--- a/Лекции/pptx/Лекция7-ПГП-2025.pptx
+++ b/Лекции/pptx/Лекция7-ПГП-2025.pptx
@@ -30,6 +30,9 @@
     <p:sldId id="274" r:id="rId25"/>
     <p:sldId id="275" r:id="rId26"/>
     <p:sldId id="276" r:id="rId27"/>
+    <p:sldId id="277" r:id="rId28"/>
+    <p:sldId id="278" r:id="rId29"/>
+    <p:sldId id="279" r:id="rId30"/>
   </p:sldIdLst>
   <p:sldSz cy="5143500" cx="9144000"/>
   <p:notesSz cx="6858000" cy="9144000"/>
@@ -875,7 +878,7 @@
   <p:cSld>
     <p:spTree>
       <p:nvGrpSpPr>
-        <p:cNvPr id="117" name="Shape 117"/>
+        <p:cNvPr id="111" name="Shape 111"/>
         <p:cNvGrpSpPr/>
         <p:nvPr/>
       </p:nvGrpSpPr>
@@ -889,7 +892,7 @@
       </p:grpSpPr>
       <p:sp>
         <p:nvSpPr>
-          <p:cNvPr id="118" name="Google Shape;118;g2161acfc8a6_0_41:notes"/>
+          <p:cNvPr id="112" name="Google Shape;112;g2161acfc8a6_0_12:notes"/>
           <p:cNvSpPr/>
           <p:nvPr>
             <p:ph idx="2" type="sldImg"/>
@@ -924,7 +927,7 @@
       </p:sp>
       <p:sp>
         <p:nvSpPr>
-          <p:cNvPr id="119" name="Google Shape;119;g2161acfc8a6_0_41:notes"/>
+          <p:cNvPr id="113" name="Google Shape;113;g2161acfc8a6_0_12:notes"/>
           <p:cNvSpPr txBox="1"/>
           <p:nvPr>
             <p:ph idx="1" type="body"/>
@@ -974,7 +977,7 @@
   <p:cSld>
     <p:spTree>
       <p:nvGrpSpPr>
-        <p:cNvPr id="124" name="Shape 124"/>
+        <p:cNvPr id="118" name="Shape 118"/>
         <p:cNvGrpSpPr/>
         <p:nvPr/>
       </p:nvGrpSpPr>
@@ -988,7 +991,7 @@
       </p:grpSpPr>
       <p:sp>
         <p:nvSpPr>
-          <p:cNvPr id="125" name="Google Shape;125;g2161acfc8a6_0_44:notes"/>
+          <p:cNvPr id="119" name="Google Shape;119;g2161acfc8a6_0_18:notes"/>
           <p:cNvSpPr/>
           <p:nvPr>
             <p:ph idx="2" type="sldImg"/>
@@ -1023,7 +1026,7 @@
       </p:sp>
       <p:sp>
         <p:nvSpPr>
-          <p:cNvPr id="126" name="Google Shape;126;g2161acfc8a6_0_44:notes"/>
+          <p:cNvPr id="120" name="Google Shape;120;g2161acfc8a6_0_18:notes"/>
           <p:cNvSpPr txBox="1"/>
           <p:nvPr>
             <p:ph idx="1" type="body"/>
@@ -1073,7 +1076,7 @@
   <p:cSld>
     <p:spTree>
       <p:nvGrpSpPr>
-        <p:cNvPr id="131" name="Shape 131"/>
+        <p:cNvPr id="126" name="Shape 126"/>
         <p:cNvGrpSpPr/>
         <p:nvPr/>
       </p:nvGrpSpPr>
@@ -1087,7 +1090,7 @@
       </p:grpSpPr>
       <p:sp>
         <p:nvSpPr>
-          <p:cNvPr id="132" name="Google Shape;132;g2161acfc8a6_0_72:notes"/>
+          <p:cNvPr id="127" name="Google Shape;127;g2161acfc8a6_0_15:notes"/>
           <p:cNvSpPr/>
           <p:nvPr>
             <p:ph idx="2" type="sldImg"/>
@@ -1122,7 +1125,7 @@
       </p:sp>
       <p:sp>
         <p:nvSpPr>
-          <p:cNvPr id="133" name="Google Shape;133;g2161acfc8a6_0_72:notes"/>
+          <p:cNvPr id="128" name="Google Shape;128;g2161acfc8a6_0_15:notes"/>
           <p:cNvSpPr txBox="1"/>
           <p:nvPr>
             <p:ph idx="1" type="body"/>
@@ -1172,7 +1175,7 @@
   <p:cSld>
     <p:spTree>
       <p:nvGrpSpPr>
-        <p:cNvPr id="137" name="Shape 137"/>
+        <p:cNvPr id="133" name="Shape 133"/>
         <p:cNvGrpSpPr/>
         <p:nvPr/>
       </p:nvGrpSpPr>
@@ -1186,7 +1189,7 @@
       </p:grpSpPr>
       <p:sp>
         <p:nvSpPr>
-          <p:cNvPr id="138" name="Google Shape;138;g2161acfc8a6_0_47:notes"/>
+          <p:cNvPr id="134" name="Google Shape;134;g2161acfc8a6_0_41:notes"/>
           <p:cNvSpPr/>
           <p:nvPr>
             <p:ph idx="2" type="sldImg"/>
@@ -1221,7 +1224,7 @@
       </p:sp>
       <p:sp>
         <p:nvSpPr>
-          <p:cNvPr id="139" name="Google Shape;139;g2161acfc8a6_0_47:notes"/>
+          <p:cNvPr id="135" name="Google Shape;135;g2161acfc8a6_0_41:notes"/>
           <p:cNvSpPr txBox="1"/>
           <p:nvPr>
             <p:ph idx="1" type="body"/>
@@ -1271,7 +1274,7 @@
   <p:cSld>
     <p:spTree>
       <p:nvGrpSpPr>
-        <p:cNvPr id="142" name="Shape 142"/>
+        <p:cNvPr id="140" name="Shape 140"/>
         <p:cNvGrpSpPr/>
         <p:nvPr/>
       </p:nvGrpSpPr>
@@ -1285,7 +1288,7 @@
       </p:grpSpPr>
       <p:sp>
         <p:nvSpPr>
-          <p:cNvPr id="143" name="Google Shape;143;g2161acfc8a6_0_50:notes"/>
+          <p:cNvPr id="141" name="Google Shape;141;g2161acfc8a6_0_44:notes"/>
           <p:cNvSpPr/>
           <p:nvPr>
             <p:ph idx="2" type="sldImg"/>
@@ -1320,7 +1323,7 @@
       </p:sp>
       <p:sp>
         <p:nvSpPr>
-          <p:cNvPr id="144" name="Google Shape;144;g2161acfc8a6_0_50:notes"/>
+          <p:cNvPr id="142" name="Google Shape;142;g2161acfc8a6_0_44:notes"/>
           <p:cNvSpPr txBox="1"/>
           <p:nvPr>
             <p:ph idx="1" type="body"/>
@@ -1370,7 +1373,7 @@
   <p:cSld>
     <p:spTree>
       <p:nvGrpSpPr>
-        <p:cNvPr id="148" name="Shape 148"/>
+        <p:cNvPr id="147" name="Shape 147"/>
         <p:cNvGrpSpPr/>
         <p:nvPr/>
       </p:nvGrpSpPr>
@@ -1384,7 +1387,7 @@
       </p:grpSpPr>
       <p:sp>
         <p:nvSpPr>
-          <p:cNvPr id="149" name="Google Shape;149;g2161acfc8a6_0_78:notes"/>
+          <p:cNvPr id="148" name="Google Shape;148;g2161acfc8a6_0_72:notes"/>
           <p:cNvSpPr/>
           <p:nvPr>
             <p:ph idx="2" type="sldImg"/>
@@ -1419,7 +1422,7 @@
       </p:sp>
       <p:sp>
         <p:nvSpPr>
-          <p:cNvPr id="150" name="Google Shape;150;g2161acfc8a6_0_78:notes"/>
+          <p:cNvPr id="149" name="Google Shape;149;g2161acfc8a6_0_72:notes"/>
           <p:cNvSpPr txBox="1"/>
           <p:nvPr>
             <p:ph idx="1" type="body"/>
@@ -1483,7 +1486,7 @@
       </p:grpSpPr>
       <p:sp>
         <p:nvSpPr>
-          <p:cNvPr id="154" name="Google Shape;154;g2161acfc8a6_0_81:notes"/>
+          <p:cNvPr id="154" name="Google Shape;154;g2161acfc8a6_0_47:notes"/>
           <p:cNvSpPr/>
           <p:nvPr>
             <p:ph idx="2" type="sldImg"/>
@@ -1518,7 +1521,7 @@
       </p:sp>
       <p:sp>
         <p:nvSpPr>
-          <p:cNvPr id="155" name="Google Shape;155;g2161acfc8a6_0_81:notes"/>
+          <p:cNvPr id="155" name="Google Shape;155;g2161acfc8a6_0_47:notes"/>
           <p:cNvSpPr txBox="1"/>
           <p:nvPr>
             <p:ph idx="1" type="body"/>
@@ -1568,7 +1571,7 @@
   <p:cSld>
     <p:spTree>
       <p:nvGrpSpPr>
-        <p:cNvPr id="159" name="Shape 159"/>
+        <p:cNvPr id="158" name="Shape 158"/>
         <p:cNvGrpSpPr/>
         <p:nvPr/>
       </p:nvGrpSpPr>
@@ -1582,7 +1585,7 @@
       </p:grpSpPr>
       <p:sp>
         <p:nvSpPr>
-          <p:cNvPr id="160" name="Google Shape;160;g2161acfc8a6_0_84:notes"/>
+          <p:cNvPr id="159" name="Google Shape;159;g2161acfc8a6_0_50:notes"/>
           <p:cNvSpPr/>
           <p:nvPr>
             <p:ph idx="2" type="sldImg"/>
@@ -1617,7 +1620,7 @@
       </p:sp>
       <p:sp>
         <p:nvSpPr>
-          <p:cNvPr id="161" name="Google Shape;161;g2161acfc8a6_0_84:notes"/>
+          <p:cNvPr id="160" name="Google Shape;160;g2161acfc8a6_0_50:notes"/>
           <p:cNvSpPr txBox="1"/>
           <p:nvPr>
             <p:ph idx="1" type="body"/>
@@ -1667,7 +1670,7 @@
   <p:cSld>
     <p:spTree>
       <p:nvGrpSpPr>
-        <p:cNvPr id="165" name="Shape 165"/>
+        <p:cNvPr id="164" name="Shape 164"/>
         <p:cNvGrpSpPr/>
         <p:nvPr/>
       </p:nvGrpSpPr>
@@ -1681,7 +1684,7 @@
       </p:grpSpPr>
       <p:sp>
         <p:nvSpPr>
-          <p:cNvPr id="166" name="Google Shape;166;g2161acfc8a6_0_87:notes"/>
+          <p:cNvPr id="165" name="Google Shape;165;g2161acfc8a6_0_78:notes"/>
           <p:cNvSpPr/>
           <p:nvPr>
             <p:ph idx="2" type="sldImg"/>
@@ -1716,7 +1719,7 @@
       </p:sp>
       <p:sp>
         <p:nvSpPr>
-          <p:cNvPr id="167" name="Google Shape;167;g2161acfc8a6_0_87:notes"/>
+          <p:cNvPr id="166" name="Google Shape;166;g2161acfc8a6_0_78:notes"/>
           <p:cNvSpPr txBox="1"/>
           <p:nvPr>
             <p:ph idx="1" type="body"/>
@@ -1766,7 +1769,7 @@
   <p:cSld>
     <p:spTree>
       <p:nvGrpSpPr>
-        <p:cNvPr id="171" name="Shape 171"/>
+        <p:cNvPr id="169" name="Shape 169"/>
         <p:cNvGrpSpPr/>
         <p:nvPr/>
       </p:nvGrpSpPr>
@@ -1780,7 +1783,7 @@
       </p:grpSpPr>
       <p:sp>
         <p:nvSpPr>
-          <p:cNvPr id="172" name="Google Shape;172;g2161acfc8a6_0_115:notes"/>
+          <p:cNvPr id="170" name="Google Shape;170;g2161acfc8a6_0_81:notes"/>
           <p:cNvSpPr/>
           <p:nvPr>
             <p:ph idx="2" type="sldImg"/>
@@ -1815,7 +1818,7 @@
       </p:sp>
       <p:sp>
         <p:nvSpPr>
-          <p:cNvPr id="173" name="Google Shape;173;g2161acfc8a6_0_115:notes"/>
+          <p:cNvPr id="171" name="Google Shape;171;g2161acfc8a6_0_81:notes"/>
           <p:cNvSpPr txBox="1"/>
           <p:nvPr>
             <p:ph idx="1" type="body"/>
@@ -1879,7 +1882,7 @@
       </p:grpSpPr>
       <p:sp>
         <p:nvSpPr>
-          <p:cNvPr id="68" name="Google Shape;68;g2139aa48c04_0_3:notes"/>
+          <p:cNvPr id="68" name="Google Shape;68;g341168721de_2_0:notes"/>
           <p:cNvSpPr/>
           <p:nvPr>
             <p:ph idx="2" type="sldImg"/>
@@ -1914,7 +1917,7 @@
       </p:sp>
       <p:sp>
         <p:nvSpPr>
-          <p:cNvPr id="69" name="Google Shape;69;g2139aa48c04_0_3:notes"/>
+          <p:cNvPr id="69" name="Google Shape;69;g341168721de_2_0:notes"/>
           <p:cNvSpPr txBox="1"/>
           <p:nvPr>
             <p:ph idx="1" type="body"/>
@@ -1964,7 +1967,7 @@
   <p:cSld>
     <p:spTree>
       <p:nvGrpSpPr>
-        <p:cNvPr id="176" name="Shape 176"/>
+        <p:cNvPr id="175" name="Shape 175"/>
         <p:cNvGrpSpPr/>
         <p:nvPr/>
       </p:nvGrpSpPr>
@@ -1978,7 +1981,7 @@
       </p:grpSpPr>
       <p:sp>
         <p:nvSpPr>
-          <p:cNvPr id="177" name="Google Shape;177;g2161acfc8a6_0_90:notes"/>
+          <p:cNvPr id="176" name="Google Shape;176;g2161acfc8a6_0_84:notes"/>
           <p:cNvSpPr/>
           <p:nvPr>
             <p:ph idx="2" type="sldImg"/>
@@ -2013,7 +2016,7 @@
       </p:sp>
       <p:sp>
         <p:nvSpPr>
-          <p:cNvPr id="178" name="Google Shape;178;g2161acfc8a6_0_90:notes"/>
+          <p:cNvPr id="177" name="Google Shape;177;g2161acfc8a6_0_84:notes"/>
           <p:cNvSpPr txBox="1"/>
           <p:nvPr>
             <p:ph idx="1" type="body"/>
@@ -2063,7 +2066,7 @@
   <p:cSld>
     <p:spTree>
       <p:nvGrpSpPr>
-        <p:cNvPr id="182" name="Shape 182"/>
+        <p:cNvPr id="181" name="Shape 181"/>
         <p:cNvGrpSpPr/>
         <p:nvPr/>
       </p:nvGrpSpPr>
@@ -2077,7 +2080,7 @@
       </p:grpSpPr>
       <p:sp>
         <p:nvSpPr>
-          <p:cNvPr id="183" name="Google Shape;183;g2161acfc8a6_0_119:notes"/>
+          <p:cNvPr id="182" name="Google Shape;182;g2161acfc8a6_0_87:notes"/>
           <p:cNvSpPr/>
           <p:nvPr>
             <p:ph idx="2" type="sldImg"/>
@@ -2112,7 +2115,7 @@
       </p:sp>
       <p:sp>
         <p:nvSpPr>
-          <p:cNvPr id="184" name="Google Shape;184;g2161acfc8a6_0_119:notes"/>
+          <p:cNvPr id="183" name="Google Shape;183;g2161acfc8a6_0_87:notes"/>
           <p:cNvSpPr txBox="1"/>
           <p:nvPr>
             <p:ph idx="1" type="body"/>
@@ -2157,12 +2160,12 @@
 </p:notes>
 </file>
 
-<file path=ppt/notesSlides/notesSlide3.xml><?xml version="1.0" encoding="utf-8"?>
+<file path=ppt/notesSlides/notesSlide22.xml><?xml version="1.0" encoding="utf-8"?>
 <p:notes xmlns:a="http://schemas.openxmlformats.org/drawingml/2006/main" xmlns:r="http://schemas.openxmlformats.org/officeDocument/2006/relationships" xmlns:mc="http://schemas.openxmlformats.org/markup-compatibility/2006" xmlns:mv="urn:schemas-microsoft-com:mac:vml" xmlns:p="http://schemas.openxmlformats.org/presentationml/2006/main" xmlns:c="http://schemas.openxmlformats.org/drawingml/2006/chart" xmlns:dgm="http://schemas.openxmlformats.org/drawingml/2006/diagram" xmlns:o="urn:schemas-microsoft-com:office:office" xmlns:v="urn:schemas-microsoft-com:vml" xmlns:pvml="urn:schemas-microsoft-com:office:powerpoint" xmlns:com="http://schemas.openxmlformats.org/drawingml/2006/compatibility" xmlns:p14="http://schemas.microsoft.com/office/powerpoint/2010/main" xmlns:p15="http://schemas.microsoft.com/office/powerpoint/2012/main" xmlns:ahyp="http://schemas.microsoft.com/office/drawing/2018/hyperlinkcolor" showMasterPhAnim="0" showMasterSp="0">
   <p:cSld>
     <p:spTree>
       <p:nvGrpSpPr>
-        <p:cNvPr id="73" name="Shape 73"/>
+        <p:cNvPr id="187" name="Shape 187"/>
         <p:cNvGrpSpPr/>
         <p:nvPr/>
       </p:nvGrpSpPr>
@@ -2176,7 +2179,7 @@
       </p:grpSpPr>
       <p:sp>
         <p:nvSpPr>
-          <p:cNvPr id="74" name="Google Shape;74;g2139aa48c04_0_6:notes"/>
+          <p:cNvPr id="188" name="Google Shape;188;g2161acfc8a6_0_115:notes"/>
           <p:cNvSpPr/>
           <p:nvPr>
             <p:ph idx="2" type="sldImg"/>
@@ -2211,7 +2214,7 @@
       </p:sp>
       <p:sp>
         <p:nvSpPr>
-          <p:cNvPr id="75" name="Google Shape;75;g2139aa48c04_0_6:notes"/>
+          <p:cNvPr id="189" name="Google Shape;189;g2161acfc8a6_0_115:notes"/>
           <p:cNvSpPr txBox="1"/>
           <p:nvPr>
             <p:ph idx="1" type="body"/>
@@ -2256,12 +2259,12 @@
 </p:notes>
 </file>
 
-<file path=ppt/notesSlides/notesSlide4.xml><?xml version="1.0" encoding="utf-8"?>
+<file path=ppt/notesSlides/notesSlide23.xml><?xml version="1.0" encoding="utf-8"?>
 <p:notes xmlns:a="http://schemas.openxmlformats.org/drawingml/2006/main" xmlns:r="http://schemas.openxmlformats.org/officeDocument/2006/relationships" xmlns:mc="http://schemas.openxmlformats.org/markup-compatibility/2006" xmlns:mv="urn:schemas-microsoft-com:mac:vml" xmlns:p="http://schemas.openxmlformats.org/presentationml/2006/main" xmlns:c="http://schemas.openxmlformats.org/drawingml/2006/chart" xmlns:dgm="http://schemas.openxmlformats.org/drawingml/2006/diagram" xmlns:o="urn:schemas-microsoft-com:office:office" xmlns:v="urn:schemas-microsoft-com:vml" xmlns:pvml="urn:schemas-microsoft-com:office:powerpoint" xmlns:com="http://schemas.openxmlformats.org/drawingml/2006/compatibility" xmlns:p14="http://schemas.microsoft.com/office/powerpoint/2010/main" xmlns:p15="http://schemas.microsoft.com/office/powerpoint/2012/main" xmlns:ahyp="http://schemas.microsoft.com/office/drawing/2018/hyperlinkcolor" showMasterPhAnim="0" showMasterSp="0">
   <p:cSld>
     <p:spTree>
       <p:nvGrpSpPr>
-        <p:cNvPr id="79" name="Shape 79"/>
+        <p:cNvPr id="192" name="Shape 192"/>
         <p:cNvGrpSpPr/>
         <p:nvPr/>
       </p:nvGrpSpPr>
@@ -2275,7 +2278,7 @@
       </p:grpSpPr>
       <p:sp>
         <p:nvSpPr>
-          <p:cNvPr id="80" name="Google Shape;80;g2139aa48c04_0_9:notes"/>
+          <p:cNvPr id="193" name="Google Shape;193;g2161acfc8a6_0_90:notes"/>
           <p:cNvSpPr/>
           <p:nvPr>
             <p:ph idx="2" type="sldImg"/>
@@ -2310,7 +2313,7 @@
       </p:sp>
       <p:sp>
         <p:nvSpPr>
-          <p:cNvPr id="81" name="Google Shape;81;g2139aa48c04_0_9:notes"/>
+          <p:cNvPr id="194" name="Google Shape;194;g2161acfc8a6_0_90:notes"/>
           <p:cNvSpPr txBox="1"/>
           <p:nvPr>
             <p:ph idx="1" type="body"/>
@@ -2355,12 +2358,12 @@
 </p:notes>
 </file>
 
-<file path=ppt/notesSlides/notesSlide5.xml><?xml version="1.0" encoding="utf-8"?>
+<file path=ppt/notesSlides/notesSlide24.xml><?xml version="1.0" encoding="utf-8"?>
 <p:notes xmlns:a="http://schemas.openxmlformats.org/drawingml/2006/main" xmlns:r="http://schemas.openxmlformats.org/officeDocument/2006/relationships" xmlns:mc="http://schemas.openxmlformats.org/markup-compatibility/2006" xmlns:mv="urn:schemas-microsoft-com:mac:vml" xmlns:p="http://schemas.openxmlformats.org/presentationml/2006/main" xmlns:c="http://schemas.openxmlformats.org/drawingml/2006/chart" xmlns:dgm="http://schemas.openxmlformats.org/drawingml/2006/diagram" xmlns:o="urn:schemas-microsoft-com:office:office" xmlns:v="urn:schemas-microsoft-com:vml" xmlns:pvml="urn:schemas-microsoft-com:office:powerpoint" xmlns:com="http://schemas.openxmlformats.org/drawingml/2006/compatibility" xmlns:p14="http://schemas.microsoft.com/office/powerpoint/2010/main" xmlns:p15="http://schemas.microsoft.com/office/powerpoint/2012/main" xmlns:ahyp="http://schemas.microsoft.com/office/drawing/2018/hyperlinkcolor" showMasterPhAnim="0" showMasterSp="0">
   <p:cSld>
     <p:spTree>
       <p:nvGrpSpPr>
-        <p:cNvPr id="84" name="Shape 84"/>
+        <p:cNvPr id="198" name="Shape 198"/>
         <p:cNvGrpSpPr/>
         <p:nvPr/>
       </p:nvGrpSpPr>
@@ -2374,7 +2377,7 @@
       </p:grpSpPr>
       <p:sp>
         <p:nvSpPr>
-          <p:cNvPr id="85" name="Google Shape;85;g2161acfc8a6_0_6:notes"/>
+          <p:cNvPr id="199" name="Google Shape;199;g2161acfc8a6_0_119:notes"/>
           <p:cNvSpPr/>
           <p:nvPr>
             <p:ph idx="2" type="sldImg"/>
@@ -2409,7 +2412,7 @@
       </p:sp>
       <p:sp>
         <p:nvSpPr>
-          <p:cNvPr id="86" name="Google Shape;86;g2161acfc8a6_0_6:notes"/>
+          <p:cNvPr id="200" name="Google Shape;200;g2161acfc8a6_0_119:notes"/>
           <p:cNvSpPr txBox="1"/>
           <p:nvPr>
             <p:ph idx="1" type="body"/>
@@ -2454,12 +2457,12 @@
 </p:notes>
 </file>
 
-<file path=ppt/notesSlides/notesSlide6.xml><?xml version="1.0" encoding="utf-8"?>
+<file path=ppt/notesSlides/notesSlide3.xml><?xml version="1.0" encoding="utf-8"?>
 <p:notes xmlns:a="http://schemas.openxmlformats.org/drawingml/2006/main" xmlns:r="http://schemas.openxmlformats.org/officeDocument/2006/relationships" xmlns:mc="http://schemas.openxmlformats.org/markup-compatibility/2006" xmlns:mv="urn:schemas-microsoft-com:mac:vml" xmlns:p="http://schemas.openxmlformats.org/presentationml/2006/main" xmlns:c="http://schemas.openxmlformats.org/drawingml/2006/chart" xmlns:dgm="http://schemas.openxmlformats.org/drawingml/2006/diagram" xmlns:o="urn:schemas-microsoft-com:office:office" xmlns:v="urn:schemas-microsoft-com:vml" xmlns:pvml="urn:schemas-microsoft-com:office:powerpoint" xmlns:com="http://schemas.openxmlformats.org/drawingml/2006/compatibility" xmlns:p14="http://schemas.microsoft.com/office/powerpoint/2010/main" xmlns:p15="http://schemas.microsoft.com/office/powerpoint/2012/main" xmlns:ahyp="http://schemas.microsoft.com/office/drawing/2018/hyperlinkcolor" showMasterPhAnim="0" showMasterSp="0">
   <p:cSld>
     <p:spTree>
       <p:nvGrpSpPr>
-        <p:cNvPr id="90" name="Shape 90"/>
+        <p:cNvPr id="72" name="Shape 72"/>
         <p:cNvGrpSpPr/>
         <p:nvPr/>
       </p:nvGrpSpPr>
@@ -2473,7 +2476,7 @@
       </p:grpSpPr>
       <p:sp>
         <p:nvSpPr>
-          <p:cNvPr id="91" name="Google Shape;91;g2161acfc8a6_0_9:notes"/>
+          <p:cNvPr id="73" name="Google Shape;73;g341168721de_0_34:notes"/>
           <p:cNvSpPr/>
           <p:nvPr>
             <p:ph idx="2" type="sldImg"/>
@@ -2508,7 +2511,7 @@
       </p:sp>
       <p:sp>
         <p:nvSpPr>
-          <p:cNvPr id="92" name="Google Shape;92;g2161acfc8a6_0_9:notes"/>
+          <p:cNvPr id="74" name="Google Shape;74;g341168721de_0_34:notes"/>
           <p:cNvSpPr txBox="1"/>
           <p:nvPr>
             <p:ph idx="1" type="body"/>
@@ -2553,12 +2556,12 @@
 </p:notes>
 </file>
 
-<file path=ppt/notesSlides/notesSlide7.xml><?xml version="1.0" encoding="utf-8"?>
+<file path=ppt/notesSlides/notesSlide4.xml><?xml version="1.0" encoding="utf-8"?>
 <p:notes xmlns:a="http://schemas.openxmlformats.org/drawingml/2006/main" xmlns:r="http://schemas.openxmlformats.org/officeDocument/2006/relationships" xmlns:mc="http://schemas.openxmlformats.org/markup-compatibility/2006" xmlns:mv="urn:schemas-microsoft-com:mac:vml" xmlns:p="http://schemas.openxmlformats.org/presentationml/2006/main" xmlns:c="http://schemas.openxmlformats.org/drawingml/2006/chart" xmlns:dgm="http://schemas.openxmlformats.org/drawingml/2006/diagram" xmlns:o="urn:schemas-microsoft-com:office:office" xmlns:v="urn:schemas-microsoft-com:vml" xmlns:pvml="urn:schemas-microsoft-com:office:powerpoint" xmlns:com="http://schemas.openxmlformats.org/drawingml/2006/compatibility" xmlns:p14="http://schemas.microsoft.com/office/powerpoint/2010/main" xmlns:p15="http://schemas.microsoft.com/office/powerpoint/2012/main" xmlns:ahyp="http://schemas.microsoft.com/office/drawing/2018/hyperlinkcolor" showMasterPhAnim="0" showMasterSp="0">
   <p:cSld>
     <p:spTree>
       <p:nvGrpSpPr>
-        <p:cNvPr id="95" name="Shape 95"/>
+        <p:cNvPr id="78" name="Shape 78"/>
         <p:cNvGrpSpPr/>
         <p:nvPr/>
       </p:nvGrpSpPr>
@@ -2572,7 +2575,7 @@
       </p:grpSpPr>
       <p:sp>
         <p:nvSpPr>
-          <p:cNvPr id="96" name="Google Shape;96;g2161acfc8a6_0_12:notes"/>
+          <p:cNvPr id="79" name="Google Shape;79;g341168721de_0_6:notes"/>
           <p:cNvSpPr/>
           <p:nvPr>
             <p:ph idx="2" type="sldImg"/>
@@ -2607,7 +2610,7 @@
       </p:sp>
       <p:sp>
         <p:nvSpPr>
-          <p:cNvPr id="97" name="Google Shape;97;g2161acfc8a6_0_12:notes"/>
+          <p:cNvPr id="80" name="Google Shape;80;g341168721de_0_6:notes"/>
           <p:cNvSpPr txBox="1"/>
           <p:nvPr>
             <p:ph idx="1" type="body"/>
@@ -2652,12 +2655,12 @@
 </p:notes>
 </file>
 
-<file path=ppt/notesSlides/notesSlide8.xml><?xml version="1.0" encoding="utf-8"?>
+<file path=ppt/notesSlides/notesSlide5.xml><?xml version="1.0" encoding="utf-8"?>
 <p:notes xmlns:a="http://schemas.openxmlformats.org/drawingml/2006/main" xmlns:r="http://schemas.openxmlformats.org/officeDocument/2006/relationships" xmlns:mc="http://schemas.openxmlformats.org/markup-compatibility/2006" xmlns:mv="urn:schemas-microsoft-com:mac:vml" xmlns:p="http://schemas.openxmlformats.org/presentationml/2006/main" xmlns:c="http://schemas.openxmlformats.org/drawingml/2006/chart" xmlns:dgm="http://schemas.openxmlformats.org/drawingml/2006/diagram" xmlns:o="urn:schemas-microsoft-com:office:office" xmlns:v="urn:schemas-microsoft-com:vml" xmlns:pvml="urn:schemas-microsoft-com:office:powerpoint" xmlns:com="http://schemas.openxmlformats.org/drawingml/2006/compatibility" xmlns:p14="http://schemas.microsoft.com/office/powerpoint/2010/main" xmlns:p15="http://schemas.microsoft.com/office/powerpoint/2012/main" xmlns:ahyp="http://schemas.microsoft.com/office/drawing/2018/hyperlinkcolor" showMasterPhAnim="0" showMasterSp="0">
   <p:cSld>
     <p:spTree>
       <p:nvGrpSpPr>
-        <p:cNvPr id="102" name="Shape 102"/>
+        <p:cNvPr id="84" name="Shape 84"/>
         <p:cNvGrpSpPr/>
         <p:nvPr/>
       </p:nvGrpSpPr>
@@ -2671,7 +2674,7 @@
       </p:grpSpPr>
       <p:sp>
         <p:nvSpPr>
-          <p:cNvPr id="103" name="Google Shape;103;g2161acfc8a6_0_18:notes"/>
+          <p:cNvPr id="85" name="Google Shape;85;g341168721de_0_0:notes"/>
           <p:cNvSpPr/>
           <p:nvPr>
             <p:ph idx="2" type="sldImg"/>
@@ -2706,7 +2709,7 @@
       </p:sp>
       <p:sp>
         <p:nvSpPr>
-          <p:cNvPr id="104" name="Google Shape;104;g2161acfc8a6_0_18:notes"/>
+          <p:cNvPr id="86" name="Google Shape;86;g341168721de_0_0:notes"/>
           <p:cNvSpPr txBox="1"/>
           <p:nvPr>
             <p:ph idx="1" type="body"/>
@@ -2751,12 +2754,12 @@
 </p:notes>
 </file>
 
-<file path=ppt/notesSlides/notesSlide9.xml><?xml version="1.0" encoding="utf-8"?>
+<file path=ppt/notesSlides/notesSlide6.xml><?xml version="1.0" encoding="utf-8"?>
 <p:notes xmlns:a="http://schemas.openxmlformats.org/drawingml/2006/main" xmlns:r="http://schemas.openxmlformats.org/officeDocument/2006/relationships" xmlns:mc="http://schemas.openxmlformats.org/markup-compatibility/2006" xmlns:mv="urn:schemas-microsoft-com:mac:vml" xmlns:p="http://schemas.openxmlformats.org/presentationml/2006/main" xmlns:c="http://schemas.openxmlformats.org/drawingml/2006/chart" xmlns:dgm="http://schemas.openxmlformats.org/drawingml/2006/diagram" xmlns:o="urn:schemas-microsoft-com:office:office" xmlns:v="urn:schemas-microsoft-com:vml" xmlns:pvml="urn:schemas-microsoft-com:office:powerpoint" xmlns:com="http://schemas.openxmlformats.org/drawingml/2006/compatibility" xmlns:p14="http://schemas.microsoft.com/office/powerpoint/2010/main" xmlns:p15="http://schemas.microsoft.com/office/powerpoint/2012/main" xmlns:ahyp="http://schemas.microsoft.com/office/drawing/2018/hyperlinkcolor" showMasterPhAnim="0" showMasterSp="0">
   <p:cSld>
     <p:spTree>
       <p:nvGrpSpPr>
-        <p:cNvPr id="110" name="Shape 110"/>
+        <p:cNvPr id="89" name="Shape 89"/>
         <p:cNvGrpSpPr/>
         <p:nvPr/>
       </p:nvGrpSpPr>
@@ -2770,7 +2773,7 @@
       </p:grpSpPr>
       <p:sp>
         <p:nvSpPr>
-          <p:cNvPr id="111" name="Google Shape;111;g2161acfc8a6_0_15:notes"/>
+          <p:cNvPr id="90" name="Google Shape;90;g341168721de_0_3:notes"/>
           <p:cNvSpPr/>
           <p:nvPr>
             <p:ph idx="2" type="sldImg"/>
@@ -2805,7 +2808,304 @@
       </p:sp>
       <p:sp>
         <p:nvSpPr>
-          <p:cNvPr id="112" name="Google Shape;112;g2161acfc8a6_0_15:notes"/>
+          <p:cNvPr id="91" name="Google Shape;91;g341168721de_0_3:notes"/>
+          <p:cNvSpPr txBox="1"/>
+          <p:nvPr>
+            <p:ph idx="1" type="body"/>
+          </p:nvPr>
+        </p:nvSpPr>
+        <p:spPr>
+          <a:xfrm>
+            <a:off x="685800" y="4343400"/>
+            <a:ext cx="5486400" cy="4114800"/>
+          </a:xfrm>
+          <a:prstGeom prst="rect">
+            <a:avLst/>
+          </a:prstGeom>
+        </p:spPr>
+        <p:txBody>
+          <a:bodyPr anchorCtr="0" anchor="t" bIns="91425" lIns="91425" spcFirstLastPara="1" rIns="91425" wrap="square" tIns="91425">
+            <a:noAutofit/>
+          </a:bodyPr>
+          <a:lstStyle/>
+          <a:p>
+            <a:pPr indent="0" lvl="0" marL="0" rtl="0" algn="l">
+              <a:spcBef>
+                <a:spcPts val="0"/>
+              </a:spcBef>
+              <a:spcAft>
+                <a:spcPts val="0"/>
+              </a:spcAft>
+              <a:buNone/>
+            </a:pPr>
+            <a:r>
+              <a:t/>
+            </a:r>
+            <a:endParaRPr/>
+          </a:p>
+        </p:txBody>
+      </p:sp>
+    </p:spTree>
+  </p:cSld>
+  <p:clrMapOvr>
+    <a:masterClrMapping/>
+  </p:clrMapOvr>
+</p:notes>
+</file>
+
+<file path=ppt/notesSlides/notesSlide7.xml><?xml version="1.0" encoding="utf-8"?>
+<p:notes xmlns:a="http://schemas.openxmlformats.org/drawingml/2006/main" xmlns:r="http://schemas.openxmlformats.org/officeDocument/2006/relationships" xmlns:mc="http://schemas.openxmlformats.org/markup-compatibility/2006" xmlns:mv="urn:schemas-microsoft-com:mac:vml" xmlns:p="http://schemas.openxmlformats.org/presentationml/2006/main" xmlns:c="http://schemas.openxmlformats.org/drawingml/2006/chart" xmlns:dgm="http://schemas.openxmlformats.org/drawingml/2006/diagram" xmlns:o="urn:schemas-microsoft-com:office:office" xmlns:v="urn:schemas-microsoft-com:vml" xmlns:pvml="urn:schemas-microsoft-com:office:powerpoint" xmlns:com="http://schemas.openxmlformats.org/drawingml/2006/compatibility" xmlns:p14="http://schemas.microsoft.com/office/powerpoint/2010/main" xmlns:p15="http://schemas.microsoft.com/office/powerpoint/2012/main" xmlns:ahyp="http://schemas.microsoft.com/office/drawing/2018/hyperlinkcolor" showMasterPhAnim="0" showMasterSp="0">
+  <p:cSld>
+    <p:spTree>
+      <p:nvGrpSpPr>
+        <p:cNvPr id="94" name="Shape 94"/>
+        <p:cNvGrpSpPr/>
+        <p:nvPr/>
+      </p:nvGrpSpPr>
+      <p:grpSpPr>
+        <a:xfrm>
+          <a:off x="0" y="0"/>
+          <a:ext cx="0" cy="0"/>
+          <a:chOff x="0" y="0"/>
+          <a:chExt cx="0" cy="0"/>
+        </a:xfrm>
+      </p:grpSpPr>
+      <p:sp>
+        <p:nvSpPr>
+          <p:cNvPr id="95" name="Google Shape;95;g341168721de_0_13:notes"/>
+          <p:cNvSpPr/>
+          <p:nvPr>
+            <p:ph idx="2" type="sldImg"/>
+          </p:nvPr>
+        </p:nvSpPr>
+        <p:spPr>
+          <a:xfrm>
+            <a:off x="381300" y="685800"/>
+            <a:ext cx="6096000" cy="3429000"/>
+          </a:xfrm>
+          <a:custGeom>
+            <a:rect b="b" l="l" r="r" t="t"/>
+            <a:pathLst>
+              <a:path extrusionOk="0" h="120000" w="120000">
+                <a:moveTo>
+                  <a:pt x="0" y="0"/>
+                </a:moveTo>
+                <a:lnTo>
+                  <a:pt x="120000" y="0"/>
+                </a:lnTo>
+                <a:lnTo>
+                  <a:pt x="120000" y="120000"/>
+                </a:lnTo>
+                <a:lnTo>
+                  <a:pt x="0" y="120000"/>
+                </a:lnTo>
+                <a:close/>
+              </a:path>
+            </a:pathLst>
+          </a:custGeom>
+        </p:spPr>
+      </p:sp>
+      <p:sp>
+        <p:nvSpPr>
+          <p:cNvPr id="96" name="Google Shape;96;g341168721de_0_13:notes"/>
+          <p:cNvSpPr txBox="1"/>
+          <p:nvPr>
+            <p:ph idx="1" type="body"/>
+          </p:nvPr>
+        </p:nvSpPr>
+        <p:spPr>
+          <a:xfrm>
+            <a:off x="685800" y="4343400"/>
+            <a:ext cx="5486400" cy="4114800"/>
+          </a:xfrm>
+          <a:prstGeom prst="rect">
+            <a:avLst/>
+          </a:prstGeom>
+        </p:spPr>
+        <p:txBody>
+          <a:bodyPr anchorCtr="0" anchor="t" bIns="91425" lIns="91425" spcFirstLastPara="1" rIns="91425" wrap="square" tIns="91425">
+            <a:noAutofit/>
+          </a:bodyPr>
+          <a:lstStyle/>
+          <a:p>
+            <a:pPr indent="0" lvl="0" marL="0" rtl="0" algn="l">
+              <a:spcBef>
+                <a:spcPts val="0"/>
+              </a:spcBef>
+              <a:spcAft>
+                <a:spcPts val="0"/>
+              </a:spcAft>
+              <a:buNone/>
+            </a:pPr>
+            <a:r>
+              <a:t/>
+            </a:r>
+            <a:endParaRPr/>
+          </a:p>
+        </p:txBody>
+      </p:sp>
+    </p:spTree>
+  </p:cSld>
+  <p:clrMapOvr>
+    <a:masterClrMapping/>
+  </p:clrMapOvr>
+</p:notes>
+</file>
+
+<file path=ppt/notesSlides/notesSlide8.xml><?xml version="1.0" encoding="utf-8"?>
+<p:notes xmlns:a="http://schemas.openxmlformats.org/drawingml/2006/main" xmlns:r="http://schemas.openxmlformats.org/officeDocument/2006/relationships" xmlns:mc="http://schemas.openxmlformats.org/markup-compatibility/2006" xmlns:mv="urn:schemas-microsoft-com:mac:vml" xmlns:p="http://schemas.openxmlformats.org/presentationml/2006/main" xmlns:c="http://schemas.openxmlformats.org/drawingml/2006/chart" xmlns:dgm="http://schemas.openxmlformats.org/drawingml/2006/diagram" xmlns:o="urn:schemas-microsoft-com:office:office" xmlns:v="urn:schemas-microsoft-com:vml" xmlns:pvml="urn:schemas-microsoft-com:office:powerpoint" xmlns:com="http://schemas.openxmlformats.org/drawingml/2006/compatibility" xmlns:p14="http://schemas.microsoft.com/office/powerpoint/2010/main" xmlns:p15="http://schemas.microsoft.com/office/powerpoint/2012/main" xmlns:ahyp="http://schemas.microsoft.com/office/drawing/2018/hyperlinkcolor" showMasterPhAnim="0" showMasterSp="0">
+  <p:cSld>
+    <p:spTree>
+      <p:nvGrpSpPr>
+        <p:cNvPr id="99" name="Shape 99"/>
+        <p:cNvGrpSpPr/>
+        <p:nvPr/>
+      </p:nvGrpSpPr>
+      <p:grpSpPr>
+        <a:xfrm>
+          <a:off x="0" y="0"/>
+          <a:ext cx="0" cy="0"/>
+          <a:chOff x="0" y="0"/>
+          <a:chExt cx="0" cy="0"/>
+        </a:xfrm>
+      </p:grpSpPr>
+      <p:sp>
+        <p:nvSpPr>
+          <p:cNvPr id="100" name="Google Shape;100;g341168721de_0_16:notes"/>
+          <p:cNvSpPr/>
+          <p:nvPr>
+            <p:ph idx="2" type="sldImg"/>
+          </p:nvPr>
+        </p:nvSpPr>
+        <p:spPr>
+          <a:xfrm>
+            <a:off x="381300" y="685800"/>
+            <a:ext cx="6096000" cy="3429000"/>
+          </a:xfrm>
+          <a:custGeom>
+            <a:rect b="b" l="l" r="r" t="t"/>
+            <a:pathLst>
+              <a:path extrusionOk="0" h="120000" w="120000">
+                <a:moveTo>
+                  <a:pt x="0" y="0"/>
+                </a:moveTo>
+                <a:lnTo>
+                  <a:pt x="120000" y="0"/>
+                </a:lnTo>
+                <a:lnTo>
+                  <a:pt x="120000" y="120000"/>
+                </a:lnTo>
+                <a:lnTo>
+                  <a:pt x="0" y="120000"/>
+                </a:lnTo>
+                <a:close/>
+              </a:path>
+            </a:pathLst>
+          </a:custGeom>
+        </p:spPr>
+      </p:sp>
+      <p:sp>
+        <p:nvSpPr>
+          <p:cNvPr id="101" name="Google Shape;101;g341168721de_0_16:notes"/>
+          <p:cNvSpPr txBox="1"/>
+          <p:nvPr>
+            <p:ph idx="1" type="body"/>
+          </p:nvPr>
+        </p:nvSpPr>
+        <p:spPr>
+          <a:xfrm>
+            <a:off x="685800" y="4343400"/>
+            <a:ext cx="5486400" cy="4114800"/>
+          </a:xfrm>
+          <a:prstGeom prst="rect">
+            <a:avLst/>
+          </a:prstGeom>
+        </p:spPr>
+        <p:txBody>
+          <a:bodyPr anchorCtr="0" anchor="t" bIns="91425" lIns="91425" spcFirstLastPara="1" rIns="91425" wrap="square" tIns="91425">
+            <a:noAutofit/>
+          </a:bodyPr>
+          <a:lstStyle/>
+          <a:p>
+            <a:pPr indent="0" lvl="0" marL="0" rtl="0" algn="l">
+              <a:spcBef>
+                <a:spcPts val="0"/>
+              </a:spcBef>
+              <a:spcAft>
+                <a:spcPts val="0"/>
+              </a:spcAft>
+              <a:buNone/>
+            </a:pPr>
+            <a:r>
+              <a:t/>
+            </a:r>
+            <a:endParaRPr/>
+          </a:p>
+        </p:txBody>
+      </p:sp>
+    </p:spTree>
+  </p:cSld>
+  <p:clrMapOvr>
+    <a:masterClrMapping/>
+  </p:clrMapOvr>
+</p:notes>
+</file>
+
+<file path=ppt/notesSlides/notesSlide9.xml><?xml version="1.0" encoding="utf-8"?>
+<p:notes xmlns:a="http://schemas.openxmlformats.org/drawingml/2006/main" xmlns:r="http://schemas.openxmlformats.org/officeDocument/2006/relationships" xmlns:mc="http://schemas.openxmlformats.org/markup-compatibility/2006" xmlns:mv="urn:schemas-microsoft-com:mac:vml" xmlns:p="http://schemas.openxmlformats.org/presentationml/2006/main" xmlns:c="http://schemas.openxmlformats.org/drawingml/2006/chart" xmlns:dgm="http://schemas.openxmlformats.org/drawingml/2006/diagram" xmlns:o="urn:schemas-microsoft-com:office:office" xmlns:v="urn:schemas-microsoft-com:vml" xmlns:pvml="urn:schemas-microsoft-com:office:powerpoint" xmlns:com="http://schemas.openxmlformats.org/drawingml/2006/compatibility" xmlns:p14="http://schemas.microsoft.com/office/powerpoint/2010/main" xmlns:p15="http://schemas.microsoft.com/office/powerpoint/2012/main" xmlns:ahyp="http://schemas.microsoft.com/office/drawing/2018/hyperlinkcolor" showMasterPhAnim="0" showMasterSp="0">
+  <p:cSld>
+    <p:spTree>
+      <p:nvGrpSpPr>
+        <p:cNvPr id="106" name="Shape 106"/>
+        <p:cNvGrpSpPr/>
+        <p:nvPr/>
+      </p:nvGrpSpPr>
+      <p:grpSpPr>
+        <a:xfrm>
+          <a:off x="0" y="0"/>
+          <a:ext cx="0" cy="0"/>
+          <a:chOff x="0" y="0"/>
+          <a:chExt cx="0" cy="0"/>
+        </a:xfrm>
+      </p:grpSpPr>
+      <p:sp>
+        <p:nvSpPr>
+          <p:cNvPr id="107" name="Google Shape;107;g341168721de_0_19:notes"/>
+          <p:cNvSpPr/>
+          <p:nvPr>
+            <p:ph idx="2" type="sldImg"/>
+          </p:nvPr>
+        </p:nvSpPr>
+        <p:spPr>
+          <a:xfrm>
+            <a:off x="381300" y="685800"/>
+            <a:ext cx="6096000" cy="3429000"/>
+          </a:xfrm>
+          <a:custGeom>
+            <a:rect b="b" l="l" r="r" t="t"/>
+            <a:pathLst>
+              <a:path extrusionOk="0" h="120000" w="120000">
+                <a:moveTo>
+                  <a:pt x="0" y="0"/>
+                </a:moveTo>
+                <a:lnTo>
+                  <a:pt x="120000" y="0"/>
+                </a:lnTo>
+                <a:lnTo>
+                  <a:pt x="120000" y="120000"/>
+                </a:lnTo>
+                <a:lnTo>
+                  <a:pt x="0" y="120000"/>
+                </a:lnTo>
+                <a:close/>
+              </a:path>
+            </a:pathLst>
+          </a:custGeom>
+        </p:spPr>
+      </p:sp>
+      <p:sp>
+        <p:nvSpPr>
+          <p:cNvPr id="108" name="Google Shape;108;g341168721de_0_19:notes"/>
           <p:cNvSpPr txBox="1"/>
           <p:nvPr>
             <p:ph idx="1" type="body"/>
@@ -10054,7 +10354,7 @@
   <p:cSld>
     <p:spTree>
       <p:nvGrpSpPr>
-        <p:cNvPr id="120" name="Shape 120"/>
+        <p:cNvPr id="114" name="Shape 114"/>
         <p:cNvGrpSpPr/>
         <p:nvPr/>
       </p:nvGrpSpPr>
@@ -10068,7 +10368,531 @@
       </p:grpSpPr>
       <p:sp>
         <p:nvSpPr>
-          <p:cNvPr id="121" name="Google Shape;121;p24"/>
+          <p:cNvPr id="115" name="Google Shape;115;p24"/>
+          <p:cNvSpPr txBox="1"/>
+          <p:nvPr/>
+        </p:nvSpPr>
+        <p:spPr>
+          <a:xfrm>
+            <a:off x="990600" y="26428"/>
+            <a:ext cx="7086600" cy="464100"/>
+          </a:xfrm>
+          <a:prstGeom prst="rect">
+            <a:avLst/>
+          </a:prstGeom>
+          <a:solidFill>
+            <a:srgbClr val="FFCC00"/>
+          </a:solidFill>
+          <a:ln>
+            <a:noFill/>
+          </a:ln>
+        </p:spPr>
+        <p:txBody>
+          <a:bodyPr anchorCtr="0" anchor="t" bIns="46800" lIns="90000" spcFirstLastPara="1" rIns="90000" wrap="square" tIns="46800">
+            <a:spAutoFit/>
+          </a:bodyPr>
+          <a:lstStyle/>
+          <a:p>
+            <a:pPr indent="0" lvl="0" marL="0" marR="0" rtl="0" algn="ctr">
+              <a:lnSpc>
+                <a:spcPct val="100000"/>
+              </a:lnSpc>
+              <a:spcBef>
+                <a:spcPts val="0"/>
+              </a:spcBef>
+              <a:spcAft>
+                <a:spcPts val="0"/>
+              </a:spcAft>
+              <a:buClr>
+                <a:srgbClr val="000000"/>
+              </a:buClr>
+              <a:buSzPts val="2400"/>
+              <a:buFont typeface="Arial"/>
+              <a:buNone/>
+            </a:pPr>
+            <a:r>
+              <a:rPr b="1" lang="en" sz="2400"/>
+              <a:t>Текстурная память</a:t>
+            </a:r>
+            <a:endParaRPr b="1" i="1" sz="2100"/>
+          </a:p>
+        </p:txBody>
+      </p:sp>
+      <p:sp>
+        <p:nvSpPr>
+          <p:cNvPr id="116" name="Google Shape;116;p24"/>
+          <p:cNvSpPr txBox="1"/>
+          <p:nvPr/>
+        </p:nvSpPr>
+        <p:spPr>
+          <a:xfrm>
+            <a:off x="421025" y="829375"/>
+            <a:ext cx="8328300" cy="1108200"/>
+          </a:xfrm>
+          <a:prstGeom prst="rect">
+            <a:avLst/>
+          </a:prstGeom>
+          <a:noFill/>
+          <a:ln cap="flat" cmpd="sng" w="9525">
+            <a:solidFill>
+              <a:schemeClr val="dk1"/>
+            </a:solidFill>
+            <a:prstDash val="solid"/>
+            <a:round/>
+            <a:headEnd len="sm" w="sm" type="none"/>
+            <a:tailEnd len="sm" w="sm" type="none"/>
+          </a:ln>
+        </p:spPr>
+        <p:txBody>
+          <a:bodyPr anchorCtr="0" anchor="t" bIns="91425" lIns="91425" spcFirstLastPara="1" rIns="91425" wrap="square" tIns="91425">
+            <a:spAutoFit/>
+          </a:bodyPr>
+          <a:lstStyle/>
+          <a:p>
+            <a:pPr indent="0" lvl="0" marL="0" rtl="0" algn="l">
+              <a:spcBef>
+                <a:spcPts val="0"/>
+              </a:spcBef>
+              <a:spcAft>
+                <a:spcPts val="0"/>
+              </a:spcAft>
+              <a:buClr>
+                <a:schemeClr val="dk1"/>
+              </a:buClr>
+              <a:buSzPts val="1100"/>
+              <a:buFont typeface="Arial"/>
+              <a:buNone/>
+            </a:pPr>
+            <a:r>
+              <a:rPr lang="en" sz="2000"/>
+              <a:t>● Текстура – специальный интерфейс доступа к глобальной памяти, обеспечивающий 1D, 2D и 3D целочисленную и </a:t>
+            </a:r>
+            <a:r>
+              <a:rPr b="1" lang="en" sz="2000"/>
+              <a:t>вещественную</a:t>
+            </a:r>
+            <a:endParaRPr b="1" sz="2000"/>
+          </a:p>
+          <a:p>
+            <a:pPr indent="0" lvl="0" marL="0" rtl="0" algn="l">
+              <a:spcBef>
+                <a:spcPts val="0"/>
+              </a:spcBef>
+              <a:spcAft>
+                <a:spcPts val="0"/>
+              </a:spcAft>
+              <a:buNone/>
+            </a:pPr>
+            <a:r>
+              <a:rPr lang="en" sz="2000"/>
+              <a:t>индексацию.</a:t>
+            </a:r>
+            <a:endParaRPr sz="2000"/>
+          </a:p>
+        </p:txBody>
+      </p:sp>
+      <p:pic>
+        <p:nvPicPr>
+          <p:cNvPr id="117" name="Google Shape;117;p24"/>
+          <p:cNvPicPr preferRelativeResize="0"/>
+          <p:nvPr/>
+        </p:nvPicPr>
+        <p:blipFill>
+          <a:blip r:embed="rId3">
+            <a:alphaModFix/>
+          </a:blip>
+          <a:stretch>
+            <a:fillRect/>
+          </a:stretch>
+        </p:blipFill>
+        <p:spPr>
+          <a:xfrm>
+            <a:off x="152400" y="2089975"/>
+            <a:ext cx="8839199" cy="2757967"/>
+          </a:xfrm>
+          <a:prstGeom prst="rect">
+            <a:avLst/>
+          </a:prstGeom>
+          <a:noFill/>
+          <a:ln>
+            <a:noFill/>
+          </a:ln>
+        </p:spPr>
+      </p:pic>
+    </p:spTree>
+  </p:cSld>
+  <p:clrMapOvr>
+    <a:masterClrMapping/>
+  </p:clrMapOvr>
+</p:sld>
+</file>
+
+<file path=ppt/slides/slide11.xml><?xml version="1.0" encoding="utf-8"?>
+<p:sld xmlns:a="http://schemas.openxmlformats.org/drawingml/2006/main" xmlns:r="http://schemas.openxmlformats.org/officeDocument/2006/relationships" xmlns:mc="http://schemas.openxmlformats.org/markup-compatibility/2006" xmlns:mv="urn:schemas-microsoft-com:mac:vml" xmlns:p="http://schemas.openxmlformats.org/presentationml/2006/main" xmlns:c="http://schemas.openxmlformats.org/drawingml/2006/chart" xmlns:dgm="http://schemas.openxmlformats.org/drawingml/2006/diagram" xmlns:o="urn:schemas-microsoft-com:office:office" xmlns:v="urn:schemas-microsoft-com:vml" xmlns:pvml="urn:schemas-microsoft-com:office:powerpoint" xmlns:com="http://schemas.openxmlformats.org/drawingml/2006/compatibility" xmlns:p14="http://schemas.microsoft.com/office/powerpoint/2010/main" xmlns:p15="http://schemas.microsoft.com/office/powerpoint/2012/main" xmlns:ahyp="http://schemas.microsoft.com/office/drawing/2018/hyperlinkcolor">
+  <p:cSld>
+    <p:spTree>
+      <p:nvGrpSpPr>
+        <p:cNvPr id="121" name="Shape 121"/>
+        <p:cNvGrpSpPr/>
+        <p:nvPr/>
+      </p:nvGrpSpPr>
+      <p:grpSpPr>
+        <a:xfrm>
+          <a:off x="0" y="0"/>
+          <a:ext cx="0" cy="0"/>
+          <a:chOff x="0" y="0"/>
+          <a:chExt cx="0" cy="0"/>
+        </a:xfrm>
+      </p:grpSpPr>
+      <p:sp>
+        <p:nvSpPr>
+          <p:cNvPr id="122" name="Google Shape;122;p25"/>
+          <p:cNvSpPr txBox="1"/>
+          <p:nvPr/>
+        </p:nvSpPr>
+        <p:spPr>
+          <a:xfrm>
+            <a:off x="990600" y="26428"/>
+            <a:ext cx="7086600" cy="464100"/>
+          </a:xfrm>
+          <a:prstGeom prst="rect">
+            <a:avLst/>
+          </a:prstGeom>
+          <a:solidFill>
+            <a:srgbClr val="FFCC00"/>
+          </a:solidFill>
+          <a:ln>
+            <a:noFill/>
+          </a:ln>
+        </p:spPr>
+        <p:txBody>
+          <a:bodyPr anchorCtr="0" anchor="t" bIns="46800" lIns="90000" spcFirstLastPara="1" rIns="90000" wrap="square" tIns="46800">
+            <a:spAutoFit/>
+          </a:bodyPr>
+          <a:lstStyle/>
+          <a:p>
+            <a:pPr indent="0" lvl="0" marL="0" marR="0" rtl="0" algn="ctr">
+              <a:lnSpc>
+                <a:spcPct val="100000"/>
+              </a:lnSpc>
+              <a:spcBef>
+                <a:spcPts val="0"/>
+              </a:spcBef>
+              <a:spcAft>
+                <a:spcPts val="0"/>
+              </a:spcAft>
+              <a:buClr>
+                <a:schemeClr val="dk1"/>
+              </a:buClr>
+              <a:buSzPts val="1100"/>
+              <a:buFont typeface="Arial"/>
+              <a:buNone/>
+            </a:pPr>
+            <a:r>
+              <a:rPr b="1" lang="en" sz="2400"/>
+              <a:t>Интегрирование по сфере</a:t>
+            </a:r>
+            <a:endParaRPr b="1" sz="2400"/>
+          </a:p>
+        </p:txBody>
+      </p:sp>
+      <p:pic>
+        <p:nvPicPr>
+          <p:cNvPr id="123" name="Google Shape;123;p25"/>
+          <p:cNvPicPr preferRelativeResize="0"/>
+          <p:nvPr/>
+        </p:nvPicPr>
+        <p:blipFill>
+          <a:blip r:embed="rId3">
+            <a:alphaModFix/>
+          </a:blip>
+          <a:stretch>
+            <a:fillRect/>
+          </a:stretch>
+        </p:blipFill>
+        <p:spPr>
+          <a:xfrm>
+            <a:off x="152400" y="642928"/>
+            <a:ext cx="3800475" cy="3943350"/>
+          </a:xfrm>
+          <a:prstGeom prst="rect">
+            <a:avLst/>
+          </a:prstGeom>
+          <a:noFill/>
+          <a:ln>
+            <a:noFill/>
+          </a:ln>
+        </p:spPr>
+      </p:pic>
+      <p:pic>
+        <p:nvPicPr>
+          <p:cNvPr id="124" name="Google Shape;124;p25"/>
+          <p:cNvPicPr preferRelativeResize="0"/>
+          <p:nvPr/>
+        </p:nvPicPr>
+        <p:blipFill>
+          <a:blip r:embed="rId4">
+            <a:alphaModFix/>
+          </a:blip>
+          <a:stretch>
+            <a:fillRect/>
+          </a:stretch>
+        </p:blipFill>
+        <p:spPr>
+          <a:xfrm>
+            <a:off x="3624275" y="3652851"/>
+            <a:ext cx="5400675" cy="933425"/>
+          </a:xfrm>
+          <a:prstGeom prst="rect">
+            <a:avLst/>
+          </a:prstGeom>
+          <a:noFill/>
+          <a:ln cap="flat" cmpd="sng" w="9525">
+            <a:solidFill>
+              <a:schemeClr val="dk1"/>
+            </a:solidFill>
+            <a:prstDash val="solid"/>
+            <a:round/>
+            <a:headEnd len="sm" w="sm" type="none"/>
+            <a:tailEnd len="sm" w="sm" type="none"/>
+          </a:ln>
+        </p:spPr>
+      </p:pic>
+      <p:sp>
+        <p:nvSpPr>
+          <p:cNvPr id="125" name="Google Shape;125;p25"/>
+          <p:cNvSpPr txBox="1"/>
+          <p:nvPr/>
+        </p:nvSpPr>
+        <p:spPr>
+          <a:xfrm>
+            <a:off x="4064750" y="2013050"/>
+            <a:ext cx="4960200" cy="492600"/>
+          </a:xfrm>
+          <a:prstGeom prst="rect">
+            <a:avLst/>
+          </a:prstGeom>
+          <a:solidFill>
+            <a:srgbClr val="D9D9D9"/>
+          </a:solidFill>
+          <a:ln>
+            <a:noFill/>
+          </a:ln>
+        </p:spPr>
+        <p:txBody>
+          <a:bodyPr anchorCtr="0" anchor="t" bIns="91425" lIns="91425" spcFirstLastPara="1" rIns="91425" wrap="square" tIns="91425">
+            <a:spAutoFit/>
+          </a:bodyPr>
+          <a:lstStyle/>
+          <a:p>
+            <a:pPr indent="0" lvl="0" marL="0" rtl="0" algn="l">
+              <a:spcBef>
+                <a:spcPts val="0"/>
+              </a:spcBef>
+              <a:spcAft>
+                <a:spcPts val="0"/>
+              </a:spcAft>
+              <a:buNone/>
+            </a:pPr>
+            <a:r>
+              <a:rPr lang="en" sz="2000"/>
+              <a:t>Интеграл по сфере функции g(φ, ψ):</a:t>
+            </a:r>
+            <a:endParaRPr/>
+          </a:p>
+        </p:txBody>
+      </p:sp>
+    </p:spTree>
+  </p:cSld>
+  <p:clrMapOvr>
+    <a:masterClrMapping/>
+  </p:clrMapOvr>
+</p:sld>
+</file>
+
+<file path=ppt/slides/slide12.xml><?xml version="1.0" encoding="utf-8"?>
+<p:sld xmlns:a="http://schemas.openxmlformats.org/drawingml/2006/main" xmlns:r="http://schemas.openxmlformats.org/officeDocument/2006/relationships" xmlns:mc="http://schemas.openxmlformats.org/markup-compatibility/2006" xmlns:mv="urn:schemas-microsoft-com:mac:vml" xmlns:p="http://schemas.openxmlformats.org/presentationml/2006/main" xmlns:c="http://schemas.openxmlformats.org/drawingml/2006/chart" xmlns:dgm="http://schemas.openxmlformats.org/drawingml/2006/diagram" xmlns:o="urn:schemas-microsoft-com:office:office" xmlns:v="urn:schemas-microsoft-com:vml" xmlns:pvml="urn:schemas-microsoft-com:office:powerpoint" xmlns:com="http://schemas.openxmlformats.org/drawingml/2006/compatibility" xmlns:p14="http://schemas.microsoft.com/office/powerpoint/2010/main" xmlns:p15="http://schemas.microsoft.com/office/powerpoint/2012/main" xmlns:ahyp="http://schemas.microsoft.com/office/drawing/2018/hyperlinkcolor">
+  <p:cSld>
+    <p:spTree>
+      <p:nvGrpSpPr>
+        <p:cNvPr id="129" name="Shape 129"/>
+        <p:cNvGrpSpPr/>
+        <p:nvPr/>
+      </p:nvGrpSpPr>
+      <p:grpSpPr>
+        <a:xfrm>
+          <a:off x="0" y="0"/>
+          <a:ext cx="0" cy="0"/>
+          <a:chOff x="0" y="0"/>
+          <a:chExt cx="0" cy="0"/>
+        </a:xfrm>
+      </p:grpSpPr>
+      <p:pic>
+        <p:nvPicPr>
+          <p:cNvPr id="130" name="Google Shape;130;p26"/>
+          <p:cNvPicPr preferRelativeResize="0"/>
+          <p:nvPr/>
+        </p:nvPicPr>
+        <p:blipFill>
+          <a:blip r:embed="rId3">
+            <a:alphaModFix/>
+          </a:blip>
+          <a:stretch>
+            <a:fillRect/>
+          </a:stretch>
+        </p:blipFill>
+        <p:spPr>
+          <a:xfrm>
+            <a:off x="152400" y="1295400"/>
+            <a:ext cx="8839200" cy="3490640"/>
+          </a:xfrm>
+          <a:prstGeom prst="rect">
+            <a:avLst/>
+          </a:prstGeom>
+          <a:noFill/>
+          <a:ln>
+            <a:noFill/>
+          </a:ln>
+        </p:spPr>
+      </p:pic>
+      <p:sp>
+        <p:nvSpPr>
+          <p:cNvPr id="131" name="Google Shape;131;p26"/>
+          <p:cNvSpPr txBox="1"/>
+          <p:nvPr/>
+        </p:nvSpPr>
+        <p:spPr>
+          <a:xfrm>
+            <a:off x="990600" y="26428"/>
+            <a:ext cx="7086600" cy="833400"/>
+          </a:xfrm>
+          <a:prstGeom prst="rect">
+            <a:avLst/>
+          </a:prstGeom>
+          <a:solidFill>
+            <a:srgbClr val="FFCC00"/>
+          </a:solidFill>
+          <a:ln>
+            <a:noFill/>
+          </a:ln>
+        </p:spPr>
+        <p:txBody>
+          <a:bodyPr anchorCtr="0" anchor="t" bIns="46800" lIns="90000" spcFirstLastPara="1" rIns="90000" wrap="square" tIns="46800">
+            <a:spAutoFit/>
+          </a:bodyPr>
+          <a:lstStyle/>
+          <a:p>
+            <a:pPr indent="0" lvl="0" marL="0" marR="0" rtl="0" algn="ctr">
+              <a:lnSpc>
+                <a:spcPct val="100000"/>
+              </a:lnSpc>
+              <a:spcBef>
+                <a:spcPts val="0"/>
+              </a:spcBef>
+              <a:spcAft>
+                <a:spcPts val="0"/>
+              </a:spcAft>
+              <a:buClr>
+                <a:schemeClr val="dk1"/>
+              </a:buClr>
+              <a:buSzPts val="1100"/>
+              <a:buFont typeface="Arial"/>
+              <a:buNone/>
+            </a:pPr>
+            <a:r>
+              <a:rPr b="1" lang="en" sz="2400"/>
+              <a:t>Текстуры: аппаратная интерполяция</a:t>
+            </a:r>
+            <a:endParaRPr b="1" sz="2400"/>
+          </a:p>
+          <a:p>
+            <a:pPr indent="0" lvl="0" marL="0" marR="0" rtl="0" algn="ctr">
+              <a:lnSpc>
+                <a:spcPct val="100000"/>
+              </a:lnSpc>
+              <a:spcBef>
+                <a:spcPts val="0"/>
+              </a:spcBef>
+              <a:spcAft>
+                <a:spcPts val="0"/>
+              </a:spcAft>
+              <a:buClr>
+                <a:schemeClr val="dk1"/>
+              </a:buClr>
+              <a:buSzPts val="1100"/>
+              <a:buFont typeface="Arial"/>
+              <a:buNone/>
+            </a:pPr>
+            <a:r>
+              <a:rPr b="1" lang="en" sz="2400"/>
+              <a:t>(пример использования)</a:t>
+            </a:r>
+            <a:endParaRPr b="1" sz="2400"/>
+          </a:p>
+        </p:txBody>
+      </p:sp>
+      <p:pic>
+        <p:nvPicPr>
+          <p:cNvPr id="132" name="Google Shape;132;p26"/>
+          <p:cNvPicPr preferRelativeResize="0"/>
+          <p:nvPr/>
+        </p:nvPicPr>
+        <p:blipFill>
+          <a:blip r:embed="rId4">
+            <a:alphaModFix/>
+          </a:blip>
+          <a:stretch>
+            <a:fillRect/>
+          </a:stretch>
+        </p:blipFill>
+        <p:spPr>
+          <a:xfrm>
+            <a:off x="3539550" y="1774678"/>
+            <a:ext cx="2476500" cy="1371600"/>
+          </a:xfrm>
+          <a:prstGeom prst="rect">
+            <a:avLst/>
+          </a:prstGeom>
+          <a:noFill/>
+          <a:ln cap="flat" cmpd="sng" w="9525">
+            <a:solidFill>
+              <a:schemeClr val="dk1"/>
+            </a:solidFill>
+            <a:prstDash val="solid"/>
+            <a:round/>
+            <a:headEnd len="sm" w="sm" type="none"/>
+            <a:tailEnd len="sm" w="sm" type="none"/>
+          </a:ln>
+        </p:spPr>
+      </p:pic>
+    </p:spTree>
+  </p:cSld>
+  <p:clrMapOvr>
+    <a:masterClrMapping/>
+  </p:clrMapOvr>
+</p:sld>
+</file>
+
+<file path=ppt/slides/slide13.xml><?xml version="1.0" encoding="utf-8"?>
+<p:sld xmlns:a="http://schemas.openxmlformats.org/drawingml/2006/main" xmlns:r="http://schemas.openxmlformats.org/officeDocument/2006/relationships" xmlns:mc="http://schemas.openxmlformats.org/markup-compatibility/2006" xmlns:mv="urn:schemas-microsoft-com:mac:vml" xmlns:p="http://schemas.openxmlformats.org/presentationml/2006/main" xmlns:c="http://schemas.openxmlformats.org/drawingml/2006/chart" xmlns:dgm="http://schemas.openxmlformats.org/drawingml/2006/diagram" xmlns:o="urn:schemas-microsoft-com:office:office" xmlns:v="urn:schemas-microsoft-com:vml" xmlns:pvml="urn:schemas-microsoft-com:office:powerpoint" xmlns:com="http://schemas.openxmlformats.org/drawingml/2006/compatibility" xmlns:p14="http://schemas.microsoft.com/office/powerpoint/2010/main" xmlns:p15="http://schemas.microsoft.com/office/powerpoint/2012/main" xmlns:ahyp="http://schemas.microsoft.com/office/drawing/2018/hyperlinkcolor">
+  <p:cSld>
+    <p:spTree>
+      <p:nvGrpSpPr>
+        <p:cNvPr id="136" name="Shape 136"/>
+        <p:cNvGrpSpPr/>
+        <p:nvPr/>
+      </p:nvGrpSpPr>
+      <p:grpSpPr>
+        <a:xfrm>
+          <a:off x="0" y="0"/>
+          <a:ext cx="0" cy="0"/>
+          <a:chOff x="0" y="0"/>
+          <a:chExt cx="0" cy="0"/>
+        </a:xfrm>
+      </p:grpSpPr>
+      <p:sp>
+        <p:nvSpPr>
+          <p:cNvPr id="137" name="Google Shape;137;p27"/>
           <p:cNvSpPr txBox="1"/>
           <p:nvPr/>
         </p:nvSpPr>
@@ -10120,7 +10944,7 @@
       </p:sp>
       <p:pic>
         <p:nvPicPr>
-          <p:cNvPr id="122" name="Google Shape;122;p24"/>
+          <p:cNvPr id="138" name="Google Shape;138;p27"/>
           <p:cNvPicPr preferRelativeResize="0"/>
           <p:nvPr/>
         </p:nvPicPr>
@@ -10148,7 +10972,7 @@
       </p:pic>
       <p:sp>
         <p:nvSpPr>
-          <p:cNvPr id="123" name="Google Shape;123;p24"/>
+          <p:cNvPr id="139" name="Google Shape;139;p27"/>
           <p:cNvSpPr txBox="1"/>
           <p:nvPr/>
         </p:nvSpPr>
@@ -10206,12 +11030,12 @@
 </p:sld>
 </file>
 
-<file path=ppt/slides/slide11.xml><?xml version="1.0" encoding="utf-8"?>
+<file path=ppt/slides/slide14.xml><?xml version="1.0" encoding="utf-8"?>
 <p:sld xmlns:a="http://schemas.openxmlformats.org/drawingml/2006/main" xmlns:r="http://schemas.openxmlformats.org/officeDocument/2006/relationships" xmlns:mc="http://schemas.openxmlformats.org/markup-compatibility/2006" xmlns:mv="urn:schemas-microsoft-com:mac:vml" xmlns:p="http://schemas.openxmlformats.org/presentationml/2006/main" xmlns:c="http://schemas.openxmlformats.org/drawingml/2006/chart" xmlns:dgm="http://schemas.openxmlformats.org/drawingml/2006/diagram" xmlns:o="urn:schemas-microsoft-com:office:office" xmlns:v="urn:schemas-microsoft-com:vml" xmlns:pvml="urn:schemas-microsoft-com:office:powerpoint" xmlns:com="http://schemas.openxmlformats.org/drawingml/2006/compatibility" xmlns:p14="http://schemas.microsoft.com/office/powerpoint/2010/main" xmlns:p15="http://schemas.microsoft.com/office/powerpoint/2012/main" xmlns:ahyp="http://schemas.microsoft.com/office/drawing/2018/hyperlinkcolor">
   <p:cSld>
     <p:spTree>
       <p:nvGrpSpPr>
-        <p:cNvPr id="127" name="Shape 127"/>
+        <p:cNvPr id="143" name="Shape 143"/>
         <p:cNvGrpSpPr/>
         <p:nvPr/>
       </p:nvGrpSpPr>
@@ -10225,7 +11049,7 @@
       </p:grpSpPr>
       <p:sp>
         <p:nvSpPr>
-          <p:cNvPr id="128" name="Google Shape;128;p25"/>
+          <p:cNvPr id="144" name="Google Shape;144;p28"/>
           <p:cNvSpPr txBox="1"/>
           <p:nvPr/>
         </p:nvSpPr>
@@ -10279,7 +11103,7 @@
       </p:sp>
       <p:sp>
         <p:nvSpPr>
-          <p:cNvPr id="129" name="Google Shape;129;p25"/>
+          <p:cNvPr id="145" name="Google Shape;145;p28"/>
           <p:cNvSpPr txBox="1"/>
           <p:nvPr/>
         </p:nvSpPr>
@@ -10331,7 +11155,7 @@
       </p:sp>
       <p:pic>
         <p:nvPicPr>
-          <p:cNvPr id="130" name="Google Shape;130;p25"/>
+          <p:cNvPr id="146" name="Google Shape;146;p28"/>
           <p:cNvPicPr preferRelativeResize="0"/>
           <p:nvPr/>
         </p:nvPicPr>
@@ -10365,12 +11189,12 @@
 </p:sld>
 </file>
 
-<file path=ppt/slides/slide12.xml><?xml version="1.0" encoding="utf-8"?>
+<file path=ppt/slides/slide15.xml><?xml version="1.0" encoding="utf-8"?>
 <p:sld xmlns:a="http://schemas.openxmlformats.org/drawingml/2006/main" xmlns:r="http://schemas.openxmlformats.org/officeDocument/2006/relationships" xmlns:mc="http://schemas.openxmlformats.org/markup-compatibility/2006" xmlns:mv="urn:schemas-microsoft-com:mac:vml" xmlns:p="http://schemas.openxmlformats.org/presentationml/2006/main" xmlns:c="http://schemas.openxmlformats.org/drawingml/2006/chart" xmlns:dgm="http://schemas.openxmlformats.org/drawingml/2006/diagram" xmlns:o="urn:schemas-microsoft-com:office:office" xmlns:v="urn:schemas-microsoft-com:vml" xmlns:pvml="urn:schemas-microsoft-com:office:powerpoint" xmlns:com="http://schemas.openxmlformats.org/drawingml/2006/compatibility" xmlns:p14="http://schemas.microsoft.com/office/powerpoint/2010/main" xmlns:p15="http://schemas.microsoft.com/office/powerpoint/2012/main" xmlns:ahyp="http://schemas.microsoft.com/office/drawing/2018/hyperlinkcolor">
   <p:cSld>
     <p:spTree>
       <p:nvGrpSpPr>
-        <p:cNvPr id="134" name="Shape 134"/>
+        <p:cNvPr id="150" name="Shape 150"/>
         <p:cNvGrpSpPr/>
         <p:nvPr/>
       </p:nvGrpSpPr>
@@ -10384,7 +11208,7 @@
       </p:grpSpPr>
       <p:sp>
         <p:nvSpPr>
-          <p:cNvPr id="135" name="Google Shape;135;p26"/>
+          <p:cNvPr id="151" name="Google Shape;151;p29"/>
           <p:cNvSpPr txBox="1"/>
           <p:nvPr/>
         </p:nvSpPr>
@@ -10436,7 +11260,7 @@
       </p:sp>
       <p:sp>
         <p:nvSpPr>
-          <p:cNvPr id="136" name="Google Shape;136;p26"/>
+          <p:cNvPr id="152" name="Google Shape;152;p29"/>
           <p:cNvSpPr txBox="1"/>
           <p:nvPr/>
         </p:nvSpPr>
@@ -10671,917 +11495,6 @@
               <a:t/>
             </a:r>
             <a:endParaRPr sz="2000"/>
-          </a:p>
-        </p:txBody>
-      </p:sp>
-    </p:spTree>
-  </p:cSld>
-  <p:clrMapOvr>
-    <a:masterClrMapping/>
-  </p:clrMapOvr>
-</p:sld>
-</file>
-
-<file path=ppt/slides/slide13.xml><?xml version="1.0" encoding="utf-8"?>
-<p:sld xmlns:a="http://schemas.openxmlformats.org/drawingml/2006/main" xmlns:r="http://schemas.openxmlformats.org/officeDocument/2006/relationships" xmlns:mc="http://schemas.openxmlformats.org/markup-compatibility/2006" xmlns:mv="urn:schemas-microsoft-com:mac:vml" xmlns:p="http://schemas.openxmlformats.org/presentationml/2006/main" xmlns:c="http://schemas.openxmlformats.org/drawingml/2006/chart" xmlns:dgm="http://schemas.openxmlformats.org/drawingml/2006/diagram" xmlns:o="urn:schemas-microsoft-com:office:office" xmlns:v="urn:schemas-microsoft-com:vml" xmlns:pvml="urn:schemas-microsoft-com:office:powerpoint" xmlns:com="http://schemas.openxmlformats.org/drawingml/2006/compatibility" xmlns:p14="http://schemas.microsoft.com/office/powerpoint/2010/main" xmlns:p15="http://schemas.microsoft.com/office/powerpoint/2012/main" xmlns:ahyp="http://schemas.microsoft.com/office/drawing/2018/hyperlinkcolor">
-  <p:cSld>
-    <p:spTree>
-      <p:nvGrpSpPr>
-        <p:cNvPr id="140" name="Shape 140"/>
-        <p:cNvGrpSpPr/>
-        <p:nvPr/>
-      </p:nvGrpSpPr>
-      <p:grpSpPr>
-        <a:xfrm>
-          <a:off x="0" y="0"/>
-          <a:ext cx="0" cy="0"/>
-          <a:chOff x="0" y="0"/>
-          <a:chExt cx="0" cy="0"/>
-        </a:xfrm>
-      </p:grpSpPr>
-      <p:sp>
-        <p:nvSpPr>
-          <p:cNvPr id="141" name="Google Shape;141;p27"/>
-          <p:cNvSpPr txBox="1"/>
-          <p:nvPr/>
-        </p:nvSpPr>
-        <p:spPr>
-          <a:xfrm>
-            <a:off x="157875" y="95850"/>
-            <a:ext cx="8880900" cy="3879000"/>
-          </a:xfrm>
-          <a:prstGeom prst="rect">
-            <a:avLst/>
-          </a:prstGeom>
-          <a:solidFill>
-            <a:srgbClr val="FFE599"/>
-          </a:solidFill>
-          <a:ln cap="flat" cmpd="sng" w="9525">
-            <a:solidFill>
-              <a:schemeClr val="dk1"/>
-            </a:solidFill>
-            <a:prstDash val="solid"/>
-            <a:round/>
-            <a:headEnd len="sm" w="sm" type="none"/>
-            <a:tailEnd len="sm" w="sm" type="none"/>
-          </a:ln>
-        </p:spPr>
-        <p:txBody>
-          <a:bodyPr anchorCtr="0" anchor="t" bIns="91425" lIns="91425" spcFirstLastPara="1" rIns="91425" wrap="square" tIns="91425">
-            <a:spAutoFit/>
-          </a:bodyPr>
-          <a:lstStyle/>
-          <a:p>
-            <a:pPr indent="0" lvl="0" marL="0" rtl="0" algn="l">
-              <a:spcBef>
-                <a:spcPts val="0"/>
-              </a:spcBef>
-              <a:spcAft>
-                <a:spcPts val="0"/>
-              </a:spcAft>
-              <a:buClr>
-                <a:schemeClr val="dk1"/>
-              </a:buClr>
-              <a:buSzPts val="1100"/>
-              <a:buFont typeface="Arial"/>
-              <a:buNone/>
-            </a:pPr>
-            <a:r>
-              <a:rPr lang="en" sz="2000"/>
-              <a:t>  for (int iphi = 0; iphi &lt; 2 * COEF; ++iphi)</a:t>
-            </a:r>
-            <a:endParaRPr sz="2000"/>
-          </a:p>
-          <a:p>
-            <a:pPr indent="0" lvl="0" marL="0" rtl="0" algn="l">
-              <a:spcBef>
-                <a:spcPts val="0"/>
-              </a:spcBef>
-              <a:spcAft>
-                <a:spcPts val="0"/>
-              </a:spcAft>
-              <a:buClr>
-                <a:schemeClr val="dk1"/>
-              </a:buClr>
-              <a:buSzPts val="1100"/>
-              <a:buFont typeface="Arial"/>
-              <a:buNone/>
-            </a:pPr>
-            <a:r>
-              <a:rPr lang="en" sz="2000"/>
-              <a:t>    for (int ipsi = 0; ipsi &lt; COEF; ++ipsi, ++i) {</a:t>
-            </a:r>
-            <a:endParaRPr sz="2000"/>
-          </a:p>
-          <a:p>
-            <a:pPr indent="0" lvl="0" marL="0" rtl="0" algn="l">
-              <a:spcBef>
-                <a:spcPts val="0"/>
-              </a:spcBef>
-              <a:spcAft>
-                <a:spcPts val="0"/>
-              </a:spcAft>
-              <a:buClr>
-                <a:schemeClr val="dk1"/>
-              </a:buClr>
-              <a:buSzPts val="1100"/>
-              <a:buFont typeface="Arial"/>
-              <a:buNone/>
-            </a:pPr>
-            <a:r>
-              <a:rPr lang="en" sz="2000"/>
-              <a:t>      float phi = iphi * M_PI / COEF;</a:t>
-            </a:r>
-            <a:endParaRPr sz="2000"/>
-          </a:p>
-          <a:p>
-            <a:pPr indent="0" lvl="0" marL="0" rtl="0" algn="l">
-              <a:spcBef>
-                <a:spcPts val="0"/>
-              </a:spcBef>
-              <a:spcAft>
-                <a:spcPts val="0"/>
-              </a:spcAft>
-              <a:buClr>
-                <a:schemeClr val="dk1"/>
-              </a:buClr>
-              <a:buSzPts val="1100"/>
-              <a:buFont typeface="Arial"/>
-              <a:buNone/>
-            </a:pPr>
-            <a:r>
-              <a:rPr lang="en" sz="2000"/>
-              <a:t>      float psi = ipsi * M_PI / COEF;</a:t>
-            </a:r>
-            <a:endParaRPr sz="2000"/>
-          </a:p>
-          <a:p>
-            <a:pPr indent="0" lvl="0" marL="0" rtl="0" algn="l">
-              <a:spcBef>
-                <a:spcPts val="0"/>
-              </a:spcBef>
-              <a:spcAft>
-                <a:spcPts val="0"/>
-              </a:spcAft>
-              <a:buClr>
-                <a:schemeClr val="dk1"/>
-              </a:buClr>
-              <a:buSzPts val="1100"/>
-              <a:buFont typeface="Arial"/>
-              <a:buNone/>
-            </a:pPr>
-            <a:r>
-              <a:rPr lang="en" sz="2000"/>
-              <a:t>      temp_vert[i].x = RADIUS * sinf(psi) * cosf(phi);</a:t>
-            </a:r>
-            <a:endParaRPr sz="2000"/>
-          </a:p>
-          <a:p>
-            <a:pPr indent="0" lvl="0" marL="0" rtl="0" algn="l">
-              <a:spcBef>
-                <a:spcPts val="0"/>
-              </a:spcBef>
-              <a:spcAft>
-                <a:spcPts val="0"/>
-              </a:spcAft>
-              <a:buClr>
-                <a:schemeClr val="dk1"/>
-              </a:buClr>
-              <a:buSzPts val="1100"/>
-              <a:buFont typeface="Arial"/>
-              <a:buNone/>
-            </a:pPr>
-            <a:r>
-              <a:rPr lang="en" sz="2000"/>
-              <a:t>      temp_vert[i].y = RADIUS * sinf(psi) * sinf(phi);</a:t>
-            </a:r>
-            <a:endParaRPr sz="2000"/>
-          </a:p>
-          <a:p>
-            <a:pPr indent="0" lvl="0" marL="0" rtl="0" algn="l">
-              <a:spcBef>
-                <a:spcPts val="0"/>
-              </a:spcBef>
-              <a:spcAft>
-                <a:spcPts val="0"/>
-              </a:spcAft>
-              <a:buClr>
-                <a:schemeClr val="dk1"/>
-              </a:buClr>
-              <a:buSzPts val="1100"/>
-              <a:buFont typeface="Arial"/>
-              <a:buNone/>
-            </a:pPr>
-            <a:r>
-              <a:rPr lang="en" sz="2000"/>
-              <a:t>      temp_vert[i].z = RADIUS * cosf(psi);</a:t>
-            </a:r>
-            <a:endParaRPr sz="2000"/>
-          </a:p>
-          <a:p>
-            <a:pPr indent="0" lvl="0" marL="0" rtl="0" algn="l">
-              <a:spcBef>
-                <a:spcPts val="0"/>
-              </a:spcBef>
-              <a:spcAft>
-                <a:spcPts val="0"/>
-              </a:spcAft>
-              <a:buClr>
-                <a:schemeClr val="dk1"/>
-              </a:buClr>
-              <a:buSzPts val="1100"/>
-              <a:buFont typeface="Arial"/>
-              <a:buNone/>
-            </a:pPr>
-            <a:r>
-              <a:rPr lang="en" sz="2000"/>
-              <a:t>    }</a:t>
-            </a:r>
-            <a:endParaRPr sz="2000"/>
-          </a:p>
-          <a:p>
-            <a:pPr indent="0" lvl="0" marL="0" rtl="0" algn="l">
-              <a:spcBef>
-                <a:spcPts val="0"/>
-              </a:spcBef>
-              <a:spcAft>
-                <a:spcPts val="0"/>
-              </a:spcAft>
-              <a:buNone/>
-            </a:pPr>
-            <a:r>
-              <a:rPr lang="en" sz="2000"/>
-              <a:t>  </a:t>
-            </a:r>
-            <a:r>
-              <a:rPr b="1" lang="en" sz="2000"/>
-              <a:t>cudaMemcpyToSymbol</a:t>
-            </a:r>
-            <a:r>
-              <a:rPr lang="en" sz="2000"/>
-              <a:t>(vert, temp_vert, sizeof(Vertex) * VERTCOUNT, 0,</a:t>
-            </a:r>
-            <a:endParaRPr sz="2000"/>
-          </a:p>
-          <a:p>
-            <a:pPr indent="0" lvl="0" marL="0" rtl="0" algn="l">
-              <a:spcBef>
-                <a:spcPts val="0"/>
-              </a:spcBef>
-              <a:spcAft>
-                <a:spcPts val="0"/>
-              </a:spcAft>
-              <a:buClr>
-                <a:schemeClr val="dk1"/>
-              </a:buClr>
-              <a:buSzPts val="1100"/>
-              <a:buFont typeface="Arial"/>
-              <a:buNone/>
-            </a:pPr>
-            <a:r>
-              <a:rPr lang="en" sz="2000"/>
-              <a:t> 										            cudaMemcpyHostToDevice);</a:t>
-            </a:r>
-            <a:endParaRPr sz="2000"/>
-          </a:p>
-          <a:p>
-            <a:pPr indent="0" lvl="0" marL="0" rtl="0" algn="l">
-              <a:spcBef>
-                <a:spcPts val="0"/>
-              </a:spcBef>
-              <a:spcAft>
-                <a:spcPts val="0"/>
-              </a:spcAft>
-              <a:buClr>
-                <a:schemeClr val="dk1"/>
-              </a:buClr>
-              <a:buSzPts val="1100"/>
-              <a:buFont typeface="Arial"/>
-              <a:buNone/>
-            </a:pPr>
-            <a:r>
-              <a:rPr lang="en" sz="2000"/>
-              <a:t>free(temp_vert);</a:t>
-            </a:r>
-            <a:endParaRPr sz="2000"/>
-          </a:p>
-          <a:p>
-            <a:pPr indent="0" lvl="0" marL="0" rtl="0" algn="l">
-              <a:spcBef>
-                <a:spcPts val="0"/>
-              </a:spcBef>
-              <a:spcAft>
-                <a:spcPts val="0"/>
-              </a:spcAft>
-              <a:buNone/>
-            </a:pPr>
-            <a:r>
-              <a:rPr lang="en" sz="2000"/>
-              <a:t>}</a:t>
-            </a:r>
-            <a:endParaRPr/>
-          </a:p>
-        </p:txBody>
-      </p:sp>
-    </p:spTree>
-  </p:cSld>
-  <p:clrMapOvr>
-    <a:masterClrMapping/>
-  </p:clrMapOvr>
-</p:sld>
-</file>
-
-<file path=ppt/slides/slide14.xml><?xml version="1.0" encoding="utf-8"?>
-<p:sld xmlns:a="http://schemas.openxmlformats.org/drawingml/2006/main" xmlns:r="http://schemas.openxmlformats.org/officeDocument/2006/relationships" xmlns:mc="http://schemas.openxmlformats.org/markup-compatibility/2006" xmlns:mv="urn:schemas-microsoft-com:mac:vml" xmlns:p="http://schemas.openxmlformats.org/presentationml/2006/main" xmlns:c="http://schemas.openxmlformats.org/drawingml/2006/chart" xmlns:dgm="http://schemas.openxmlformats.org/drawingml/2006/diagram" xmlns:o="urn:schemas-microsoft-com:office:office" xmlns:v="urn:schemas-microsoft-com:vml" xmlns:pvml="urn:schemas-microsoft-com:office:powerpoint" xmlns:com="http://schemas.openxmlformats.org/drawingml/2006/compatibility" xmlns:p14="http://schemas.microsoft.com/office/powerpoint/2010/main" xmlns:p15="http://schemas.microsoft.com/office/powerpoint/2012/main" xmlns:ahyp="http://schemas.microsoft.com/office/drawing/2018/hyperlinkcolor">
-  <p:cSld>
-    <p:spTree>
-      <p:nvGrpSpPr>
-        <p:cNvPr id="145" name="Shape 145"/>
-        <p:cNvGrpSpPr/>
-        <p:nvPr/>
-      </p:nvGrpSpPr>
-      <p:grpSpPr>
-        <a:xfrm>
-          <a:off x="0" y="0"/>
-          <a:ext cx="0" cy="0"/>
-          <a:chOff x="0" y="0"/>
-          <a:chExt cx="0" cy="0"/>
-        </a:xfrm>
-      </p:grpSpPr>
-      <p:sp>
-        <p:nvSpPr>
-          <p:cNvPr id="146" name="Google Shape;146;p28"/>
-          <p:cNvSpPr txBox="1"/>
-          <p:nvPr/>
-        </p:nvSpPr>
-        <p:spPr>
-          <a:xfrm>
-            <a:off x="197250" y="184700"/>
-            <a:ext cx="8749500" cy="800400"/>
-          </a:xfrm>
-          <a:prstGeom prst="rect">
-            <a:avLst/>
-          </a:prstGeom>
-          <a:solidFill>
-            <a:srgbClr val="C9DAF8"/>
-          </a:solidFill>
-          <a:ln>
-            <a:noFill/>
-          </a:ln>
-        </p:spPr>
-        <p:txBody>
-          <a:bodyPr anchorCtr="0" anchor="t" bIns="91425" lIns="91425" spcFirstLastPara="1" rIns="91425" wrap="square" tIns="91425">
-            <a:spAutoFit/>
-          </a:bodyPr>
-          <a:lstStyle/>
-          <a:p>
-            <a:pPr indent="0" lvl="0" marL="0" rtl="0" algn="l">
-              <a:spcBef>
-                <a:spcPts val="0"/>
-              </a:spcBef>
-              <a:spcAft>
-                <a:spcPts val="0"/>
-              </a:spcAft>
-              <a:buNone/>
-            </a:pPr>
-            <a:r>
-              <a:rPr b="1" lang="en" sz="2000"/>
-              <a:t>Шаг 3: </a:t>
-            </a:r>
-            <a:r>
-              <a:rPr lang="en" sz="2000"/>
-              <a:t>сохранить значения тестовой функции/функций, определенные на первом шаге в текстуре</a:t>
-            </a:r>
-            <a:r>
-              <a:rPr lang="en" sz="2000"/>
-              <a:t>. </a:t>
-            </a:r>
-            <a:endParaRPr sz="2000"/>
-          </a:p>
-        </p:txBody>
-      </p:sp>
-      <p:sp>
-        <p:nvSpPr>
-          <p:cNvPr id="147" name="Google Shape;147;p28"/>
-          <p:cNvSpPr txBox="1"/>
-          <p:nvPr/>
-        </p:nvSpPr>
-        <p:spPr>
-          <a:xfrm>
-            <a:off x="65775" y="1197775"/>
-            <a:ext cx="9012600" cy="3078300"/>
-          </a:xfrm>
-          <a:prstGeom prst="rect">
-            <a:avLst/>
-          </a:prstGeom>
-          <a:solidFill>
-            <a:srgbClr val="FFE599"/>
-          </a:solidFill>
-          <a:ln>
-            <a:noFill/>
-          </a:ln>
-        </p:spPr>
-        <p:txBody>
-          <a:bodyPr anchorCtr="0" anchor="t" bIns="91425" lIns="91425" spcFirstLastPara="1" rIns="91425" wrap="square" tIns="91425">
-            <a:spAutoFit/>
-          </a:bodyPr>
-          <a:lstStyle/>
-          <a:p>
-            <a:pPr indent="0" lvl="0" marL="0" rtl="0" algn="l">
-              <a:spcBef>
-                <a:spcPts val="0"/>
-              </a:spcBef>
-              <a:spcAft>
-                <a:spcPts val="0"/>
-              </a:spcAft>
-              <a:buNone/>
-            </a:pPr>
-            <a:r>
-              <a:rPr lang="en" sz="2000"/>
-              <a:t>cudaArray* df_Array = 0;</a:t>
-            </a:r>
-            <a:endParaRPr sz="2000"/>
-          </a:p>
-          <a:p>
-            <a:pPr indent="0" lvl="0" marL="0" rtl="0" algn="l">
-              <a:spcBef>
-                <a:spcPts val="0"/>
-              </a:spcBef>
-              <a:spcAft>
-                <a:spcPts val="0"/>
-              </a:spcAft>
-              <a:buClr>
-                <a:schemeClr val="dk1"/>
-              </a:buClr>
-              <a:buSzPts val="1100"/>
-              <a:buFont typeface="Arial"/>
-              <a:buNone/>
-            </a:pPr>
-            <a:r>
-              <a:t/>
-            </a:r>
-            <a:endParaRPr sz="2000"/>
-          </a:p>
-          <a:p>
-            <a:pPr indent="0" lvl="0" marL="0" rtl="0" algn="l">
-              <a:spcBef>
-                <a:spcPts val="0"/>
-              </a:spcBef>
-              <a:spcAft>
-                <a:spcPts val="0"/>
-              </a:spcAft>
-              <a:buNone/>
-            </a:pPr>
-            <a:r>
-              <a:rPr b="1" lang="en" sz="2000"/>
-              <a:t>void  load_texture(float *df_h)</a:t>
-            </a:r>
-            <a:r>
-              <a:rPr lang="en" sz="2000"/>
-              <a:t>{</a:t>
-            </a:r>
-            <a:endParaRPr sz="2000"/>
-          </a:p>
-          <a:p>
-            <a:pPr indent="0" lvl="0" marL="0" rtl="0" algn="l">
-              <a:spcBef>
-                <a:spcPts val="0"/>
-              </a:spcBef>
-              <a:spcAft>
-                <a:spcPts val="0"/>
-              </a:spcAft>
-              <a:buNone/>
-            </a:pPr>
-            <a:r>
-              <a:rPr lang="en" sz="2000"/>
-              <a:t>  const cudaExtent volumeSize = make_cudaExtent(FGSIZE, FGSIZE,</a:t>
-            </a:r>
-            <a:endParaRPr sz="2000"/>
-          </a:p>
-          <a:p>
-            <a:pPr indent="457200" lvl="0" marL="6858000" rtl="0" algn="l">
-              <a:spcBef>
-                <a:spcPts val="0"/>
-              </a:spcBef>
-              <a:spcAft>
-                <a:spcPts val="0"/>
-              </a:spcAft>
-              <a:buNone/>
-            </a:pPr>
-            <a:r>
-              <a:rPr lang="en" sz="2000"/>
-              <a:t> FGSIZE);</a:t>
-            </a:r>
-            <a:endParaRPr sz="2000"/>
-          </a:p>
-          <a:p>
-            <a:pPr indent="0" lvl="0" marL="0" rtl="0" algn="l">
-              <a:spcBef>
-                <a:spcPts val="0"/>
-              </a:spcBef>
-              <a:spcAft>
-                <a:spcPts val="0"/>
-              </a:spcAft>
-              <a:buNone/>
-            </a:pPr>
-            <a:r>
-              <a:rPr lang="en" sz="2000"/>
-              <a:t>  cudaChannelFormatDesc channelDesc = cudaCreateChannelDesc&lt;float&gt;();</a:t>
-            </a:r>
-            <a:endParaRPr sz="2000"/>
-          </a:p>
-          <a:p>
-            <a:pPr indent="0" lvl="0" marL="0" rtl="0" algn="l">
-              <a:spcBef>
-                <a:spcPts val="0"/>
-              </a:spcBef>
-              <a:spcAft>
-                <a:spcPts val="0"/>
-              </a:spcAft>
-              <a:buNone/>
-            </a:pPr>
-            <a:r>
-              <a:rPr lang="en" sz="2000"/>
-              <a:t>  cudaMalloc3DArray(&amp;df_Array, &amp;channelDesc, volumeSize);</a:t>
-            </a:r>
-            <a:endParaRPr sz="2000"/>
-          </a:p>
-          <a:p>
-            <a:pPr indent="0" lvl="0" marL="0" rtl="0" algn="l">
-              <a:spcBef>
-                <a:spcPts val="0"/>
-              </a:spcBef>
-              <a:spcAft>
-                <a:spcPts val="0"/>
-              </a:spcAft>
-              <a:buNone/>
-            </a:pPr>
-            <a:r>
-              <a:rPr lang="en" sz="2000"/>
-              <a:t>  cudaMemcpy3DParms cpyParams={0};</a:t>
-            </a:r>
-            <a:endParaRPr sz="2000"/>
-          </a:p>
-          <a:p>
-            <a:pPr indent="0" lvl="0" marL="0" rtl="0" algn="l">
-              <a:spcBef>
-                <a:spcPts val="0"/>
-              </a:spcBef>
-              <a:spcAft>
-                <a:spcPts val="0"/>
-              </a:spcAft>
-              <a:buClr>
-                <a:schemeClr val="dk1"/>
-              </a:buClr>
-              <a:buSzPts val="1100"/>
-              <a:buFont typeface="Arial"/>
-              <a:buNone/>
-            </a:pPr>
-            <a:r>
-              <a:t/>
-            </a:r>
-            <a:endParaRPr/>
-          </a:p>
-          <a:p>
-            <a:pPr indent="0" lvl="0" marL="0" rtl="0" algn="l">
-              <a:spcBef>
-                <a:spcPts val="0"/>
-              </a:spcBef>
-              <a:spcAft>
-                <a:spcPts val="0"/>
-              </a:spcAft>
-              <a:buNone/>
-            </a:pPr>
-            <a:r>
-              <a:t/>
-            </a:r>
-            <a:endParaRPr/>
-          </a:p>
-        </p:txBody>
-      </p:sp>
-    </p:spTree>
-  </p:cSld>
-  <p:clrMapOvr>
-    <a:masterClrMapping/>
-  </p:clrMapOvr>
-</p:sld>
-</file>
-
-<file path=ppt/slides/slide15.xml><?xml version="1.0" encoding="utf-8"?>
-<p:sld xmlns:a="http://schemas.openxmlformats.org/drawingml/2006/main" xmlns:r="http://schemas.openxmlformats.org/officeDocument/2006/relationships" xmlns:mc="http://schemas.openxmlformats.org/markup-compatibility/2006" xmlns:mv="urn:schemas-microsoft-com:mac:vml" xmlns:p="http://schemas.openxmlformats.org/presentationml/2006/main" xmlns:c="http://schemas.openxmlformats.org/drawingml/2006/chart" xmlns:dgm="http://schemas.openxmlformats.org/drawingml/2006/diagram" xmlns:o="urn:schemas-microsoft-com:office:office" xmlns:v="urn:schemas-microsoft-com:vml" xmlns:pvml="urn:schemas-microsoft-com:office:powerpoint" xmlns:com="http://schemas.openxmlformats.org/drawingml/2006/compatibility" xmlns:p14="http://schemas.microsoft.com/office/powerpoint/2010/main" xmlns:p15="http://schemas.microsoft.com/office/powerpoint/2012/main" xmlns:ahyp="http://schemas.microsoft.com/office/drawing/2018/hyperlinkcolor">
-  <p:cSld>
-    <p:spTree>
-      <p:nvGrpSpPr>
-        <p:cNvPr id="151" name="Shape 151"/>
-        <p:cNvGrpSpPr/>
-        <p:nvPr/>
-      </p:nvGrpSpPr>
-      <p:grpSpPr>
-        <a:xfrm>
-          <a:off x="0" y="0"/>
-          <a:ext cx="0" cy="0"/>
-          <a:chOff x="0" y="0"/>
-          <a:chExt cx="0" cy="0"/>
-        </a:xfrm>
-      </p:grpSpPr>
-      <p:sp>
-        <p:nvSpPr>
-          <p:cNvPr id="152" name="Google Shape;152;p29"/>
-          <p:cNvSpPr txBox="1"/>
-          <p:nvPr/>
-        </p:nvSpPr>
-        <p:spPr>
-          <a:xfrm>
-            <a:off x="118400" y="589275"/>
-            <a:ext cx="8959800" cy="3263100"/>
-          </a:xfrm>
-          <a:prstGeom prst="rect">
-            <a:avLst/>
-          </a:prstGeom>
-          <a:solidFill>
-            <a:srgbClr val="FFE599"/>
-          </a:solidFill>
-          <a:ln>
-            <a:noFill/>
-          </a:ln>
-        </p:spPr>
-        <p:txBody>
-          <a:bodyPr anchorCtr="0" anchor="t" bIns="91425" lIns="91425" spcFirstLastPara="1" rIns="91425" wrap="square" tIns="91425">
-            <a:spAutoFit/>
-          </a:bodyPr>
-          <a:lstStyle/>
-          <a:p>
-            <a:pPr indent="0" lvl="0" marL="0" rtl="0" algn="l">
-              <a:spcBef>
-                <a:spcPts val="0"/>
-              </a:spcBef>
-              <a:spcAft>
-                <a:spcPts val="0"/>
-              </a:spcAft>
-              <a:buClr>
-                <a:schemeClr val="dk1"/>
-              </a:buClr>
-              <a:buSzPts val="1100"/>
-              <a:buFont typeface="Arial"/>
-              <a:buNone/>
-            </a:pPr>
-            <a:r>
-              <a:rPr lang="en" sz="2000">
-                <a:solidFill>
-                  <a:schemeClr val="dk1"/>
-                </a:solidFill>
-              </a:rPr>
-              <a:t>  </a:t>
-            </a:r>
-            <a:r>
-              <a:rPr lang="en" sz="2000">
-                <a:solidFill>
-                  <a:schemeClr val="dk1"/>
-                </a:solidFill>
-              </a:rPr>
-              <a:t>cpyParams.srcPtr = make_cudaPitchedPtr( (void*)df_h,</a:t>
-            </a:r>
-            <a:endParaRPr sz="2000">
-              <a:solidFill>
-                <a:schemeClr val="dk1"/>
-              </a:solidFill>
-            </a:endParaRPr>
-          </a:p>
-          <a:p>
-            <a:pPr indent="0" lvl="0" marL="0" rtl="0" algn="l">
-              <a:spcBef>
-                <a:spcPts val="0"/>
-              </a:spcBef>
-              <a:spcAft>
-                <a:spcPts val="0"/>
-              </a:spcAft>
-              <a:buNone/>
-            </a:pPr>
-            <a:r>
-              <a:rPr lang="en" sz="2000">
-                <a:solidFill>
-                  <a:schemeClr val="dk1"/>
-                </a:solidFill>
-              </a:rPr>
-              <a:t>           volumeSize.width*sizeof(float), </a:t>
-            </a:r>
-            <a:endParaRPr sz="2000">
-              <a:solidFill>
-                <a:schemeClr val="dk1"/>
-              </a:solidFill>
-            </a:endParaRPr>
-          </a:p>
-          <a:p>
-            <a:pPr indent="0" lvl="0" marL="0" rtl="0" algn="l">
-              <a:spcBef>
-                <a:spcPts val="0"/>
-              </a:spcBef>
-              <a:spcAft>
-                <a:spcPts val="0"/>
-              </a:spcAft>
-              <a:buClr>
-                <a:schemeClr val="dk1"/>
-              </a:buClr>
-              <a:buSzPts val="1100"/>
-              <a:buFont typeface="Arial"/>
-              <a:buNone/>
-            </a:pPr>
-            <a:r>
-              <a:rPr lang="en" sz="2000">
-                <a:solidFill>
-                  <a:schemeClr val="dk1"/>
-                </a:solidFill>
-              </a:rPr>
-              <a:t>            volumeSize.width, volumeSize.height);</a:t>
-            </a:r>
-            <a:endParaRPr sz="2000">
-              <a:solidFill>
-                <a:schemeClr val="dk1"/>
-              </a:solidFill>
-            </a:endParaRPr>
-          </a:p>
-          <a:p>
-            <a:pPr indent="0" lvl="0" marL="0" rtl="0" algn="l">
-              <a:spcBef>
-                <a:spcPts val="0"/>
-              </a:spcBef>
-              <a:spcAft>
-                <a:spcPts val="0"/>
-              </a:spcAft>
-              <a:buClr>
-                <a:schemeClr val="dk1"/>
-              </a:buClr>
-              <a:buSzPts val="1100"/>
-              <a:buFont typeface="Arial"/>
-              <a:buNone/>
-            </a:pPr>
-            <a:r>
-              <a:rPr lang="en" sz="2000">
-                <a:solidFill>
-                  <a:schemeClr val="dk1"/>
-                </a:solidFill>
-              </a:rPr>
-              <a:t>  cpyParams.dstArray = df_Array;</a:t>
-            </a:r>
-            <a:endParaRPr sz="2000">
-              <a:solidFill>
-                <a:schemeClr val="dk1"/>
-              </a:solidFill>
-            </a:endParaRPr>
-          </a:p>
-          <a:p>
-            <a:pPr indent="0" lvl="0" marL="0" rtl="0" algn="l">
-              <a:spcBef>
-                <a:spcPts val="0"/>
-              </a:spcBef>
-              <a:spcAft>
-                <a:spcPts val="0"/>
-              </a:spcAft>
-              <a:buNone/>
-            </a:pPr>
-            <a:r>
-              <a:rPr lang="en" sz="2000">
-                <a:solidFill>
-                  <a:schemeClr val="dk1"/>
-                </a:solidFill>
-              </a:rPr>
-              <a:t>  </a:t>
-            </a:r>
-            <a:endParaRPr sz="2000">
-              <a:solidFill>
-                <a:schemeClr val="dk1"/>
-              </a:solidFill>
-            </a:endParaRPr>
-          </a:p>
-          <a:p>
-            <a:pPr indent="0" lvl="0" marL="0" rtl="0" algn="l">
-              <a:spcBef>
-                <a:spcPts val="0"/>
-              </a:spcBef>
-              <a:spcAft>
-                <a:spcPts val="0"/>
-              </a:spcAft>
-              <a:buClr>
-                <a:schemeClr val="dk1"/>
-              </a:buClr>
-              <a:buSzPts val="1100"/>
-              <a:buFont typeface="Arial"/>
-              <a:buNone/>
-            </a:pPr>
-            <a:r>
-              <a:rPr lang="en" sz="2000">
-                <a:solidFill>
-                  <a:schemeClr val="dk1"/>
-                </a:solidFill>
-              </a:rPr>
-              <a:t>  cpyParams.extent = volumeSize;</a:t>
-            </a:r>
-            <a:endParaRPr sz="2000">
-              <a:solidFill>
-                <a:schemeClr val="dk1"/>
-              </a:solidFill>
-            </a:endParaRPr>
-          </a:p>
-          <a:p>
-            <a:pPr indent="0" lvl="0" marL="0" rtl="0" algn="l">
-              <a:spcBef>
-                <a:spcPts val="0"/>
-              </a:spcBef>
-              <a:spcAft>
-                <a:spcPts val="0"/>
-              </a:spcAft>
-              <a:buClr>
-                <a:schemeClr val="dk1"/>
-              </a:buClr>
-              <a:buSzPts val="1100"/>
-              <a:buFont typeface="Arial"/>
-              <a:buNone/>
-            </a:pPr>
-            <a:r>
-              <a:rPr lang="en" sz="2000">
-                <a:solidFill>
-                  <a:schemeClr val="dk1"/>
-                </a:solidFill>
-              </a:rPr>
-              <a:t>  cpyParams.kind = cudaMemcpyHostToDevice;</a:t>
-            </a:r>
-            <a:endParaRPr sz="2000">
-              <a:solidFill>
-                <a:schemeClr val="dk1"/>
-              </a:solidFill>
-            </a:endParaRPr>
-          </a:p>
-          <a:p>
-            <a:pPr indent="0" lvl="0" marL="0" rtl="0" algn="l">
-              <a:spcBef>
-                <a:spcPts val="0"/>
-              </a:spcBef>
-              <a:spcAft>
-                <a:spcPts val="0"/>
-              </a:spcAft>
-              <a:buNone/>
-            </a:pPr>
-            <a:r>
-              <a:rPr lang="en" sz="2000">
-                <a:solidFill>
-                  <a:schemeClr val="dk1"/>
-                </a:solidFill>
-              </a:rPr>
-              <a:t>  </a:t>
-            </a:r>
-            <a:endParaRPr sz="2000">
-              <a:solidFill>
-                <a:schemeClr val="dk1"/>
-              </a:solidFill>
-            </a:endParaRPr>
-          </a:p>
-          <a:p>
-            <a:pPr indent="0" lvl="0" marL="0" rtl="0" algn="l">
-              <a:spcBef>
-                <a:spcPts val="0"/>
-              </a:spcBef>
-              <a:spcAft>
-                <a:spcPts val="0"/>
-              </a:spcAft>
-              <a:buNone/>
-            </a:pPr>
-            <a:r>
-              <a:rPr lang="en" sz="2000">
-                <a:solidFill>
-                  <a:schemeClr val="dk1"/>
-                </a:solidFill>
-              </a:rPr>
-              <a:t>  cudaMemcpy3D(&amp;cpyParams);</a:t>
-            </a:r>
-            <a:endParaRPr sz="2000">
-              <a:solidFill>
-                <a:schemeClr val="dk1"/>
-              </a:solidFill>
-            </a:endParaRPr>
-          </a:p>
-          <a:p>
-            <a:pPr indent="0" lvl="0" marL="0" rtl="0" algn="l">
-              <a:spcBef>
-                <a:spcPts val="0"/>
-              </a:spcBef>
-              <a:spcAft>
-                <a:spcPts val="0"/>
-              </a:spcAft>
-              <a:buNone/>
-            </a:pPr>
-            <a:r>
-              <a:rPr lang="en" sz="2000">
-                <a:solidFill>
-                  <a:schemeClr val="dk1"/>
-                </a:solidFill>
-              </a:rPr>
-              <a:t>}</a:t>
-            </a:r>
-            <a:endParaRPr sz="2000">
-              <a:solidFill>
-                <a:schemeClr val="dk1"/>
-              </a:solidFill>
-            </a:endParaRPr>
           </a:p>
         </p:txBody>
       </p:sp>
@@ -11618,6 +11531,917 @@
         </p:nvSpPr>
         <p:spPr>
           <a:xfrm>
+            <a:off x="157875" y="95850"/>
+            <a:ext cx="8880900" cy="3879000"/>
+          </a:xfrm>
+          <a:prstGeom prst="rect">
+            <a:avLst/>
+          </a:prstGeom>
+          <a:solidFill>
+            <a:srgbClr val="FFE599"/>
+          </a:solidFill>
+          <a:ln cap="flat" cmpd="sng" w="9525">
+            <a:solidFill>
+              <a:schemeClr val="dk1"/>
+            </a:solidFill>
+            <a:prstDash val="solid"/>
+            <a:round/>
+            <a:headEnd len="sm" w="sm" type="none"/>
+            <a:tailEnd len="sm" w="sm" type="none"/>
+          </a:ln>
+        </p:spPr>
+        <p:txBody>
+          <a:bodyPr anchorCtr="0" anchor="t" bIns="91425" lIns="91425" spcFirstLastPara="1" rIns="91425" wrap="square" tIns="91425">
+            <a:spAutoFit/>
+          </a:bodyPr>
+          <a:lstStyle/>
+          <a:p>
+            <a:pPr indent="0" lvl="0" marL="0" rtl="0" algn="l">
+              <a:spcBef>
+                <a:spcPts val="0"/>
+              </a:spcBef>
+              <a:spcAft>
+                <a:spcPts val="0"/>
+              </a:spcAft>
+              <a:buClr>
+                <a:schemeClr val="dk1"/>
+              </a:buClr>
+              <a:buSzPts val="1100"/>
+              <a:buFont typeface="Arial"/>
+              <a:buNone/>
+            </a:pPr>
+            <a:r>
+              <a:rPr lang="en" sz="2000"/>
+              <a:t>  for (int iphi = 0; iphi &lt; 2 * COEF; ++iphi)</a:t>
+            </a:r>
+            <a:endParaRPr sz="2000"/>
+          </a:p>
+          <a:p>
+            <a:pPr indent="0" lvl="0" marL="0" rtl="0" algn="l">
+              <a:spcBef>
+                <a:spcPts val="0"/>
+              </a:spcBef>
+              <a:spcAft>
+                <a:spcPts val="0"/>
+              </a:spcAft>
+              <a:buClr>
+                <a:schemeClr val="dk1"/>
+              </a:buClr>
+              <a:buSzPts val="1100"/>
+              <a:buFont typeface="Arial"/>
+              <a:buNone/>
+            </a:pPr>
+            <a:r>
+              <a:rPr lang="en" sz="2000"/>
+              <a:t>    for (int ipsi = 0; ipsi &lt; COEF; ++ipsi, ++i) {</a:t>
+            </a:r>
+            <a:endParaRPr sz="2000"/>
+          </a:p>
+          <a:p>
+            <a:pPr indent="0" lvl="0" marL="0" rtl="0" algn="l">
+              <a:spcBef>
+                <a:spcPts val="0"/>
+              </a:spcBef>
+              <a:spcAft>
+                <a:spcPts val="0"/>
+              </a:spcAft>
+              <a:buClr>
+                <a:schemeClr val="dk1"/>
+              </a:buClr>
+              <a:buSzPts val="1100"/>
+              <a:buFont typeface="Arial"/>
+              <a:buNone/>
+            </a:pPr>
+            <a:r>
+              <a:rPr lang="en" sz="2000"/>
+              <a:t>      float phi = iphi * M_PI / COEF;</a:t>
+            </a:r>
+            <a:endParaRPr sz="2000"/>
+          </a:p>
+          <a:p>
+            <a:pPr indent="0" lvl="0" marL="0" rtl="0" algn="l">
+              <a:spcBef>
+                <a:spcPts val="0"/>
+              </a:spcBef>
+              <a:spcAft>
+                <a:spcPts val="0"/>
+              </a:spcAft>
+              <a:buClr>
+                <a:schemeClr val="dk1"/>
+              </a:buClr>
+              <a:buSzPts val="1100"/>
+              <a:buFont typeface="Arial"/>
+              <a:buNone/>
+            </a:pPr>
+            <a:r>
+              <a:rPr lang="en" sz="2000"/>
+              <a:t>      float psi = ipsi * M_PI / COEF;</a:t>
+            </a:r>
+            <a:endParaRPr sz="2000"/>
+          </a:p>
+          <a:p>
+            <a:pPr indent="0" lvl="0" marL="0" rtl="0" algn="l">
+              <a:spcBef>
+                <a:spcPts val="0"/>
+              </a:spcBef>
+              <a:spcAft>
+                <a:spcPts val="0"/>
+              </a:spcAft>
+              <a:buClr>
+                <a:schemeClr val="dk1"/>
+              </a:buClr>
+              <a:buSzPts val="1100"/>
+              <a:buFont typeface="Arial"/>
+              <a:buNone/>
+            </a:pPr>
+            <a:r>
+              <a:rPr lang="en" sz="2000"/>
+              <a:t>      temp_vert[i].x = RADIUS * sinf(psi) * cosf(phi);</a:t>
+            </a:r>
+            <a:endParaRPr sz="2000"/>
+          </a:p>
+          <a:p>
+            <a:pPr indent="0" lvl="0" marL="0" rtl="0" algn="l">
+              <a:spcBef>
+                <a:spcPts val="0"/>
+              </a:spcBef>
+              <a:spcAft>
+                <a:spcPts val="0"/>
+              </a:spcAft>
+              <a:buClr>
+                <a:schemeClr val="dk1"/>
+              </a:buClr>
+              <a:buSzPts val="1100"/>
+              <a:buFont typeface="Arial"/>
+              <a:buNone/>
+            </a:pPr>
+            <a:r>
+              <a:rPr lang="en" sz="2000"/>
+              <a:t>      temp_vert[i].y = RADIUS * sinf(psi) * sinf(phi);</a:t>
+            </a:r>
+            <a:endParaRPr sz="2000"/>
+          </a:p>
+          <a:p>
+            <a:pPr indent="0" lvl="0" marL="0" rtl="0" algn="l">
+              <a:spcBef>
+                <a:spcPts val="0"/>
+              </a:spcBef>
+              <a:spcAft>
+                <a:spcPts val="0"/>
+              </a:spcAft>
+              <a:buClr>
+                <a:schemeClr val="dk1"/>
+              </a:buClr>
+              <a:buSzPts val="1100"/>
+              <a:buFont typeface="Arial"/>
+              <a:buNone/>
+            </a:pPr>
+            <a:r>
+              <a:rPr lang="en" sz="2000"/>
+              <a:t>      temp_vert[i].z = RADIUS * cosf(psi);</a:t>
+            </a:r>
+            <a:endParaRPr sz="2000"/>
+          </a:p>
+          <a:p>
+            <a:pPr indent="0" lvl="0" marL="0" rtl="0" algn="l">
+              <a:spcBef>
+                <a:spcPts val="0"/>
+              </a:spcBef>
+              <a:spcAft>
+                <a:spcPts val="0"/>
+              </a:spcAft>
+              <a:buClr>
+                <a:schemeClr val="dk1"/>
+              </a:buClr>
+              <a:buSzPts val="1100"/>
+              <a:buFont typeface="Arial"/>
+              <a:buNone/>
+            </a:pPr>
+            <a:r>
+              <a:rPr lang="en" sz="2000"/>
+              <a:t>    }</a:t>
+            </a:r>
+            <a:endParaRPr sz="2000"/>
+          </a:p>
+          <a:p>
+            <a:pPr indent="0" lvl="0" marL="0" rtl="0" algn="l">
+              <a:spcBef>
+                <a:spcPts val="0"/>
+              </a:spcBef>
+              <a:spcAft>
+                <a:spcPts val="0"/>
+              </a:spcAft>
+              <a:buNone/>
+            </a:pPr>
+            <a:r>
+              <a:rPr lang="en" sz="2000"/>
+              <a:t>  </a:t>
+            </a:r>
+            <a:r>
+              <a:rPr b="1" lang="en" sz="2000"/>
+              <a:t>cudaMemcpyToSymbol</a:t>
+            </a:r>
+            <a:r>
+              <a:rPr lang="en" sz="2000"/>
+              <a:t>(vert, temp_vert, sizeof(Vertex) * VERTCOUNT, 0,</a:t>
+            </a:r>
+            <a:endParaRPr sz="2000"/>
+          </a:p>
+          <a:p>
+            <a:pPr indent="0" lvl="0" marL="0" rtl="0" algn="l">
+              <a:spcBef>
+                <a:spcPts val="0"/>
+              </a:spcBef>
+              <a:spcAft>
+                <a:spcPts val="0"/>
+              </a:spcAft>
+              <a:buClr>
+                <a:schemeClr val="dk1"/>
+              </a:buClr>
+              <a:buSzPts val="1100"/>
+              <a:buFont typeface="Arial"/>
+              <a:buNone/>
+            </a:pPr>
+            <a:r>
+              <a:rPr lang="en" sz="2000"/>
+              <a:t> 										            cudaMemcpyHostToDevice);</a:t>
+            </a:r>
+            <a:endParaRPr sz="2000"/>
+          </a:p>
+          <a:p>
+            <a:pPr indent="0" lvl="0" marL="0" rtl="0" algn="l">
+              <a:spcBef>
+                <a:spcPts val="0"/>
+              </a:spcBef>
+              <a:spcAft>
+                <a:spcPts val="0"/>
+              </a:spcAft>
+              <a:buClr>
+                <a:schemeClr val="dk1"/>
+              </a:buClr>
+              <a:buSzPts val="1100"/>
+              <a:buFont typeface="Arial"/>
+              <a:buNone/>
+            </a:pPr>
+            <a:r>
+              <a:rPr lang="en" sz="2000"/>
+              <a:t>free(temp_vert);</a:t>
+            </a:r>
+            <a:endParaRPr sz="2000"/>
+          </a:p>
+          <a:p>
+            <a:pPr indent="0" lvl="0" marL="0" rtl="0" algn="l">
+              <a:spcBef>
+                <a:spcPts val="0"/>
+              </a:spcBef>
+              <a:spcAft>
+                <a:spcPts val="0"/>
+              </a:spcAft>
+              <a:buNone/>
+            </a:pPr>
+            <a:r>
+              <a:rPr lang="en" sz="2000"/>
+              <a:t>}</a:t>
+            </a:r>
+            <a:endParaRPr/>
+          </a:p>
+        </p:txBody>
+      </p:sp>
+    </p:spTree>
+  </p:cSld>
+  <p:clrMapOvr>
+    <a:masterClrMapping/>
+  </p:clrMapOvr>
+</p:sld>
+</file>
+
+<file path=ppt/slides/slide17.xml><?xml version="1.0" encoding="utf-8"?>
+<p:sld xmlns:a="http://schemas.openxmlformats.org/drawingml/2006/main" xmlns:r="http://schemas.openxmlformats.org/officeDocument/2006/relationships" xmlns:mc="http://schemas.openxmlformats.org/markup-compatibility/2006" xmlns:mv="urn:schemas-microsoft-com:mac:vml" xmlns:p="http://schemas.openxmlformats.org/presentationml/2006/main" xmlns:c="http://schemas.openxmlformats.org/drawingml/2006/chart" xmlns:dgm="http://schemas.openxmlformats.org/drawingml/2006/diagram" xmlns:o="urn:schemas-microsoft-com:office:office" xmlns:v="urn:schemas-microsoft-com:vml" xmlns:pvml="urn:schemas-microsoft-com:office:powerpoint" xmlns:com="http://schemas.openxmlformats.org/drawingml/2006/compatibility" xmlns:p14="http://schemas.microsoft.com/office/powerpoint/2010/main" xmlns:p15="http://schemas.microsoft.com/office/powerpoint/2012/main" xmlns:ahyp="http://schemas.microsoft.com/office/drawing/2018/hyperlinkcolor">
+  <p:cSld>
+    <p:spTree>
+      <p:nvGrpSpPr>
+        <p:cNvPr id="161" name="Shape 161"/>
+        <p:cNvGrpSpPr/>
+        <p:nvPr/>
+      </p:nvGrpSpPr>
+      <p:grpSpPr>
+        <a:xfrm>
+          <a:off x="0" y="0"/>
+          <a:ext cx="0" cy="0"/>
+          <a:chOff x="0" y="0"/>
+          <a:chExt cx="0" cy="0"/>
+        </a:xfrm>
+      </p:grpSpPr>
+      <p:sp>
+        <p:nvSpPr>
+          <p:cNvPr id="162" name="Google Shape;162;p31"/>
+          <p:cNvSpPr txBox="1"/>
+          <p:nvPr/>
+        </p:nvSpPr>
+        <p:spPr>
+          <a:xfrm>
+            <a:off x="197250" y="184700"/>
+            <a:ext cx="8749500" cy="800400"/>
+          </a:xfrm>
+          <a:prstGeom prst="rect">
+            <a:avLst/>
+          </a:prstGeom>
+          <a:solidFill>
+            <a:srgbClr val="C9DAF8"/>
+          </a:solidFill>
+          <a:ln>
+            <a:noFill/>
+          </a:ln>
+        </p:spPr>
+        <p:txBody>
+          <a:bodyPr anchorCtr="0" anchor="t" bIns="91425" lIns="91425" spcFirstLastPara="1" rIns="91425" wrap="square" tIns="91425">
+            <a:spAutoFit/>
+          </a:bodyPr>
+          <a:lstStyle/>
+          <a:p>
+            <a:pPr indent="0" lvl="0" marL="0" rtl="0" algn="l">
+              <a:spcBef>
+                <a:spcPts val="0"/>
+              </a:spcBef>
+              <a:spcAft>
+                <a:spcPts val="0"/>
+              </a:spcAft>
+              <a:buNone/>
+            </a:pPr>
+            <a:r>
+              <a:rPr b="1" lang="en" sz="2000"/>
+              <a:t>Шаг 3: </a:t>
+            </a:r>
+            <a:r>
+              <a:rPr lang="en" sz="2000"/>
+              <a:t>сохранить значения тестовой функции/функций, определенные на первом шаге в текстуре</a:t>
+            </a:r>
+            <a:r>
+              <a:rPr lang="en" sz="2000"/>
+              <a:t>. </a:t>
+            </a:r>
+            <a:endParaRPr sz="2000"/>
+          </a:p>
+        </p:txBody>
+      </p:sp>
+      <p:sp>
+        <p:nvSpPr>
+          <p:cNvPr id="163" name="Google Shape;163;p31"/>
+          <p:cNvSpPr txBox="1"/>
+          <p:nvPr/>
+        </p:nvSpPr>
+        <p:spPr>
+          <a:xfrm>
+            <a:off x="65775" y="1197775"/>
+            <a:ext cx="9012600" cy="3078300"/>
+          </a:xfrm>
+          <a:prstGeom prst="rect">
+            <a:avLst/>
+          </a:prstGeom>
+          <a:solidFill>
+            <a:srgbClr val="FFE599"/>
+          </a:solidFill>
+          <a:ln>
+            <a:noFill/>
+          </a:ln>
+        </p:spPr>
+        <p:txBody>
+          <a:bodyPr anchorCtr="0" anchor="t" bIns="91425" lIns="91425" spcFirstLastPara="1" rIns="91425" wrap="square" tIns="91425">
+            <a:spAutoFit/>
+          </a:bodyPr>
+          <a:lstStyle/>
+          <a:p>
+            <a:pPr indent="0" lvl="0" marL="0" rtl="0" algn="l">
+              <a:spcBef>
+                <a:spcPts val="0"/>
+              </a:spcBef>
+              <a:spcAft>
+                <a:spcPts val="0"/>
+              </a:spcAft>
+              <a:buNone/>
+            </a:pPr>
+            <a:r>
+              <a:rPr lang="en" sz="2000"/>
+              <a:t>cudaArray* df_Array = 0;</a:t>
+            </a:r>
+            <a:endParaRPr sz="2000"/>
+          </a:p>
+          <a:p>
+            <a:pPr indent="0" lvl="0" marL="0" rtl="0" algn="l">
+              <a:spcBef>
+                <a:spcPts val="0"/>
+              </a:spcBef>
+              <a:spcAft>
+                <a:spcPts val="0"/>
+              </a:spcAft>
+              <a:buClr>
+                <a:schemeClr val="dk1"/>
+              </a:buClr>
+              <a:buSzPts val="1100"/>
+              <a:buFont typeface="Arial"/>
+              <a:buNone/>
+            </a:pPr>
+            <a:r>
+              <a:t/>
+            </a:r>
+            <a:endParaRPr sz="2000"/>
+          </a:p>
+          <a:p>
+            <a:pPr indent="0" lvl="0" marL="0" rtl="0" algn="l">
+              <a:spcBef>
+                <a:spcPts val="0"/>
+              </a:spcBef>
+              <a:spcAft>
+                <a:spcPts val="0"/>
+              </a:spcAft>
+              <a:buNone/>
+            </a:pPr>
+            <a:r>
+              <a:rPr b="1" lang="en" sz="2000"/>
+              <a:t>void  load_texture(float *df_h)</a:t>
+            </a:r>
+            <a:r>
+              <a:rPr lang="en" sz="2000"/>
+              <a:t>{</a:t>
+            </a:r>
+            <a:endParaRPr sz="2000"/>
+          </a:p>
+          <a:p>
+            <a:pPr indent="0" lvl="0" marL="0" rtl="0" algn="l">
+              <a:spcBef>
+                <a:spcPts val="0"/>
+              </a:spcBef>
+              <a:spcAft>
+                <a:spcPts val="0"/>
+              </a:spcAft>
+              <a:buNone/>
+            </a:pPr>
+            <a:r>
+              <a:rPr lang="en" sz="2000"/>
+              <a:t>  const cudaExtent volumeSize = make_cudaExtent(FGSIZE, FGSIZE,</a:t>
+            </a:r>
+            <a:endParaRPr sz="2000"/>
+          </a:p>
+          <a:p>
+            <a:pPr indent="457200" lvl="0" marL="6858000" rtl="0" algn="l">
+              <a:spcBef>
+                <a:spcPts val="0"/>
+              </a:spcBef>
+              <a:spcAft>
+                <a:spcPts val="0"/>
+              </a:spcAft>
+              <a:buNone/>
+            </a:pPr>
+            <a:r>
+              <a:rPr lang="en" sz="2000"/>
+              <a:t> FGSIZE);</a:t>
+            </a:r>
+            <a:endParaRPr sz="2000"/>
+          </a:p>
+          <a:p>
+            <a:pPr indent="0" lvl="0" marL="0" rtl="0" algn="l">
+              <a:spcBef>
+                <a:spcPts val="0"/>
+              </a:spcBef>
+              <a:spcAft>
+                <a:spcPts val="0"/>
+              </a:spcAft>
+              <a:buNone/>
+            </a:pPr>
+            <a:r>
+              <a:rPr lang="en" sz="2000"/>
+              <a:t>  cudaChannelFormatDesc channelDesc = cudaCreateChannelDesc&lt;float&gt;();</a:t>
+            </a:r>
+            <a:endParaRPr sz="2000"/>
+          </a:p>
+          <a:p>
+            <a:pPr indent="0" lvl="0" marL="0" rtl="0" algn="l">
+              <a:spcBef>
+                <a:spcPts val="0"/>
+              </a:spcBef>
+              <a:spcAft>
+                <a:spcPts val="0"/>
+              </a:spcAft>
+              <a:buNone/>
+            </a:pPr>
+            <a:r>
+              <a:rPr lang="en" sz="2000"/>
+              <a:t>  cudaMalloc3DArray(&amp;df_Array, &amp;channelDesc, volumeSize);</a:t>
+            </a:r>
+            <a:endParaRPr sz="2000"/>
+          </a:p>
+          <a:p>
+            <a:pPr indent="0" lvl="0" marL="0" rtl="0" algn="l">
+              <a:spcBef>
+                <a:spcPts val="0"/>
+              </a:spcBef>
+              <a:spcAft>
+                <a:spcPts val="0"/>
+              </a:spcAft>
+              <a:buNone/>
+            </a:pPr>
+            <a:r>
+              <a:rPr lang="en" sz="2000"/>
+              <a:t>  cudaMemcpy3DParms cpyParams={0};</a:t>
+            </a:r>
+            <a:endParaRPr sz="2000"/>
+          </a:p>
+          <a:p>
+            <a:pPr indent="0" lvl="0" marL="0" rtl="0" algn="l">
+              <a:spcBef>
+                <a:spcPts val="0"/>
+              </a:spcBef>
+              <a:spcAft>
+                <a:spcPts val="0"/>
+              </a:spcAft>
+              <a:buClr>
+                <a:schemeClr val="dk1"/>
+              </a:buClr>
+              <a:buSzPts val="1100"/>
+              <a:buFont typeface="Arial"/>
+              <a:buNone/>
+            </a:pPr>
+            <a:r>
+              <a:t/>
+            </a:r>
+            <a:endParaRPr/>
+          </a:p>
+          <a:p>
+            <a:pPr indent="0" lvl="0" marL="0" rtl="0" algn="l">
+              <a:spcBef>
+                <a:spcPts val="0"/>
+              </a:spcBef>
+              <a:spcAft>
+                <a:spcPts val="0"/>
+              </a:spcAft>
+              <a:buNone/>
+            </a:pPr>
+            <a:r>
+              <a:t/>
+            </a:r>
+            <a:endParaRPr/>
+          </a:p>
+        </p:txBody>
+      </p:sp>
+    </p:spTree>
+  </p:cSld>
+  <p:clrMapOvr>
+    <a:masterClrMapping/>
+  </p:clrMapOvr>
+</p:sld>
+</file>
+
+<file path=ppt/slides/slide18.xml><?xml version="1.0" encoding="utf-8"?>
+<p:sld xmlns:a="http://schemas.openxmlformats.org/drawingml/2006/main" xmlns:r="http://schemas.openxmlformats.org/officeDocument/2006/relationships" xmlns:mc="http://schemas.openxmlformats.org/markup-compatibility/2006" xmlns:mv="urn:schemas-microsoft-com:mac:vml" xmlns:p="http://schemas.openxmlformats.org/presentationml/2006/main" xmlns:c="http://schemas.openxmlformats.org/drawingml/2006/chart" xmlns:dgm="http://schemas.openxmlformats.org/drawingml/2006/diagram" xmlns:o="urn:schemas-microsoft-com:office:office" xmlns:v="urn:schemas-microsoft-com:vml" xmlns:pvml="urn:schemas-microsoft-com:office:powerpoint" xmlns:com="http://schemas.openxmlformats.org/drawingml/2006/compatibility" xmlns:p14="http://schemas.microsoft.com/office/powerpoint/2010/main" xmlns:p15="http://schemas.microsoft.com/office/powerpoint/2012/main" xmlns:ahyp="http://schemas.microsoft.com/office/drawing/2018/hyperlinkcolor">
+  <p:cSld>
+    <p:spTree>
+      <p:nvGrpSpPr>
+        <p:cNvPr id="167" name="Shape 167"/>
+        <p:cNvGrpSpPr/>
+        <p:nvPr/>
+      </p:nvGrpSpPr>
+      <p:grpSpPr>
+        <a:xfrm>
+          <a:off x="0" y="0"/>
+          <a:ext cx="0" cy="0"/>
+          <a:chOff x="0" y="0"/>
+          <a:chExt cx="0" cy="0"/>
+        </a:xfrm>
+      </p:grpSpPr>
+      <p:sp>
+        <p:nvSpPr>
+          <p:cNvPr id="168" name="Google Shape;168;p32"/>
+          <p:cNvSpPr txBox="1"/>
+          <p:nvPr/>
+        </p:nvSpPr>
+        <p:spPr>
+          <a:xfrm>
+            <a:off x="118400" y="589275"/>
+            <a:ext cx="8959800" cy="3263100"/>
+          </a:xfrm>
+          <a:prstGeom prst="rect">
+            <a:avLst/>
+          </a:prstGeom>
+          <a:solidFill>
+            <a:srgbClr val="FFE599"/>
+          </a:solidFill>
+          <a:ln>
+            <a:noFill/>
+          </a:ln>
+        </p:spPr>
+        <p:txBody>
+          <a:bodyPr anchorCtr="0" anchor="t" bIns="91425" lIns="91425" spcFirstLastPara="1" rIns="91425" wrap="square" tIns="91425">
+            <a:spAutoFit/>
+          </a:bodyPr>
+          <a:lstStyle/>
+          <a:p>
+            <a:pPr indent="0" lvl="0" marL="0" rtl="0" algn="l">
+              <a:spcBef>
+                <a:spcPts val="0"/>
+              </a:spcBef>
+              <a:spcAft>
+                <a:spcPts val="0"/>
+              </a:spcAft>
+              <a:buClr>
+                <a:schemeClr val="dk1"/>
+              </a:buClr>
+              <a:buSzPts val="1100"/>
+              <a:buFont typeface="Arial"/>
+              <a:buNone/>
+            </a:pPr>
+            <a:r>
+              <a:rPr lang="en" sz="2000">
+                <a:solidFill>
+                  <a:schemeClr val="dk1"/>
+                </a:solidFill>
+              </a:rPr>
+              <a:t>  </a:t>
+            </a:r>
+            <a:r>
+              <a:rPr lang="en" sz="2000">
+                <a:solidFill>
+                  <a:schemeClr val="dk1"/>
+                </a:solidFill>
+              </a:rPr>
+              <a:t>cpyParams.srcPtr = make_cudaPitchedPtr( (void*)df_h,</a:t>
+            </a:r>
+            <a:endParaRPr sz="2000">
+              <a:solidFill>
+                <a:schemeClr val="dk1"/>
+              </a:solidFill>
+            </a:endParaRPr>
+          </a:p>
+          <a:p>
+            <a:pPr indent="0" lvl="0" marL="0" rtl="0" algn="l">
+              <a:spcBef>
+                <a:spcPts val="0"/>
+              </a:spcBef>
+              <a:spcAft>
+                <a:spcPts val="0"/>
+              </a:spcAft>
+              <a:buNone/>
+            </a:pPr>
+            <a:r>
+              <a:rPr lang="en" sz="2000">
+                <a:solidFill>
+                  <a:schemeClr val="dk1"/>
+                </a:solidFill>
+              </a:rPr>
+              <a:t>           volumeSize.width*sizeof(float), </a:t>
+            </a:r>
+            <a:endParaRPr sz="2000">
+              <a:solidFill>
+                <a:schemeClr val="dk1"/>
+              </a:solidFill>
+            </a:endParaRPr>
+          </a:p>
+          <a:p>
+            <a:pPr indent="0" lvl="0" marL="0" rtl="0" algn="l">
+              <a:spcBef>
+                <a:spcPts val="0"/>
+              </a:spcBef>
+              <a:spcAft>
+                <a:spcPts val="0"/>
+              </a:spcAft>
+              <a:buClr>
+                <a:schemeClr val="dk1"/>
+              </a:buClr>
+              <a:buSzPts val="1100"/>
+              <a:buFont typeface="Arial"/>
+              <a:buNone/>
+            </a:pPr>
+            <a:r>
+              <a:rPr lang="en" sz="2000">
+                <a:solidFill>
+                  <a:schemeClr val="dk1"/>
+                </a:solidFill>
+              </a:rPr>
+              <a:t>            volumeSize.width, volumeSize.height);</a:t>
+            </a:r>
+            <a:endParaRPr sz="2000">
+              <a:solidFill>
+                <a:schemeClr val="dk1"/>
+              </a:solidFill>
+            </a:endParaRPr>
+          </a:p>
+          <a:p>
+            <a:pPr indent="0" lvl="0" marL="0" rtl="0" algn="l">
+              <a:spcBef>
+                <a:spcPts val="0"/>
+              </a:spcBef>
+              <a:spcAft>
+                <a:spcPts val="0"/>
+              </a:spcAft>
+              <a:buClr>
+                <a:schemeClr val="dk1"/>
+              </a:buClr>
+              <a:buSzPts val="1100"/>
+              <a:buFont typeface="Arial"/>
+              <a:buNone/>
+            </a:pPr>
+            <a:r>
+              <a:rPr lang="en" sz="2000">
+                <a:solidFill>
+                  <a:schemeClr val="dk1"/>
+                </a:solidFill>
+              </a:rPr>
+              <a:t>  cpyParams.dstArray = df_Array;</a:t>
+            </a:r>
+            <a:endParaRPr sz="2000">
+              <a:solidFill>
+                <a:schemeClr val="dk1"/>
+              </a:solidFill>
+            </a:endParaRPr>
+          </a:p>
+          <a:p>
+            <a:pPr indent="0" lvl="0" marL="0" rtl="0" algn="l">
+              <a:spcBef>
+                <a:spcPts val="0"/>
+              </a:spcBef>
+              <a:spcAft>
+                <a:spcPts val="0"/>
+              </a:spcAft>
+              <a:buNone/>
+            </a:pPr>
+            <a:r>
+              <a:rPr lang="en" sz="2000">
+                <a:solidFill>
+                  <a:schemeClr val="dk1"/>
+                </a:solidFill>
+              </a:rPr>
+              <a:t>  </a:t>
+            </a:r>
+            <a:endParaRPr sz="2000">
+              <a:solidFill>
+                <a:schemeClr val="dk1"/>
+              </a:solidFill>
+            </a:endParaRPr>
+          </a:p>
+          <a:p>
+            <a:pPr indent="0" lvl="0" marL="0" rtl="0" algn="l">
+              <a:spcBef>
+                <a:spcPts val="0"/>
+              </a:spcBef>
+              <a:spcAft>
+                <a:spcPts val="0"/>
+              </a:spcAft>
+              <a:buClr>
+                <a:schemeClr val="dk1"/>
+              </a:buClr>
+              <a:buSzPts val="1100"/>
+              <a:buFont typeface="Arial"/>
+              <a:buNone/>
+            </a:pPr>
+            <a:r>
+              <a:rPr lang="en" sz="2000">
+                <a:solidFill>
+                  <a:schemeClr val="dk1"/>
+                </a:solidFill>
+              </a:rPr>
+              <a:t>  cpyParams.extent = volumeSize;</a:t>
+            </a:r>
+            <a:endParaRPr sz="2000">
+              <a:solidFill>
+                <a:schemeClr val="dk1"/>
+              </a:solidFill>
+            </a:endParaRPr>
+          </a:p>
+          <a:p>
+            <a:pPr indent="0" lvl="0" marL="0" rtl="0" algn="l">
+              <a:spcBef>
+                <a:spcPts val="0"/>
+              </a:spcBef>
+              <a:spcAft>
+                <a:spcPts val="0"/>
+              </a:spcAft>
+              <a:buClr>
+                <a:schemeClr val="dk1"/>
+              </a:buClr>
+              <a:buSzPts val="1100"/>
+              <a:buFont typeface="Arial"/>
+              <a:buNone/>
+            </a:pPr>
+            <a:r>
+              <a:rPr lang="en" sz="2000">
+                <a:solidFill>
+                  <a:schemeClr val="dk1"/>
+                </a:solidFill>
+              </a:rPr>
+              <a:t>  cpyParams.kind = cudaMemcpyHostToDevice;</a:t>
+            </a:r>
+            <a:endParaRPr sz="2000">
+              <a:solidFill>
+                <a:schemeClr val="dk1"/>
+              </a:solidFill>
+            </a:endParaRPr>
+          </a:p>
+          <a:p>
+            <a:pPr indent="0" lvl="0" marL="0" rtl="0" algn="l">
+              <a:spcBef>
+                <a:spcPts val="0"/>
+              </a:spcBef>
+              <a:spcAft>
+                <a:spcPts val="0"/>
+              </a:spcAft>
+              <a:buNone/>
+            </a:pPr>
+            <a:r>
+              <a:rPr lang="en" sz="2000">
+                <a:solidFill>
+                  <a:schemeClr val="dk1"/>
+                </a:solidFill>
+              </a:rPr>
+              <a:t>  </a:t>
+            </a:r>
+            <a:endParaRPr sz="2000">
+              <a:solidFill>
+                <a:schemeClr val="dk1"/>
+              </a:solidFill>
+            </a:endParaRPr>
+          </a:p>
+          <a:p>
+            <a:pPr indent="0" lvl="0" marL="0" rtl="0" algn="l">
+              <a:spcBef>
+                <a:spcPts val="0"/>
+              </a:spcBef>
+              <a:spcAft>
+                <a:spcPts val="0"/>
+              </a:spcAft>
+              <a:buNone/>
+            </a:pPr>
+            <a:r>
+              <a:rPr lang="en" sz="2000">
+                <a:solidFill>
+                  <a:schemeClr val="dk1"/>
+                </a:solidFill>
+              </a:rPr>
+              <a:t>  cudaMemcpy3D(&amp;cpyParams);</a:t>
+            </a:r>
+            <a:endParaRPr sz="2000">
+              <a:solidFill>
+                <a:schemeClr val="dk1"/>
+              </a:solidFill>
+            </a:endParaRPr>
+          </a:p>
+          <a:p>
+            <a:pPr indent="0" lvl="0" marL="0" rtl="0" algn="l">
+              <a:spcBef>
+                <a:spcPts val="0"/>
+              </a:spcBef>
+              <a:spcAft>
+                <a:spcPts val="0"/>
+              </a:spcAft>
+              <a:buNone/>
+            </a:pPr>
+            <a:r>
+              <a:rPr lang="en" sz="2000">
+                <a:solidFill>
+                  <a:schemeClr val="dk1"/>
+                </a:solidFill>
+              </a:rPr>
+              <a:t>}</a:t>
+            </a:r>
+            <a:endParaRPr sz="2000">
+              <a:solidFill>
+                <a:schemeClr val="dk1"/>
+              </a:solidFill>
+            </a:endParaRPr>
+          </a:p>
+        </p:txBody>
+      </p:sp>
+    </p:spTree>
+  </p:cSld>
+  <p:clrMapOvr>
+    <a:masterClrMapping/>
+  </p:clrMapOvr>
+</p:sld>
+</file>
+
+<file path=ppt/slides/slide19.xml><?xml version="1.0" encoding="utf-8"?>
+<p:sld xmlns:a="http://schemas.openxmlformats.org/drawingml/2006/main" xmlns:r="http://schemas.openxmlformats.org/officeDocument/2006/relationships" xmlns:mc="http://schemas.openxmlformats.org/markup-compatibility/2006" xmlns:mv="urn:schemas-microsoft-com:mac:vml" xmlns:p="http://schemas.openxmlformats.org/presentationml/2006/main" xmlns:c="http://schemas.openxmlformats.org/drawingml/2006/chart" xmlns:dgm="http://schemas.openxmlformats.org/drawingml/2006/diagram" xmlns:o="urn:schemas-microsoft-com:office:office" xmlns:v="urn:schemas-microsoft-com:vml" xmlns:pvml="urn:schemas-microsoft-com:office:powerpoint" xmlns:com="http://schemas.openxmlformats.org/drawingml/2006/compatibility" xmlns:p14="http://schemas.microsoft.com/office/powerpoint/2010/main" xmlns:p15="http://schemas.microsoft.com/office/powerpoint/2012/main" xmlns:ahyp="http://schemas.microsoft.com/office/drawing/2018/hyperlinkcolor">
+  <p:cSld>
+    <p:spTree>
+      <p:nvGrpSpPr>
+        <p:cNvPr id="172" name="Shape 172"/>
+        <p:cNvGrpSpPr/>
+        <p:nvPr/>
+      </p:nvGrpSpPr>
+      <p:grpSpPr>
+        <a:xfrm>
+          <a:off x="0" y="0"/>
+          <a:ext cx="0" cy="0"/>
+          <a:chOff x="0" y="0"/>
+          <a:chExt cx="0" cy="0"/>
+        </a:xfrm>
+      </p:grpSpPr>
+      <p:sp>
+        <p:nvSpPr>
+          <p:cNvPr id="173" name="Google Shape;173;p33"/>
+          <p:cNvSpPr txBox="1"/>
+          <p:nvPr/>
+        </p:nvSpPr>
+        <p:spPr>
+          <a:xfrm>
             <a:off x="197250" y="184700"/>
             <a:ext cx="8749500" cy="492600"/>
           </a:xfrm>
@@ -11664,7 +12488,7 @@
       </p:sp>
       <p:sp>
         <p:nvSpPr>
-          <p:cNvPr id="158" name="Google Shape;158;p30"/>
+          <p:cNvPr id="174" name="Google Shape;174;p33"/>
           <p:cNvSpPr txBox="1"/>
           <p:nvPr/>
         </p:nvSpPr>
@@ -11904,12 +12728,65 @@
 </p:sld>
 </file>
 
-<file path=ppt/slides/slide17.xml><?xml version="1.0" encoding="utf-8"?>
+<file path=ppt/slides/slide2.xml><?xml version="1.0" encoding="utf-8"?>
 <p:sld xmlns:a="http://schemas.openxmlformats.org/drawingml/2006/main" xmlns:r="http://schemas.openxmlformats.org/officeDocument/2006/relationships" xmlns:mc="http://schemas.openxmlformats.org/markup-compatibility/2006" xmlns:mv="urn:schemas-microsoft-com:mac:vml" xmlns:p="http://schemas.openxmlformats.org/presentationml/2006/main" xmlns:c="http://schemas.openxmlformats.org/drawingml/2006/chart" xmlns:dgm="http://schemas.openxmlformats.org/drawingml/2006/diagram" xmlns:o="urn:schemas-microsoft-com:office:office" xmlns:v="urn:schemas-microsoft-com:vml" xmlns:pvml="urn:schemas-microsoft-com:office:powerpoint" xmlns:com="http://schemas.openxmlformats.org/drawingml/2006/compatibility" xmlns:p14="http://schemas.microsoft.com/office/powerpoint/2010/main" xmlns:p15="http://schemas.microsoft.com/office/powerpoint/2012/main" xmlns:ahyp="http://schemas.microsoft.com/office/drawing/2018/hyperlinkcolor">
   <p:cSld>
     <p:spTree>
       <p:nvGrpSpPr>
-        <p:cNvPr id="162" name="Shape 162"/>
+        <p:cNvPr id="70" name="Shape 70"/>
+        <p:cNvGrpSpPr/>
+        <p:nvPr/>
+      </p:nvGrpSpPr>
+      <p:grpSpPr>
+        <a:xfrm>
+          <a:off x="0" y="0"/>
+          <a:ext cx="0" cy="0"/>
+          <a:chOff x="0" y="0"/>
+          <a:chExt cx="0" cy="0"/>
+        </a:xfrm>
+      </p:grpSpPr>
+      <p:pic>
+        <p:nvPicPr>
+          <p:cNvPr id="71" name="Google Shape;71;p16"/>
+          <p:cNvPicPr preferRelativeResize="0"/>
+          <p:nvPr/>
+        </p:nvPicPr>
+        <p:blipFill>
+          <a:blip r:embed="rId3">
+            <a:alphaModFix/>
+          </a:blip>
+          <a:stretch>
+            <a:fillRect/>
+          </a:stretch>
+        </p:blipFill>
+        <p:spPr>
+          <a:xfrm>
+            <a:off x="685800" y="228600"/>
+            <a:ext cx="7217951" cy="4838700"/>
+          </a:xfrm>
+          <a:prstGeom prst="rect">
+            <a:avLst/>
+          </a:prstGeom>
+          <a:noFill/>
+          <a:ln>
+            <a:noFill/>
+          </a:ln>
+        </p:spPr>
+      </p:pic>
+    </p:spTree>
+  </p:cSld>
+  <p:clrMapOvr>
+    <a:masterClrMapping/>
+  </p:clrMapOvr>
+</p:sld>
+</file>
+
+<file path=ppt/slides/slide20.xml><?xml version="1.0" encoding="utf-8"?>
+<p:sld xmlns:a="http://schemas.openxmlformats.org/drawingml/2006/main" xmlns:r="http://schemas.openxmlformats.org/officeDocument/2006/relationships" xmlns:mc="http://schemas.openxmlformats.org/markup-compatibility/2006" xmlns:mv="urn:schemas-microsoft-com:mac:vml" xmlns:p="http://schemas.openxmlformats.org/presentationml/2006/main" xmlns:c="http://schemas.openxmlformats.org/drawingml/2006/chart" xmlns:dgm="http://schemas.openxmlformats.org/drawingml/2006/diagram" xmlns:o="urn:schemas-microsoft-com:office:office" xmlns:v="urn:schemas-microsoft-com:vml" xmlns:pvml="urn:schemas-microsoft-com:office:powerpoint" xmlns:com="http://schemas.openxmlformats.org/drawingml/2006/compatibility" xmlns:p14="http://schemas.microsoft.com/office/powerpoint/2010/main" xmlns:p15="http://schemas.microsoft.com/office/powerpoint/2012/main" xmlns:ahyp="http://schemas.microsoft.com/office/drawing/2018/hyperlinkcolor">
+  <p:cSld>
+    <p:spTree>
+      <p:nvGrpSpPr>
+        <p:cNvPr id="178" name="Shape 178"/>
         <p:cNvGrpSpPr/>
         <p:nvPr/>
       </p:nvGrpSpPr>
@@ -11923,7 +12800,7 @@
       </p:grpSpPr>
       <p:sp>
         <p:nvSpPr>
-          <p:cNvPr id="163" name="Google Shape;163;p31"/>
+          <p:cNvPr id="179" name="Google Shape;179;p34"/>
           <p:cNvSpPr txBox="1"/>
           <p:nvPr/>
         </p:nvSpPr>
@@ -11975,7 +12852,7 @@
       </p:sp>
       <p:sp>
         <p:nvSpPr>
-          <p:cNvPr id="164" name="Google Shape;164;p31"/>
+          <p:cNvPr id="180" name="Google Shape;180;p34"/>
           <p:cNvSpPr txBox="1"/>
           <p:nvPr/>
         </p:nvSpPr>
@@ -12252,12 +13129,12 @@
 </p:sld>
 </file>
 
-<file path=ppt/slides/slide18.xml><?xml version="1.0" encoding="utf-8"?>
+<file path=ppt/slides/slide21.xml><?xml version="1.0" encoding="utf-8"?>
 <p:sld xmlns:a="http://schemas.openxmlformats.org/drawingml/2006/main" xmlns:r="http://schemas.openxmlformats.org/officeDocument/2006/relationships" xmlns:mc="http://schemas.openxmlformats.org/markup-compatibility/2006" xmlns:mv="urn:schemas-microsoft-com:mac:vml" xmlns:p="http://schemas.openxmlformats.org/presentationml/2006/main" xmlns:c="http://schemas.openxmlformats.org/drawingml/2006/chart" xmlns:dgm="http://schemas.openxmlformats.org/drawingml/2006/diagram" xmlns:o="urn:schemas-microsoft-com:office:office" xmlns:v="urn:schemas-microsoft-com:vml" xmlns:pvml="urn:schemas-microsoft-com:office:powerpoint" xmlns:com="http://schemas.openxmlformats.org/drawingml/2006/compatibility" xmlns:p14="http://schemas.microsoft.com/office/powerpoint/2010/main" xmlns:p15="http://schemas.microsoft.com/office/powerpoint/2012/main" xmlns:ahyp="http://schemas.microsoft.com/office/drawing/2018/hyperlinkcolor">
   <p:cSld>
     <p:spTree>
       <p:nvGrpSpPr>
-        <p:cNvPr id="168" name="Shape 168"/>
+        <p:cNvPr id="184" name="Shape 184"/>
         <p:cNvGrpSpPr/>
         <p:nvPr/>
       </p:nvGrpSpPr>
@@ -12271,7 +13148,7 @@
       </p:grpSpPr>
       <p:sp>
         <p:nvSpPr>
-          <p:cNvPr id="169" name="Google Shape;169;p32"/>
+          <p:cNvPr id="185" name="Google Shape;185;p35"/>
           <p:cNvSpPr txBox="1"/>
           <p:nvPr/>
         </p:nvSpPr>
@@ -12501,7 +13378,7 @@
       </p:sp>
       <p:sp>
         <p:nvSpPr>
-          <p:cNvPr id="170" name="Google Shape;170;p32"/>
+          <p:cNvPr id="186" name="Google Shape;186;p35"/>
           <p:cNvSpPr txBox="1"/>
           <p:nvPr/>
         </p:nvSpPr>
@@ -12555,12 +13432,12 @@
 </p:sld>
 </file>
 
-<file path=ppt/slides/slide19.xml><?xml version="1.0" encoding="utf-8"?>
+<file path=ppt/slides/slide22.xml><?xml version="1.0" encoding="utf-8"?>
 <p:sld xmlns:a="http://schemas.openxmlformats.org/drawingml/2006/main" xmlns:r="http://schemas.openxmlformats.org/officeDocument/2006/relationships" xmlns:mc="http://schemas.openxmlformats.org/markup-compatibility/2006" xmlns:mv="urn:schemas-microsoft-com:mac:vml" xmlns:p="http://schemas.openxmlformats.org/presentationml/2006/main" xmlns:c="http://schemas.openxmlformats.org/drawingml/2006/chart" xmlns:dgm="http://schemas.openxmlformats.org/drawingml/2006/diagram" xmlns:o="urn:schemas-microsoft-com:office:office" xmlns:v="urn:schemas-microsoft-com:vml" xmlns:pvml="urn:schemas-microsoft-com:office:powerpoint" xmlns:com="http://schemas.openxmlformats.org/drawingml/2006/compatibility" xmlns:p14="http://schemas.microsoft.com/office/powerpoint/2010/main" xmlns:p15="http://schemas.microsoft.com/office/powerpoint/2012/main" xmlns:ahyp="http://schemas.microsoft.com/office/drawing/2018/hyperlinkcolor">
   <p:cSld>
     <p:spTree>
       <p:nvGrpSpPr>
-        <p:cNvPr id="174" name="Shape 174"/>
+        <p:cNvPr id="190" name="Shape 190"/>
         <p:cNvGrpSpPr/>
         <p:nvPr/>
       </p:nvGrpSpPr>
@@ -12574,7 +13451,7 @@
       </p:grpSpPr>
       <p:sp>
         <p:nvSpPr>
-          <p:cNvPr id="175" name="Google Shape;175;p33"/>
+          <p:cNvPr id="191" name="Google Shape;191;p36"/>
           <p:cNvSpPr txBox="1"/>
           <p:nvPr/>
         </p:nvSpPr>
@@ -12632,12 +13509,12 @@
 </p:sld>
 </file>
 
-<file path=ppt/slides/slide2.xml><?xml version="1.0" encoding="utf-8"?>
+<file path=ppt/slides/slide23.xml><?xml version="1.0" encoding="utf-8"?>
 <p:sld xmlns:a="http://schemas.openxmlformats.org/drawingml/2006/main" xmlns:r="http://schemas.openxmlformats.org/officeDocument/2006/relationships" xmlns:mc="http://schemas.openxmlformats.org/markup-compatibility/2006" xmlns:mv="urn:schemas-microsoft-com:mac:vml" xmlns:p="http://schemas.openxmlformats.org/presentationml/2006/main" xmlns:c="http://schemas.openxmlformats.org/drawingml/2006/chart" xmlns:dgm="http://schemas.openxmlformats.org/drawingml/2006/diagram" xmlns:o="urn:schemas-microsoft-com:office:office" xmlns:v="urn:schemas-microsoft-com:vml" xmlns:pvml="urn:schemas-microsoft-com:office:powerpoint" xmlns:com="http://schemas.openxmlformats.org/drawingml/2006/compatibility" xmlns:p14="http://schemas.microsoft.com/office/powerpoint/2010/main" xmlns:p15="http://schemas.microsoft.com/office/powerpoint/2012/main" xmlns:ahyp="http://schemas.microsoft.com/office/drawing/2018/hyperlinkcolor">
   <p:cSld>
     <p:spTree>
       <p:nvGrpSpPr>
-        <p:cNvPr id="70" name="Shape 70"/>
+        <p:cNvPr id="195" name="Shape 195"/>
         <p:cNvGrpSpPr/>
         <p:nvPr/>
       </p:nvGrpSpPr>
@@ -12651,433 +13528,7 @@
       </p:grpSpPr>
       <p:sp>
         <p:nvSpPr>
-          <p:cNvPr id="71" name="Google Shape;71;p16"/>
-          <p:cNvSpPr txBox="1"/>
-          <p:nvPr/>
-        </p:nvSpPr>
-        <p:spPr>
-          <a:xfrm>
-            <a:off x="184200" y="84925"/>
-            <a:ext cx="8631000" cy="4710000"/>
-          </a:xfrm>
-          <a:prstGeom prst="rect">
-            <a:avLst/>
-          </a:prstGeom>
-          <a:solidFill>
-            <a:srgbClr val="FFE599"/>
-          </a:solidFill>
-          <a:ln cap="flat" cmpd="sng" w="9525">
-            <a:solidFill>
-              <a:schemeClr val="dk1"/>
-            </a:solidFill>
-            <a:prstDash val="solid"/>
-            <a:round/>
-            <a:headEnd len="sm" w="sm" type="none"/>
-            <a:tailEnd len="sm" w="sm" type="none"/>
-          </a:ln>
-        </p:spPr>
-        <p:txBody>
-          <a:bodyPr anchorCtr="0" anchor="t" bIns="91425" lIns="91425" spcFirstLastPara="1" rIns="91425" wrap="square" tIns="91425">
-            <a:spAutoFit/>
-          </a:bodyPr>
-          <a:lstStyle/>
-          <a:p>
-            <a:pPr indent="0" lvl="0" marL="0" rtl="0" algn="l">
-              <a:spcBef>
-                <a:spcPts val="0"/>
-              </a:spcBef>
-              <a:spcAft>
-                <a:spcPts val="0"/>
-              </a:spcAft>
-              <a:buClr>
-                <a:schemeClr val="dk1"/>
-              </a:buClr>
-              <a:buSzPts val="1100"/>
-              <a:buFont typeface="Arial"/>
-              <a:buNone/>
-            </a:pPr>
-            <a:r>
-              <a:rPr lang="en" sz="2000"/>
-              <a:t>#define </a:t>
-            </a:r>
-            <a:r>
-              <a:rPr lang="en" sz="2000">
-                <a:solidFill>
-                  <a:schemeClr val="dk1"/>
-                </a:solidFill>
-              </a:rPr>
-              <a:t>CM_SIZE </a:t>
-            </a:r>
-            <a:r>
-              <a:rPr lang="en" sz="2000"/>
-              <a:t>4</a:t>
-            </a:r>
-            <a:endParaRPr sz="2000"/>
-          </a:p>
-          <a:p>
-            <a:pPr indent="0" lvl="0" marL="0" rtl="0" algn="l">
-              <a:spcBef>
-                <a:spcPts val="0"/>
-              </a:spcBef>
-              <a:spcAft>
-                <a:spcPts val="0"/>
-              </a:spcAft>
-              <a:buClr>
-                <a:schemeClr val="dk1"/>
-              </a:buClr>
-              <a:buSzPts val="1100"/>
-              <a:buFont typeface="Arial"/>
-              <a:buNone/>
-            </a:pPr>
-            <a:r>
-              <a:t/>
-            </a:r>
-            <a:endParaRPr sz="2000"/>
-          </a:p>
-          <a:p>
-            <a:pPr indent="0" lvl="0" marL="0" rtl="0" algn="l">
-              <a:spcBef>
-                <a:spcPts val="0"/>
-              </a:spcBef>
-              <a:spcAft>
-                <a:spcPts val="0"/>
-              </a:spcAft>
-              <a:buClr>
-                <a:schemeClr val="dk1"/>
-              </a:buClr>
-              <a:buSzPts val="1100"/>
-              <a:buFont typeface="Arial"/>
-              <a:buNone/>
-            </a:pPr>
-            <a:r>
-              <a:rPr b="1" lang="en" sz="2000"/>
-              <a:t>__constant__ int c_a[CM_SIZE];</a:t>
-            </a:r>
-            <a:endParaRPr b="1" sz="2000"/>
-          </a:p>
-          <a:p>
-            <a:pPr indent="0" lvl="0" marL="0" rtl="0" algn="l">
-              <a:spcBef>
-                <a:spcPts val="0"/>
-              </a:spcBef>
-              <a:spcAft>
-                <a:spcPts val="0"/>
-              </a:spcAft>
-              <a:buNone/>
-            </a:pPr>
-            <a:r>
-              <a:rPr lang="en"/>
-              <a:t>……………………………………………………………………………………..</a:t>
-            </a:r>
-            <a:endParaRPr/>
-          </a:p>
-          <a:p>
-            <a:pPr indent="0" lvl="0" marL="0" rtl="0" algn="l">
-              <a:spcBef>
-                <a:spcPts val="0"/>
-              </a:spcBef>
-              <a:spcAft>
-                <a:spcPts val="0"/>
-              </a:spcAft>
-              <a:buClr>
-                <a:schemeClr val="dk1"/>
-              </a:buClr>
-              <a:buSzPts val="1100"/>
-              <a:buFont typeface="Arial"/>
-              <a:buNone/>
-            </a:pPr>
-            <a:r>
-              <a:rPr lang="en" sz="2000"/>
-              <a:t>void hInitCM(int M){</a:t>
-            </a:r>
-            <a:endParaRPr sz="2000"/>
-          </a:p>
-          <a:p>
-            <a:pPr indent="0" lvl="0" marL="0" rtl="0" algn="l">
-              <a:spcBef>
-                <a:spcPts val="0"/>
-              </a:spcBef>
-              <a:spcAft>
-                <a:spcPts val="0"/>
-              </a:spcAft>
-              <a:buClr>
-                <a:schemeClr val="dk1"/>
-              </a:buClr>
-              <a:buSzPts val="1100"/>
-              <a:buFont typeface="Arial"/>
-              <a:buNone/>
-            </a:pPr>
-            <a:r>
-              <a:rPr lang="en" sz="2000"/>
-              <a:t>  int* tmp_a=(int*)calloc(M,sizeof(int));</a:t>
-            </a:r>
-            <a:endParaRPr sz="2000"/>
-          </a:p>
-          <a:p>
-            <a:pPr indent="0" lvl="0" marL="0" rtl="0" algn="l">
-              <a:spcBef>
-                <a:spcPts val="0"/>
-              </a:spcBef>
-              <a:spcAft>
-                <a:spcPts val="0"/>
-              </a:spcAft>
-              <a:buClr>
-                <a:schemeClr val="dk1"/>
-              </a:buClr>
-              <a:buSzPts val="1100"/>
-              <a:buFont typeface="Arial"/>
-              <a:buNone/>
-            </a:pPr>
-            <a:r>
-              <a:rPr lang="en" sz="2000"/>
-              <a:t>  </a:t>
-            </a:r>
-            <a:endParaRPr sz="2000"/>
-          </a:p>
-          <a:p>
-            <a:pPr indent="0" lvl="0" marL="0" rtl="0" algn="l">
-              <a:spcBef>
-                <a:spcPts val="0"/>
-              </a:spcBef>
-              <a:spcAft>
-                <a:spcPts val="0"/>
-              </a:spcAft>
-              <a:buClr>
-                <a:schemeClr val="dk1"/>
-              </a:buClr>
-              <a:buSzPts val="1100"/>
-              <a:buFont typeface="Arial"/>
-              <a:buNone/>
-            </a:pPr>
-            <a:r>
-              <a:rPr lang="en" sz="2000"/>
-              <a:t>  for(int i=0; i&lt;M;i++)</a:t>
-            </a:r>
-            <a:endParaRPr sz="2000"/>
-          </a:p>
-          <a:p>
-            <a:pPr indent="0" lvl="0" marL="0" rtl="0" algn="l">
-              <a:spcBef>
-                <a:spcPts val="0"/>
-              </a:spcBef>
-              <a:spcAft>
-                <a:spcPts val="0"/>
-              </a:spcAft>
-              <a:buClr>
-                <a:schemeClr val="dk1"/>
-              </a:buClr>
-              <a:buSzPts val="1100"/>
-              <a:buFont typeface="Arial"/>
-              <a:buNone/>
-            </a:pPr>
-            <a:r>
-              <a:rPr lang="en" sz="2000"/>
-              <a:t>    tmp_a[i]=-2*i;	  </a:t>
-            </a:r>
-            <a:endParaRPr sz="2000"/>
-          </a:p>
-          <a:p>
-            <a:pPr indent="0" lvl="0" marL="0" rtl="0" algn="l">
-              <a:spcBef>
-                <a:spcPts val="0"/>
-              </a:spcBef>
-              <a:spcAft>
-                <a:spcPts val="0"/>
-              </a:spcAft>
-              <a:buClr>
-                <a:schemeClr val="dk1"/>
-              </a:buClr>
-              <a:buSzPts val="1100"/>
-              <a:buFont typeface="Arial"/>
-              <a:buNone/>
-            </a:pPr>
-            <a:r>
-              <a:rPr lang="en" sz="2000"/>
-              <a:t>  </a:t>
-            </a:r>
-            <a:endParaRPr sz="2000"/>
-          </a:p>
-          <a:p>
-            <a:pPr indent="0" lvl="0" marL="0" rtl="0" algn="l">
-              <a:spcBef>
-                <a:spcPts val="0"/>
-              </a:spcBef>
-              <a:spcAft>
-                <a:spcPts val="0"/>
-              </a:spcAft>
-              <a:buNone/>
-            </a:pPr>
-            <a:r>
-              <a:rPr lang="en" sz="2000"/>
-              <a:t>  CUDA_CHECK_RETURN(</a:t>
-            </a:r>
-            <a:r>
-              <a:rPr b="1" lang="en" sz="2000"/>
-              <a:t>cudaMemcpyToSymbol</a:t>
-            </a:r>
-            <a:r>
-              <a:rPr lang="en" sz="2000"/>
-              <a:t>(c_a, tmp_a,</a:t>
-            </a:r>
-            <a:endParaRPr sz="2000"/>
-          </a:p>
-          <a:p>
-            <a:pPr indent="457200" lvl="0" marL="2286000" rtl="0" algn="l">
-              <a:spcBef>
-                <a:spcPts val="0"/>
-              </a:spcBef>
-              <a:spcAft>
-                <a:spcPts val="0"/>
-              </a:spcAft>
-              <a:buClr>
-                <a:schemeClr val="dk1"/>
-              </a:buClr>
-              <a:buSzPts val="1100"/>
-              <a:buFont typeface="Arial"/>
-              <a:buNone/>
-            </a:pPr>
-            <a:r>
-              <a:rPr lang="en" sz="2000"/>
-              <a:t>       M*sizeof(int), 0, cudaMemcpyHostToDevice));</a:t>
-            </a:r>
-            <a:endParaRPr sz="2000"/>
-          </a:p>
-          <a:p>
-            <a:pPr indent="0" lvl="0" marL="0" rtl="0" algn="l">
-              <a:spcBef>
-                <a:spcPts val="0"/>
-              </a:spcBef>
-              <a:spcAft>
-                <a:spcPts val="0"/>
-              </a:spcAft>
-              <a:buClr>
-                <a:schemeClr val="dk1"/>
-              </a:buClr>
-              <a:buSzPts val="1100"/>
-              <a:buFont typeface="Arial"/>
-              <a:buNone/>
-            </a:pPr>
-            <a:r>
-              <a:rPr lang="en" sz="2000"/>
-              <a:t>  </a:t>
-            </a:r>
-            <a:endParaRPr sz="2000"/>
-          </a:p>
-          <a:p>
-            <a:pPr indent="0" lvl="0" marL="0" rtl="0" algn="l">
-              <a:spcBef>
-                <a:spcPts val="0"/>
-              </a:spcBef>
-              <a:spcAft>
-                <a:spcPts val="0"/>
-              </a:spcAft>
-              <a:buClr>
-                <a:schemeClr val="dk1"/>
-              </a:buClr>
-              <a:buSzPts val="1100"/>
-              <a:buFont typeface="Arial"/>
-              <a:buNone/>
-            </a:pPr>
-            <a:r>
-              <a:rPr lang="en" sz="2000"/>
-              <a:t>  free(tmp_a);</a:t>
-            </a:r>
-            <a:endParaRPr sz="2000"/>
-          </a:p>
-          <a:p>
-            <a:pPr indent="0" lvl="0" marL="0" rtl="0" algn="l">
-              <a:spcBef>
-                <a:spcPts val="0"/>
-              </a:spcBef>
-              <a:spcAft>
-                <a:spcPts val="0"/>
-              </a:spcAft>
-              <a:buNone/>
-            </a:pPr>
-            <a:r>
-              <a:rPr lang="en" sz="2000"/>
-              <a:t>}</a:t>
-            </a:r>
-            <a:endParaRPr/>
-          </a:p>
-        </p:txBody>
-      </p:sp>
-      <p:sp>
-        <p:nvSpPr>
-          <p:cNvPr id="72" name="Google Shape;72;p16"/>
-          <p:cNvSpPr txBox="1"/>
-          <p:nvPr/>
-        </p:nvSpPr>
-        <p:spPr>
-          <a:xfrm>
-            <a:off x="6828400" y="395200"/>
-            <a:ext cx="1289400" cy="492600"/>
-          </a:xfrm>
-          <a:prstGeom prst="rect">
-            <a:avLst/>
-          </a:prstGeom>
-          <a:noFill/>
-          <a:ln cap="flat" cmpd="sng" w="9525">
-            <a:solidFill>
-              <a:schemeClr val="dk1"/>
-            </a:solidFill>
-            <a:prstDash val="solid"/>
-            <a:round/>
-            <a:headEnd len="sm" w="sm" type="none"/>
-            <a:tailEnd len="sm" w="sm" type="none"/>
-          </a:ln>
-        </p:spPr>
-        <p:txBody>
-          <a:bodyPr anchorCtr="0" anchor="t" bIns="91425" lIns="91425" spcFirstLastPara="1" rIns="91425" wrap="square" tIns="91425">
-            <a:spAutoFit/>
-          </a:bodyPr>
-          <a:lstStyle/>
-          <a:p>
-            <a:pPr indent="0" lvl="0" marL="0" rtl="0" algn="l">
-              <a:spcBef>
-                <a:spcPts val="0"/>
-              </a:spcBef>
-              <a:spcAft>
-                <a:spcPts val="0"/>
-              </a:spcAft>
-              <a:buNone/>
-            </a:pPr>
-            <a:r>
-              <a:rPr b="1" i="1" lang="en" sz="2000"/>
-              <a:t>lab6.cu</a:t>
-            </a:r>
-            <a:endParaRPr b="1" i="1" sz="2000"/>
-          </a:p>
-        </p:txBody>
-      </p:sp>
-    </p:spTree>
-  </p:cSld>
-  <p:clrMapOvr>
-    <a:masterClrMapping/>
-  </p:clrMapOvr>
-</p:sld>
-</file>
-
-<file path=ppt/slides/slide20.xml><?xml version="1.0" encoding="utf-8"?>
-<p:sld xmlns:a="http://schemas.openxmlformats.org/drawingml/2006/main" xmlns:r="http://schemas.openxmlformats.org/officeDocument/2006/relationships" xmlns:mc="http://schemas.openxmlformats.org/markup-compatibility/2006" xmlns:mv="urn:schemas-microsoft-com:mac:vml" xmlns:p="http://schemas.openxmlformats.org/presentationml/2006/main" xmlns:c="http://schemas.openxmlformats.org/drawingml/2006/chart" xmlns:dgm="http://schemas.openxmlformats.org/drawingml/2006/diagram" xmlns:o="urn:schemas-microsoft-com:office:office" xmlns:v="urn:schemas-microsoft-com:vml" xmlns:pvml="urn:schemas-microsoft-com:office:powerpoint" xmlns:com="http://schemas.openxmlformats.org/drawingml/2006/compatibility" xmlns:p14="http://schemas.microsoft.com/office/powerpoint/2010/main" xmlns:p15="http://schemas.microsoft.com/office/powerpoint/2012/main" xmlns:ahyp="http://schemas.microsoft.com/office/drawing/2018/hyperlinkcolor">
-  <p:cSld>
-    <p:spTree>
-      <p:nvGrpSpPr>
-        <p:cNvPr id="179" name="Shape 179"/>
-        <p:cNvGrpSpPr/>
-        <p:nvPr/>
-      </p:nvGrpSpPr>
-      <p:grpSpPr>
-        <a:xfrm>
-          <a:off x="0" y="0"/>
-          <a:ext cx="0" cy="0"/>
-          <a:chOff x="0" y="0"/>
-          <a:chExt cx="0" cy="0"/>
-        </a:xfrm>
-      </p:grpSpPr>
-      <p:sp>
-        <p:nvSpPr>
-          <p:cNvPr id="180" name="Google Shape;180;p34"/>
+          <p:cNvPr id="196" name="Google Shape;196;p37"/>
           <p:cNvSpPr txBox="1"/>
           <p:nvPr/>
         </p:nvSpPr>
@@ -13184,7 +13635,7 @@
       </p:sp>
       <p:sp>
         <p:nvSpPr>
-          <p:cNvPr id="181" name="Google Shape;181;p34"/>
+          <p:cNvPr id="197" name="Google Shape;197;p37"/>
           <p:cNvSpPr txBox="1"/>
           <p:nvPr/>
         </p:nvSpPr>
@@ -13242,12 +13693,12 @@
 </p:sld>
 </file>
 
-<file path=ppt/slides/slide21.xml><?xml version="1.0" encoding="utf-8"?>
+<file path=ppt/slides/slide24.xml><?xml version="1.0" encoding="utf-8"?>
 <p:sld xmlns:a="http://schemas.openxmlformats.org/drawingml/2006/main" xmlns:r="http://schemas.openxmlformats.org/officeDocument/2006/relationships" xmlns:mc="http://schemas.openxmlformats.org/markup-compatibility/2006" xmlns:mv="urn:schemas-microsoft-com:mac:vml" xmlns:p="http://schemas.openxmlformats.org/presentationml/2006/main" xmlns:c="http://schemas.openxmlformats.org/drawingml/2006/chart" xmlns:dgm="http://schemas.openxmlformats.org/drawingml/2006/diagram" xmlns:o="urn:schemas-microsoft-com:office:office" xmlns:v="urn:schemas-microsoft-com:vml" xmlns:pvml="urn:schemas-microsoft-com:office:powerpoint" xmlns:com="http://schemas.openxmlformats.org/drawingml/2006/compatibility" xmlns:p14="http://schemas.microsoft.com/office/powerpoint/2010/main" xmlns:p15="http://schemas.microsoft.com/office/powerpoint/2012/main" xmlns:ahyp="http://schemas.microsoft.com/office/drawing/2018/hyperlinkcolor">
   <p:cSld>
     <p:spTree>
       <p:nvGrpSpPr>
-        <p:cNvPr id="185" name="Shape 185"/>
+        <p:cNvPr id="201" name="Shape 201"/>
         <p:cNvGrpSpPr/>
         <p:nvPr/>
       </p:nvGrpSpPr>
@@ -13261,7 +13712,7 @@
       </p:grpSpPr>
       <p:sp>
         <p:nvSpPr>
-          <p:cNvPr id="186" name="Google Shape;186;p35"/>
+          <p:cNvPr id="202" name="Google Shape;202;p38"/>
           <p:cNvSpPr txBox="1"/>
           <p:nvPr/>
         </p:nvSpPr>
@@ -13324,7 +13775,7 @@
   <p:cSld>
     <p:spTree>
       <p:nvGrpSpPr>
-        <p:cNvPr id="76" name="Shape 76"/>
+        <p:cNvPr id="75" name="Shape 75"/>
         <p:cNvGrpSpPr/>
         <p:nvPr/>
       </p:nvGrpSpPr>
@@ -13336,6 +13787,34 @@
           <a:chExt cx="0" cy="0"/>
         </a:xfrm>
       </p:grpSpPr>
+      <p:pic>
+        <p:nvPicPr>
+          <p:cNvPr id="76" name="Google Shape;76;p17"/>
+          <p:cNvPicPr preferRelativeResize="0"/>
+          <p:nvPr/>
+        </p:nvPicPr>
+        <p:blipFill>
+          <a:blip r:embed="rId3">
+            <a:alphaModFix/>
+          </a:blip>
+          <a:stretch>
+            <a:fillRect/>
+          </a:stretch>
+        </p:blipFill>
+        <p:spPr>
+          <a:xfrm>
+            <a:off x="1524000" y="685800"/>
+            <a:ext cx="5889082" cy="4305995"/>
+          </a:xfrm>
+          <a:prstGeom prst="rect">
+            <a:avLst/>
+          </a:prstGeom>
+          <a:noFill/>
+          <a:ln>
+            <a:noFill/>
+          </a:ln>
+        </p:spPr>
+      </p:pic>
       <p:sp>
         <p:nvSpPr>
           <p:cNvPr id="77" name="Google Shape;77;p17"/>
@@ -13344,261 +13823,8 @@
         </p:nvSpPr>
         <p:spPr>
           <a:xfrm>
-            <a:off x="197400" y="502650"/>
-            <a:ext cx="8749200" cy="3478800"/>
-          </a:xfrm>
-          <a:prstGeom prst="rect">
-            <a:avLst/>
-          </a:prstGeom>
-          <a:solidFill>
-            <a:srgbClr val="FFE599"/>
-          </a:solidFill>
-          <a:ln cap="flat" cmpd="sng" w="9525">
-            <a:solidFill>
-              <a:schemeClr val="dk1"/>
-            </a:solidFill>
-            <a:prstDash val="solid"/>
-            <a:round/>
-            <a:headEnd len="sm" w="sm" type="none"/>
-            <a:tailEnd len="sm" w="sm" type="none"/>
-          </a:ln>
-        </p:spPr>
-        <p:txBody>
-          <a:bodyPr anchorCtr="0" anchor="t" bIns="91425" lIns="91425" spcFirstLastPara="1" rIns="91425" wrap="square" tIns="91425">
-            <a:spAutoFit/>
-          </a:bodyPr>
-          <a:lstStyle/>
-          <a:p>
-            <a:pPr indent="0" lvl="0" marL="0" rtl="0" algn="l">
-              <a:spcBef>
-                <a:spcPts val="0"/>
-              </a:spcBef>
-              <a:spcAft>
-                <a:spcPts val="0"/>
-              </a:spcAft>
-              <a:buClr>
-                <a:schemeClr val="dk1"/>
-              </a:buClr>
-              <a:buSzPts val="1100"/>
-              <a:buFont typeface="Arial"/>
-              <a:buNone/>
-            </a:pPr>
-            <a:r>
-              <a:rPr lang="en" sz="2000"/>
-              <a:t>__global__ void gTestCM(int* a, int* b){</a:t>
-            </a:r>
-            <a:endParaRPr sz="2000"/>
-          </a:p>
-          <a:p>
-            <a:pPr indent="0" lvl="0" marL="0" rtl="0" algn="l">
-              <a:spcBef>
-                <a:spcPts val="0"/>
-              </a:spcBef>
-              <a:spcAft>
-                <a:spcPts val="0"/>
-              </a:spcAft>
-              <a:buClr>
-                <a:schemeClr val="dk1"/>
-              </a:buClr>
-              <a:buSzPts val="1100"/>
-              <a:buFont typeface="Arial"/>
-              <a:buNone/>
-            </a:pPr>
-            <a:r>
-              <a:rPr lang="en" sz="2000"/>
-              <a:t> int i=threadIdx.x+blockIdx.x*blockDim.x;</a:t>
-            </a:r>
-            <a:endParaRPr sz="2000"/>
-          </a:p>
-          <a:p>
-            <a:pPr indent="0" lvl="0" marL="0" rtl="0" algn="l">
-              <a:spcBef>
-                <a:spcPts val="0"/>
-              </a:spcBef>
-              <a:spcAft>
-                <a:spcPts val="0"/>
-              </a:spcAft>
-              <a:buClr>
-                <a:schemeClr val="dk1"/>
-              </a:buClr>
-              <a:buSzPts val="1100"/>
-              <a:buFont typeface="Arial"/>
-              <a:buNone/>
-            </a:pPr>
-            <a:r>
-              <a:rPr lang="en" sz="2000"/>
-              <a:t> </a:t>
-            </a:r>
-            <a:endParaRPr sz="2000"/>
-          </a:p>
-          <a:p>
-            <a:pPr indent="0" lvl="0" marL="0" rtl="0" algn="l">
-              <a:spcBef>
-                <a:spcPts val="0"/>
-              </a:spcBef>
-              <a:spcAft>
-                <a:spcPts val="0"/>
-              </a:spcAft>
-              <a:buClr>
-                <a:schemeClr val="dk1"/>
-              </a:buClr>
-              <a:buSzPts val="1100"/>
-              <a:buFont typeface="Arial"/>
-              <a:buNone/>
-            </a:pPr>
-            <a:r>
-              <a:rPr lang="en" sz="2000"/>
-              <a:t>  b[i]=a[i]*c_a[i%CM_SIZE];</a:t>
-            </a:r>
-            <a:endParaRPr sz="2000"/>
-          </a:p>
-          <a:p>
-            <a:pPr indent="0" lvl="0" marL="0" rtl="0" algn="l">
-              <a:spcBef>
-                <a:spcPts val="0"/>
-              </a:spcBef>
-              <a:spcAft>
-                <a:spcPts val="0"/>
-              </a:spcAft>
-              <a:buClr>
-                <a:schemeClr val="dk1"/>
-              </a:buClr>
-              <a:buSzPts val="1100"/>
-              <a:buFont typeface="Arial"/>
-              <a:buNone/>
-            </a:pPr>
-            <a:r>
-              <a:rPr lang="en" sz="2000"/>
-              <a:t>}</a:t>
-            </a:r>
-            <a:endParaRPr sz="2000"/>
-          </a:p>
-          <a:p>
-            <a:pPr indent="0" lvl="0" marL="0" rtl="0" algn="l">
-              <a:spcBef>
-                <a:spcPts val="0"/>
-              </a:spcBef>
-              <a:spcAft>
-                <a:spcPts val="0"/>
-              </a:spcAft>
-              <a:buNone/>
-            </a:pPr>
-            <a:r>
-              <a:t/>
-            </a:r>
-            <a:endParaRPr/>
-          </a:p>
-          <a:p>
-            <a:pPr indent="0" lvl="0" marL="0" rtl="0" algn="l">
-              <a:spcBef>
-                <a:spcPts val="0"/>
-              </a:spcBef>
-              <a:spcAft>
-                <a:spcPts val="0"/>
-              </a:spcAft>
-              <a:buClr>
-                <a:schemeClr val="dk1"/>
-              </a:buClr>
-              <a:buSzPts val="1100"/>
-              <a:buFont typeface="Arial"/>
-              <a:buNone/>
-            </a:pPr>
-            <a:r>
-              <a:rPr lang="en" sz="2000"/>
-              <a:t>__global__ void gTestGM(int* a, int* b, int* c){</a:t>
-            </a:r>
-            <a:endParaRPr sz="2000"/>
-          </a:p>
-          <a:p>
-            <a:pPr indent="0" lvl="0" marL="0" rtl="0" algn="l">
-              <a:spcBef>
-                <a:spcPts val="0"/>
-              </a:spcBef>
-              <a:spcAft>
-                <a:spcPts val="0"/>
-              </a:spcAft>
-              <a:buClr>
-                <a:schemeClr val="dk1"/>
-              </a:buClr>
-              <a:buSzPts val="1100"/>
-              <a:buFont typeface="Arial"/>
-              <a:buNone/>
-            </a:pPr>
-            <a:r>
-              <a:rPr lang="en" sz="2000"/>
-              <a:t> int i=threadIdx.x+blockIdx.x*blockDim.x;</a:t>
-            </a:r>
-            <a:endParaRPr sz="2000"/>
-          </a:p>
-          <a:p>
-            <a:pPr indent="0" lvl="0" marL="0" rtl="0" algn="l">
-              <a:spcBef>
-                <a:spcPts val="0"/>
-              </a:spcBef>
-              <a:spcAft>
-                <a:spcPts val="0"/>
-              </a:spcAft>
-              <a:buClr>
-                <a:schemeClr val="dk1"/>
-              </a:buClr>
-              <a:buSzPts val="1100"/>
-              <a:buFont typeface="Arial"/>
-              <a:buNone/>
-            </a:pPr>
-            <a:r>
-              <a:t/>
-            </a:r>
-            <a:endParaRPr sz="2000"/>
-          </a:p>
-          <a:p>
-            <a:pPr indent="0" lvl="0" marL="0" rtl="0" algn="l">
-              <a:spcBef>
-                <a:spcPts val="0"/>
-              </a:spcBef>
-              <a:spcAft>
-                <a:spcPts val="0"/>
-              </a:spcAft>
-              <a:buClr>
-                <a:schemeClr val="dk1"/>
-              </a:buClr>
-              <a:buSzPts val="1100"/>
-              <a:buFont typeface="Arial"/>
-              <a:buNone/>
-            </a:pPr>
-            <a:r>
-              <a:rPr lang="en" sz="2000"/>
-              <a:t> b[i]=a[i]*c[i%CM_SIZE];</a:t>
-            </a:r>
-            <a:endParaRPr sz="2000"/>
-          </a:p>
-          <a:p>
-            <a:pPr indent="0" lvl="0" marL="0" rtl="0" algn="l">
-              <a:spcBef>
-                <a:spcPts val="0"/>
-              </a:spcBef>
-              <a:spcAft>
-                <a:spcPts val="0"/>
-              </a:spcAft>
-              <a:buNone/>
-            </a:pPr>
-            <a:r>
-              <a:rPr lang="en" sz="2000"/>
-              <a:t>}</a:t>
-            </a:r>
-            <a:endParaRPr/>
-          </a:p>
-        </p:txBody>
-      </p:sp>
-      <p:sp>
-        <p:nvSpPr>
-          <p:cNvPr id="78" name="Google Shape;78;p17"/>
-          <p:cNvSpPr txBox="1"/>
-          <p:nvPr/>
-        </p:nvSpPr>
-        <p:spPr>
-          <a:xfrm>
-            <a:off x="6828400" y="852400"/>
-            <a:ext cx="1289400" cy="492600"/>
+            <a:off x="51375" y="143200"/>
+            <a:ext cx="9030900" cy="413400"/>
           </a:xfrm>
           <a:prstGeom prst="rect">
             <a:avLst/>
@@ -13616,7 +13842,7 @@
         </p:spPr>
         <p:txBody>
           <a:bodyPr anchorCtr="0" anchor="t" bIns="91425" lIns="91425" spcFirstLastPara="1" rIns="91425" wrap="square" tIns="91425">
-            <a:spAutoFit/>
+            <a:noAutofit/>
           </a:bodyPr>
           <a:lstStyle/>
           <a:p>
@@ -13630,10 +13856,10 @@
               <a:buNone/>
             </a:pPr>
             <a:r>
-              <a:rPr b="1" i="1" lang="en" sz="2000"/>
-              <a:t>lab6.cu</a:t>
-            </a:r>
-            <a:endParaRPr b="1" i="1" sz="2000"/>
+              <a:rPr i="1" lang="en" sz="1600"/>
+              <a:t>https://www.researchgate.net/figure/Memory-Hierarchy-in-the-NVIDIA-GPUs_fig2_228345757</a:t>
+            </a:r>
+            <a:endParaRPr i="1" sz="1600"/>
           </a:p>
         </p:txBody>
       </p:sp>
@@ -13650,7 +13876,7 @@
   <p:cSld>
     <p:spTree>
       <p:nvGrpSpPr>
-        <p:cNvPr id="82" name="Shape 82"/>
+        <p:cNvPr id="81" name="Shape 81"/>
         <p:cNvGrpSpPr/>
         <p:nvPr/>
       </p:nvGrpSpPr>
@@ -13664,19 +13890,376 @@
       </p:grpSpPr>
       <p:sp>
         <p:nvSpPr>
+          <p:cNvPr id="82" name="Google Shape;82;p18"/>
+          <p:cNvSpPr txBox="1"/>
+          <p:nvPr/>
+        </p:nvSpPr>
+        <p:spPr>
+          <a:xfrm>
+            <a:off x="60500" y="102875"/>
+            <a:ext cx="8965800" cy="4770300"/>
+          </a:xfrm>
+          <a:prstGeom prst="rect">
+            <a:avLst/>
+          </a:prstGeom>
+          <a:solidFill>
+            <a:srgbClr val="D0E0E3"/>
+          </a:solidFill>
+          <a:ln>
+            <a:noFill/>
+          </a:ln>
+        </p:spPr>
+        <p:txBody>
+          <a:bodyPr anchorCtr="0" anchor="t" bIns="91425" lIns="91425" spcFirstLastPara="1" rIns="91425" wrap="square" tIns="91425">
+            <a:noAutofit/>
+          </a:bodyPr>
+          <a:lstStyle/>
+          <a:p>
+            <a:pPr indent="0" lvl="0" marL="0" rtl="0" algn="l">
+              <a:spcBef>
+                <a:spcPts val="0"/>
+              </a:spcBef>
+              <a:spcAft>
+                <a:spcPts val="0"/>
+              </a:spcAft>
+              <a:buClr>
+                <a:schemeClr val="dk1"/>
+              </a:buClr>
+              <a:buSzPts val="1100"/>
+              <a:buFont typeface="Arial"/>
+              <a:buNone/>
+            </a:pPr>
+            <a:r>
+              <a:rPr lang="en" sz="2000"/>
+              <a:t>#include &lt;stdio.h&gt;</a:t>
+            </a:r>
+            <a:endParaRPr sz="2000"/>
+          </a:p>
+          <a:p>
+            <a:pPr indent="0" lvl="0" marL="0" rtl="0" algn="l">
+              <a:spcBef>
+                <a:spcPts val="0"/>
+              </a:spcBef>
+              <a:spcAft>
+                <a:spcPts val="0"/>
+              </a:spcAft>
+              <a:buClr>
+                <a:schemeClr val="dk1"/>
+              </a:buClr>
+              <a:buSzPts val="1100"/>
+              <a:buFont typeface="Arial"/>
+              <a:buNone/>
+            </a:pPr>
+            <a:r>
+              <a:rPr lang="en" sz="2000"/>
+              <a:t>#define ARRAY_SIZE 2048</a:t>
+            </a:r>
+            <a:endParaRPr sz="2000"/>
+          </a:p>
+          <a:p>
+            <a:pPr indent="0" lvl="0" marL="0" rtl="0" algn="l">
+              <a:spcBef>
+                <a:spcPts val="0"/>
+              </a:spcBef>
+              <a:spcAft>
+                <a:spcPts val="0"/>
+              </a:spcAft>
+              <a:buClr>
+                <a:schemeClr val="dk1"/>
+              </a:buClr>
+              <a:buSzPts val="1100"/>
+              <a:buFont typeface="Arial"/>
+              <a:buNone/>
+            </a:pPr>
+            <a:r>
+              <a:rPr lang="en" sz="2000"/>
+              <a:t>#define THREADS_PER_BLOCK 64</a:t>
+            </a:r>
+            <a:endParaRPr sz="2000"/>
+          </a:p>
+          <a:p>
+            <a:pPr indent="0" lvl="0" marL="0" rtl="0" algn="l">
+              <a:spcBef>
+                <a:spcPts val="0"/>
+              </a:spcBef>
+              <a:spcAft>
+                <a:spcPts val="0"/>
+              </a:spcAft>
+              <a:buClr>
+                <a:schemeClr val="dk1"/>
+              </a:buClr>
+              <a:buSzPts val="1100"/>
+              <a:buFont typeface="Arial"/>
+              <a:buNone/>
+            </a:pPr>
+            <a:r>
+              <a:t/>
+            </a:r>
+            <a:endParaRPr sz="2000"/>
+          </a:p>
+          <a:p>
+            <a:pPr indent="0" lvl="0" marL="0" rtl="0" algn="l">
+              <a:spcBef>
+                <a:spcPts val="0"/>
+              </a:spcBef>
+              <a:spcAft>
+                <a:spcPts val="0"/>
+              </a:spcAft>
+              <a:buClr>
+                <a:schemeClr val="dk1"/>
+              </a:buClr>
+              <a:buSzPts val="1100"/>
+              <a:buFont typeface="Arial"/>
+              <a:buNone/>
+            </a:pPr>
+            <a:r>
+              <a:rPr lang="en" sz="2000"/>
+              <a:t>__device__ float A[ARRAY_SIZE];</a:t>
+            </a:r>
+            <a:endParaRPr sz="2000"/>
+          </a:p>
+          <a:p>
+            <a:pPr indent="0" lvl="0" marL="0" rtl="0" algn="l">
+              <a:spcBef>
+                <a:spcPts val="0"/>
+              </a:spcBef>
+              <a:spcAft>
+                <a:spcPts val="0"/>
+              </a:spcAft>
+              <a:buClr>
+                <a:schemeClr val="dk1"/>
+              </a:buClr>
+              <a:buSzPts val="1100"/>
+              <a:buFont typeface="Arial"/>
+              <a:buNone/>
+            </a:pPr>
+            <a:r>
+              <a:rPr lang="en" sz="2000"/>
+              <a:t>__device__ float B[ARRAY_SIZE/THREADS_PER_BLOCK];</a:t>
+            </a:r>
+            <a:endParaRPr sz="2000"/>
+          </a:p>
+          <a:p>
+            <a:pPr indent="0" lvl="0" marL="0" rtl="0" algn="l">
+              <a:spcBef>
+                <a:spcPts val="0"/>
+              </a:spcBef>
+              <a:spcAft>
+                <a:spcPts val="0"/>
+              </a:spcAft>
+              <a:buClr>
+                <a:schemeClr val="dk1"/>
+              </a:buClr>
+              <a:buSzPts val="1100"/>
+              <a:buFont typeface="Arial"/>
+              <a:buNone/>
+            </a:pPr>
+            <a:r>
+              <a:rPr b="1" lang="en" sz="2000"/>
+              <a:t>__constant__ float C[ARRAY_SIZE/THREADS_PER_BLOCK];</a:t>
+            </a:r>
+            <a:endParaRPr b="1" sz="2000"/>
+          </a:p>
+          <a:p>
+            <a:pPr indent="0" lvl="0" marL="0" rtl="0" algn="l">
+              <a:spcBef>
+                <a:spcPts val="0"/>
+              </a:spcBef>
+              <a:spcAft>
+                <a:spcPts val="0"/>
+              </a:spcAft>
+              <a:buClr>
+                <a:schemeClr val="dk1"/>
+              </a:buClr>
+              <a:buSzPts val="1100"/>
+              <a:buFont typeface="Arial"/>
+              <a:buNone/>
+            </a:pPr>
+            <a:r>
+              <a:t/>
+            </a:r>
+            <a:endParaRPr b="1" sz="2000"/>
+          </a:p>
+          <a:p>
+            <a:pPr indent="0" lvl="0" marL="0" rtl="0" algn="l">
+              <a:spcBef>
+                <a:spcPts val="0"/>
+              </a:spcBef>
+              <a:spcAft>
+                <a:spcPts val="0"/>
+              </a:spcAft>
+              <a:buClr>
+                <a:schemeClr val="dk1"/>
+              </a:buClr>
+              <a:buSzPts val="1100"/>
+              <a:buFont typeface="Arial"/>
+              <a:buNone/>
+            </a:pPr>
+            <a:r>
+              <a:rPr lang="en" sz="2000"/>
+              <a:t>__global__ void gOut();</a:t>
+            </a:r>
+            <a:endParaRPr sz="2000"/>
+          </a:p>
+          <a:p>
+            <a:pPr indent="0" lvl="0" marL="0" rtl="0" algn="l">
+              <a:spcBef>
+                <a:spcPts val="0"/>
+              </a:spcBef>
+              <a:spcAft>
+                <a:spcPts val="0"/>
+              </a:spcAft>
+              <a:buClr>
+                <a:schemeClr val="dk1"/>
+              </a:buClr>
+              <a:buSzPts val="1100"/>
+              <a:buFont typeface="Arial"/>
+              <a:buNone/>
+            </a:pPr>
+            <a:r>
+              <a:t/>
+            </a:r>
+            <a:endParaRPr sz="2000"/>
+          </a:p>
+          <a:p>
+            <a:pPr indent="0" lvl="0" marL="0" rtl="0" algn="l">
+              <a:spcBef>
+                <a:spcPts val="0"/>
+              </a:spcBef>
+              <a:spcAft>
+                <a:spcPts val="0"/>
+              </a:spcAft>
+              <a:buClr>
+                <a:schemeClr val="dk1"/>
+              </a:buClr>
+              <a:buSzPts val="1100"/>
+              <a:buFont typeface="Arial"/>
+              <a:buNone/>
+            </a:pPr>
+            <a:r>
+              <a:rPr lang="en" sz="2000"/>
+              <a:t>__global__ void gInit(){</a:t>
+            </a:r>
+            <a:endParaRPr sz="2000"/>
+          </a:p>
+          <a:p>
+            <a:pPr indent="0" lvl="0" marL="0" rtl="0" algn="l">
+              <a:spcBef>
+                <a:spcPts val="0"/>
+              </a:spcBef>
+              <a:spcAft>
+                <a:spcPts val="0"/>
+              </a:spcAft>
+              <a:buClr>
+                <a:schemeClr val="dk1"/>
+              </a:buClr>
+              <a:buSzPts val="1100"/>
+              <a:buFont typeface="Arial"/>
+              <a:buNone/>
+            </a:pPr>
+            <a:r>
+              <a:rPr lang="en" sz="2000"/>
+              <a:t>    int i= threadIdx.x+blockIdx.x*blockDim.x;</a:t>
+            </a:r>
+            <a:endParaRPr sz="2000"/>
+          </a:p>
+          <a:p>
+            <a:pPr indent="0" lvl="0" marL="0" rtl="0" algn="l">
+              <a:spcBef>
+                <a:spcPts val="0"/>
+              </a:spcBef>
+              <a:spcAft>
+                <a:spcPts val="0"/>
+              </a:spcAft>
+              <a:buClr>
+                <a:schemeClr val="dk1"/>
+              </a:buClr>
+              <a:buSzPts val="1100"/>
+              <a:buFont typeface="Arial"/>
+              <a:buNone/>
+            </a:pPr>
+            <a:r>
+              <a:rPr lang="en" sz="2000"/>
+              <a:t>    A[i]=(float)i;</a:t>
+            </a:r>
+            <a:endParaRPr sz="2000"/>
+          </a:p>
+          <a:p>
+            <a:pPr indent="0" lvl="0" marL="0" rtl="0" algn="l">
+              <a:spcBef>
+                <a:spcPts val="0"/>
+              </a:spcBef>
+              <a:spcAft>
+                <a:spcPts val="0"/>
+              </a:spcAft>
+              <a:buClr>
+                <a:schemeClr val="dk1"/>
+              </a:buClr>
+              <a:buSzPts val="1100"/>
+              <a:buFont typeface="Arial"/>
+              <a:buNone/>
+            </a:pPr>
+            <a:r>
+              <a:rPr lang="en" sz="2000"/>
+              <a:t>    B[blockIdx.x]=(float)blockIdx.x;</a:t>
+            </a:r>
+            <a:endParaRPr sz="2000"/>
+          </a:p>
+          <a:p>
+            <a:pPr indent="0" lvl="0" marL="0" rtl="0" algn="l">
+              <a:spcBef>
+                <a:spcPts val="0"/>
+              </a:spcBef>
+              <a:spcAft>
+                <a:spcPts val="0"/>
+              </a:spcAft>
+              <a:buClr>
+                <a:schemeClr val="dk1"/>
+              </a:buClr>
+              <a:buSzPts val="1100"/>
+              <a:buFont typeface="Arial"/>
+              <a:buNone/>
+            </a:pPr>
+            <a:r>
+              <a:rPr lang="en" sz="2000"/>
+              <a:t>}</a:t>
+            </a:r>
+            <a:endParaRPr sz="2000"/>
+          </a:p>
+          <a:p>
+            <a:pPr indent="0" lvl="0" marL="0" rtl="0" algn="l">
+              <a:spcBef>
+                <a:spcPts val="0"/>
+              </a:spcBef>
+              <a:spcAft>
+                <a:spcPts val="0"/>
+              </a:spcAft>
+              <a:buNone/>
+            </a:pPr>
+            <a:r>
+              <a:t/>
+            </a:r>
+            <a:endParaRPr sz="2000"/>
+          </a:p>
+        </p:txBody>
+      </p:sp>
+      <p:sp>
+        <p:nvSpPr>
           <p:cNvPr id="83" name="Google Shape;83;p18"/>
           <p:cNvSpPr txBox="1"/>
           <p:nvPr/>
         </p:nvSpPr>
         <p:spPr>
           <a:xfrm>
-            <a:off x="92100" y="673700"/>
-            <a:ext cx="8986200" cy="1939500"/>
+            <a:off x="6313400" y="566800"/>
+            <a:ext cx="1795200" cy="302700"/>
           </a:xfrm>
           <a:prstGeom prst="rect">
             <a:avLst/>
           </a:prstGeom>
-          <a:noFill/>
+          <a:solidFill>
+            <a:srgbClr val="EFEFEF"/>
+          </a:solidFill>
           <a:ln cap="flat" cmpd="sng" w="9525">
             <a:solidFill>
               <a:schemeClr val="dk1"/>
@@ -13688,8 +14271,8 @@
           </a:ln>
         </p:spPr>
         <p:txBody>
-          <a:bodyPr anchorCtr="0" anchor="t" bIns="91425" lIns="91425" spcFirstLastPara="1" rIns="91425" wrap="square" tIns="91425">
-            <a:spAutoFit/>
+          <a:bodyPr anchorCtr="0" anchor="ctr" bIns="91425" lIns="91425" spcFirstLastPara="1" rIns="91425" wrap="square" tIns="91425">
+            <a:noAutofit/>
           </a:bodyPr>
           <a:lstStyle/>
           <a:p>
@@ -13703,254 +14286,10 @@
               <a:buNone/>
             </a:pPr>
             <a:r>
-              <a:rPr lang="en" sz="2000">
-                <a:solidFill>
-                  <a:schemeClr val="dk1"/>
-                </a:solidFill>
-                <a:highlight>
-                  <a:srgbClr val="C0C3A1"/>
-                </a:highlight>
-              </a:rPr>
-              <a:t>nvprof ./lab6 1024 128</a:t>
-            </a:r>
-            <a:endParaRPr sz="2000">
-              <a:solidFill>
-                <a:schemeClr val="dk1"/>
-              </a:solidFill>
-              <a:highlight>
-                <a:srgbClr val="C0C3A1"/>
-              </a:highlight>
-            </a:endParaRPr>
-          </a:p>
-          <a:p>
-            <a:pPr indent="0" lvl="0" marL="0" rtl="0" algn="l">
-              <a:spcBef>
-                <a:spcPts val="0"/>
-              </a:spcBef>
-              <a:spcAft>
-                <a:spcPts val="0"/>
-              </a:spcAft>
-              <a:buNone/>
-            </a:pPr>
-            <a:r>
-              <a:rPr lang="en" sz="2000">
-                <a:solidFill>
-                  <a:schemeClr val="dk1"/>
-                </a:solidFill>
-                <a:highlight>
-                  <a:srgbClr val="C0C3A1"/>
-                </a:highlight>
-              </a:rPr>
-              <a:t>………………………………………………………………………………………….</a:t>
-            </a:r>
-            <a:endParaRPr sz="2000">
-              <a:solidFill>
-                <a:schemeClr val="dk1"/>
-              </a:solidFill>
-              <a:highlight>
-                <a:srgbClr val="C0C3A1"/>
-              </a:highlight>
-            </a:endParaRPr>
-          </a:p>
-          <a:p>
-            <a:pPr indent="0" lvl="0" marL="0" rtl="0" algn="l">
-              <a:spcBef>
-                <a:spcPts val="0"/>
-              </a:spcBef>
-              <a:spcAft>
-                <a:spcPts val="0"/>
-              </a:spcAft>
-              <a:buClr>
-                <a:schemeClr val="dk1"/>
-              </a:buClr>
-              <a:buSzPts val="1100"/>
-              <a:buFont typeface="Arial"/>
-              <a:buNone/>
-            </a:pPr>
-            <a:r>
-              <a:rPr lang="en" sz="2000">
-                <a:solidFill>
-                  <a:schemeClr val="dk1"/>
-                </a:solidFill>
-                <a:highlight>
-                  <a:srgbClr val="C0C3A1"/>
-                </a:highlight>
-              </a:rPr>
-              <a:t>5.61%  2.3680us    1   </a:t>
-            </a:r>
-            <a:r>
-              <a:rPr b="1" lang="en" sz="2000">
-                <a:solidFill>
-                  <a:schemeClr val="dk1"/>
-                </a:solidFill>
-                <a:highlight>
-                  <a:srgbClr val="C0C3A1"/>
-                </a:highlight>
-              </a:rPr>
-              <a:t>2.3680us </a:t>
-            </a:r>
-            <a:r>
-              <a:rPr lang="en" sz="2000">
-                <a:solidFill>
-                  <a:schemeClr val="dk1"/>
-                </a:solidFill>
-                <a:highlight>
-                  <a:srgbClr val="C0C3A1"/>
-                </a:highlight>
-              </a:rPr>
-              <a:t> 2.3680us  2.3680us  </a:t>
-            </a:r>
-            <a:r>
-              <a:rPr b="1" lang="en" sz="2000">
-                <a:solidFill>
-                  <a:schemeClr val="dk1"/>
-                </a:solidFill>
-                <a:highlight>
-                  <a:srgbClr val="C0C3A1"/>
-                </a:highlight>
-              </a:rPr>
-              <a:t>gTestCM</a:t>
-            </a:r>
-            <a:r>
-              <a:rPr lang="en" sz="2000">
-                <a:solidFill>
-                  <a:schemeClr val="dk1"/>
-                </a:solidFill>
-                <a:highlight>
-                  <a:srgbClr val="C0C3A1"/>
-                </a:highlight>
-              </a:rPr>
-              <a:t>(int*, int*)</a:t>
-            </a:r>
-            <a:endParaRPr sz="2000">
-              <a:solidFill>
-                <a:schemeClr val="dk1"/>
-              </a:solidFill>
-              <a:highlight>
-                <a:srgbClr val="C0C3A1"/>
-              </a:highlight>
-            </a:endParaRPr>
-          </a:p>
-          <a:p>
-            <a:pPr indent="0" lvl="0" marL="0" rtl="0" algn="l">
-              <a:spcBef>
-                <a:spcPts val="0"/>
-              </a:spcBef>
-              <a:spcAft>
-                <a:spcPts val="0"/>
-              </a:spcAft>
-              <a:buClr>
-                <a:schemeClr val="dk1"/>
-              </a:buClr>
-              <a:buSzPts val="1100"/>
-              <a:buFont typeface="Arial"/>
-              <a:buNone/>
-            </a:pPr>
-            <a:r>
-              <a:rPr lang="en" sz="2000">
-                <a:solidFill>
-                  <a:schemeClr val="dk1"/>
-                </a:solidFill>
-                <a:highlight>
-                  <a:srgbClr val="C0C3A1"/>
-                </a:highlight>
-              </a:rPr>
-              <a:t>5.38%  2.2720us    1   </a:t>
-            </a:r>
-            <a:r>
-              <a:rPr b="1" lang="en" sz="2000">
-                <a:solidFill>
-                  <a:schemeClr val="dk1"/>
-                </a:solidFill>
-                <a:highlight>
-                  <a:srgbClr val="C0C3A1"/>
-                </a:highlight>
-              </a:rPr>
-              <a:t>2.2720us</a:t>
-            </a:r>
-            <a:r>
-              <a:rPr lang="en" sz="2000">
-                <a:solidFill>
-                  <a:schemeClr val="dk1"/>
-                </a:solidFill>
-                <a:highlight>
-                  <a:srgbClr val="C0C3A1"/>
-                </a:highlight>
-              </a:rPr>
-              <a:t>  2.2720us  2.2720us  </a:t>
-            </a:r>
-            <a:r>
-              <a:rPr b="1" lang="en" sz="2000">
-                <a:solidFill>
-                  <a:schemeClr val="dk1"/>
-                </a:solidFill>
-                <a:highlight>
-                  <a:srgbClr val="C0C3A1"/>
-                </a:highlight>
-              </a:rPr>
-              <a:t>gTestGM</a:t>
-            </a:r>
-            <a:r>
-              <a:rPr lang="en" sz="2000">
-                <a:solidFill>
-                  <a:schemeClr val="dk1"/>
-                </a:solidFill>
-                <a:highlight>
-                  <a:srgbClr val="C0C3A1"/>
-                </a:highlight>
-              </a:rPr>
-              <a:t>(int*, int*, int*)</a:t>
-            </a:r>
-            <a:endParaRPr sz="2000">
-              <a:solidFill>
-                <a:schemeClr val="dk1"/>
-              </a:solidFill>
-              <a:highlight>
-                <a:srgbClr val="C0C3A1"/>
-              </a:highlight>
-            </a:endParaRPr>
-          </a:p>
-          <a:p>
-            <a:pPr indent="0" lvl="0" marL="0" rtl="0" algn="l">
-              <a:spcBef>
-                <a:spcPts val="0"/>
-              </a:spcBef>
-              <a:spcAft>
-                <a:spcPts val="0"/>
-              </a:spcAft>
-              <a:buClr>
-                <a:schemeClr val="dk1"/>
-              </a:buClr>
-              <a:buSzPts val="1100"/>
-              <a:buFont typeface="Arial"/>
-              <a:buNone/>
-            </a:pPr>
-            <a:r>
-              <a:t/>
-            </a:r>
-            <a:endParaRPr sz="2000">
-              <a:solidFill>
-                <a:schemeClr val="dk1"/>
-              </a:solidFill>
-              <a:highlight>
-                <a:srgbClr val="C0C3A1"/>
-              </a:highlight>
-            </a:endParaRPr>
-          </a:p>
-          <a:p>
-            <a:pPr indent="0" lvl="0" marL="0" rtl="0" algn="l">
-              <a:spcBef>
-                <a:spcPts val="0"/>
-              </a:spcBef>
-              <a:spcAft>
-                <a:spcPts val="0"/>
-              </a:spcAft>
-              <a:buNone/>
-            </a:pPr>
-            <a:r>
-              <a:t/>
-            </a:r>
-            <a:endParaRPr/>
+              <a:rPr b="1" i="1" lang="en" sz="2000"/>
+              <a:t>test_mem.cu</a:t>
+            </a:r>
+            <a:endParaRPr b="1" i="1" sz="2000"/>
           </a:p>
         </p:txBody>
       </p:sp>
@@ -13987,14 +14326,14 @@
         </p:nvSpPr>
         <p:spPr>
           <a:xfrm>
-            <a:off x="92100" y="639150"/>
-            <a:ext cx="8880900" cy="3263100"/>
+            <a:off x="100850" y="788675"/>
+            <a:ext cx="8895300" cy="3792000"/>
           </a:xfrm>
           <a:prstGeom prst="rect">
             <a:avLst/>
           </a:prstGeom>
           <a:solidFill>
-            <a:srgbClr val="FFE599"/>
+            <a:srgbClr val="D0E0E3"/>
           </a:solidFill>
           <a:ln cap="flat" cmpd="sng" w="9525">
             <a:solidFill>
@@ -14008,7 +14347,7 @@
         </p:spPr>
         <p:txBody>
           <a:bodyPr anchorCtr="0" anchor="t" bIns="91425" lIns="91425" spcFirstLastPara="1" rIns="91425" wrap="square" tIns="91425">
-            <a:spAutoFit/>
+            <a:noAutofit/>
           </a:bodyPr>
           <a:lstStyle/>
           <a:p>
@@ -14028,7 +14367,7 @@
             </a:pPr>
             <a:r>
               <a:rPr lang="en" sz="2000"/>
-              <a:t>#include &lt;stdio.h&gt;</a:t>
+              <a:t>void hInitC(){</a:t>
             </a:r>
             <a:endParaRPr sz="2000"/>
           </a:p>
@@ -14049,22 +14388,7 @@
             </a:pPr>
             <a:r>
               <a:rPr lang="en" sz="2000"/>
-              <a:t>#define CM_SIZE 4</a:t>
-            </a:r>
-            <a:endParaRPr sz="2000"/>
-          </a:p>
-          <a:p>
-            <a:pPr indent="0" lvl="0" marL="0" rtl="0" algn="l">
-              <a:spcBef>
-                <a:spcPts val="0"/>
-              </a:spcBef>
-              <a:spcAft>
-                <a:spcPts val="0"/>
-              </a:spcAft>
-              <a:buNone/>
-            </a:pPr>
-            <a:r>
-              <a:t/>
+              <a:t>    int N=ARRAY_SIZE/THREADS_PER_BLOCK;</a:t>
             </a:r>
             <a:endParaRPr sz="2000"/>
           </a:p>
@@ -14084,10 +14408,10 @@
               <a:buNone/>
             </a:pPr>
             <a:r>
-              <a:rPr b="1" lang="en" sz="2000"/>
-              <a:t>extern __constant__ int c_a[CM_SIZE];</a:t>
-            </a:r>
-            <a:endParaRPr b="1" sz="2000"/>
+              <a:rPr lang="en" sz="2000"/>
+              <a:t>    float* hC=(float*)calloc(N, sizeof(float));</a:t>
+            </a:r>
+            <a:endParaRPr sz="2000"/>
           </a:p>
           <a:p>
             <a:pPr indent="0" lvl="0" marL="0" rtl="0" algn="l">
@@ -14105,7 +14429,8 @@
               <a:buNone/>
             </a:pPr>
             <a:r>
-              <a:t/>
+              <a:rPr lang="en" sz="2000"/>
+              <a:t>    for(int n=0;n&lt;N;n++)</a:t>
             </a:r>
             <a:endParaRPr sz="2000"/>
           </a:p>
@@ -14126,12 +14451,51 @@
             </a:pPr>
             <a:r>
               <a:rPr lang="en" sz="2000"/>
-              <a:t>__global__ void gTestCM1(){</a:t>
+              <a:t>        hC[n]=(float)n;</a:t>
             </a:r>
             <a:endParaRPr sz="2000"/>
           </a:p>
           <a:p>
             <a:pPr indent="0" lvl="0" marL="0" rtl="0" algn="l">
+              <a:spcBef>
+                <a:spcPts val="0"/>
+              </a:spcBef>
+              <a:spcAft>
+                <a:spcPts val="0"/>
+              </a:spcAft>
+              <a:buNone/>
+            </a:pPr>
+            <a:r>
+              <a:t/>
+            </a:r>
+            <a:endParaRPr sz="2000"/>
+          </a:p>
+          <a:p>
+            <a:pPr indent="0" lvl="0" marL="0" rtl="0" algn="l">
+              <a:spcBef>
+                <a:spcPts val="0"/>
+              </a:spcBef>
+              <a:spcAft>
+                <a:spcPts val="0"/>
+              </a:spcAft>
+              <a:buNone/>
+            </a:pPr>
+            <a:r>
+              <a:rPr lang="en" sz="2000"/>
+              <a:t>    </a:t>
+            </a:r>
+            <a:r>
+              <a:rPr b="1" lang="en" sz="2000"/>
+              <a:t>cudaMemcpyToSymbol</a:t>
+            </a:r>
+            <a:r>
+              <a:rPr lang="en" sz="2000"/>
+              <a:t>(C, hC, N*sizeof(float), 0,</a:t>
+            </a:r>
+            <a:endParaRPr sz="2000"/>
+          </a:p>
+          <a:p>
+            <a:pPr indent="457200" lvl="0" marL="4572000" rtl="0" algn="l">
               <a:spcBef>
                 <a:spcPts val="0"/>
               </a:spcBef>
@@ -14147,7 +14511,7 @@
             </a:pPr>
             <a:r>
               <a:rPr lang="en" sz="2000"/>
-              <a:t> int i=threadIdx.x+blockIdx.x*blockDim.x;</a:t>
+              <a:t>    cudaMemcpyHostToDevice);</a:t>
             </a:r>
             <a:endParaRPr sz="2000"/>
           </a:p>
@@ -14167,8 +14531,7 @@
               <a:buNone/>
             </a:pPr>
             <a:r>
-              <a:rPr lang="en" sz="2000"/>
-              <a:t> </a:t>
+              <a:t/>
             </a:r>
             <a:endParaRPr sz="2000"/>
           </a:p>
@@ -14189,7 +14552,7 @@
             </a:pPr>
             <a:r>
               <a:rPr lang="en" sz="2000"/>
-              <a:t> printf("%d\n", c_a[i]);</a:t>
+              <a:t>    free(hC);</a:t>
             </a:r>
             <a:endParaRPr sz="2000"/>
           </a:p>
@@ -14201,61 +14564,33 @@
               <a:spcAft>
                 <a:spcPts val="0"/>
               </a:spcAft>
+              <a:buClr>
+                <a:schemeClr val="dk1"/>
+              </a:buClr>
+              <a:buSzPts val="1100"/>
+              <a:buFont typeface="Arial"/>
               <a:buNone/>
             </a:pPr>
             <a:r>
               <a:rPr lang="en" sz="2000"/>
-              <a:t>} </a:t>
-            </a:r>
-            <a:endParaRPr/>
-          </a:p>
-        </p:txBody>
-      </p:sp>
-      <p:sp>
-        <p:nvSpPr>
-          <p:cNvPr id="89" name="Google Shape;89;p19"/>
-          <p:cNvSpPr txBox="1"/>
-          <p:nvPr/>
-        </p:nvSpPr>
-        <p:spPr>
-          <a:xfrm>
-            <a:off x="6828400" y="852400"/>
-            <a:ext cx="1289400" cy="492600"/>
-          </a:xfrm>
-          <a:prstGeom prst="rect">
-            <a:avLst/>
-          </a:prstGeom>
-          <a:noFill/>
-          <a:ln cap="flat" cmpd="sng" w="9525">
-            <a:solidFill>
-              <a:schemeClr val="dk1"/>
-            </a:solidFill>
-            <a:prstDash val="solid"/>
-            <a:round/>
-            <a:headEnd len="sm" w="sm" type="none"/>
-            <a:tailEnd len="sm" w="sm" type="none"/>
-          </a:ln>
-        </p:spPr>
-        <p:txBody>
-          <a:bodyPr anchorCtr="0" anchor="t" bIns="91425" lIns="91425" spcFirstLastPara="1" rIns="91425" wrap="square" tIns="91425">
-            <a:spAutoFit/>
-          </a:bodyPr>
-          <a:lstStyle/>
-          <a:p>
-            <a:pPr indent="0" lvl="0" marL="0" rtl="0" algn="l">
-              <a:spcBef>
-                <a:spcPts val="0"/>
-              </a:spcBef>
-              <a:spcAft>
-                <a:spcPts val="0"/>
-              </a:spcAft>
-              <a:buNone/>
-            </a:pPr>
-            <a:r>
-              <a:rPr b="1" i="1" lang="en" sz="2000"/>
-              <a:t>lab61.cu</a:t>
-            </a:r>
-            <a:endParaRPr b="1" i="1" sz="2000"/>
+              <a:t>}</a:t>
+            </a:r>
+            <a:endParaRPr sz="2000"/>
+          </a:p>
+          <a:p>
+            <a:pPr indent="0" lvl="0" marL="0" rtl="0" algn="l">
+              <a:spcBef>
+                <a:spcPts val="0"/>
+              </a:spcBef>
+              <a:spcAft>
+                <a:spcPts val="0"/>
+              </a:spcAft>
+              <a:buNone/>
+            </a:pPr>
+            <a:r>
+              <a:t/>
+            </a:r>
+            <a:endParaRPr sz="1800"/>
           </a:p>
         </p:txBody>
       </p:sp>
@@ -14272,7 +14607,7 @@
   <p:cSld>
     <p:spTree>
       <p:nvGrpSpPr>
-        <p:cNvPr id="93" name="Shape 93"/>
+        <p:cNvPr id="92" name="Shape 92"/>
         <p:cNvGrpSpPr/>
         <p:nvPr/>
       </p:nvGrpSpPr>
@@ -14286,19 +14621,21 @@
       </p:grpSpPr>
       <p:sp>
         <p:nvSpPr>
-          <p:cNvPr id="94" name="Google Shape;94;p20"/>
+          <p:cNvPr id="93" name="Google Shape;93;p20"/>
           <p:cNvSpPr txBox="1"/>
           <p:nvPr/>
         </p:nvSpPr>
         <p:spPr>
           <a:xfrm>
-            <a:off x="144725" y="450025"/>
-            <a:ext cx="8841300" cy="3478800"/>
+            <a:off x="121025" y="808850"/>
+            <a:ext cx="8915400" cy="2884500"/>
           </a:xfrm>
           <a:prstGeom prst="rect">
             <a:avLst/>
           </a:prstGeom>
-          <a:noFill/>
+          <a:solidFill>
+            <a:srgbClr val="D0E0E3"/>
+          </a:solidFill>
           <a:ln cap="flat" cmpd="sng" w="9525">
             <a:solidFill>
               <a:schemeClr val="dk1"/>
@@ -14311,7 +14648,7 @@
         </p:spPr>
         <p:txBody>
           <a:bodyPr anchorCtr="0" anchor="t" bIns="91425" lIns="91425" spcFirstLastPara="1" rIns="91425" wrap="square" tIns="91425">
-            <a:spAutoFit/>
+            <a:noAutofit/>
           </a:bodyPr>
           <a:lstStyle/>
           <a:p>
@@ -14330,47 +14667,10 @@
               <a:buNone/>
             </a:pPr>
             <a:r>
-              <a:rPr lang="en" sz="2000">
-                <a:solidFill>
-                  <a:schemeClr val="dk1"/>
-                </a:solidFill>
-                <a:highlight>
-                  <a:srgbClr val="C0C3A1"/>
-                </a:highlight>
-              </a:rPr>
-              <a:t>…/Lab6&gt; nvcc </a:t>
-            </a:r>
-            <a:r>
-              <a:rPr b="1" lang="en" sz="2000">
-                <a:solidFill>
-                  <a:schemeClr val="dk1"/>
-                </a:solidFill>
-                <a:highlight>
-                  <a:srgbClr val="C0C3A1"/>
-                </a:highlight>
-              </a:rPr>
-              <a:t>-rdc=true</a:t>
-            </a:r>
-            <a:r>
-              <a:rPr lang="en" sz="2000">
-                <a:solidFill>
-                  <a:schemeClr val="dk1"/>
-                </a:solidFill>
-                <a:highlight>
-                  <a:srgbClr val="C0C3A1"/>
-                </a:highlight>
-              </a:rPr>
-              <a:t>  lab6.cu lab61.cu  -o lab6</a:t>
-            </a:r>
-            <a:endParaRPr sz="1100">
-              <a:solidFill>
-                <a:schemeClr val="dk1"/>
-              </a:solidFill>
-              <a:latin typeface="Courier New"/>
-              <a:ea typeface="Courier New"/>
-              <a:cs typeface="Courier New"/>
-              <a:sym typeface="Courier New"/>
-            </a:endParaRPr>
+              <a:rPr lang="en" sz="1800"/>
+              <a:t>__global__ void gTestB(){</a:t>
+            </a:r>
+            <a:endParaRPr sz="1800"/>
           </a:p>
           <a:p>
             <a:pPr indent="0" lvl="0" marL="0" rtl="0" algn="l">
@@ -14388,287 +14688,207 @@
               <a:buNone/>
             </a:pPr>
             <a:r>
-              <a:rPr lang="en" sz="2000">
-                <a:highlight>
-                  <a:srgbClr val="C0C3A1"/>
-                </a:highlight>
-              </a:rPr>
-              <a:t>…</a:t>
-            </a:r>
-            <a:r>
-              <a:rPr lang="en" sz="2000">
-                <a:solidFill>
-                  <a:schemeClr val="dk1"/>
-                </a:solidFill>
-                <a:highlight>
-                  <a:srgbClr val="C0C3A1"/>
-                </a:highlight>
-              </a:rPr>
-              <a:t>/Lab6&gt; nvprof ./lab6 1024 128</a:t>
-            </a:r>
-            <a:endParaRPr sz="2000">
-              <a:solidFill>
+              <a:rPr lang="en" sz="1800"/>
+              <a:t>    int i= threadIdx.x+blockIdx.x*blockDim.x;</a:t>
+            </a:r>
+            <a:endParaRPr sz="1800"/>
+          </a:p>
+          <a:p>
+            <a:pPr indent="0" lvl="0" marL="0" rtl="0" algn="l">
+              <a:spcBef>
+                <a:spcPts val="0"/>
+              </a:spcBef>
+              <a:spcAft>
+                <a:spcPts val="0"/>
+              </a:spcAft>
+              <a:buClr>
                 <a:schemeClr val="dk1"/>
-              </a:solidFill>
-              <a:highlight>
-                <a:srgbClr val="C0C3A1"/>
-              </a:highlight>
-            </a:endParaRPr>
-          </a:p>
-          <a:p>
-            <a:pPr indent="0" lvl="0" marL="0" rtl="0" algn="l">
-              <a:spcBef>
-                <a:spcPts val="0"/>
-              </a:spcBef>
-              <a:spcAft>
-                <a:spcPts val="0"/>
-              </a:spcAft>
-              <a:buNone/>
-            </a:pPr>
-            <a:r>
-              <a:rPr lang="en" sz="2000">
-                <a:solidFill>
-                  <a:schemeClr val="dk1"/>
-                </a:solidFill>
-                <a:highlight>
-                  <a:srgbClr val="C0C3A1"/>
-                </a:highlight>
-              </a:rPr>
-              <a:t>0</a:t>
-            </a:r>
-            <a:endParaRPr sz="2000">
-              <a:solidFill>
+              </a:buClr>
+              <a:buSzPts val="1100"/>
+              <a:buFont typeface="Arial"/>
+              <a:buNone/>
+            </a:pPr>
+            <a:r>
+              <a:rPr lang="en" sz="1800"/>
+              <a:t>    A[i]=A[i]*(</a:t>
+            </a:r>
+            <a:r>
+              <a:rPr b="1" lang="en" sz="1800"/>
+              <a:t>B</a:t>
+            </a:r>
+            <a:r>
+              <a:rPr lang="en" sz="1800"/>
+              <a:t>[blockIdx.x]+1);</a:t>
+            </a:r>
+            <a:endParaRPr sz="1800"/>
+          </a:p>
+          <a:p>
+            <a:pPr indent="0" lvl="0" marL="0" rtl="0" algn="l">
+              <a:spcBef>
+                <a:spcPts val="0"/>
+              </a:spcBef>
+              <a:spcAft>
+                <a:spcPts val="0"/>
+              </a:spcAft>
+              <a:buClr>
                 <a:schemeClr val="dk1"/>
-              </a:solidFill>
-              <a:highlight>
-                <a:srgbClr val="C0C3A1"/>
-              </a:highlight>
-            </a:endParaRPr>
-          </a:p>
-          <a:p>
-            <a:pPr indent="0" lvl="0" marL="0" rtl="0" algn="l">
-              <a:spcBef>
-                <a:spcPts val="0"/>
-              </a:spcBef>
-              <a:spcAft>
-                <a:spcPts val="0"/>
-              </a:spcAft>
-              <a:buNone/>
-            </a:pPr>
-            <a:r>
-              <a:rPr lang="en" sz="2000">
-                <a:solidFill>
-                  <a:schemeClr val="dk1"/>
-                </a:solidFill>
-                <a:highlight>
-                  <a:srgbClr val="C0C3A1"/>
-                </a:highlight>
-              </a:rPr>
-              <a:t>-2</a:t>
-            </a:r>
-            <a:endParaRPr sz="2000">
-              <a:solidFill>
+              </a:buClr>
+              <a:buSzPts val="1100"/>
+              <a:buFont typeface="Arial"/>
+              <a:buNone/>
+            </a:pPr>
+            <a:r>
+              <a:rPr lang="en" sz="1800"/>
+              <a:t>}</a:t>
+            </a:r>
+            <a:endParaRPr sz="1800"/>
+          </a:p>
+          <a:p>
+            <a:pPr indent="0" lvl="0" marL="0" rtl="0" algn="l">
+              <a:spcBef>
+                <a:spcPts val="0"/>
+              </a:spcBef>
+              <a:spcAft>
+                <a:spcPts val="0"/>
+              </a:spcAft>
+              <a:buClr>
                 <a:schemeClr val="dk1"/>
-              </a:solidFill>
-              <a:highlight>
-                <a:srgbClr val="C0C3A1"/>
-              </a:highlight>
-            </a:endParaRPr>
-          </a:p>
-          <a:p>
-            <a:pPr indent="0" lvl="0" marL="0" rtl="0" algn="l">
-              <a:spcBef>
-                <a:spcPts val="0"/>
-              </a:spcBef>
-              <a:spcAft>
-                <a:spcPts val="0"/>
-              </a:spcAft>
-              <a:buNone/>
-            </a:pPr>
-            <a:r>
-              <a:rPr lang="en" sz="2000">
-                <a:solidFill>
-                  <a:schemeClr val="dk1"/>
-                </a:solidFill>
-                <a:highlight>
-                  <a:srgbClr val="C0C3A1"/>
-                </a:highlight>
-              </a:rPr>
-              <a:t>-4</a:t>
-            </a:r>
-            <a:endParaRPr sz="2000">
-              <a:solidFill>
+              </a:buClr>
+              <a:buSzPts val="1100"/>
+              <a:buFont typeface="Arial"/>
+              <a:buNone/>
+            </a:pPr>
+            <a:r>
+              <a:t/>
+            </a:r>
+            <a:endParaRPr sz="1800"/>
+          </a:p>
+          <a:p>
+            <a:pPr indent="0" lvl="0" marL="0" rtl="0" algn="l">
+              <a:spcBef>
+                <a:spcPts val="0"/>
+              </a:spcBef>
+              <a:spcAft>
+                <a:spcPts val="0"/>
+              </a:spcAft>
+              <a:buClr>
                 <a:schemeClr val="dk1"/>
-              </a:solidFill>
-              <a:highlight>
-                <a:srgbClr val="C0C3A1"/>
-              </a:highlight>
-            </a:endParaRPr>
-          </a:p>
-          <a:p>
-            <a:pPr indent="0" lvl="0" marL="0" rtl="0" algn="l">
-              <a:spcBef>
-                <a:spcPts val="0"/>
-              </a:spcBef>
-              <a:spcAft>
-                <a:spcPts val="0"/>
-              </a:spcAft>
-              <a:buNone/>
-            </a:pPr>
-            <a:r>
-              <a:rPr lang="en" sz="2000">
-                <a:solidFill>
-                  <a:schemeClr val="dk1"/>
-                </a:solidFill>
-                <a:highlight>
-                  <a:srgbClr val="C0C3A1"/>
-                </a:highlight>
-              </a:rPr>
-              <a:t>-6</a:t>
-            </a:r>
-            <a:endParaRPr sz="2000">
-              <a:solidFill>
+              </a:buClr>
+              <a:buSzPts val="1100"/>
+              <a:buFont typeface="Arial"/>
+              <a:buNone/>
+            </a:pPr>
+            <a:r>
+              <a:rPr lang="en" sz="1800"/>
+              <a:t>__global__ void gTestC(){</a:t>
+            </a:r>
+            <a:endParaRPr sz="1800"/>
+          </a:p>
+          <a:p>
+            <a:pPr indent="0" lvl="0" marL="0" rtl="0" algn="l">
+              <a:spcBef>
+                <a:spcPts val="0"/>
+              </a:spcBef>
+              <a:spcAft>
+                <a:spcPts val="0"/>
+              </a:spcAft>
+              <a:buClr>
                 <a:schemeClr val="dk1"/>
-              </a:solidFill>
-              <a:highlight>
-                <a:srgbClr val="C0C3A1"/>
-              </a:highlight>
-            </a:endParaRPr>
-          </a:p>
-          <a:p>
-            <a:pPr indent="0" lvl="0" marL="0" rtl="0" algn="l">
-              <a:spcBef>
-                <a:spcPts val="0"/>
-              </a:spcBef>
-              <a:spcAft>
-                <a:spcPts val="0"/>
-              </a:spcAft>
-              <a:buNone/>
-            </a:pPr>
-            <a:r>
-              <a:rPr lang="en" sz="2000">
-                <a:solidFill>
-                  <a:schemeClr val="dk1"/>
-                </a:solidFill>
-                <a:highlight>
-                  <a:srgbClr val="C0C3A1"/>
-                </a:highlight>
-              </a:rPr>
-              <a:t>…………………………………………………………………………………</a:t>
-            </a:r>
-            <a:endParaRPr sz="2000">
-              <a:solidFill>
+              </a:buClr>
+              <a:buSzPts val="1100"/>
+              <a:buFont typeface="Arial"/>
+              <a:buNone/>
+            </a:pPr>
+            <a:r>
+              <a:rPr lang="en" sz="1800"/>
+              <a:t>    int i= threadIdx.x+blockIdx.x*blockDim.x;</a:t>
+            </a:r>
+            <a:endParaRPr sz="1800"/>
+          </a:p>
+          <a:p>
+            <a:pPr indent="0" lvl="0" marL="0" rtl="0" algn="l">
+              <a:spcBef>
+                <a:spcPts val="0"/>
+              </a:spcBef>
+              <a:spcAft>
+                <a:spcPts val="0"/>
+              </a:spcAft>
+              <a:buClr>
                 <a:schemeClr val="dk1"/>
-              </a:solidFill>
-              <a:highlight>
-                <a:srgbClr val="C0C3A1"/>
-              </a:highlight>
-            </a:endParaRPr>
-          </a:p>
-          <a:p>
-            <a:pPr indent="0" lvl="0" marL="0" rtl="0" algn="l">
-              <a:spcBef>
-                <a:spcPts val="0"/>
-              </a:spcBef>
-              <a:spcAft>
-                <a:spcPts val="0"/>
-              </a:spcAft>
-              <a:buNone/>
-            </a:pPr>
-            <a:r>
-              <a:rPr lang="en" sz="2000">
-                <a:solidFill>
-                  <a:schemeClr val="dk1"/>
-                </a:solidFill>
-                <a:highlight>
-                  <a:srgbClr val="C0C3A1"/>
-                </a:highlight>
-              </a:rPr>
-              <a:t>74.37%  31.392us  1  31.392us  31.392us  31.392us  gTestCM1(void)</a:t>
-            </a:r>
-            <a:endParaRPr sz="2000">
-              <a:solidFill>
+              </a:buClr>
+              <a:buSzPts val="1100"/>
+              <a:buFont typeface="Arial"/>
+              <a:buNone/>
+            </a:pPr>
+            <a:r>
+              <a:rPr lang="en" sz="1800"/>
+              <a:t>    A[i]=A[i]*(</a:t>
+            </a:r>
+            <a:r>
+              <a:rPr b="1" lang="en" sz="1800"/>
+              <a:t>C</a:t>
+            </a:r>
+            <a:r>
+              <a:rPr lang="en" sz="1800"/>
+              <a:t>[blockIdx.x]+1);</a:t>
+            </a:r>
+            <a:endParaRPr sz="1800"/>
+          </a:p>
+          <a:p>
+            <a:pPr indent="0" lvl="0" marL="0" rtl="0" algn="l">
+              <a:spcBef>
+                <a:spcPts val="0"/>
+              </a:spcBef>
+              <a:spcAft>
+                <a:spcPts val="0"/>
+              </a:spcAft>
+              <a:buClr>
                 <a:schemeClr val="dk1"/>
-              </a:solidFill>
-              <a:highlight>
-                <a:srgbClr val="C0C3A1"/>
-              </a:highlight>
-            </a:endParaRPr>
-          </a:p>
-          <a:p>
-            <a:pPr indent="0" lvl="0" marL="0" rtl="0" algn="l">
-              <a:spcBef>
-                <a:spcPts val="0"/>
-              </a:spcBef>
-              <a:spcAft>
-                <a:spcPts val="0"/>
-              </a:spcAft>
-              <a:buNone/>
-            </a:pPr>
-            <a:r>
-              <a:rPr lang="en" sz="2000">
-                <a:solidFill>
-                  <a:schemeClr val="dk1"/>
-                </a:solidFill>
-                <a:highlight>
-                  <a:srgbClr val="C0C3A1"/>
-                </a:highlight>
-              </a:rPr>
-              <a:t>5.61%  2.3680us    1  2.3680us  2.3680us  2.3680us  gTestCM(int*, int*)</a:t>
-            </a:r>
-            <a:endParaRPr sz="2000">
-              <a:solidFill>
+              </a:buClr>
+              <a:buSzPts val="1100"/>
+              <a:buFont typeface="Arial"/>
+              <a:buNone/>
+            </a:pPr>
+            <a:r>
+              <a:rPr lang="en" sz="1800"/>
+              <a:t>}</a:t>
+            </a:r>
+            <a:endParaRPr sz="1800"/>
+          </a:p>
+          <a:p>
+            <a:pPr indent="0" lvl="0" marL="0" rtl="0" algn="l">
+              <a:spcBef>
+                <a:spcPts val="0"/>
+              </a:spcBef>
+              <a:spcAft>
+                <a:spcPts val="0"/>
+              </a:spcAft>
+              <a:buClr>
                 <a:schemeClr val="dk1"/>
-              </a:solidFill>
-              <a:highlight>
-                <a:srgbClr val="C0C3A1"/>
-              </a:highlight>
-            </a:endParaRPr>
-          </a:p>
-          <a:p>
-            <a:pPr indent="0" lvl="0" marL="0" rtl="0" algn="l">
-              <a:spcBef>
-                <a:spcPts val="0"/>
-              </a:spcBef>
-              <a:spcAft>
-                <a:spcPts val="0"/>
-              </a:spcAft>
-              <a:buNone/>
-            </a:pPr>
-            <a:r>
-              <a:rPr lang="en" sz="2000">
-                <a:solidFill>
-                  <a:schemeClr val="dk1"/>
-                </a:solidFill>
-                <a:highlight>
-                  <a:srgbClr val="C0C3A1"/>
-                </a:highlight>
-              </a:rPr>
-              <a:t>5.38%  2.2720us    1  2.2720us  2.2720us  2.2720us  gTestGM(int*, int*, int*)</a:t>
-            </a:r>
-            <a:endParaRPr sz="2000">
-              <a:solidFill>
-                <a:schemeClr val="dk1"/>
-              </a:solidFill>
-              <a:highlight>
-                <a:srgbClr val="C0C3A1"/>
-              </a:highlight>
-            </a:endParaRPr>
-          </a:p>
-          <a:p>
-            <a:pPr indent="0" lvl="0" marL="0" rtl="0" algn="l">
-              <a:spcBef>
-                <a:spcPts val="0"/>
-              </a:spcBef>
-              <a:spcAft>
-                <a:spcPts val="0"/>
-              </a:spcAft>
+              </a:buClr>
+              <a:buSzPts val="1100"/>
+              <a:buFont typeface="Arial"/>
               <a:buNone/>
             </a:pPr>
             <a:r>
               <a:t/>
             </a:r>
-            <a:endParaRPr/>
+            <a:endParaRPr sz="1800"/>
+          </a:p>
+          <a:p>
+            <a:pPr indent="0" lvl="0" marL="0" rtl="0" algn="l">
+              <a:spcBef>
+                <a:spcPts val="0"/>
+              </a:spcBef>
+              <a:spcAft>
+                <a:spcPts val="0"/>
+              </a:spcAft>
+              <a:buNone/>
+            </a:pPr>
+            <a:r>
+              <a:t/>
+            </a:r>
+            <a:endParaRPr sz="1800"/>
           </a:p>
         </p:txBody>
       </p:sp>
@@ -14685,7 +14905,7 @@
   <p:cSld>
     <p:spTree>
       <p:nvGrpSpPr>
-        <p:cNvPr id="98" name="Shape 98"/>
+        <p:cNvPr id="97" name="Shape 97"/>
         <p:cNvGrpSpPr/>
         <p:nvPr/>
       </p:nvGrpSpPr>
@@ -14699,71 +14919,21 @@
       </p:grpSpPr>
       <p:sp>
         <p:nvSpPr>
-          <p:cNvPr id="99" name="Google Shape;99;p21"/>
+          <p:cNvPr id="98" name="Google Shape;98;p21"/>
           <p:cNvSpPr txBox="1"/>
           <p:nvPr/>
         </p:nvSpPr>
         <p:spPr>
           <a:xfrm>
-            <a:off x="990600" y="26428"/>
-            <a:ext cx="7086600" cy="464100"/>
+            <a:off x="60500" y="62525"/>
+            <a:ext cx="8996100" cy="4871100"/>
           </a:xfrm>
           <a:prstGeom prst="rect">
             <a:avLst/>
           </a:prstGeom>
           <a:solidFill>
-            <a:srgbClr val="FFCC00"/>
+            <a:srgbClr val="D0E0E3"/>
           </a:solidFill>
-          <a:ln>
-            <a:noFill/>
-          </a:ln>
-        </p:spPr>
-        <p:txBody>
-          <a:bodyPr anchorCtr="0" anchor="t" bIns="46800" lIns="90000" spcFirstLastPara="1" rIns="90000" wrap="square" tIns="46800">
-            <a:spAutoFit/>
-          </a:bodyPr>
-          <a:lstStyle/>
-          <a:p>
-            <a:pPr indent="0" lvl="0" marL="0" marR="0" rtl="0" algn="ctr">
-              <a:lnSpc>
-                <a:spcPct val="100000"/>
-              </a:lnSpc>
-              <a:spcBef>
-                <a:spcPts val="0"/>
-              </a:spcBef>
-              <a:spcAft>
-                <a:spcPts val="0"/>
-              </a:spcAft>
-              <a:buClr>
-                <a:srgbClr val="000000"/>
-              </a:buClr>
-              <a:buSzPts val="2400"/>
-              <a:buFont typeface="Arial"/>
-              <a:buNone/>
-            </a:pPr>
-            <a:r>
-              <a:rPr b="1" lang="en" sz="2400"/>
-              <a:t>Текстурная память</a:t>
-            </a:r>
-            <a:endParaRPr b="1" i="1" sz="2100"/>
-          </a:p>
-        </p:txBody>
-      </p:sp>
-      <p:sp>
-        <p:nvSpPr>
-          <p:cNvPr id="100" name="Google Shape;100;p21"/>
-          <p:cNvSpPr txBox="1"/>
-          <p:nvPr/>
-        </p:nvSpPr>
-        <p:spPr>
-          <a:xfrm>
-            <a:off x="421025" y="829375"/>
-            <a:ext cx="8328300" cy="1108200"/>
-          </a:xfrm>
-          <a:prstGeom prst="rect">
-            <a:avLst/>
-          </a:prstGeom>
-          <a:noFill/>
           <a:ln cap="flat" cmpd="sng" w="9525">
             <a:solidFill>
               <a:schemeClr val="dk1"/>
@@ -14776,7 +14946,7 @@
         </p:spPr>
         <p:txBody>
           <a:bodyPr anchorCtr="0" anchor="t" bIns="91425" lIns="91425" spcFirstLastPara="1" rIns="91425" wrap="square" tIns="91425">
-            <a:spAutoFit/>
+            <a:noAutofit/>
           </a:bodyPr>
           <a:lstStyle/>
           <a:p>
@@ -14795,61 +14965,359 @@
               <a:buNone/>
             </a:pPr>
             <a:r>
-              <a:rPr lang="en" sz="2000"/>
-              <a:t>● Текстура – специальный интерфейс доступа к глобальной памяти, обеспечивающий 1D, 2D и 3D целочисленную и </a:t>
-            </a:r>
-            <a:r>
-              <a:rPr b="1" lang="en" sz="2000"/>
-              <a:t>вещественную</a:t>
-            </a:r>
-            <a:endParaRPr b="1" sz="2000"/>
-          </a:p>
-          <a:p>
-            <a:pPr indent="0" lvl="0" marL="0" rtl="0" algn="l">
-              <a:spcBef>
-                <a:spcPts val="0"/>
-              </a:spcBef>
-              <a:spcAft>
-                <a:spcPts val="0"/>
-              </a:spcAft>
-              <a:buNone/>
-            </a:pPr>
-            <a:r>
-              <a:rPr lang="en" sz="2000"/>
-              <a:t>индексацию.</a:t>
-            </a:r>
-            <a:endParaRPr sz="2000"/>
+              <a:rPr lang="en" sz="1800"/>
+              <a:t>int main(){</a:t>
+            </a:r>
+            <a:endParaRPr sz="1800"/>
+          </a:p>
+          <a:p>
+            <a:pPr indent="0" lvl="0" marL="0" rtl="0" algn="l">
+              <a:spcBef>
+                <a:spcPts val="0"/>
+              </a:spcBef>
+              <a:spcAft>
+                <a:spcPts val="0"/>
+              </a:spcAft>
+              <a:buClr>
+                <a:schemeClr val="dk1"/>
+              </a:buClr>
+              <a:buSzPts val="1100"/>
+              <a:buFont typeface="Arial"/>
+              <a:buNone/>
+            </a:pPr>
+            <a:r>
+              <a:rPr lang="en" sz="1800"/>
+              <a:t>  gInit&lt;&lt;&lt;ARRAY_SIZE/THREADS_PER_BLOCK, THREADS_PER_BLOCK&gt;&gt;&gt;();</a:t>
+            </a:r>
+            <a:endParaRPr sz="1800"/>
+          </a:p>
+          <a:p>
+            <a:pPr indent="0" lvl="0" marL="0" rtl="0" algn="l">
+              <a:spcBef>
+                <a:spcPts val="0"/>
+              </a:spcBef>
+              <a:spcAft>
+                <a:spcPts val="0"/>
+              </a:spcAft>
+              <a:buClr>
+                <a:schemeClr val="dk1"/>
+              </a:buClr>
+              <a:buSzPts val="1100"/>
+              <a:buFont typeface="Arial"/>
+              <a:buNone/>
+            </a:pPr>
+            <a:r>
+              <a:rPr lang="en" sz="1800"/>
+              <a:t>  cudaDeviceSynchronize();</a:t>
+            </a:r>
+            <a:endParaRPr sz="1800"/>
+          </a:p>
+          <a:p>
+            <a:pPr indent="0" lvl="0" marL="0" rtl="0" algn="l">
+              <a:spcBef>
+                <a:spcPts val="0"/>
+              </a:spcBef>
+              <a:spcAft>
+                <a:spcPts val="0"/>
+              </a:spcAft>
+              <a:buClr>
+                <a:schemeClr val="dk1"/>
+              </a:buClr>
+              <a:buSzPts val="1100"/>
+              <a:buFont typeface="Arial"/>
+              <a:buNone/>
+            </a:pPr>
+            <a:r>
+              <a:t/>
+            </a:r>
+            <a:endParaRPr sz="1800"/>
+          </a:p>
+          <a:p>
+            <a:pPr indent="0" lvl="0" marL="0" rtl="0" algn="l">
+              <a:spcBef>
+                <a:spcPts val="0"/>
+              </a:spcBef>
+              <a:spcAft>
+                <a:spcPts val="0"/>
+              </a:spcAft>
+              <a:buClr>
+                <a:schemeClr val="dk1"/>
+              </a:buClr>
+              <a:buSzPts val="1100"/>
+              <a:buFont typeface="Arial"/>
+              <a:buNone/>
+            </a:pPr>
+            <a:r>
+              <a:rPr lang="en" sz="1800"/>
+              <a:t>  hInitC();</a:t>
+            </a:r>
+            <a:endParaRPr sz="1800"/>
+          </a:p>
+          <a:p>
+            <a:pPr indent="0" lvl="0" marL="0" rtl="0" algn="l">
+              <a:spcBef>
+                <a:spcPts val="0"/>
+              </a:spcBef>
+              <a:spcAft>
+                <a:spcPts val="0"/>
+              </a:spcAft>
+              <a:buClr>
+                <a:schemeClr val="dk1"/>
+              </a:buClr>
+              <a:buSzPts val="1100"/>
+              <a:buFont typeface="Arial"/>
+              <a:buNone/>
+            </a:pPr>
+            <a:r>
+              <a:t/>
+            </a:r>
+            <a:endParaRPr sz="1800"/>
+          </a:p>
+          <a:p>
+            <a:pPr indent="0" lvl="0" marL="0" rtl="0" algn="l">
+              <a:spcBef>
+                <a:spcPts val="0"/>
+              </a:spcBef>
+              <a:spcAft>
+                <a:spcPts val="0"/>
+              </a:spcAft>
+              <a:buClr>
+                <a:schemeClr val="dk1"/>
+              </a:buClr>
+              <a:buSzPts val="1100"/>
+              <a:buFont typeface="Arial"/>
+              <a:buNone/>
+            </a:pPr>
+            <a:r>
+              <a:rPr lang="en" sz="1800"/>
+              <a:t>  gTestB&lt;&lt;&lt;ARRAY_SIZE/THREADS_PER_BLOCK, THREADS_PER_BLOCK&gt;&gt;&gt;();</a:t>
+            </a:r>
+            <a:endParaRPr sz="1800"/>
+          </a:p>
+          <a:p>
+            <a:pPr indent="0" lvl="0" marL="0" rtl="0" algn="l">
+              <a:spcBef>
+                <a:spcPts val="0"/>
+              </a:spcBef>
+              <a:spcAft>
+                <a:spcPts val="0"/>
+              </a:spcAft>
+              <a:buClr>
+                <a:schemeClr val="dk1"/>
+              </a:buClr>
+              <a:buSzPts val="1100"/>
+              <a:buFont typeface="Arial"/>
+              <a:buNone/>
+            </a:pPr>
+            <a:r>
+              <a:rPr lang="en" sz="1800"/>
+              <a:t>  cudaDeviceSynchronize();</a:t>
+            </a:r>
+            <a:endParaRPr sz="1800"/>
+          </a:p>
+          <a:p>
+            <a:pPr indent="0" lvl="0" marL="0" rtl="0" algn="l">
+              <a:spcBef>
+                <a:spcPts val="0"/>
+              </a:spcBef>
+              <a:spcAft>
+                <a:spcPts val="0"/>
+              </a:spcAft>
+              <a:buClr>
+                <a:schemeClr val="dk1"/>
+              </a:buClr>
+              <a:buSzPts val="1100"/>
+              <a:buFont typeface="Arial"/>
+              <a:buNone/>
+            </a:pPr>
+            <a:r>
+              <a:t/>
+            </a:r>
+            <a:endParaRPr sz="1800"/>
+          </a:p>
+          <a:p>
+            <a:pPr indent="0" lvl="0" marL="0" rtl="0" algn="l">
+              <a:spcBef>
+                <a:spcPts val="0"/>
+              </a:spcBef>
+              <a:spcAft>
+                <a:spcPts val="0"/>
+              </a:spcAft>
+              <a:buClr>
+                <a:schemeClr val="dk1"/>
+              </a:buClr>
+              <a:buSzPts val="1100"/>
+              <a:buFont typeface="Arial"/>
+              <a:buNone/>
+            </a:pPr>
+            <a:r>
+              <a:rPr lang="en" sz="1800"/>
+              <a:t>  gTestC&lt;&lt;&lt;ARRAY_SIZE/THREADS_PER_BLOCK, THREADS_PER_BLOCK&gt;&gt;&gt;();</a:t>
+            </a:r>
+            <a:endParaRPr sz="1800"/>
+          </a:p>
+          <a:p>
+            <a:pPr indent="0" lvl="0" marL="0" rtl="0" algn="l">
+              <a:spcBef>
+                <a:spcPts val="0"/>
+              </a:spcBef>
+              <a:spcAft>
+                <a:spcPts val="0"/>
+              </a:spcAft>
+              <a:buClr>
+                <a:schemeClr val="dk1"/>
+              </a:buClr>
+              <a:buSzPts val="1100"/>
+              <a:buFont typeface="Arial"/>
+              <a:buNone/>
+            </a:pPr>
+            <a:r>
+              <a:rPr lang="en" sz="1800"/>
+              <a:t>  cudaDeviceSynchronize();</a:t>
+            </a:r>
+            <a:endParaRPr sz="1800"/>
+          </a:p>
+          <a:p>
+            <a:pPr indent="0" lvl="0" marL="0" rtl="0" algn="l">
+              <a:spcBef>
+                <a:spcPts val="0"/>
+              </a:spcBef>
+              <a:spcAft>
+                <a:spcPts val="0"/>
+              </a:spcAft>
+              <a:buClr>
+                <a:schemeClr val="dk1"/>
+              </a:buClr>
+              <a:buSzPts val="1100"/>
+              <a:buFont typeface="Arial"/>
+              <a:buNone/>
+            </a:pPr>
+            <a:r>
+              <a:t/>
+            </a:r>
+            <a:endParaRPr sz="1800"/>
+          </a:p>
+          <a:p>
+            <a:pPr indent="0" lvl="0" marL="0" rtl="0" algn="l">
+              <a:spcBef>
+                <a:spcPts val="0"/>
+              </a:spcBef>
+              <a:spcAft>
+                <a:spcPts val="0"/>
+              </a:spcAft>
+              <a:buClr>
+                <a:schemeClr val="dk1"/>
+              </a:buClr>
+              <a:buSzPts val="1100"/>
+              <a:buFont typeface="Arial"/>
+              <a:buNone/>
+            </a:pPr>
+            <a:r>
+              <a:rPr lang="en" sz="1800"/>
+              <a:t>  gOut&lt;&lt;&lt;ARRAY_SIZE/THREADS_PER_BLOCK, THREADS_PER_BLOCK&gt;&gt;&gt;();</a:t>
+            </a:r>
+            <a:endParaRPr sz="1800"/>
+          </a:p>
+          <a:p>
+            <a:pPr indent="0" lvl="0" marL="0" rtl="0" algn="l">
+              <a:spcBef>
+                <a:spcPts val="0"/>
+              </a:spcBef>
+              <a:spcAft>
+                <a:spcPts val="0"/>
+              </a:spcAft>
+              <a:buClr>
+                <a:schemeClr val="dk1"/>
+              </a:buClr>
+              <a:buSzPts val="1100"/>
+              <a:buFont typeface="Arial"/>
+              <a:buNone/>
+            </a:pPr>
+            <a:r>
+              <a:rPr lang="en" sz="1800"/>
+              <a:t>  cudaDeviceSynchronize();</a:t>
+            </a:r>
+            <a:endParaRPr sz="1800"/>
+          </a:p>
+          <a:p>
+            <a:pPr indent="0" lvl="0" marL="0" rtl="0" algn="l">
+              <a:spcBef>
+                <a:spcPts val="0"/>
+              </a:spcBef>
+              <a:spcAft>
+                <a:spcPts val="0"/>
+              </a:spcAft>
+              <a:buClr>
+                <a:schemeClr val="dk1"/>
+              </a:buClr>
+              <a:buSzPts val="1100"/>
+              <a:buFont typeface="Arial"/>
+              <a:buNone/>
+            </a:pPr>
+            <a:r>
+              <a:t/>
+            </a:r>
+            <a:endParaRPr sz="1800"/>
+          </a:p>
+          <a:p>
+            <a:pPr indent="0" lvl="0" marL="0" rtl="0" algn="l">
+              <a:spcBef>
+                <a:spcPts val="0"/>
+              </a:spcBef>
+              <a:spcAft>
+                <a:spcPts val="0"/>
+              </a:spcAft>
+              <a:buClr>
+                <a:schemeClr val="dk1"/>
+              </a:buClr>
+              <a:buSzPts val="1100"/>
+              <a:buFont typeface="Arial"/>
+              <a:buNone/>
+            </a:pPr>
+            <a:r>
+              <a:rPr lang="en" sz="1800"/>
+              <a:t>  return 0;</a:t>
+            </a:r>
+            <a:endParaRPr sz="1800"/>
+          </a:p>
+          <a:p>
+            <a:pPr indent="0" lvl="0" marL="0" rtl="0" algn="l">
+              <a:spcBef>
+                <a:spcPts val="0"/>
+              </a:spcBef>
+              <a:spcAft>
+                <a:spcPts val="0"/>
+              </a:spcAft>
+              <a:buClr>
+                <a:schemeClr val="dk1"/>
+              </a:buClr>
+              <a:buSzPts val="1100"/>
+              <a:buFont typeface="Arial"/>
+              <a:buNone/>
+            </a:pPr>
+            <a:r>
+              <a:rPr lang="en" sz="1800"/>
+              <a:t>}</a:t>
+            </a:r>
+            <a:endParaRPr sz="1800"/>
+          </a:p>
+          <a:p>
+            <a:pPr indent="0" lvl="0" marL="0" rtl="0" algn="l">
+              <a:spcBef>
+                <a:spcPts val="0"/>
+              </a:spcBef>
+              <a:spcAft>
+                <a:spcPts val="0"/>
+              </a:spcAft>
+              <a:buNone/>
+            </a:pPr>
+            <a:r>
+              <a:t/>
+            </a:r>
+            <a:endParaRPr sz="1800"/>
           </a:p>
         </p:txBody>
       </p:sp>
-      <p:pic>
-        <p:nvPicPr>
-          <p:cNvPr id="101" name="Google Shape;101;p21"/>
-          <p:cNvPicPr preferRelativeResize="0"/>
-          <p:nvPr/>
-        </p:nvPicPr>
-        <p:blipFill>
-          <a:blip r:embed="rId3">
-            <a:alphaModFix/>
-          </a:blip>
-          <a:stretch>
-            <a:fillRect/>
-          </a:stretch>
-        </p:blipFill>
-        <p:spPr>
-          <a:xfrm>
-            <a:off x="152400" y="2089975"/>
-            <a:ext cx="8839199" cy="2757967"/>
-          </a:xfrm>
-          <a:prstGeom prst="rect">
-            <a:avLst/>
-          </a:prstGeom>
-          <a:noFill/>
-          <a:ln>
-            <a:noFill/>
-          </a:ln>
-        </p:spPr>
-      </p:pic>
     </p:spTree>
   </p:cSld>
   <p:clrMapOvr>
@@ -14863,7 +15331,7 @@
   <p:cSld>
     <p:spTree>
       <p:nvGrpSpPr>
-        <p:cNvPr id="105" name="Shape 105"/>
+        <p:cNvPr id="102" name="Shape 102"/>
         <p:cNvGrpSpPr/>
         <p:nvPr/>
       </p:nvGrpSpPr>
@@ -14877,107 +15345,21 @@
       </p:grpSpPr>
       <p:sp>
         <p:nvSpPr>
-          <p:cNvPr id="106" name="Google Shape;106;p22"/>
+          <p:cNvPr id="103" name="Google Shape;103;p22"/>
           <p:cNvSpPr txBox="1"/>
           <p:nvPr/>
         </p:nvSpPr>
         <p:spPr>
           <a:xfrm>
-            <a:off x="990600" y="26428"/>
-            <a:ext cx="7086600" cy="464100"/>
+            <a:off x="100850" y="123050"/>
+            <a:ext cx="8925600" cy="3418800"/>
           </a:xfrm>
           <a:prstGeom prst="rect">
             <a:avLst/>
           </a:prstGeom>
           <a:solidFill>
-            <a:srgbClr val="FFCC00"/>
+            <a:srgbClr val="C9DAF8"/>
           </a:solidFill>
-          <a:ln>
-            <a:noFill/>
-          </a:ln>
-        </p:spPr>
-        <p:txBody>
-          <a:bodyPr anchorCtr="0" anchor="t" bIns="46800" lIns="90000" spcFirstLastPara="1" rIns="90000" wrap="square" tIns="46800">
-            <a:spAutoFit/>
-          </a:bodyPr>
-          <a:lstStyle/>
-          <a:p>
-            <a:pPr indent="0" lvl="0" marL="0" marR="0" rtl="0" algn="ctr">
-              <a:lnSpc>
-                <a:spcPct val="100000"/>
-              </a:lnSpc>
-              <a:spcBef>
-                <a:spcPts val="0"/>
-              </a:spcBef>
-              <a:spcAft>
-                <a:spcPts val="0"/>
-              </a:spcAft>
-              <a:buClr>
-                <a:schemeClr val="dk1"/>
-              </a:buClr>
-              <a:buSzPts val="1100"/>
-              <a:buFont typeface="Arial"/>
-              <a:buNone/>
-            </a:pPr>
-            <a:r>
-              <a:rPr b="1" lang="en" sz="2400"/>
-              <a:t>Интегрирование по сфере</a:t>
-            </a:r>
-            <a:endParaRPr b="1" sz="2400"/>
-          </a:p>
-        </p:txBody>
-      </p:sp>
-      <p:pic>
-        <p:nvPicPr>
-          <p:cNvPr id="107" name="Google Shape;107;p22"/>
-          <p:cNvPicPr preferRelativeResize="0"/>
-          <p:nvPr/>
-        </p:nvPicPr>
-        <p:blipFill>
-          <a:blip r:embed="rId3">
-            <a:alphaModFix/>
-          </a:blip>
-          <a:stretch>
-            <a:fillRect/>
-          </a:stretch>
-        </p:blipFill>
-        <p:spPr>
-          <a:xfrm>
-            <a:off x="152400" y="642928"/>
-            <a:ext cx="3800475" cy="3943350"/>
-          </a:xfrm>
-          <a:prstGeom prst="rect">
-            <a:avLst/>
-          </a:prstGeom>
-          <a:noFill/>
-          <a:ln>
-            <a:noFill/>
-          </a:ln>
-        </p:spPr>
-      </p:pic>
-      <p:pic>
-        <p:nvPicPr>
-          <p:cNvPr id="108" name="Google Shape;108;p22"/>
-          <p:cNvPicPr preferRelativeResize="0"/>
-          <p:nvPr/>
-        </p:nvPicPr>
-        <p:blipFill>
-          <a:blip r:embed="rId4">
-            <a:alphaModFix/>
-          </a:blip>
-          <a:stretch>
-            <a:fillRect/>
-          </a:stretch>
-        </p:blipFill>
-        <p:spPr>
-          <a:xfrm>
-            <a:off x="3624275" y="3652851"/>
-            <a:ext cx="5400675" cy="933425"/>
-          </a:xfrm>
-          <a:prstGeom prst="rect">
-            <a:avLst/>
-          </a:prstGeom>
-          <a:noFill/>
           <a:ln cap="flat" cmpd="sng" w="9525">
             <a:solidFill>
               <a:schemeClr val="dk1"/>
@@ -14988,23 +15370,306 @@
             <a:tailEnd len="sm" w="sm" type="none"/>
           </a:ln>
         </p:spPr>
-      </p:pic>
+        <p:txBody>
+          <a:bodyPr anchorCtr="0" anchor="t" bIns="91425" lIns="91425" spcFirstLastPara="1" rIns="91425" wrap="square" tIns="91425">
+            <a:noAutofit/>
+          </a:bodyPr>
+          <a:lstStyle/>
+          <a:p>
+            <a:pPr indent="0" lvl="0" marL="0" rtl="0" algn="l">
+              <a:spcBef>
+                <a:spcPts val="0"/>
+              </a:spcBef>
+              <a:spcAft>
+                <a:spcPts val="0"/>
+              </a:spcAft>
+              <a:buClr>
+                <a:schemeClr val="dk1"/>
+              </a:buClr>
+              <a:buSzPts val="1100"/>
+              <a:buFont typeface="Arial"/>
+              <a:buNone/>
+            </a:pPr>
+            <a:r>
+              <a:rPr lang="en" sz="2000"/>
+              <a:t>#include &lt;stdio.h&gt;</a:t>
+            </a:r>
+            <a:endParaRPr sz="2000"/>
+          </a:p>
+          <a:p>
+            <a:pPr indent="0" lvl="0" marL="0" rtl="0" algn="l">
+              <a:spcBef>
+                <a:spcPts val="0"/>
+              </a:spcBef>
+              <a:spcAft>
+                <a:spcPts val="0"/>
+              </a:spcAft>
+              <a:buNone/>
+            </a:pPr>
+            <a:r>
+              <a:rPr lang="en" sz="2000"/>
+              <a:t>#define ARRAY_SIZE 2048                                              </a:t>
+            </a:r>
+            <a:endParaRPr b="1" i="1" sz="2000"/>
+          </a:p>
+          <a:p>
+            <a:pPr indent="0" lvl="0" marL="0" rtl="0" algn="l">
+              <a:spcBef>
+                <a:spcPts val="0"/>
+              </a:spcBef>
+              <a:spcAft>
+                <a:spcPts val="0"/>
+              </a:spcAft>
+              <a:buClr>
+                <a:schemeClr val="dk1"/>
+              </a:buClr>
+              <a:buSzPts val="1100"/>
+              <a:buFont typeface="Arial"/>
+              <a:buNone/>
+            </a:pPr>
+            <a:r>
+              <a:rPr lang="en" sz="2000"/>
+              <a:t>#define THREADS_PER_BLOCK 64                      </a:t>
+            </a:r>
+            <a:endParaRPr sz="2000"/>
+          </a:p>
+          <a:p>
+            <a:pPr indent="0" lvl="0" marL="0" rtl="0" algn="l">
+              <a:spcBef>
+                <a:spcPts val="0"/>
+              </a:spcBef>
+              <a:spcAft>
+                <a:spcPts val="0"/>
+              </a:spcAft>
+              <a:buClr>
+                <a:schemeClr val="dk1"/>
+              </a:buClr>
+              <a:buSzPts val="1100"/>
+              <a:buFont typeface="Arial"/>
+              <a:buNone/>
+            </a:pPr>
+            <a:r>
+              <a:t/>
+            </a:r>
+            <a:endParaRPr sz="2000"/>
+          </a:p>
+          <a:p>
+            <a:pPr indent="0" lvl="0" marL="0" rtl="0" algn="l">
+              <a:spcBef>
+                <a:spcPts val="0"/>
+              </a:spcBef>
+              <a:spcAft>
+                <a:spcPts val="0"/>
+              </a:spcAft>
+              <a:buClr>
+                <a:schemeClr val="dk1"/>
+              </a:buClr>
+              <a:buSzPts val="1100"/>
+              <a:buFont typeface="Arial"/>
+              <a:buNone/>
+            </a:pPr>
+            <a:r>
+              <a:rPr lang="en" sz="2000"/>
+              <a:t>extern __device__ float B[ARRAY_SIZE/THREADS_PER_BLOCK];</a:t>
+            </a:r>
+            <a:endParaRPr sz="2000"/>
+          </a:p>
+          <a:p>
+            <a:pPr indent="0" lvl="0" marL="0" rtl="0" algn="l">
+              <a:spcBef>
+                <a:spcPts val="0"/>
+              </a:spcBef>
+              <a:spcAft>
+                <a:spcPts val="0"/>
+              </a:spcAft>
+              <a:buClr>
+                <a:schemeClr val="dk1"/>
+              </a:buClr>
+              <a:buSzPts val="1100"/>
+              <a:buFont typeface="Arial"/>
+              <a:buNone/>
+            </a:pPr>
+            <a:r>
+              <a:rPr lang="en" sz="2000"/>
+              <a:t>extern  __constant__ float C[ARRAY_SIZE/THREADS_PER_BLOCK];</a:t>
+            </a:r>
+            <a:endParaRPr sz="2000"/>
+          </a:p>
+          <a:p>
+            <a:pPr indent="0" lvl="0" marL="0" rtl="0" algn="l">
+              <a:spcBef>
+                <a:spcPts val="0"/>
+              </a:spcBef>
+              <a:spcAft>
+                <a:spcPts val="0"/>
+              </a:spcAft>
+              <a:buClr>
+                <a:schemeClr val="dk1"/>
+              </a:buClr>
+              <a:buSzPts val="1100"/>
+              <a:buFont typeface="Arial"/>
+              <a:buNone/>
+            </a:pPr>
+            <a:r>
+              <a:t/>
+            </a:r>
+            <a:endParaRPr sz="2000"/>
+          </a:p>
+          <a:p>
+            <a:pPr indent="0" lvl="0" marL="0" rtl="0" algn="l">
+              <a:spcBef>
+                <a:spcPts val="0"/>
+              </a:spcBef>
+              <a:spcAft>
+                <a:spcPts val="0"/>
+              </a:spcAft>
+              <a:buClr>
+                <a:schemeClr val="dk1"/>
+              </a:buClr>
+              <a:buSzPts val="1100"/>
+              <a:buFont typeface="Arial"/>
+              <a:buNone/>
+            </a:pPr>
+            <a:r>
+              <a:rPr lang="en" sz="2000"/>
+              <a:t>__global__ void gOut(){</a:t>
+            </a:r>
+            <a:endParaRPr sz="2000"/>
+          </a:p>
+          <a:p>
+            <a:pPr indent="0" lvl="0" marL="0" rtl="0" algn="l">
+              <a:spcBef>
+                <a:spcPts val="0"/>
+              </a:spcBef>
+              <a:spcAft>
+                <a:spcPts val="0"/>
+              </a:spcAft>
+              <a:buClr>
+                <a:schemeClr val="dk1"/>
+              </a:buClr>
+              <a:buSzPts val="1100"/>
+              <a:buFont typeface="Arial"/>
+              <a:buNone/>
+            </a:pPr>
+            <a:r>
+              <a:rPr lang="en" sz="2000"/>
+              <a:t>    printf("B %g\tC: %g\n", B[blockIdx.x], C[blockIdx.x]);</a:t>
+            </a:r>
+            <a:endParaRPr sz="2000"/>
+          </a:p>
+          <a:p>
+            <a:pPr indent="0" lvl="0" marL="0" rtl="0" algn="l">
+              <a:spcBef>
+                <a:spcPts val="0"/>
+              </a:spcBef>
+              <a:spcAft>
+                <a:spcPts val="0"/>
+              </a:spcAft>
+              <a:buClr>
+                <a:schemeClr val="dk1"/>
+              </a:buClr>
+              <a:buSzPts val="1100"/>
+              <a:buFont typeface="Arial"/>
+              <a:buNone/>
+            </a:pPr>
+            <a:r>
+              <a:rPr lang="en" sz="2000"/>
+              <a:t>}</a:t>
+            </a:r>
+            <a:endParaRPr sz="2000"/>
+          </a:p>
+          <a:p>
+            <a:pPr indent="0" lvl="0" marL="0" rtl="0" algn="l">
+              <a:spcBef>
+                <a:spcPts val="0"/>
+              </a:spcBef>
+              <a:spcAft>
+                <a:spcPts val="0"/>
+              </a:spcAft>
+              <a:buNone/>
+            </a:pPr>
+            <a:r>
+              <a:t/>
+            </a:r>
+            <a:endParaRPr sz="1800"/>
+          </a:p>
+        </p:txBody>
+      </p:sp>
       <p:sp>
         <p:nvSpPr>
-          <p:cNvPr id="109" name="Google Shape;109;p22"/>
+          <p:cNvPr id="104" name="Google Shape;104;p22"/>
           <p:cNvSpPr txBox="1"/>
           <p:nvPr/>
         </p:nvSpPr>
         <p:spPr>
           <a:xfrm>
-            <a:off x="4064750" y="2013050"/>
-            <a:ext cx="4960200" cy="492600"/>
+            <a:off x="6232700" y="496200"/>
+            <a:ext cx="2017200" cy="332700"/>
           </a:xfrm>
           <a:prstGeom prst="rect">
             <a:avLst/>
           </a:prstGeom>
           <a:solidFill>
-            <a:srgbClr val="D9D9D9"/>
+            <a:srgbClr val="C9DAF8"/>
+          </a:solidFill>
+          <a:ln cap="flat" cmpd="sng" w="9525">
+            <a:solidFill>
+              <a:schemeClr val="dk1"/>
+            </a:solidFill>
+            <a:prstDash val="solid"/>
+            <a:round/>
+            <a:headEnd len="sm" w="sm" type="none"/>
+            <a:tailEnd len="sm" w="sm" type="none"/>
+          </a:ln>
+        </p:spPr>
+        <p:txBody>
+          <a:bodyPr anchorCtr="0" anchor="ctr" bIns="91425" lIns="91425" spcFirstLastPara="1" rIns="91425" wrap="square" tIns="91425">
+            <a:noAutofit/>
+          </a:bodyPr>
+          <a:lstStyle/>
+          <a:p>
+            <a:pPr indent="0" lvl="0" marL="0" rtl="0" algn="l">
+              <a:spcBef>
+                <a:spcPts val="0"/>
+              </a:spcBef>
+              <a:spcAft>
+                <a:spcPts val="0"/>
+              </a:spcAft>
+              <a:buClr>
+                <a:schemeClr val="dk1"/>
+              </a:buClr>
+              <a:buSzPts val="1100"/>
+              <a:buFont typeface="Arial"/>
+              <a:buNone/>
+            </a:pPr>
+            <a:r>
+              <a:rPr b="1" i="1" lang="en" sz="2000">
+                <a:solidFill>
+                  <a:schemeClr val="dk1"/>
+                </a:solidFill>
+              </a:rPr>
+              <a:t>test_mem2.cu</a:t>
+            </a:r>
+            <a:endParaRPr sz="1800"/>
+          </a:p>
+        </p:txBody>
+      </p:sp>
+      <p:sp>
+        <p:nvSpPr>
+          <p:cNvPr id="105" name="Google Shape;105;p22"/>
+          <p:cNvSpPr txBox="1"/>
+          <p:nvPr/>
+        </p:nvSpPr>
+        <p:spPr>
+          <a:xfrm>
+            <a:off x="131100" y="3693225"/>
+            <a:ext cx="8804400" cy="514500"/>
+          </a:xfrm>
+          <a:prstGeom prst="rect">
+            <a:avLst/>
+          </a:prstGeom>
+          <a:solidFill>
+            <a:srgbClr val="EFEFEF"/>
           </a:solidFill>
           <a:ln>
             <a:noFill/>
@@ -15012,7 +15677,7 @@
         </p:spPr>
         <p:txBody>
           <a:bodyPr anchorCtr="0" anchor="t" bIns="91425" lIns="91425" spcFirstLastPara="1" rIns="91425" wrap="square" tIns="91425">
-            <a:spAutoFit/>
+            <a:noAutofit/>
           </a:bodyPr>
           <a:lstStyle/>
           <a:p>
@@ -15023,13 +15688,88 @@
               <a:spcAft>
                 <a:spcPts val="0"/>
               </a:spcAft>
-              <a:buNone/>
-            </a:pPr>
-            <a:r>
-              <a:rPr lang="en" sz="2000"/>
-              <a:t>Интеграл по сфере функции g(φ, ψ):</a:t>
-            </a:r>
-            <a:endParaRPr/>
+              <a:buClr>
+                <a:schemeClr val="dk1"/>
+              </a:buClr>
+              <a:buSzPts val="1100"/>
+              <a:buFont typeface="Arial"/>
+              <a:buNone/>
+            </a:pPr>
+            <a:r>
+              <a:rPr lang="en" sz="2000">
+                <a:solidFill>
+                  <a:schemeClr val="dk1"/>
+                </a:solidFill>
+                <a:highlight>
+                  <a:srgbClr val="EFEFEF"/>
+                </a:highlight>
+              </a:rPr>
+              <a:t>~/Lab7&gt; nvcc </a:t>
+            </a:r>
+            <a:r>
+              <a:rPr b="1" lang="en" sz="2000">
+                <a:solidFill>
+                  <a:schemeClr val="dk1"/>
+                </a:solidFill>
+                <a:highlight>
+                  <a:srgbClr val="EFEFEF"/>
+                </a:highlight>
+              </a:rPr>
+              <a:t>-rdc=true</a:t>
+            </a:r>
+            <a:r>
+              <a:rPr lang="en" sz="2000">
+                <a:solidFill>
+                  <a:schemeClr val="dk1"/>
+                </a:solidFill>
+                <a:highlight>
+                  <a:srgbClr val="EFEFEF"/>
+                </a:highlight>
+              </a:rPr>
+              <a:t>   test_mem.cu   test_mem2.cu -o test_mem</a:t>
+            </a:r>
+            <a:r>
+              <a:rPr lang="en" sz="1100">
+                <a:solidFill>
+                  <a:schemeClr val="dk1"/>
+                </a:solidFill>
+                <a:highlight>
+                  <a:srgbClr val="EFEFEF"/>
+                </a:highlight>
+                <a:latin typeface="Courier New"/>
+                <a:ea typeface="Courier New"/>
+                <a:cs typeface="Courier New"/>
+                <a:sym typeface="Courier New"/>
+              </a:rPr>
+              <a:t> </a:t>
+            </a:r>
+            <a:endParaRPr sz="1100">
+              <a:solidFill>
+                <a:schemeClr val="dk1"/>
+              </a:solidFill>
+              <a:highlight>
+                <a:srgbClr val="EFEFEF"/>
+              </a:highlight>
+              <a:latin typeface="Courier New"/>
+              <a:ea typeface="Courier New"/>
+              <a:cs typeface="Courier New"/>
+              <a:sym typeface="Courier New"/>
+            </a:endParaRPr>
+          </a:p>
+          <a:p>
+            <a:pPr indent="0" lvl="0" marL="0" rtl="0" algn="l">
+              <a:spcBef>
+                <a:spcPts val="0"/>
+              </a:spcBef>
+              <a:spcAft>
+                <a:spcPts val="0"/>
+              </a:spcAft>
+              <a:buNone/>
+            </a:pPr>
+            <a:r>
+              <a:t/>
+            </a:r>
+            <a:endParaRPr sz="1800"/>
           </a:p>
         </p:txBody>
       </p:sp>
@@ -15046,7 +15786,7 @@
   <p:cSld>
     <p:spTree>
       <p:nvGrpSpPr>
-        <p:cNvPr id="113" name="Shape 113"/>
+        <p:cNvPr id="109" name="Shape 109"/>
         <p:cNvGrpSpPr/>
         <p:nvPr/>
       </p:nvGrpSpPr>
@@ -15058,133 +15798,23 @@
           <a:chExt cx="0" cy="0"/>
         </a:xfrm>
       </p:grpSpPr>
-      <p:pic>
-        <p:nvPicPr>
-          <p:cNvPr id="114" name="Google Shape;114;p23"/>
-          <p:cNvPicPr preferRelativeResize="0"/>
-          <p:nvPr/>
-        </p:nvPicPr>
-        <p:blipFill>
-          <a:blip r:embed="rId3">
-            <a:alphaModFix/>
-          </a:blip>
-          <a:stretch>
-            <a:fillRect/>
-          </a:stretch>
-        </p:blipFill>
-        <p:spPr>
-          <a:xfrm>
-            <a:off x="152400" y="1295400"/>
-            <a:ext cx="8839200" cy="3490640"/>
-          </a:xfrm>
-          <a:prstGeom prst="rect">
-            <a:avLst/>
-          </a:prstGeom>
-          <a:noFill/>
-          <a:ln>
-            <a:noFill/>
-          </a:ln>
-        </p:spPr>
-      </p:pic>
       <p:sp>
         <p:nvSpPr>
-          <p:cNvPr id="115" name="Google Shape;115;p23"/>
+          <p:cNvPr id="110" name="Google Shape;110;p23"/>
           <p:cNvSpPr txBox="1"/>
           <p:nvPr/>
         </p:nvSpPr>
         <p:spPr>
           <a:xfrm>
-            <a:off x="990600" y="26428"/>
-            <a:ext cx="7086600" cy="833400"/>
+            <a:off x="100850" y="626175"/>
+            <a:ext cx="8976000" cy="3580200"/>
           </a:xfrm>
           <a:prstGeom prst="rect">
             <a:avLst/>
           </a:prstGeom>
           <a:solidFill>
-            <a:srgbClr val="FFCC00"/>
+            <a:srgbClr val="EFEFEF"/>
           </a:solidFill>
-          <a:ln>
-            <a:noFill/>
-          </a:ln>
-        </p:spPr>
-        <p:txBody>
-          <a:bodyPr anchorCtr="0" anchor="t" bIns="46800" lIns="90000" spcFirstLastPara="1" rIns="90000" wrap="square" tIns="46800">
-            <a:spAutoFit/>
-          </a:bodyPr>
-          <a:lstStyle/>
-          <a:p>
-            <a:pPr indent="0" lvl="0" marL="0" marR="0" rtl="0" algn="ctr">
-              <a:lnSpc>
-                <a:spcPct val="100000"/>
-              </a:lnSpc>
-              <a:spcBef>
-                <a:spcPts val="0"/>
-              </a:spcBef>
-              <a:spcAft>
-                <a:spcPts val="0"/>
-              </a:spcAft>
-              <a:buClr>
-                <a:schemeClr val="dk1"/>
-              </a:buClr>
-              <a:buSzPts val="1100"/>
-              <a:buFont typeface="Arial"/>
-              <a:buNone/>
-            </a:pPr>
-            <a:r>
-              <a:rPr b="1" lang="en" sz="2400"/>
-              <a:t>Текстуры: аппаратная интерполяция</a:t>
-            </a:r>
-            <a:endParaRPr b="1" sz="2400"/>
-          </a:p>
-          <a:p>
-            <a:pPr indent="0" lvl="0" marL="0" marR="0" rtl="0" algn="ctr">
-              <a:lnSpc>
-                <a:spcPct val="100000"/>
-              </a:lnSpc>
-              <a:spcBef>
-                <a:spcPts val="0"/>
-              </a:spcBef>
-              <a:spcAft>
-                <a:spcPts val="0"/>
-              </a:spcAft>
-              <a:buClr>
-                <a:schemeClr val="dk1"/>
-              </a:buClr>
-              <a:buSzPts val="1100"/>
-              <a:buFont typeface="Arial"/>
-              <a:buNone/>
-            </a:pPr>
-            <a:r>
-              <a:rPr b="1" lang="en" sz="2400"/>
-              <a:t>(пример использования)</a:t>
-            </a:r>
-            <a:endParaRPr b="1" sz="2400"/>
-          </a:p>
-        </p:txBody>
-      </p:sp>
-      <p:pic>
-        <p:nvPicPr>
-          <p:cNvPr id="116" name="Google Shape;116;p23"/>
-          <p:cNvPicPr preferRelativeResize="0"/>
-          <p:nvPr/>
-        </p:nvPicPr>
-        <p:blipFill>
-          <a:blip r:embed="rId4">
-            <a:alphaModFix/>
-          </a:blip>
-          <a:stretch>
-            <a:fillRect/>
-          </a:stretch>
-        </p:blipFill>
-        <p:spPr>
-          <a:xfrm>
-            <a:off x="3539550" y="1774678"/>
-            <a:ext cx="2476500" cy="1371600"/>
-          </a:xfrm>
-          <a:prstGeom prst="rect">
-            <a:avLst/>
-          </a:prstGeom>
-          <a:noFill/>
           <a:ln cap="flat" cmpd="sng" w="9525">
             <a:solidFill>
               <a:schemeClr val="dk1"/>
@@ -15195,7 +15825,330 @@
             <a:tailEnd len="sm" w="sm" type="none"/>
           </a:ln>
         </p:spPr>
-      </p:pic>
+        <p:txBody>
+          <a:bodyPr anchorCtr="0" anchor="t" bIns="91425" lIns="91425" spcFirstLastPara="1" rIns="91425" wrap="square" tIns="91425">
+            <a:noAutofit/>
+          </a:bodyPr>
+          <a:lstStyle/>
+          <a:p>
+            <a:pPr indent="0" lvl="0" marL="0" rtl="0" algn="l">
+              <a:spcBef>
+                <a:spcPts val="0"/>
+              </a:spcBef>
+              <a:spcAft>
+                <a:spcPts val="0"/>
+              </a:spcAft>
+              <a:buClr>
+                <a:schemeClr val="dk1"/>
+              </a:buClr>
+              <a:buSzPts val="1100"/>
+              <a:buFont typeface="Arial"/>
+              <a:buNone/>
+            </a:pPr>
+            <a:r>
+              <a:rPr lang="en" sz="1900">
+                <a:solidFill>
+                  <a:schemeClr val="dk1"/>
+                </a:solidFill>
+                <a:highlight>
+                  <a:srgbClr val="EFEFEF"/>
+                </a:highlight>
+              </a:rPr>
+              <a:t>7&gt; </a:t>
+            </a:r>
+            <a:r>
+              <a:rPr b="1" lang="en" sz="1900">
+                <a:solidFill>
+                  <a:schemeClr val="dk1"/>
+                </a:solidFill>
+                <a:highlight>
+                  <a:srgbClr val="EFEFEF"/>
+                </a:highlight>
+              </a:rPr>
+              <a:t>nvprof ./test_mem &gt; test.txt</a:t>
+            </a:r>
+            <a:endParaRPr b="1" sz="1900">
+              <a:solidFill>
+                <a:schemeClr val="dk1"/>
+              </a:solidFill>
+              <a:highlight>
+                <a:srgbClr val="EFEFEF"/>
+              </a:highlight>
+            </a:endParaRPr>
+          </a:p>
+          <a:p>
+            <a:pPr indent="0" lvl="0" marL="0" rtl="0" algn="l">
+              <a:spcBef>
+                <a:spcPts val="0"/>
+              </a:spcBef>
+              <a:spcAft>
+                <a:spcPts val="0"/>
+              </a:spcAft>
+              <a:buClr>
+                <a:schemeClr val="dk1"/>
+              </a:buClr>
+              <a:buSzPts val="1100"/>
+              <a:buFont typeface="Arial"/>
+              <a:buNone/>
+            </a:pPr>
+            <a:r>
+              <a:rPr lang="en" sz="1900">
+                <a:solidFill>
+                  <a:schemeClr val="dk1"/>
+                </a:solidFill>
+              </a:rPr>
+              <a:t>==9251== NVPROF is profiling process 9251, command: ./test_mem</a:t>
+            </a:r>
+            <a:endParaRPr sz="1900">
+              <a:solidFill>
+                <a:schemeClr val="dk1"/>
+              </a:solidFill>
+            </a:endParaRPr>
+          </a:p>
+          <a:p>
+            <a:pPr indent="0" lvl="0" marL="0" rtl="0" algn="l">
+              <a:spcBef>
+                <a:spcPts val="0"/>
+              </a:spcBef>
+              <a:spcAft>
+                <a:spcPts val="0"/>
+              </a:spcAft>
+              <a:buClr>
+                <a:schemeClr val="dk1"/>
+              </a:buClr>
+              <a:buSzPts val="1100"/>
+              <a:buFont typeface="Arial"/>
+              <a:buNone/>
+            </a:pPr>
+            <a:r>
+              <a:rPr lang="en" sz="1900">
+                <a:solidFill>
+                  <a:schemeClr val="dk1"/>
+                </a:solidFill>
+              </a:rPr>
+              <a:t>==9251== Profiling application: ./test_mem</a:t>
+            </a:r>
+            <a:endParaRPr sz="1900">
+              <a:solidFill>
+                <a:schemeClr val="dk1"/>
+              </a:solidFill>
+            </a:endParaRPr>
+          </a:p>
+          <a:p>
+            <a:pPr indent="0" lvl="0" marL="0" rtl="0" algn="l">
+              <a:spcBef>
+                <a:spcPts val="0"/>
+              </a:spcBef>
+              <a:spcAft>
+                <a:spcPts val="0"/>
+              </a:spcAft>
+              <a:buClr>
+                <a:schemeClr val="dk1"/>
+              </a:buClr>
+              <a:buSzPts val="1100"/>
+              <a:buFont typeface="Arial"/>
+              <a:buNone/>
+            </a:pPr>
+            <a:r>
+              <a:rPr lang="en" sz="1900">
+                <a:solidFill>
+                  <a:schemeClr val="dk1"/>
+                </a:solidFill>
+              </a:rPr>
+              <a:t>==9251== Profiling result:</a:t>
+            </a:r>
+            <a:endParaRPr sz="1900">
+              <a:solidFill>
+                <a:schemeClr val="dk1"/>
+              </a:solidFill>
+            </a:endParaRPr>
+          </a:p>
+          <a:p>
+            <a:pPr indent="0" lvl="0" marL="0" rtl="0" algn="l">
+              <a:spcBef>
+                <a:spcPts val="0"/>
+              </a:spcBef>
+              <a:spcAft>
+                <a:spcPts val="0"/>
+              </a:spcAft>
+              <a:buClr>
+                <a:schemeClr val="dk1"/>
+              </a:buClr>
+              <a:buSzPts val="1100"/>
+              <a:buFont typeface="Arial"/>
+              <a:buNone/>
+            </a:pPr>
+            <a:r>
+              <a:rPr lang="en" sz="1900">
+                <a:solidFill>
+                  <a:schemeClr val="dk1"/>
+                </a:solidFill>
+              </a:rPr>
+              <a:t>           Type  Time(%)      Time     Calls       Avg       Min       Max  Name</a:t>
+            </a:r>
+            <a:endParaRPr sz="1900">
+              <a:solidFill>
+                <a:schemeClr val="dk1"/>
+              </a:solidFill>
+            </a:endParaRPr>
+          </a:p>
+          <a:p>
+            <a:pPr indent="0" lvl="0" marL="0" rtl="0" algn="l">
+              <a:spcBef>
+                <a:spcPts val="0"/>
+              </a:spcBef>
+              <a:spcAft>
+                <a:spcPts val="0"/>
+              </a:spcAft>
+              <a:buClr>
+                <a:schemeClr val="dk1"/>
+              </a:buClr>
+              <a:buSzPts val="1100"/>
+              <a:buFont typeface="Arial"/>
+              <a:buNone/>
+            </a:pPr>
+            <a:r>
+              <a:rPr lang="en" sz="1900">
+                <a:solidFill>
+                  <a:schemeClr val="dk1"/>
+                </a:solidFill>
+              </a:rPr>
+              <a:t>GPU activities:   99.84%  2.8895ms         1  2.8895ms  2.8895ms  2.8895ms  gOut(void)</a:t>
+            </a:r>
+            <a:endParaRPr sz="1900">
+              <a:solidFill>
+                <a:schemeClr val="dk1"/>
+              </a:solidFill>
+            </a:endParaRPr>
+          </a:p>
+          <a:p>
+            <a:pPr indent="0" lvl="0" marL="0" rtl="0" algn="l">
+              <a:spcBef>
+                <a:spcPts val="0"/>
+              </a:spcBef>
+              <a:spcAft>
+                <a:spcPts val="0"/>
+              </a:spcAft>
+              <a:buClr>
+                <a:schemeClr val="dk1"/>
+              </a:buClr>
+              <a:buSzPts val="1100"/>
+              <a:buFont typeface="Arial"/>
+              <a:buNone/>
+            </a:pPr>
+            <a:r>
+              <a:rPr lang="en" sz="1900">
+                <a:solidFill>
+                  <a:schemeClr val="dk1"/>
+                </a:solidFill>
+              </a:rPr>
+              <a:t>                   0.05%  1.5360us         1  1.5360us  1.5360us  1.5360us  gInit(void)</a:t>
+            </a:r>
+            <a:endParaRPr sz="1900">
+              <a:solidFill>
+                <a:schemeClr val="dk1"/>
+              </a:solidFill>
+            </a:endParaRPr>
+          </a:p>
+          <a:p>
+            <a:pPr indent="0" lvl="0" marL="0" rtl="0" algn="l">
+              <a:spcBef>
+                <a:spcPts val="0"/>
+              </a:spcBef>
+              <a:spcAft>
+                <a:spcPts val="0"/>
+              </a:spcAft>
+              <a:buClr>
+                <a:schemeClr val="dk1"/>
+              </a:buClr>
+              <a:buSzPts val="1100"/>
+              <a:buFont typeface="Arial"/>
+              <a:buNone/>
+            </a:pPr>
+            <a:r>
+              <a:rPr lang="en" sz="1900">
+                <a:solidFill>
+                  <a:schemeClr val="dk1"/>
+                </a:solidFill>
+              </a:rPr>
+              <a:t>                   0.05%  1.4080us         1  1.4080us  1.4080us  1.4080us  gTestB(void)</a:t>
+            </a:r>
+            <a:endParaRPr sz="1900">
+              <a:solidFill>
+                <a:schemeClr val="dk1"/>
+              </a:solidFill>
+            </a:endParaRPr>
+          </a:p>
+          <a:p>
+            <a:pPr indent="0" lvl="0" marL="0" rtl="0" algn="l">
+              <a:spcBef>
+                <a:spcPts val="0"/>
+              </a:spcBef>
+              <a:spcAft>
+                <a:spcPts val="0"/>
+              </a:spcAft>
+              <a:buClr>
+                <a:schemeClr val="dk1"/>
+              </a:buClr>
+              <a:buSzPts val="1100"/>
+              <a:buFont typeface="Arial"/>
+              <a:buNone/>
+            </a:pPr>
+            <a:r>
+              <a:rPr lang="en" sz="1900">
+                <a:solidFill>
+                  <a:schemeClr val="dk1"/>
+                </a:solidFill>
+              </a:rPr>
+              <a:t>                   0.04%  1.2160us         1  1.2160us  1.2160us  1.2160us  gTestC(void)</a:t>
+            </a:r>
+            <a:endParaRPr sz="1900">
+              <a:solidFill>
+                <a:schemeClr val="dk1"/>
+              </a:solidFill>
+            </a:endParaRPr>
+          </a:p>
+          <a:p>
+            <a:pPr indent="0" lvl="0" marL="0" rtl="0" algn="l">
+              <a:spcBef>
+                <a:spcPts val="0"/>
+              </a:spcBef>
+              <a:spcAft>
+                <a:spcPts val="0"/>
+              </a:spcAft>
+              <a:buClr>
+                <a:schemeClr val="dk1"/>
+              </a:buClr>
+              <a:buSzPts val="1100"/>
+              <a:buFont typeface="Arial"/>
+              <a:buNone/>
+            </a:pPr>
+            <a:r>
+              <a:t/>
+            </a:r>
+            <a:endParaRPr sz="1900">
+              <a:solidFill>
+                <a:schemeClr val="dk1"/>
+              </a:solidFill>
+            </a:endParaRPr>
+          </a:p>
+          <a:p>
+            <a:pPr indent="0" lvl="0" marL="0" rtl="0" algn="l">
+              <a:spcBef>
+                <a:spcPts val="0"/>
+              </a:spcBef>
+              <a:spcAft>
+                <a:spcPts val="0"/>
+              </a:spcAft>
+              <a:buNone/>
+            </a:pPr>
+            <a:r>
+              <a:t/>
+            </a:r>
+            <a:endParaRPr sz="1800"/>
+          </a:p>
+        </p:txBody>
+      </p:sp>
     </p:spTree>
   </p:cSld>
   <p:clrMapOvr>
@@ -15484,6 +16437,285 @@
 </file>
 
 <file path=ppt/theme/theme2.xml><?xml version="1.0" encoding="utf-8"?>
+<a:theme xmlns:a="http://schemas.openxmlformats.org/drawingml/2006/main" xmlns:r="http://schemas.openxmlformats.org/officeDocument/2006/relationships">
+  <a:themeElements>
+    <a:clrScheme name="Default">
+      <a:dk1>
+        <a:srgbClr val="000000"/>
+      </a:dk1>
+      <a:lt1>
+        <a:srgbClr val="FFFFFF"/>
+      </a:lt1>
+      <a:dk2>
+        <a:srgbClr val="158158"/>
+      </a:dk2>
+      <a:lt2>
+        <a:srgbClr val="F3F3F3"/>
+      </a:lt2>
+      <a:accent1>
+        <a:srgbClr val="058DC7"/>
+      </a:accent1>
+      <a:accent2>
+        <a:srgbClr val="50B432"/>
+      </a:accent2>
+      <a:accent3>
+        <a:srgbClr val="ED561B"/>
+      </a:accent3>
+      <a:accent4>
+        <a:srgbClr val="EDEF00"/>
+      </a:accent4>
+      <a:accent5>
+        <a:srgbClr val="24CBE5"/>
+      </a:accent5>
+      <a:accent6>
+        <a:srgbClr val="64E572"/>
+      </a:accent6>
+      <a:hlink>
+        <a:srgbClr val="2200CC"/>
+      </a:hlink>
+      <a:folHlink>
+        <a:srgbClr val="551A8B"/>
+      </a:folHlink>
+    </a:clrScheme>
+    <a:fontScheme name="Office">
+      <a:majorFont>
+        <a:latin typeface="Arial"/>
+        <a:ea typeface=""/>
+        <a:cs typeface=""/>
+        <a:font script="Jpan" typeface="ＭＳ Ｐゴシック"/>
+        <a:font script="Hang" typeface="맑은 고딕"/>
+        <a:font script="Hans" typeface="宋体"/>
+        <a:font script="Hant" typeface="新細明體"/>
+        <a:font script="Arab" typeface="Times New Roman"/>
+        <a:font script="Hebr" typeface="Times New Roman"/>
+        <a:font script="Thai" typeface="Angsana New"/>
+        <a:font script="Ethi" typeface="Nyala"/>
+        <a:font script="Beng" typeface="Vrinda"/>
+        <a:font script="Gujr" typeface="Shruti"/>
+        <a:font script="Khmr" typeface="MoolBoran"/>
+        <a:font script="Knda" typeface="Tunga"/>
+        <a:font script="Guru" typeface="Raavi"/>
+        <a:font script="Cans" typeface="Euphemia"/>
+        <a:font script="Cher" typeface="Plantagenet Cherokee"/>
+        <a:font script="Yiii" typeface="Microsoft Yi Baiti"/>
+        <a:font script="Tibt" typeface="Microsoft Himalaya"/>
+        <a:font script="Thaa" typeface="MV Boli"/>
+        <a:font script="Deva" typeface="Mangal"/>
+        <a:font script="Telu" typeface="Gautami"/>
+        <a:font script="Taml" typeface="Latha"/>
+        <a:font script="Syrc" typeface="Estrangelo Edessa"/>
+        <a:font script="Orya" typeface="Kalinga"/>
+        <a:font script="Mlym" typeface="Kartika"/>
+        <a:font script="Laoo" typeface="DokChampa"/>
+        <a:font script="Sinh" typeface="Iskoola Pota"/>
+        <a:font script="Mong" typeface="Mongolian Baiti"/>
+        <a:font script="Viet" typeface="Times New Roman"/>
+        <a:font script="Uigh" typeface="Microsoft Uighur"/>
+        <a:font script="Geor" typeface="Sylfaen"/>
+      </a:majorFont>
+      <a:minorFont>
+        <a:latin typeface="Arial"/>
+        <a:ea typeface=""/>
+        <a:cs typeface=""/>
+        <a:font script="Jpan" typeface="ＭＳ Ｐゴシック"/>
+        <a:font script="Hang" typeface="맑은 고딕"/>
+        <a:font script="Hans" typeface="宋体"/>
+        <a:font script="Hant" typeface="新細明體"/>
+        <a:font script="Arab" typeface="Arial"/>
+        <a:font script="Hebr" typeface="Arial"/>
+        <a:font script="Thai" typeface="Cordia New"/>
+        <a:font script="Ethi" typeface="Nyala"/>
+        <a:font script="Beng" typeface="Vrinda"/>
+        <a:font script="Gujr" typeface="Shruti"/>
+        <a:font script="Khmr" typeface="DaunPenh"/>
+        <a:font script="Knda" typeface="Tunga"/>
+        <a:font script="Guru" typeface="Raavi"/>
+        <a:font script="Cans" typeface="Euphemia"/>
+        <a:font script="Cher" typeface="Plantagenet Cherokee"/>
+        <a:font script="Yiii" typeface="Microsoft Yi Baiti"/>
+        <a:font script="Tibt" typeface="Microsoft Himalaya"/>
+        <a:font script="Thaa" typeface="MV Boli"/>
+        <a:font script="Deva" typeface="Mangal"/>
+        <a:font script="Telu" typeface="Gautami"/>
+        <a:font script="Taml" typeface="Latha"/>
+        <a:font script="Syrc" typeface="Estrangelo Edessa"/>
+        <a:font script="Orya" typeface="Kalinga"/>
+        <a:font script="Mlym" typeface="Kartika"/>
+        <a:font script="Laoo" typeface="DokChampa"/>
+        <a:font script="Sinh" typeface="Iskoola Pota"/>
+        <a:font script="Mong" typeface="Mongolian Baiti"/>
+        <a:font script="Viet" typeface="Arial"/>
+        <a:font script="Uigh" typeface="Microsoft Uighur"/>
+        <a:font script="Geor" typeface="Sylfaen"/>
+      </a:minorFont>
+    </a:fontScheme>
+    <a:fmtScheme name="Office">
+      <a:fillStyleLst>
+        <a:solidFill>
+          <a:schemeClr val="phClr"/>
+        </a:solidFill>
+        <a:gradFill rotWithShape="1">
+          <a:gsLst>
+            <a:gs pos="0">
+              <a:schemeClr val="phClr">
+                <a:tint val="50000"/>
+                <a:satMod val="300000"/>
+              </a:schemeClr>
+            </a:gs>
+            <a:gs pos="35000">
+              <a:schemeClr val="phClr">
+                <a:tint val="37000"/>
+                <a:satMod val="300000"/>
+              </a:schemeClr>
+            </a:gs>
+            <a:gs pos="100000">
+              <a:schemeClr val="phClr">
+                <a:tint val="15000"/>
+                <a:satMod val="350000"/>
+              </a:schemeClr>
+            </a:gs>
+          </a:gsLst>
+          <a:lin ang="16200000" scaled="1"/>
+        </a:gradFill>
+        <a:gradFill rotWithShape="1">
+          <a:gsLst>
+            <a:gs pos="0">
+              <a:schemeClr val="phClr">
+                <a:tint val="100000"/>
+                <a:shade val="100000"/>
+                <a:satMod val="130000"/>
+              </a:schemeClr>
+            </a:gs>
+            <a:gs pos="100000">
+              <a:schemeClr val="phClr">
+                <a:tint val="50000"/>
+                <a:shade val="100000"/>
+                <a:satMod val="350000"/>
+              </a:schemeClr>
+            </a:gs>
+          </a:gsLst>
+          <a:lin ang="16200000" scaled="0"/>
+        </a:gradFill>
+      </a:fillStyleLst>
+      <a:lnStyleLst>
+        <a:ln w="9525" cap="flat" cmpd="sng" algn="ctr">
+          <a:solidFill>
+            <a:schemeClr val="phClr">
+              <a:shade val="95000"/>
+              <a:satMod val="105000"/>
+            </a:schemeClr>
+          </a:solidFill>
+          <a:prstDash val="solid"/>
+        </a:ln>
+        <a:ln w="25400" cap="flat" cmpd="sng" algn="ctr">
+          <a:solidFill>
+            <a:schemeClr val="phClr"/>
+          </a:solidFill>
+          <a:prstDash val="solid"/>
+        </a:ln>
+        <a:ln w="38100" cap="flat" cmpd="sng" algn="ctr">
+          <a:solidFill>
+            <a:schemeClr val="phClr"/>
+          </a:solidFill>
+          <a:prstDash val="solid"/>
+        </a:ln>
+      </a:lnStyleLst>
+      <a:effectStyleLst>
+        <a:effectStyle>
+          <a:effectLst>
+            <a:outerShdw blurRad="40000" dist="20000" dir="5400000" rotWithShape="0">
+              <a:srgbClr val="000000">
+                <a:alpha val="38000"/>
+              </a:srgbClr>
+            </a:outerShdw>
+          </a:effectLst>
+        </a:effectStyle>
+        <a:effectStyle>
+          <a:effectLst>
+            <a:outerShdw blurRad="40000" dist="23000" dir="5400000" rotWithShape="0">
+              <a:srgbClr val="000000">
+                <a:alpha val="35000"/>
+              </a:srgbClr>
+            </a:outerShdw>
+          </a:effectLst>
+        </a:effectStyle>
+        <a:effectStyle>
+          <a:effectLst>
+            <a:outerShdw blurRad="40000" dist="23000" dir="5400000" rotWithShape="0">
+              <a:srgbClr val="000000">
+                <a:alpha val="35000"/>
+              </a:srgbClr>
+            </a:outerShdw>
+          </a:effectLst>
+          <a:scene3d>
+            <a:camera prst="orthographicFront">
+              <a:rot lat="0" lon="0" rev="0"/>
+            </a:camera>
+            <a:lightRig rig="threePt" dir="t">
+              <a:rot lat="0" lon="0" rev="1200000"/>
+            </a:lightRig>
+          </a:scene3d>
+          <a:sp3d>
+            <a:bevelT w="63500" h="25400"/>
+          </a:sp3d>
+        </a:effectStyle>
+      </a:effectStyleLst>
+      <a:bgFillStyleLst>
+        <a:solidFill>
+          <a:schemeClr val="phClr"/>
+        </a:solidFill>
+        <a:gradFill rotWithShape="1">
+          <a:gsLst>
+            <a:gs pos="0">
+              <a:schemeClr val="phClr">
+                <a:tint val="40000"/>
+                <a:satMod val="350000"/>
+              </a:schemeClr>
+            </a:gs>
+            <a:gs pos="40000">
+              <a:schemeClr val="phClr">
+                <a:tint val="45000"/>
+                <a:shade val="99000"/>
+                <a:satMod val="350000"/>
+              </a:schemeClr>
+            </a:gs>
+            <a:gs pos="100000">
+              <a:schemeClr val="phClr">
+                <a:shade val="20000"/>
+                <a:satMod val="255000"/>
+              </a:schemeClr>
+            </a:gs>
+          </a:gsLst>
+          <a:path path="circle">
+            <a:fillToRect l="50000" t="-80000" r="50000" b="180000"/>
+          </a:path>
+        </a:gradFill>
+        <a:gradFill rotWithShape="1">
+          <a:gsLst>
+            <a:gs pos="0">
+              <a:schemeClr val="phClr">
+                <a:tint val="80000"/>
+                <a:satMod val="300000"/>
+              </a:schemeClr>
+            </a:gs>
+            <a:gs pos="100000">
+              <a:schemeClr val="phClr">
+                <a:shade val="30000"/>
+                <a:satMod val="200000"/>
+              </a:schemeClr>
+            </a:gs>
+          </a:gsLst>
+          <a:path path="circle">
+            <a:fillToRect l="50000" t="50000" r="50000" b="50000"/>
+          </a:path>
+        </a:gradFill>
+      </a:bgFillStyleLst>
+    </a:fmtScheme>
+  </a:themeElements>
+</a:theme>
+</file>
+
+<file path=ppt/theme/theme3.xml><?xml version="1.0" encoding="utf-8"?>
 <a:theme xmlns:a="http://schemas.openxmlformats.org/drawingml/2006/main" xmlns:r="http://schemas.openxmlformats.org/officeDocument/2006/relationships" name="POI_THEME_TEMPLATE_DESIGN">
   <a:themeElements>
     <a:clrScheme name="POI_THEME_TEMPLATE_DESIGN">
@@ -15760,283 +16992,4 @@
     </a:fmtScheme>
   </a:themeElements>
 </a:theme>
-</file>
-
-<file path=ppt/theme/theme3.xml><?xml version="1.0" encoding="utf-8"?>
-<a:theme xmlns:a="http://schemas.openxmlformats.org/drawingml/2006/main" xmlns:r="http://schemas.openxmlformats.org/officeDocument/2006/relationships">
-  <a:themeElements>
-    <a:clrScheme name="Default">
-      <a:dk1>
-        <a:srgbClr val="000000"/>
-      </a:dk1>
-      <a:lt1>
-        <a:srgbClr val="FFFFFF"/>
-      </a:lt1>
-      <a:dk2>
-        <a:srgbClr val="158158"/>
-      </a:dk2>
-      <a:lt2>
-        <a:srgbClr val="F3F3F3"/>
-      </a:lt2>
-      <a:accent1>
-        <a:srgbClr val="058DC7"/>
-      </a:accent1>
-      <a:accent2>
-        <a:srgbClr val="50B432"/>
-      </a:accent2>
-      <a:accent3>
-        <a:srgbClr val="ED561B"/>
-      </a:accent3>
-      <a:accent4>
-        <a:srgbClr val="EDEF00"/>
-      </a:accent4>
-      <a:accent5>
-        <a:srgbClr val="24CBE5"/>
-      </a:accent5>
-      <a:accent6>
-        <a:srgbClr val="64E572"/>
-      </a:accent6>
-      <a:hlink>
-        <a:srgbClr val="2200CC"/>
-      </a:hlink>
-      <a:folHlink>
-        <a:srgbClr val="551A8B"/>
-      </a:folHlink>
-    </a:clrScheme>
-    <a:fontScheme name="Office">
-      <a:majorFont>
-        <a:latin typeface="Arial"/>
-        <a:ea typeface=""/>
-        <a:cs typeface=""/>
-        <a:font script="Jpan" typeface="ＭＳ Ｐゴシック"/>
-        <a:font script="Hang" typeface="맑은 고딕"/>
-        <a:font script="Hans" typeface="宋体"/>
-        <a:font script="Hant" typeface="新細明體"/>
-        <a:font script="Arab" typeface="Times New Roman"/>
-        <a:font script="Hebr" typeface="Times New Roman"/>
-        <a:font script="Thai" typeface="Angsana New"/>
-        <a:font script="Ethi" typeface="Nyala"/>
-        <a:font script="Beng" typeface="Vrinda"/>
-        <a:font script="Gujr" typeface="Shruti"/>
-        <a:font script="Khmr" typeface="MoolBoran"/>
-        <a:font script="Knda" typeface="Tunga"/>
-        <a:font script="Guru" typeface="Raavi"/>
-        <a:font script="Cans" typeface="Euphemia"/>
-        <a:font script="Cher" typeface="Plantagenet Cherokee"/>
-        <a:font script="Yiii" typeface="Microsoft Yi Baiti"/>
-        <a:font script="Tibt" typeface="Microsoft Himalaya"/>
-        <a:font script="Thaa" typeface="MV Boli"/>
-        <a:font script="Deva" typeface="Mangal"/>
-        <a:font script="Telu" typeface="Gautami"/>
-        <a:font script="Taml" typeface="Latha"/>
-        <a:font script="Syrc" typeface="Estrangelo Edessa"/>
-        <a:font script="Orya" typeface="Kalinga"/>
-        <a:font script="Mlym" typeface="Kartika"/>
-        <a:font script="Laoo" typeface="DokChampa"/>
-        <a:font script="Sinh" typeface="Iskoola Pota"/>
-        <a:font script="Mong" typeface="Mongolian Baiti"/>
-        <a:font script="Viet" typeface="Times New Roman"/>
-        <a:font script="Uigh" typeface="Microsoft Uighur"/>
-        <a:font script="Geor" typeface="Sylfaen"/>
-      </a:majorFont>
-      <a:minorFont>
-        <a:latin typeface="Arial"/>
-        <a:ea typeface=""/>
-        <a:cs typeface=""/>
-        <a:font script="Jpan" typeface="ＭＳ Ｐゴシック"/>
-        <a:font script="Hang" typeface="맑은 고딕"/>
-        <a:font script="Hans" typeface="宋体"/>
-        <a:font script="Hant" typeface="新細明體"/>
-        <a:font script="Arab" typeface="Arial"/>
-        <a:font script="Hebr" typeface="Arial"/>
-        <a:font script="Thai" typeface="Cordia New"/>
-        <a:font script="Ethi" typeface="Nyala"/>
-        <a:font script="Beng" typeface="Vrinda"/>
-        <a:font script="Gujr" typeface="Shruti"/>
-        <a:font script="Khmr" typeface="DaunPenh"/>
-        <a:font script="Knda" typeface="Tunga"/>
-        <a:font script="Guru" typeface="Raavi"/>
-        <a:font script="Cans" typeface="Euphemia"/>
-        <a:font script="Cher" typeface="Plantagenet Cherokee"/>
-        <a:font script="Yiii" typeface="Microsoft Yi Baiti"/>
-        <a:font script="Tibt" typeface="Microsoft Himalaya"/>
-        <a:font script="Thaa" typeface="MV Boli"/>
-        <a:font script="Deva" typeface="Mangal"/>
-        <a:font script="Telu" typeface="Gautami"/>
-        <a:font script="Taml" typeface="Latha"/>
-        <a:font script="Syrc" typeface="Estrangelo Edessa"/>
-        <a:font script="Orya" typeface="Kalinga"/>
-        <a:font script="Mlym" typeface="Kartika"/>
-        <a:font script="Laoo" typeface="DokChampa"/>
-        <a:font script="Sinh" typeface="Iskoola Pota"/>
-        <a:font script="Mong" typeface="Mongolian Baiti"/>
-        <a:font script="Viet" typeface="Arial"/>
-        <a:font script="Uigh" typeface="Microsoft Uighur"/>
-        <a:font script="Geor" typeface="Sylfaen"/>
-      </a:minorFont>
-    </a:fontScheme>
-    <a:fmtScheme name="Office">
-      <a:fillStyleLst>
-        <a:solidFill>
-          <a:schemeClr val="phClr"/>
-        </a:solidFill>
-        <a:gradFill rotWithShape="1">
-          <a:gsLst>
-            <a:gs pos="0">
-              <a:schemeClr val="phClr">
-                <a:tint val="50000"/>
-                <a:satMod val="300000"/>
-              </a:schemeClr>
-            </a:gs>
-            <a:gs pos="35000">
-              <a:schemeClr val="phClr">
-                <a:tint val="37000"/>
-                <a:satMod val="300000"/>
-              </a:schemeClr>
-            </a:gs>
-            <a:gs pos="100000">
-              <a:schemeClr val="phClr">
-                <a:tint val="15000"/>
-                <a:satMod val="350000"/>
-              </a:schemeClr>
-            </a:gs>
-          </a:gsLst>
-          <a:lin ang="16200000" scaled="1"/>
-        </a:gradFill>
-        <a:gradFill rotWithShape="1">
-          <a:gsLst>
-            <a:gs pos="0">
-              <a:schemeClr val="phClr">
-                <a:tint val="100000"/>
-                <a:shade val="100000"/>
-                <a:satMod val="130000"/>
-              </a:schemeClr>
-            </a:gs>
-            <a:gs pos="100000">
-              <a:schemeClr val="phClr">
-                <a:tint val="50000"/>
-                <a:shade val="100000"/>
-                <a:satMod val="350000"/>
-              </a:schemeClr>
-            </a:gs>
-          </a:gsLst>
-          <a:lin ang="16200000" scaled="0"/>
-        </a:gradFill>
-      </a:fillStyleLst>
-      <a:lnStyleLst>
-        <a:ln w="9525" cap="flat" cmpd="sng" algn="ctr">
-          <a:solidFill>
-            <a:schemeClr val="phClr">
-              <a:shade val="95000"/>
-              <a:satMod val="105000"/>
-            </a:schemeClr>
-          </a:solidFill>
-          <a:prstDash val="solid"/>
-        </a:ln>
-        <a:ln w="25400" cap="flat" cmpd="sng" algn="ctr">
-          <a:solidFill>
-            <a:schemeClr val="phClr"/>
-          </a:solidFill>
-          <a:prstDash val="solid"/>
-        </a:ln>
-        <a:ln w="38100" cap="flat" cmpd="sng" algn="ctr">
-          <a:solidFill>
-            <a:schemeClr val="phClr"/>
-          </a:solidFill>
-          <a:prstDash val="solid"/>
-        </a:ln>
-      </a:lnStyleLst>
-      <a:effectStyleLst>
-        <a:effectStyle>
-          <a:effectLst>
-            <a:outerShdw blurRad="40000" dist="20000" dir="5400000" rotWithShape="0">
-              <a:srgbClr val="000000">
-                <a:alpha val="38000"/>
-              </a:srgbClr>
-            </a:outerShdw>
-          </a:effectLst>
-        </a:effectStyle>
-        <a:effectStyle>
-          <a:effectLst>
-            <a:outerShdw blurRad="40000" dist="23000" dir="5400000" rotWithShape="0">
-              <a:srgbClr val="000000">
-                <a:alpha val="35000"/>
-              </a:srgbClr>
-            </a:outerShdw>
-          </a:effectLst>
-        </a:effectStyle>
-        <a:effectStyle>
-          <a:effectLst>
-            <a:outerShdw blurRad="40000" dist="23000" dir="5400000" rotWithShape="0">
-              <a:srgbClr val="000000">
-                <a:alpha val="35000"/>
-              </a:srgbClr>
-            </a:outerShdw>
-          </a:effectLst>
-          <a:scene3d>
-            <a:camera prst="orthographicFront">
-              <a:rot lat="0" lon="0" rev="0"/>
-            </a:camera>
-            <a:lightRig rig="threePt" dir="t">
-              <a:rot lat="0" lon="0" rev="1200000"/>
-            </a:lightRig>
-          </a:scene3d>
-          <a:sp3d>
-            <a:bevelT w="63500" h="25400"/>
-          </a:sp3d>
-        </a:effectStyle>
-      </a:effectStyleLst>
-      <a:bgFillStyleLst>
-        <a:solidFill>
-          <a:schemeClr val="phClr"/>
-        </a:solidFill>
-        <a:gradFill rotWithShape="1">
-          <a:gsLst>
-            <a:gs pos="0">
-              <a:schemeClr val="phClr">
-                <a:tint val="40000"/>
-                <a:satMod val="350000"/>
-              </a:schemeClr>
-            </a:gs>
-            <a:gs pos="40000">
-              <a:schemeClr val="phClr">
-                <a:tint val="45000"/>
-                <a:shade val="99000"/>
-                <a:satMod val="350000"/>
-              </a:schemeClr>
-            </a:gs>
-            <a:gs pos="100000">
-              <a:schemeClr val="phClr">
-                <a:shade val="20000"/>
-                <a:satMod val="255000"/>
-              </a:schemeClr>
-            </a:gs>
-          </a:gsLst>
-          <a:path path="circle">
-            <a:fillToRect l="50000" t="-80000" r="50000" b="180000"/>
-          </a:path>
-        </a:gradFill>
-        <a:gradFill rotWithShape="1">
-          <a:gsLst>
-            <a:gs pos="0">
-              <a:schemeClr val="phClr">
-                <a:tint val="80000"/>
-                <a:satMod val="300000"/>
-              </a:schemeClr>
-            </a:gs>
-            <a:gs pos="100000">
-              <a:schemeClr val="phClr">
-                <a:shade val="30000"/>
-                <a:satMod val="200000"/>
-              </a:schemeClr>
-            </a:gs>
-          </a:gsLst>
-          <a:path path="circle">
-            <a:fillToRect l="50000" t="50000" r="50000" b="50000"/>
-          </a:path>
-        </a:gradFill>
-      </a:bgFillStyleLst>
-    </a:fmtScheme>
-  </a:themeElements>
-</a:theme>
 </file>
--- a/Лекции/pptx/Лекция7-ПГП-2025.pptx
+++ b/Лекции/pptx/Лекция7-ПГП-2025.pptx
@@ -33,6 +33,10 @@
     <p:sldId id="277" r:id="rId28"/>
     <p:sldId id="278" r:id="rId29"/>
     <p:sldId id="279" r:id="rId30"/>
+    <p:sldId id="280" r:id="rId31"/>
+    <p:sldId id="281" r:id="rId32"/>
+    <p:sldId id="282" r:id="rId33"/>
+    <p:sldId id="283" r:id="rId34"/>
   </p:sldIdLst>
   <p:sldSz cy="5143500" cx="9144000"/>
   <p:notesSz cx="6858000" cy="9144000"/>
@@ -878,7 +882,7 @@
   <p:cSld>
     <p:spTree>
       <p:nvGrpSpPr>
-        <p:cNvPr id="111" name="Shape 111"/>
+        <p:cNvPr id="113" name="Shape 113"/>
         <p:cNvGrpSpPr/>
         <p:nvPr/>
       </p:nvGrpSpPr>
@@ -892,7 +896,7 @@
       </p:grpSpPr>
       <p:sp>
         <p:nvSpPr>
-          <p:cNvPr id="112" name="Google Shape;112;g2161acfc8a6_0_12:notes"/>
+          <p:cNvPr id="114" name="Google Shape;114;g342f475273b_0_0:notes"/>
           <p:cNvSpPr/>
           <p:nvPr>
             <p:ph idx="2" type="sldImg"/>
@@ -927,7 +931,7 @@
       </p:sp>
       <p:sp>
         <p:nvSpPr>
-          <p:cNvPr id="113" name="Google Shape;113;g2161acfc8a6_0_12:notes"/>
+          <p:cNvPr id="115" name="Google Shape;115;g342f475273b_0_0:notes"/>
           <p:cNvSpPr txBox="1"/>
           <p:nvPr>
             <p:ph idx="1" type="body"/>
@@ -977,7 +981,7 @@
   <p:cSld>
     <p:spTree>
       <p:nvGrpSpPr>
-        <p:cNvPr id="118" name="Shape 118"/>
+        <p:cNvPr id="120" name="Shape 120"/>
         <p:cNvGrpSpPr/>
         <p:nvPr/>
       </p:nvGrpSpPr>
@@ -991,7 +995,7 @@
       </p:grpSpPr>
       <p:sp>
         <p:nvSpPr>
-          <p:cNvPr id="119" name="Google Shape;119;g2161acfc8a6_0_18:notes"/>
+          <p:cNvPr id="121" name="Google Shape;121;g342f475273b_0_6:notes"/>
           <p:cNvSpPr/>
           <p:nvPr>
             <p:ph idx="2" type="sldImg"/>
@@ -1026,7 +1030,7 @@
       </p:sp>
       <p:sp>
         <p:nvSpPr>
-          <p:cNvPr id="120" name="Google Shape;120;g2161acfc8a6_0_18:notes"/>
+          <p:cNvPr id="122" name="Google Shape;122;g342f475273b_0_6:notes"/>
           <p:cNvSpPr txBox="1"/>
           <p:nvPr>
             <p:ph idx="1" type="body"/>
@@ -1076,7 +1080,7 @@
   <p:cSld>
     <p:spTree>
       <p:nvGrpSpPr>
-        <p:cNvPr id="126" name="Shape 126"/>
+        <p:cNvPr id="125" name="Shape 125"/>
         <p:cNvGrpSpPr/>
         <p:nvPr/>
       </p:nvGrpSpPr>
@@ -1090,7 +1094,7 @@
       </p:grpSpPr>
       <p:sp>
         <p:nvSpPr>
-          <p:cNvPr id="127" name="Google Shape;127;g2161acfc8a6_0_15:notes"/>
+          <p:cNvPr id="126" name="Google Shape;126;g342f475273b_0_3:notes"/>
           <p:cNvSpPr/>
           <p:nvPr>
             <p:ph idx="2" type="sldImg"/>
@@ -1125,7 +1129,7 @@
       </p:sp>
       <p:sp>
         <p:nvSpPr>
-          <p:cNvPr id="128" name="Google Shape;128;g2161acfc8a6_0_15:notes"/>
+          <p:cNvPr id="127" name="Google Shape;127;g342f475273b_0_3:notes"/>
           <p:cNvSpPr txBox="1"/>
           <p:nvPr>
             <p:ph idx="1" type="body"/>
@@ -1175,7 +1179,7 @@
   <p:cSld>
     <p:spTree>
       <p:nvGrpSpPr>
-        <p:cNvPr id="133" name="Shape 133"/>
+        <p:cNvPr id="130" name="Shape 130"/>
         <p:cNvGrpSpPr/>
         <p:nvPr/>
       </p:nvGrpSpPr>
@@ -1189,7 +1193,7 @@
       </p:grpSpPr>
       <p:sp>
         <p:nvSpPr>
-          <p:cNvPr id="134" name="Google Shape;134;g2161acfc8a6_0_41:notes"/>
+          <p:cNvPr id="131" name="Google Shape;131;g2161acfc8a6_0_18:notes"/>
           <p:cNvSpPr/>
           <p:nvPr>
             <p:ph idx="2" type="sldImg"/>
@@ -1224,7 +1228,7 @@
       </p:sp>
       <p:sp>
         <p:nvSpPr>
-          <p:cNvPr id="135" name="Google Shape;135;g2161acfc8a6_0_41:notes"/>
+          <p:cNvPr id="132" name="Google Shape;132;g2161acfc8a6_0_18:notes"/>
           <p:cNvSpPr txBox="1"/>
           <p:nvPr>
             <p:ph idx="1" type="body"/>
@@ -1274,7 +1278,7 @@
   <p:cSld>
     <p:spTree>
       <p:nvGrpSpPr>
-        <p:cNvPr id="140" name="Shape 140"/>
+        <p:cNvPr id="138" name="Shape 138"/>
         <p:cNvGrpSpPr/>
         <p:nvPr/>
       </p:nvGrpSpPr>
@@ -1288,7 +1292,7 @@
       </p:grpSpPr>
       <p:sp>
         <p:nvSpPr>
-          <p:cNvPr id="141" name="Google Shape;141;g2161acfc8a6_0_44:notes"/>
+          <p:cNvPr id="139" name="Google Shape;139;g2161acfc8a6_0_15:notes"/>
           <p:cNvSpPr/>
           <p:nvPr>
             <p:ph idx="2" type="sldImg"/>
@@ -1323,7 +1327,7 @@
       </p:sp>
       <p:sp>
         <p:nvSpPr>
-          <p:cNvPr id="142" name="Google Shape;142;g2161acfc8a6_0_44:notes"/>
+          <p:cNvPr id="140" name="Google Shape;140;g2161acfc8a6_0_15:notes"/>
           <p:cNvSpPr txBox="1"/>
           <p:nvPr>
             <p:ph idx="1" type="body"/>
@@ -1373,7 +1377,7 @@
   <p:cSld>
     <p:spTree>
       <p:nvGrpSpPr>
-        <p:cNvPr id="147" name="Shape 147"/>
+        <p:cNvPr id="145" name="Shape 145"/>
         <p:cNvGrpSpPr/>
         <p:nvPr/>
       </p:nvGrpSpPr>
@@ -1387,7 +1391,7 @@
       </p:grpSpPr>
       <p:sp>
         <p:nvSpPr>
-          <p:cNvPr id="148" name="Google Shape;148;g2161acfc8a6_0_72:notes"/>
+          <p:cNvPr id="146" name="Google Shape;146;g2161acfc8a6_0_41:notes"/>
           <p:cNvSpPr/>
           <p:nvPr>
             <p:ph idx="2" type="sldImg"/>
@@ -1422,7 +1426,7 @@
       </p:sp>
       <p:sp>
         <p:nvSpPr>
-          <p:cNvPr id="149" name="Google Shape;149;g2161acfc8a6_0_72:notes"/>
+          <p:cNvPr id="147" name="Google Shape;147;g2161acfc8a6_0_41:notes"/>
           <p:cNvSpPr txBox="1"/>
           <p:nvPr>
             <p:ph idx="1" type="body"/>
@@ -1472,7 +1476,7 @@
   <p:cSld>
     <p:spTree>
       <p:nvGrpSpPr>
-        <p:cNvPr id="153" name="Shape 153"/>
+        <p:cNvPr id="152" name="Shape 152"/>
         <p:cNvGrpSpPr/>
         <p:nvPr/>
       </p:nvGrpSpPr>
@@ -1486,7 +1490,7 @@
       </p:grpSpPr>
       <p:sp>
         <p:nvSpPr>
-          <p:cNvPr id="154" name="Google Shape;154;g2161acfc8a6_0_47:notes"/>
+          <p:cNvPr id="153" name="Google Shape;153;g2161acfc8a6_0_44:notes"/>
           <p:cNvSpPr/>
           <p:nvPr>
             <p:ph idx="2" type="sldImg"/>
@@ -1521,7 +1525,7 @@
       </p:sp>
       <p:sp>
         <p:nvSpPr>
-          <p:cNvPr id="155" name="Google Shape;155;g2161acfc8a6_0_47:notes"/>
+          <p:cNvPr id="154" name="Google Shape;154;g2161acfc8a6_0_44:notes"/>
           <p:cNvSpPr txBox="1"/>
           <p:nvPr>
             <p:ph idx="1" type="body"/>
@@ -1571,7 +1575,7 @@
   <p:cSld>
     <p:spTree>
       <p:nvGrpSpPr>
-        <p:cNvPr id="158" name="Shape 158"/>
+        <p:cNvPr id="159" name="Shape 159"/>
         <p:cNvGrpSpPr/>
         <p:nvPr/>
       </p:nvGrpSpPr>
@@ -1585,7 +1589,7 @@
       </p:grpSpPr>
       <p:sp>
         <p:nvSpPr>
-          <p:cNvPr id="159" name="Google Shape;159;g2161acfc8a6_0_50:notes"/>
+          <p:cNvPr id="160" name="Google Shape;160;g2161acfc8a6_0_72:notes"/>
           <p:cNvSpPr/>
           <p:nvPr>
             <p:ph idx="2" type="sldImg"/>
@@ -1620,7 +1624,7 @@
       </p:sp>
       <p:sp>
         <p:nvSpPr>
-          <p:cNvPr id="160" name="Google Shape;160;g2161acfc8a6_0_50:notes"/>
+          <p:cNvPr id="161" name="Google Shape;161;g2161acfc8a6_0_72:notes"/>
           <p:cNvSpPr txBox="1"/>
           <p:nvPr>
             <p:ph idx="1" type="body"/>
@@ -1670,7 +1674,7 @@
   <p:cSld>
     <p:spTree>
       <p:nvGrpSpPr>
-        <p:cNvPr id="164" name="Shape 164"/>
+        <p:cNvPr id="165" name="Shape 165"/>
         <p:cNvGrpSpPr/>
         <p:nvPr/>
       </p:nvGrpSpPr>
@@ -1684,7 +1688,7 @@
       </p:grpSpPr>
       <p:sp>
         <p:nvSpPr>
-          <p:cNvPr id="165" name="Google Shape;165;g2161acfc8a6_0_78:notes"/>
+          <p:cNvPr id="166" name="Google Shape;166;g2161acfc8a6_0_47:notes"/>
           <p:cNvSpPr/>
           <p:nvPr>
             <p:ph idx="2" type="sldImg"/>
@@ -1719,7 +1723,7 @@
       </p:sp>
       <p:sp>
         <p:nvSpPr>
-          <p:cNvPr id="166" name="Google Shape;166;g2161acfc8a6_0_78:notes"/>
+          <p:cNvPr id="167" name="Google Shape;167;g2161acfc8a6_0_47:notes"/>
           <p:cNvSpPr txBox="1"/>
           <p:nvPr>
             <p:ph idx="1" type="body"/>
@@ -1769,7 +1773,7 @@
   <p:cSld>
     <p:spTree>
       <p:nvGrpSpPr>
-        <p:cNvPr id="169" name="Shape 169"/>
+        <p:cNvPr id="170" name="Shape 170"/>
         <p:cNvGrpSpPr/>
         <p:nvPr/>
       </p:nvGrpSpPr>
@@ -1783,7 +1787,7 @@
       </p:grpSpPr>
       <p:sp>
         <p:nvSpPr>
-          <p:cNvPr id="170" name="Google Shape;170;g2161acfc8a6_0_81:notes"/>
+          <p:cNvPr id="171" name="Google Shape;171;g2161acfc8a6_0_50:notes"/>
           <p:cNvSpPr/>
           <p:nvPr>
             <p:ph idx="2" type="sldImg"/>
@@ -1818,7 +1822,7 @@
       </p:sp>
       <p:sp>
         <p:nvSpPr>
-          <p:cNvPr id="171" name="Google Shape;171;g2161acfc8a6_0_81:notes"/>
+          <p:cNvPr id="172" name="Google Shape;172;g2161acfc8a6_0_50:notes"/>
           <p:cNvSpPr txBox="1"/>
           <p:nvPr>
             <p:ph idx="1" type="body"/>
@@ -1882,7 +1886,7 @@
       </p:grpSpPr>
       <p:sp>
         <p:nvSpPr>
-          <p:cNvPr id="68" name="Google Shape;68;g341168721de_2_0:notes"/>
+          <p:cNvPr id="68" name="Google Shape;68;g341168721de_0_34:notes"/>
           <p:cNvSpPr/>
           <p:nvPr>
             <p:ph idx="2" type="sldImg"/>
@@ -1917,7 +1921,7 @@
       </p:sp>
       <p:sp>
         <p:nvSpPr>
-          <p:cNvPr id="69" name="Google Shape;69;g341168721de_2_0:notes"/>
+          <p:cNvPr id="69" name="Google Shape;69;g341168721de_0_34:notes"/>
           <p:cNvSpPr txBox="1"/>
           <p:nvPr>
             <p:ph idx="1" type="body"/>
@@ -1967,7 +1971,7 @@
   <p:cSld>
     <p:spTree>
       <p:nvGrpSpPr>
-        <p:cNvPr id="175" name="Shape 175"/>
+        <p:cNvPr id="176" name="Shape 176"/>
         <p:cNvGrpSpPr/>
         <p:nvPr/>
       </p:nvGrpSpPr>
@@ -1981,7 +1985,7 @@
       </p:grpSpPr>
       <p:sp>
         <p:nvSpPr>
-          <p:cNvPr id="176" name="Google Shape;176;g2161acfc8a6_0_84:notes"/>
+          <p:cNvPr id="177" name="Google Shape;177;g2161acfc8a6_0_78:notes"/>
           <p:cNvSpPr/>
           <p:nvPr>
             <p:ph idx="2" type="sldImg"/>
@@ -2016,7 +2020,7 @@
       </p:sp>
       <p:sp>
         <p:nvSpPr>
-          <p:cNvPr id="177" name="Google Shape;177;g2161acfc8a6_0_84:notes"/>
+          <p:cNvPr id="178" name="Google Shape;178;g2161acfc8a6_0_78:notes"/>
           <p:cNvSpPr txBox="1"/>
           <p:nvPr>
             <p:ph idx="1" type="body"/>
@@ -2080,7 +2084,7 @@
       </p:grpSpPr>
       <p:sp>
         <p:nvSpPr>
-          <p:cNvPr id="182" name="Google Shape;182;g2161acfc8a6_0_87:notes"/>
+          <p:cNvPr id="182" name="Google Shape;182;g304c3b1dafd_0_2:notes"/>
           <p:cNvSpPr/>
           <p:nvPr>
             <p:ph idx="2" type="sldImg"/>
@@ -2115,7 +2119,7 @@
       </p:sp>
       <p:sp>
         <p:nvSpPr>
-          <p:cNvPr id="183" name="Google Shape;183;g2161acfc8a6_0_87:notes"/>
+          <p:cNvPr id="183" name="Google Shape;183;g304c3b1dafd_0_2:notes"/>
           <p:cNvSpPr txBox="1"/>
           <p:nvPr>
             <p:ph idx="1" type="body"/>
@@ -2165,7 +2169,7 @@
   <p:cSld>
     <p:spTree>
       <p:nvGrpSpPr>
-        <p:cNvPr id="187" name="Shape 187"/>
+        <p:cNvPr id="186" name="Shape 186"/>
         <p:cNvGrpSpPr/>
         <p:nvPr/>
       </p:nvGrpSpPr>
@@ -2179,7 +2183,7 @@
       </p:grpSpPr>
       <p:sp>
         <p:nvSpPr>
-          <p:cNvPr id="188" name="Google Shape;188;g2161acfc8a6_0_115:notes"/>
+          <p:cNvPr id="187" name="Google Shape;187;g2161acfc8a6_0_81:notes"/>
           <p:cNvSpPr/>
           <p:nvPr>
             <p:ph idx="2" type="sldImg"/>
@@ -2214,7 +2218,7 @@
       </p:sp>
       <p:sp>
         <p:nvSpPr>
-          <p:cNvPr id="189" name="Google Shape;189;g2161acfc8a6_0_115:notes"/>
+          <p:cNvPr id="188" name="Google Shape;188;g2161acfc8a6_0_81:notes"/>
           <p:cNvSpPr txBox="1"/>
           <p:nvPr>
             <p:ph idx="1" type="body"/>
@@ -2278,7 +2282,7 @@
       </p:grpSpPr>
       <p:sp>
         <p:nvSpPr>
-          <p:cNvPr id="193" name="Google Shape;193;g2161acfc8a6_0_90:notes"/>
+          <p:cNvPr id="193" name="Google Shape;193;g304c3b1dafd_0_5:notes"/>
           <p:cNvSpPr/>
           <p:nvPr>
             <p:ph idx="2" type="sldImg"/>
@@ -2313,7 +2317,7 @@
       </p:sp>
       <p:sp>
         <p:nvSpPr>
-          <p:cNvPr id="194" name="Google Shape;194;g2161acfc8a6_0_90:notes"/>
+          <p:cNvPr id="194" name="Google Shape;194;g304c3b1dafd_0_5:notes"/>
           <p:cNvSpPr txBox="1"/>
           <p:nvPr>
             <p:ph idx="1" type="body"/>
@@ -2363,7 +2367,7 @@
   <p:cSld>
     <p:spTree>
       <p:nvGrpSpPr>
-        <p:cNvPr id="198" name="Shape 198"/>
+        <p:cNvPr id="197" name="Shape 197"/>
         <p:cNvGrpSpPr/>
         <p:nvPr/>
       </p:nvGrpSpPr>
@@ -2377,7 +2381,7 @@
       </p:grpSpPr>
       <p:sp>
         <p:nvSpPr>
-          <p:cNvPr id="199" name="Google Shape;199;g2161acfc8a6_0_119:notes"/>
+          <p:cNvPr id="198" name="Google Shape;198;g2161acfc8a6_0_84:notes"/>
           <p:cNvSpPr/>
           <p:nvPr>
             <p:ph idx="2" type="sldImg"/>
@@ -2412,7 +2416,7 @@
       </p:sp>
       <p:sp>
         <p:nvSpPr>
-          <p:cNvPr id="200" name="Google Shape;200;g2161acfc8a6_0_119:notes"/>
+          <p:cNvPr id="199" name="Google Shape;199;g2161acfc8a6_0_84:notes"/>
           <p:cNvSpPr txBox="1"/>
           <p:nvPr>
             <p:ph idx="1" type="body"/>
@@ -2457,12 +2461,12 @@
 </p:notes>
 </file>
 
-<file path=ppt/notesSlides/notesSlide3.xml><?xml version="1.0" encoding="utf-8"?>
+<file path=ppt/notesSlides/notesSlide25.xml><?xml version="1.0" encoding="utf-8"?>
 <p:notes xmlns:a="http://schemas.openxmlformats.org/drawingml/2006/main" xmlns:r="http://schemas.openxmlformats.org/officeDocument/2006/relationships" xmlns:mc="http://schemas.openxmlformats.org/markup-compatibility/2006" xmlns:mv="urn:schemas-microsoft-com:mac:vml" xmlns:p="http://schemas.openxmlformats.org/presentationml/2006/main" xmlns:c="http://schemas.openxmlformats.org/drawingml/2006/chart" xmlns:dgm="http://schemas.openxmlformats.org/drawingml/2006/diagram" xmlns:o="urn:schemas-microsoft-com:office:office" xmlns:v="urn:schemas-microsoft-com:vml" xmlns:pvml="urn:schemas-microsoft-com:office:powerpoint" xmlns:com="http://schemas.openxmlformats.org/drawingml/2006/compatibility" xmlns:p14="http://schemas.microsoft.com/office/powerpoint/2010/main" xmlns:p15="http://schemas.microsoft.com/office/powerpoint/2012/main" xmlns:ahyp="http://schemas.microsoft.com/office/drawing/2018/hyperlinkcolor" showMasterPhAnim="0" showMasterSp="0">
   <p:cSld>
     <p:spTree>
       <p:nvGrpSpPr>
-        <p:cNvPr id="72" name="Shape 72"/>
+        <p:cNvPr id="203" name="Shape 203"/>
         <p:cNvGrpSpPr/>
         <p:nvPr/>
       </p:nvGrpSpPr>
@@ -2476,7 +2480,7 @@
       </p:grpSpPr>
       <p:sp>
         <p:nvSpPr>
-          <p:cNvPr id="73" name="Google Shape;73;g341168721de_0_34:notes"/>
+          <p:cNvPr id="204" name="Google Shape;204;g2161acfc8a6_0_87:notes"/>
           <p:cNvSpPr/>
           <p:nvPr>
             <p:ph idx="2" type="sldImg"/>
@@ -2511,7 +2515,7 @@
       </p:sp>
       <p:sp>
         <p:nvSpPr>
-          <p:cNvPr id="74" name="Google Shape;74;g341168721de_0_34:notes"/>
+          <p:cNvPr id="205" name="Google Shape;205;g2161acfc8a6_0_87:notes"/>
           <p:cNvSpPr txBox="1"/>
           <p:nvPr>
             <p:ph idx="1" type="body"/>
@@ -2556,12 +2560,12 @@
 </p:notes>
 </file>
 
-<file path=ppt/notesSlides/notesSlide4.xml><?xml version="1.0" encoding="utf-8"?>
+<file path=ppt/notesSlides/notesSlide26.xml><?xml version="1.0" encoding="utf-8"?>
 <p:notes xmlns:a="http://schemas.openxmlformats.org/drawingml/2006/main" xmlns:r="http://schemas.openxmlformats.org/officeDocument/2006/relationships" xmlns:mc="http://schemas.openxmlformats.org/markup-compatibility/2006" xmlns:mv="urn:schemas-microsoft-com:mac:vml" xmlns:p="http://schemas.openxmlformats.org/presentationml/2006/main" xmlns:c="http://schemas.openxmlformats.org/drawingml/2006/chart" xmlns:dgm="http://schemas.openxmlformats.org/drawingml/2006/diagram" xmlns:o="urn:schemas-microsoft-com:office:office" xmlns:v="urn:schemas-microsoft-com:vml" xmlns:pvml="urn:schemas-microsoft-com:office:powerpoint" xmlns:com="http://schemas.openxmlformats.org/drawingml/2006/compatibility" xmlns:p14="http://schemas.microsoft.com/office/powerpoint/2010/main" xmlns:p15="http://schemas.microsoft.com/office/powerpoint/2012/main" xmlns:ahyp="http://schemas.microsoft.com/office/drawing/2018/hyperlinkcolor" showMasterPhAnim="0" showMasterSp="0">
   <p:cSld>
     <p:spTree>
       <p:nvGrpSpPr>
-        <p:cNvPr id="78" name="Shape 78"/>
+        <p:cNvPr id="209" name="Shape 209"/>
         <p:cNvGrpSpPr/>
         <p:nvPr/>
       </p:nvGrpSpPr>
@@ -2575,7 +2579,7 @@
       </p:grpSpPr>
       <p:sp>
         <p:nvSpPr>
-          <p:cNvPr id="79" name="Google Shape;79;g341168721de_0_6:notes"/>
+          <p:cNvPr id="210" name="Google Shape;210;g2161acfc8a6_0_115:notes"/>
           <p:cNvSpPr/>
           <p:nvPr>
             <p:ph idx="2" type="sldImg"/>
@@ -2610,7 +2614,7 @@
       </p:sp>
       <p:sp>
         <p:nvSpPr>
-          <p:cNvPr id="80" name="Google Shape;80;g341168721de_0_6:notes"/>
+          <p:cNvPr id="211" name="Google Shape;211;g2161acfc8a6_0_115:notes"/>
           <p:cNvSpPr txBox="1"/>
           <p:nvPr>
             <p:ph idx="1" type="body"/>
@@ -2655,12 +2659,12 @@
 </p:notes>
 </file>
 
-<file path=ppt/notesSlides/notesSlide5.xml><?xml version="1.0" encoding="utf-8"?>
+<file path=ppt/notesSlides/notesSlide27.xml><?xml version="1.0" encoding="utf-8"?>
 <p:notes xmlns:a="http://schemas.openxmlformats.org/drawingml/2006/main" xmlns:r="http://schemas.openxmlformats.org/officeDocument/2006/relationships" xmlns:mc="http://schemas.openxmlformats.org/markup-compatibility/2006" xmlns:mv="urn:schemas-microsoft-com:mac:vml" xmlns:p="http://schemas.openxmlformats.org/presentationml/2006/main" xmlns:c="http://schemas.openxmlformats.org/drawingml/2006/chart" xmlns:dgm="http://schemas.openxmlformats.org/drawingml/2006/diagram" xmlns:o="urn:schemas-microsoft-com:office:office" xmlns:v="urn:schemas-microsoft-com:vml" xmlns:pvml="urn:schemas-microsoft-com:office:powerpoint" xmlns:com="http://schemas.openxmlformats.org/drawingml/2006/compatibility" xmlns:p14="http://schemas.microsoft.com/office/powerpoint/2010/main" xmlns:p15="http://schemas.microsoft.com/office/powerpoint/2012/main" xmlns:ahyp="http://schemas.microsoft.com/office/drawing/2018/hyperlinkcolor" showMasterPhAnim="0" showMasterSp="0">
   <p:cSld>
     <p:spTree>
       <p:nvGrpSpPr>
-        <p:cNvPr id="84" name="Shape 84"/>
+        <p:cNvPr id="214" name="Shape 214"/>
         <p:cNvGrpSpPr/>
         <p:nvPr/>
       </p:nvGrpSpPr>
@@ -2674,7 +2678,7 @@
       </p:grpSpPr>
       <p:sp>
         <p:nvSpPr>
-          <p:cNvPr id="85" name="Google Shape;85;g341168721de_0_0:notes"/>
+          <p:cNvPr id="215" name="Google Shape;215;g2161acfc8a6_0_90:notes"/>
           <p:cNvSpPr/>
           <p:nvPr>
             <p:ph idx="2" type="sldImg"/>
@@ -2709,7 +2713,7 @@
       </p:sp>
       <p:sp>
         <p:nvSpPr>
-          <p:cNvPr id="86" name="Google Shape;86;g341168721de_0_0:notes"/>
+          <p:cNvPr id="216" name="Google Shape;216;g2161acfc8a6_0_90:notes"/>
           <p:cNvSpPr txBox="1"/>
           <p:nvPr>
             <p:ph idx="1" type="body"/>
@@ -2754,12 +2758,12 @@
 </p:notes>
 </file>
 
-<file path=ppt/notesSlides/notesSlide6.xml><?xml version="1.0" encoding="utf-8"?>
+<file path=ppt/notesSlides/notesSlide28.xml><?xml version="1.0" encoding="utf-8"?>
 <p:notes xmlns:a="http://schemas.openxmlformats.org/drawingml/2006/main" xmlns:r="http://schemas.openxmlformats.org/officeDocument/2006/relationships" xmlns:mc="http://schemas.openxmlformats.org/markup-compatibility/2006" xmlns:mv="urn:schemas-microsoft-com:mac:vml" xmlns:p="http://schemas.openxmlformats.org/presentationml/2006/main" xmlns:c="http://schemas.openxmlformats.org/drawingml/2006/chart" xmlns:dgm="http://schemas.openxmlformats.org/drawingml/2006/diagram" xmlns:o="urn:schemas-microsoft-com:office:office" xmlns:v="urn:schemas-microsoft-com:vml" xmlns:pvml="urn:schemas-microsoft-com:office:powerpoint" xmlns:com="http://schemas.openxmlformats.org/drawingml/2006/compatibility" xmlns:p14="http://schemas.microsoft.com/office/powerpoint/2010/main" xmlns:p15="http://schemas.microsoft.com/office/powerpoint/2012/main" xmlns:ahyp="http://schemas.microsoft.com/office/drawing/2018/hyperlinkcolor" showMasterPhAnim="0" showMasterSp="0">
   <p:cSld>
     <p:spTree>
       <p:nvGrpSpPr>
-        <p:cNvPr id="89" name="Shape 89"/>
+        <p:cNvPr id="220" name="Shape 220"/>
         <p:cNvGrpSpPr/>
         <p:nvPr/>
       </p:nvGrpSpPr>
@@ -2773,7 +2777,7 @@
       </p:grpSpPr>
       <p:sp>
         <p:nvSpPr>
-          <p:cNvPr id="90" name="Google Shape;90;g341168721de_0_3:notes"/>
+          <p:cNvPr id="221" name="Google Shape;221;g2161acfc8a6_0_119:notes"/>
           <p:cNvSpPr/>
           <p:nvPr>
             <p:ph idx="2" type="sldImg"/>
@@ -2808,7 +2812,7 @@
       </p:sp>
       <p:sp>
         <p:nvSpPr>
-          <p:cNvPr id="91" name="Google Shape;91;g341168721de_0_3:notes"/>
+          <p:cNvPr id="222" name="Google Shape;222;g2161acfc8a6_0_119:notes"/>
           <p:cNvSpPr txBox="1"/>
           <p:nvPr>
             <p:ph idx="1" type="body"/>
@@ -2853,12 +2857,12 @@
 </p:notes>
 </file>
 
-<file path=ppt/notesSlides/notesSlide7.xml><?xml version="1.0" encoding="utf-8"?>
+<file path=ppt/notesSlides/notesSlide3.xml><?xml version="1.0" encoding="utf-8"?>
 <p:notes xmlns:a="http://schemas.openxmlformats.org/drawingml/2006/main" xmlns:r="http://schemas.openxmlformats.org/officeDocument/2006/relationships" xmlns:mc="http://schemas.openxmlformats.org/markup-compatibility/2006" xmlns:mv="urn:schemas-microsoft-com:mac:vml" xmlns:p="http://schemas.openxmlformats.org/presentationml/2006/main" xmlns:c="http://schemas.openxmlformats.org/drawingml/2006/chart" xmlns:dgm="http://schemas.openxmlformats.org/drawingml/2006/diagram" xmlns:o="urn:schemas-microsoft-com:office:office" xmlns:v="urn:schemas-microsoft-com:vml" xmlns:pvml="urn:schemas-microsoft-com:office:powerpoint" xmlns:com="http://schemas.openxmlformats.org/drawingml/2006/compatibility" xmlns:p14="http://schemas.microsoft.com/office/powerpoint/2010/main" xmlns:p15="http://schemas.microsoft.com/office/powerpoint/2012/main" xmlns:ahyp="http://schemas.microsoft.com/office/drawing/2018/hyperlinkcolor" showMasterPhAnim="0" showMasterSp="0">
   <p:cSld>
     <p:spTree>
       <p:nvGrpSpPr>
-        <p:cNvPr id="94" name="Shape 94"/>
+        <p:cNvPr id="73" name="Shape 73"/>
         <p:cNvGrpSpPr/>
         <p:nvPr/>
       </p:nvGrpSpPr>
@@ -2872,7 +2876,7 @@
       </p:grpSpPr>
       <p:sp>
         <p:nvSpPr>
-          <p:cNvPr id="95" name="Google Shape;95;g341168721de_0_13:notes"/>
+          <p:cNvPr id="74" name="Google Shape;74;g341168721de_0_6:notes"/>
           <p:cNvSpPr/>
           <p:nvPr>
             <p:ph idx="2" type="sldImg"/>
@@ -2907,7 +2911,7 @@
       </p:sp>
       <p:sp>
         <p:nvSpPr>
-          <p:cNvPr id="96" name="Google Shape;96;g341168721de_0_13:notes"/>
+          <p:cNvPr id="75" name="Google Shape;75;g341168721de_0_6:notes"/>
           <p:cNvSpPr txBox="1"/>
           <p:nvPr>
             <p:ph idx="1" type="body"/>
@@ -2952,12 +2956,12 @@
 </p:notes>
 </file>
 
-<file path=ppt/notesSlides/notesSlide8.xml><?xml version="1.0" encoding="utf-8"?>
+<file path=ppt/notesSlides/notesSlide4.xml><?xml version="1.0" encoding="utf-8"?>
 <p:notes xmlns:a="http://schemas.openxmlformats.org/drawingml/2006/main" xmlns:r="http://schemas.openxmlformats.org/officeDocument/2006/relationships" xmlns:mc="http://schemas.openxmlformats.org/markup-compatibility/2006" xmlns:mv="urn:schemas-microsoft-com:mac:vml" xmlns:p="http://schemas.openxmlformats.org/presentationml/2006/main" xmlns:c="http://schemas.openxmlformats.org/drawingml/2006/chart" xmlns:dgm="http://schemas.openxmlformats.org/drawingml/2006/diagram" xmlns:o="urn:schemas-microsoft-com:office:office" xmlns:v="urn:schemas-microsoft-com:vml" xmlns:pvml="urn:schemas-microsoft-com:office:powerpoint" xmlns:com="http://schemas.openxmlformats.org/drawingml/2006/compatibility" xmlns:p14="http://schemas.microsoft.com/office/powerpoint/2010/main" xmlns:p15="http://schemas.microsoft.com/office/powerpoint/2012/main" xmlns:ahyp="http://schemas.microsoft.com/office/drawing/2018/hyperlinkcolor" showMasterPhAnim="0" showMasterSp="0">
   <p:cSld>
     <p:spTree>
       <p:nvGrpSpPr>
-        <p:cNvPr id="99" name="Shape 99"/>
+        <p:cNvPr id="79" name="Shape 79"/>
         <p:cNvGrpSpPr/>
         <p:nvPr/>
       </p:nvGrpSpPr>
@@ -2971,7 +2975,7 @@
       </p:grpSpPr>
       <p:sp>
         <p:nvSpPr>
-          <p:cNvPr id="100" name="Google Shape;100;g341168721de_0_16:notes"/>
+          <p:cNvPr id="80" name="Google Shape;80;g341168721de_0_0:notes"/>
           <p:cNvSpPr/>
           <p:nvPr>
             <p:ph idx="2" type="sldImg"/>
@@ -3006,7 +3010,7 @@
       </p:sp>
       <p:sp>
         <p:nvSpPr>
-          <p:cNvPr id="101" name="Google Shape;101;g341168721de_0_16:notes"/>
+          <p:cNvPr id="81" name="Google Shape;81;g341168721de_0_0:notes"/>
           <p:cNvSpPr txBox="1"/>
           <p:nvPr>
             <p:ph idx="1" type="body"/>
@@ -3051,12 +3055,12 @@
 </p:notes>
 </file>
 
-<file path=ppt/notesSlides/notesSlide9.xml><?xml version="1.0" encoding="utf-8"?>
+<file path=ppt/notesSlides/notesSlide5.xml><?xml version="1.0" encoding="utf-8"?>
 <p:notes xmlns:a="http://schemas.openxmlformats.org/drawingml/2006/main" xmlns:r="http://schemas.openxmlformats.org/officeDocument/2006/relationships" xmlns:mc="http://schemas.openxmlformats.org/markup-compatibility/2006" xmlns:mv="urn:schemas-microsoft-com:mac:vml" xmlns:p="http://schemas.openxmlformats.org/presentationml/2006/main" xmlns:c="http://schemas.openxmlformats.org/drawingml/2006/chart" xmlns:dgm="http://schemas.openxmlformats.org/drawingml/2006/diagram" xmlns:o="urn:schemas-microsoft-com:office:office" xmlns:v="urn:schemas-microsoft-com:vml" xmlns:pvml="urn:schemas-microsoft-com:office:powerpoint" xmlns:com="http://schemas.openxmlformats.org/drawingml/2006/compatibility" xmlns:p14="http://schemas.microsoft.com/office/powerpoint/2010/main" xmlns:p15="http://schemas.microsoft.com/office/powerpoint/2012/main" xmlns:ahyp="http://schemas.microsoft.com/office/drawing/2018/hyperlinkcolor" showMasterPhAnim="0" showMasterSp="0">
   <p:cSld>
     <p:spTree>
       <p:nvGrpSpPr>
-        <p:cNvPr id="106" name="Shape 106"/>
+        <p:cNvPr id="84" name="Shape 84"/>
         <p:cNvGrpSpPr/>
         <p:nvPr/>
       </p:nvGrpSpPr>
@@ -3070,7 +3074,7 @@
       </p:grpSpPr>
       <p:sp>
         <p:nvSpPr>
-          <p:cNvPr id="107" name="Google Shape;107;g341168721de_0_19:notes"/>
+          <p:cNvPr id="85" name="Google Shape;85;g341168721de_0_3:notes"/>
           <p:cNvSpPr/>
           <p:nvPr>
             <p:ph idx="2" type="sldImg"/>
@@ -3105,7 +3109,403 @@
       </p:sp>
       <p:sp>
         <p:nvSpPr>
-          <p:cNvPr id="108" name="Google Shape;108;g341168721de_0_19:notes"/>
+          <p:cNvPr id="86" name="Google Shape;86;g341168721de_0_3:notes"/>
+          <p:cNvSpPr txBox="1"/>
+          <p:nvPr>
+            <p:ph idx="1" type="body"/>
+          </p:nvPr>
+        </p:nvSpPr>
+        <p:spPr>
+          <a:xfrm>
+            <a:off x="685800" y="4343400"/>
+            <a:ext cx="5486400" cy="4114800"/>
+          </a:xfrm>
+          <a:prstGeom prst="rect">
+            <a:avLst/>
+          </a:prstGeom>
+        </p:spPr>
+        <p:txBody>
+          <a:bodyPr anchorCtr="0" anchor="t" bIns="91425" lIns="91425" spcFirstLastPara="1" rIns="91425" wrap="square" tIns="91425">
+            <a:noAutofit/>
+          </a:bodyPr>
+          <a:lstStyle/>
+          <a:p>
+            <a:pPr indent="0" lvl="0" marL="0" rtl="0" algn="l">
+              <a:spcBef>
+                <a:spcPts val="0"/>
+              </a:spcBef>
+              <a:spcAft>
+                <a:spcPts val="0"/>
+              </a:spcAft>
+              <a:buNone/>
+            </a:pPr>
+            <a:r>
+              <a:t/>
+            </a:r>
+            <a:endParaRPr/>
+          </a:p>
+        </p:txBody>
+      </p:sp>
+    </p:spTree>
+  </p:cSld>
+  <p:clrMapOvr>
+    <a:masterClrMapping/>
+  </p:clrMapOvr>
+</p:notes>
+</file>
+
+<file path=ppt/notesSlides/notesSlide6.xml><?xml version="1.0" encoding="utf-8"?>
+<p:notes xmlns:a="http://schemas.openxmlformats.org/drawingml/2006/main" xmlns:r="http://schemas.openxmlformats.org/officeDocument/2006/relationships" xmlns:mc="http://schemas.openxmlformats.org/markup-compatibility/2006" xmlns:mv="urn:schemas-microsoft-com:mac:vml" xmlns:p="http://schemas.openxmlformats.org/presentationml/2006/main" xmlns:c="http://schemas.openxmlformats.org/drawingml/2006/chart" xmlns:dgm="http://schemas.openxmlformats.org/drawingml/2006/diagram" xmlns:o="urn:schemas-microsoft-com:office:office" xmlns:v="urn:schemas-microsoft-com:vml" xmlns:pvml="urn:schemas-microsoft-com:office:powerpoint" xmlns:com="http://schemas.openxmlformats.org/drawingml/2006/compatibility" xmlns:p14="http://schemas.microsoft.com/office/powerpoint/2010/main" xmlns:p15="http://schemas.microsoft.com/office/powerpoint/2012/main" xmlns:ahyp="http://schemas.microsoft.com/office/drawing/2018/hyperlinkcolor" showMasterPhAnim="0" showMasterSp="0">
+  <p:cSld>
+    <p:spTree>
+      <p:nvGrpSpPr>
+        <p:cNvPr id="89" name="Shape 89"/>
+        <p:cNvGrpSpPr/>
+        <p:nvPr/>
+      </p:nvGrpSpPr>
+      <p:grpSpPr>
+        <a:xfrm>
+          <a:off x="0" y="0"/>
+          <a:ext cx="0" cy="0"/>
+          <a:chOff x="0" y="0"/>
+          <a:chExt cx="0" cy="0"/>
+        </a:xfrm>
+      </p:grpSpPr>
+      <p:sp>
+        <p:nvSpPr>
+          <p:cNvPr id="90" name="Google Shape;90;g341168721de_0_13:notes"/>
+          <p:cNvSpPr/>
+          <p:nvPr>
+            <p:ph idx="2" type="sldImg"/>
+          </p:nvPr>
+        </p:nvSpPr>
+        <p:spPr>
+          <a:xfrm>
+            <a:off x="381300" y="685800"/>
+            <a:ext cx="6096000" cy="3429000"/>
+          </a:xfrm>
+          <a:custGeom>
+            <a:rect b="b" l="l" r="r" t="t"/>
+            <a:pathLst>
+              <a:path extrusionOk="0" h="120000" w="120000">
+                <a:moveTo>
+                  <a:pt x="0" y="0"/>
+                </a:moveTo>
+                <a:lnTo>
+                  <a:pt x="120000" y="0"/>
+                </a:lnTo>
+                <a:lnTo>
+                  <a:pt x="120000" y="120000"/>
+                </a:lnTo>
+                <a:lnTo>
+                  <a:pt x="0" y="120000"/>
+                </a:lnTo>
+                <a:close/>
+              </a:path>
+            </a:pathLst>
+          </a:custGeom>
+        </p:spPr>
+      </p:sp>
+      <p:sp>
+        <p:nvSpPr>
+          <p:cNvPr id="91" name="Google Shape;91;g341168721de_0_13:notes"/>
+          <p:cNvSpPr txBox="1"/>
+          <p:nvPr>
+            <p:ph idx="1" type="body"/>
+          </p:nvPr>
+        </p:nvSpPr>
+        <p:spPr>
+          <a:xfrm>
+            <a:off x="685800" y="4343400"/>
+            <a:ext cx="5486400" cy="4114800"/>
+          </a:xfrm>
+          <a:prstGeom prst="rect">
+            <a:avLst/>
+          </a:prstGeom>
+        </p:spPr>
+        <p:txBody>
+          <a:bodyPr anchorCtr="0" anchor="t" bIns="91425" lIns="91425" spcFirstLastPara="1" rIns="91425" wrap="square" tIns="91425">
+            <a:noAutofit/>
+          </a:bodyPr>
+          <a:lstStyle/>
+          <a:p>
+            <a:pPr indent="0" lvl="0" marL="0" rtl="0" algn="l">
+              <a:spcBef>
+                <a:spcPts val="0"/>
+              </a:spcBef>
+              <a:spcAft>
+                <a:spcPts val="0"/>
+              </a:spcAft>
+              <a:buNone/>
+            </a:pPr>
+            <a:r>
+              <a:t/>
+            </a:r>
+            <a:endParaRPr/>
+          </a:p>
+        </p:txBody>
+      </p:sp>
+    </p:spTree>
+  </p:cSld>
+  <p:clrMapOvr>
+    <a:masterClrMapping/>
+  </p:clrMapOvr>
+</p:notes>
+</file>
+
+<file path=ppt/notesSlides/notesSlide7.xml><?xml version="1.0" encoding="utf-8"?>
+<p:notes xmlns:a="http://schemas.openxmlformats.org/drawingml/2006/main" xmlns:r="http://schemas.openxmlformats.org/officeDocument/2006/relationships" xmlns:mc="http://schemas.openxmlformats.org/markup-compatibility/2006" xmlns:mv="urn:schemas-microsoft-com:mac:vml" xmlns:p="http://schemas.openxmlformats.org/presentationml/2006/main" xmlns:c="http://schemas.openxmlformats.org/drawingml/2006/chart" xmlns:dgm="http://schemas.openxmlformats.org/drawingml/2006/diagram" xmlns:o="urn:schemas-microsoft-com:office:office" xmlns:v="urn:schemas-microsoft-com:vml" xmlns:pvml="urn:schemas-microsoft-com:office:powerpoint" xmlns:com="http://schemas.openxmlformats.org/drawingml/2006/compatibility" xmlns:p14="http://schemas.microsoft.com/office/powerpoint/2010/main" xmlns:p15="http://schemas.microsoft.com/office/powerpoint/2012/main" xmlns:ahyp="http://schemas.microsoft.com/office/drawing/2018/hyperlinkcolor" showMasterPhAnim="0" showMasterSp="0">
+  <p:cSld>
+    <p:spTree>
+      <p:nvGrpSpPr>
+        <p:cNvPr id="94" name="Shape 94"/>
+        <p:cNvGrpSpPr/>
+        <p:nvPr/>
+      </p:nvGrpSpPr>
+      <p:grpSpPr>
+        <a:xfrm>
+          <a:off x="0" y="0"/>
+          <a:ext cx="0" cy="0"/>
+          <a:chOff x="0" y="0"/>
+          <a:chExt cx="0" cy="0"/>
+        </a:xfrm>
+      </p:grpSpPr>
+      <p:sp>
+        <p:nvSpPr>
+          <p:cNvPr id="95" name="Google Shape;95;g341168721de_0_16:notes"/>
+          <p:cNvSpPr/>
+          <p:nvPr>
+            <p:ph idx="2" type="sldImg"/>
+          </p:nvPr>
+        </p:nvSpPr>
+        <p:spPr>
+          <a:xfrm>
+            <a:off x="381300" y="685800"/>
+            <a:ext cx="6096000" cy="3429000"/>
+          </a:xfrm>
+          <a:custGeom>
+            <a:rect b="b" l="l" r="r" t="t"/>
+            <a:pathLst>
+              <a:path extrusionOk="0" h="120000" w="120000">
+                <a:moveTo>
+                  <a:pt x="0" y="0"/>
+                </a:moveTo>
+                <a:lnTo>
+                  <a:pt x="120000" y="0"/>
+                </a:lnTo>
+                <a:lnTo>
+                  <a:pt x="120000" y="120000"/>
+                </a:lnTo>
+                <a:lnTo>
+                  <a:pt x="0" y="120000"/>
+                </a:lnTo>
+                <a:close/>
+              </a:path>
+            </a:pathLst>
+          </a:custGeom>
+        </p:spPr>
+      </p:sp>
+      <p:sp>
+        <p:nvSpPr>
+          <p:cNvPr id="96" name="Google Shape;96;g341168721de_0_16:notes"/>
+          <p:cNvSpPr txBox="1"/>
+          <p:nvPr>
+            <p:ph idx="1" type="body"/>
+          </p:nvPr>
+        </p:nvSpPr>
+        <p:spPr>
+          <a:xfrm>
+            <a:off x="685800" y="4343400"/>
+            <a:ext cx="5486400" cy="4114800"/>
+          </a:xfrm>
+          <a:prstGeom prst="rect">
+            <a:avLst/>
+          </a:prstGeom>
+        </p:spPr>
+        <p:txBody>
+          <a:bodyPr anchorCtr="0" anchor="t" bIns="91425" lIns="91425" spcFirstLastPara="1" rIns="91425" wrap="square" tIns="91425">
+            <a:noAutofit/>
+          </a:bodyPr>
+          <a:lstStyle/>
+          <a:p>
+            <a:pPr indent="0" lvl="0" marL="0" rtl="0" algn="l">
+              <a:spcBef>
+                <a:spcPts val="0"/>
+              </a:spcBef>
+              <a:spcAft>
+                <a:spcPts val="0"/>
+              </a:spcAft>
+              <a:buNone/>
+            </a:pPr>
+            <a:r>
+              <a:t/>
+            </a:r>
+            <a:endParaRPr/>
+          </a:p>
+        </p:txBody>
+      </p:sp>
+    </p:spTree>
+  </p:cSld>
+  <p:clrMapOvr>
+    <a:masterClrMapping/>
+  </p:clrMapOvr>
+</p:notes>
+</file>
+
+<file path=ppt/notesSlides/notesSlide8.xml><?xml version="1.0" encoding="utf-8"?>
+<p:notes xmlns:a="http://schemas.openxmlformats.org/drawingml/2006/main" xmlns:r="http://schemas.openxmlformats.org/officeDocument/2006/relationships" xmlns:mc="http://schemas.openxmlformats.org/markup-compatibility/2006" xmlns:mv="urn:schemas-microsoft-com:mac:vml" xmlns:p="http://schemas.openxmlformats.org/presentationml/2006/main" xmlns:c="http://schemas.openxmlformats.org/drawingml/2006/chart" xmlns:dgm="http://schemas.openxmlformats.org/drawingml/2006/diagram" xmlns:o="urn:schemas-microsoft-com:office:office" xmlns:v="urn:schemas-microsoft-com:vml" xmlns:pvml="urn:schemas-microsoft-com:office:powerpoint" xmlns:com="http://schemas.openxmlformats.org/drawingml/2006/compatibility" xmlns:p14="http://schemas.microsoft.com/office/powerpoint/2010/main" xmlns:p15="http://schemas.microsoft.com/office/powerpoint/2012/main" xmlns:ahyp="http://schemas.microsoft.com/office/drawing/2018/hyperlinkcolor" showMasterPhAnim="0" showMasterSp="0">
+  <p:cSld>
+    <p:spTree>
+      <p:nvGrpSpPr>
+        <p:cNvPr id="101" name="Shape 101"/>
+        <p:cNvGrpSpPr/>
+        <p:nvPr/>
+      </p:nvGrpSpPr>
+      <p:grpSpPr>
+        <a:xfrm>
+          <a:off x="0" y="0"/>
+          <a:ext cx="0" cy="0"/>
+          <a:chOff x="0" y="0"/>
+          <a:chExt cx="0" cy="0"/>
+        </a:xfrm>
+      </p:grpSpPr>
+      <p:sp>
+        <p:nvSpPr>
+          <p:cNvPr id="102" name="Google Shape;102;g341168721de_0_19:notes"/>
+          <p:cNvSpPr/>
+          <p:nvPr>
+            <p:ph idx="2" type="sldImg"/>
+          </p:nvPr>
+        </p:nvSpPr>
+        <p:spPr>
+          <a:xfrm>
+            <a:off x="381300" y="685800"/>
+            <a:ext cx="6096000" cy="3429000"/>
+          </a:xfrm>
+          <a:custGeom>
+            <a:rect b="b" l="l" r="r" t="t"/>
+            <a:pathLst>
+              <a:path extrusionOk="0" h="120000" w="120000">
+                <a:moveTo>
+                  <a:pt x="0" y="0"/>
+                </a:moveTo>
+                <a:lnTo>
+                  <a:pt x="120000" y="0"/>
+                </a:lnTo>
+                <a:lnTo>
+                  <a:pt x="120000" y="120000"/>
+                </a:lnTo>
+                <a:lnTo>
+                  <a:pt x="0" y="120000"/>
+                </a:lnTo>
+                <a:close/>
+              </a:path>
+            </a:pathLst>
+          </a:custGeom>
+        </p:spPr>
+      </p:sp>
+      <p:sp>
+        <p:nvSpPr>
+          <p:cNvPr id="103" name="Google Shape;103;g341168721de_0_19:notes"/>
+          <p:cNvSpPr txBox="1"/>
+          <p:nvPr>
+            <p:ph idx="1" type="body"/>
+          </p:nvPr>
+        </p:nvSpPr>
+        <p:spPr>
+          <a:xfrm>
+            <a:off x="685800" y="4343400"/>
+            <a:ext cx="5486400" cy="4114800"/>
+          </a:xfrm>
+          <a:prstGeom prst="rect">
+            <a:avLst/>
+          </a:prstGeom>
+        </p:spPr>
+        <p:txBody>
+          <a:bodyPr anchorCtr="0" anchor="t" bIns="91425" lIns="91425" spcFirstLastPara="1" rIns="91425" wrap="square" tIns="91425">
+            <a:noAutofit/>
+          </a:bodyPr>
+          <a:lstStyle/>
+          <a:p>
+            <a:pPr indent="0" lvl="0" marL="0" rtl="0" algn="l">
+              <a:spcBef>
+                <a:spcPts val="0"/>
+              </a:spcBef>
+              <a:spcAft>
+                <a:spcPts val="0"/>
+              </a:spcAft>
+              <a:buNone/>
+            </a:pPr>
+            <a:r>
+              <a:t/>
+            </a:r>
+            <a:endParaRPr/>
+          </a:p>
+        </p:txBody>
+      </p:sp>
+    </p:spTree>
+  </p:cSld>
+  <p:clrMapOvr>
+    <a:masterClrMapping/>
+  </p:clrMapOvr>
+</p:notes>
+</file>
+
+<file path=ppt/notesSlides/notesSlide9.xml><?xml version="1.0" encoding="utf-8"?>
+<p:notes xmlns:a="http://schemas.openxmlformats.org/drawingml/2006/main" xmlns:r="http://schemas.openxmlformats.org/officeDocument/2006/relationships" xmlns:mc="http://schemas.openxmlformats.org/markup-compatibility/2006" xmlns:mv="urn:schemas-microsoft-com:mac:vml" xmlns:p="http://schemas.openxmlformats.org/presentationml/2006/main" xmlns:c="http://schemas.openxmlformats.org/drawingml/2006/chart" xmlns:dgm="http://schemas.openxmlformats.org/drawingml/2006/diagram" xmlns:o="urn:schemas-microsoft-com:office:office" xmlns:v="urn:schemas-microsoft-com:vml" xmlns:pvml="urn:schemas-microsoft-com:office:powerpoint" xmlns:com="http://schemas.openxmlformats.org/drawingml/2006/compatibility" xmlns:p14="http://schemas.microsoft.com/office/powerpoint/2010/main" xmlns:p15="http://schemas.microsoft.com/office/powerpoint/2012/main" xmlns:ahyp="http://schemas.microsoft.com/office/drawing/2018/hyperlinkcolor" showMasterPhAnim="0" showMasterSp="0">
+  <p:cSld>
+    <p:spTree>
+      <p:nvGrpSpPr>
+        <p:cNvPr id="106" name="Shape 106"/>
+        <p:cNvGrpSpPr/>
+        <p:nvPr/>
+      </p:nvGrpSpPr>
+      <p:grpSpPr>
+        <a:xfrm>
+          <a:off x="0" y="0"/>
+          <a:ext cx="0" cy="0"/>
+          <a:chOff x="0" y="0"/>
+          <a:chExt cx="0" cy="0"/>
+        </a:xfrm>
+      </p:grpSpPr>
+      <p:sp>
+        <p:nvSpPr>
+          <p:cNvPr id="107" name="Google Shape;107;g2161acfc8a6_0_12:notes"/>
+          <p:cNvSpPr/>
+          <p:nvPr>
+            <p:ph idx="2" type="sldImg"/>
+          </p:nvPr>
+        </p:nvSpPr>
+        <p:spPr>
+          <a:xfrm>
+            <a:off x="381300" y="685800"/>
+            <a:ext cx="6096000" cy="3429000"/>
+          </a:xfrm>
+          <a:custGeom>
+            <a:rect b="b" l="l" r="r" t="t"/>
+            <a:pathLst>
+              <a:path extrusionOk="0" h="120000" w="120000">
+                <a:moveTo>
+                  <a:pt x="0" y="0"/>
+                </a:moveTo>
+                <a:lnTo>
+                  <a:pt x="120000" y="0"/>
+                </a:lnTo>
+                <a:lnTo>
+                  <a:pt x="120000" y="120000"/>
+                </a:lnTo>
+                <a:lnTo>
+                  <a:pt x="0" y="120000"/>
+                </a:lnTo>
+                <a:close/>
+              </a:path>
+            </a:pathLst>
+          </a:custGeom>
+        </p:spPr>
+      </p:sp>
+      <p:sp>
+        <p:nvSpPr>
+          <p:cNvPr id="108" name="Google Shape;108;g2161acfc8a6_0_12:notes"/>
           <p:cNvSpPr txBox="1"/>
           <p:nvPr>
             <p:ph idx="1" type="body"/>
@@ -10354,7 +10754,7 @@
   <p:cSld>
     <p:spTree>
       <p:nvGrpSpPr>
-        <p:cNvPr id="114" name="Shape 114"/>
+        <p:cNvPr id="116" name="Shape 116"/>
         <p:cNvGrpSpPr/>
         <p:nvPr/>
       </p:nvGrpSpPr>
@@ -10368,7 +10768,7 @@
       </p:grpSpPr>
       <p:sp>
         <p:nvSpPr>
-          <p:cNvPr id="115" name="Google Shape;115;p24"/>
+          <p:cNvPr id="117" name="Google Shape;117;p24"/>
           <p:cNvSpPr txBox="1"/>
           <p:nvPr/>
         </p:nvSpPr>
@@ -10412,88 +10812,15 @@
             </a:pPr>
             <a:r>
               <a:rPr b="1" lang="en" sz="2400"/>
-              <a:t>Текстурная память</a:t>
+              <a:t>Трилинейная  интерполяция</a:t>
             </a:r>
             <a:endParaRPr b="1" i="1" sz="2100"/>
-          </a:p>
-        </p:txBody>
-      </p:sp>
-      <p:sp>
-        <p:nvSpPr>
-          <p:cNvPr id="116" name="Google Shape;116;p24"/>
-          <p:cNvSpPr txBox="1"/>
-          <p:nvPr/>
-        </p:nvSpPr>
-        <p:spPr>
-          <a:xfrm>
-            <a:off x="421025" y="829375"/>
-            <a:ext cx="8328300" cy="1108200"/>
-          </a:xfrm>
-          <a:prstGeom prst="rect">
-            <a:avLst/>
-          </a:prstGeom>
-          <a:noFill/>
-          <a:ln cap="flat" cmpd="sng" w="9525">
-            <a:solidFill>
-              <a:schemeClr val="dk1"/>
-            </a:solidFill>
-            <a:prstDash val="solid"/>
-            <a:round/>
-            <a:headEnd len="sm" w="sm" type="none"/>
-            <a:tailEnd len="sm" w="sm" type="none"/>
-          </a:ln>
-        </p:spPr>
-        <p:txBody>
-          <a:bodyPr anchorCtr="0" anchor="t" bIns="91425" lIns="91425" spcFirstLastPara="1" rIns="91425" wrap="square" tIns="91425">
-            <a:spAutoFit/>
-          </a:bodyPr>
-          <a:lstStyle/>
-          <a:p>
-            <a:pPr indent="0" lvl="0" marL="0" rtl="0" algn="l">
-              <a:spcBef>
-                <a:spcPts val="0"/>
-              </a:spcBef>
-              <a:spcAft>
-                <a:spcPts val="0"/>
-              </a:spcAft>
-              <a:buClr>
-                <a:schemeClr val="dk1"/>
-              </a:buClr>
-              <a:buSzPts val="1100"/>
-              <a:buFont typeface="Arial"/>
-              <a:buNone/>
-            </a:pPr>
-            <a:r>
-              <a:rPr lang="en" sz="2000"/>
-              <a:t>● Текстура – специальный интерфейс доступа к глобальной памяти, обеспечивающий 1D, 2D и 3D целочисленную и </a:t>
-            </a:r>
-            <a:r>
-              <a:rPr b="1" lang="en" sz="2000"/>
-              <a:t>вещественную</a:t>
-            </a:r>
-            <a:endParaRPr b="1" sz="2000"/>
-          </a:p>
-          <a:p>
-            <a:pPr indent="0" lvl="0" marL="0" rtl="0" algn="l">
-              <a:spcBef>
-                <a:spcPts val="0"/>
-              </a:spcBef>
-              <a:spcAft>
-                <a:spcPts val="0"/>
-              </a:spcAft>
-              <a:buNone/>
-            </a:pPr>
-            <a:r>
-              <a:rPr lang="en" sz="2000"/>
-              <a:t>индексацию.</a:t>
-            </a:r>
-            <a:endParaRPr sz="2000"/>
           </a:p>
         </p:txBody>
       </p:sp>
       <p:pic>
         <p:nvPicPr>
-          <p:cNvPr id="117" name="Google Shape;117;p24"/>
+          <p:cNvPr id="118" name="Google Shape;118;p24" title="Lecture7-1.jpg"/>
           <p:cNvPicPr preferRelativeResize="0"/>
           <p:nvPr/>
         </p:nvPicPr>
@@ -10507,8 +10834,36 @@
         </p:blipFill>
         <p:spPr>
           <a:xfrm>
-            <a:off x="152400" y="2089975"/>
-            <a:ext cx="8839199" cy="2757967"/>
+            <a:off x="394450" y="566725"/>
+            <a:ext cx="3278647" cy="4530826"/>
+          </a:xfrm>
+          <a:prstGeom prst="rect">
+            <a:avLst/>
+          </a:prstGeom>
+          <a:noFill/>
+          <a:ln>
+            <a:noFill/>
+          </a:ln>
+        </p:spPr>
+      </p:pic>
+      <p:pic>
+        <p:nvPicPr>
+          <p:cNvPr id="119" name="Google Shape;119;p24" title="Lecture7-11.jpg"/>
+          <p:cNvPicPr preferRelativeResize="0"/>
+          <p:nvPr/>
+        </p:nvPicPr>
+        <p:blipFill>
+          <a:blip r:embed="rId4">
+            <a:alphaModFix/>
+          </a:blip>
+          <a:stretch>
+            <a:fillRect/>
+          </a:stretch>
+        </p:blipFill>
+        <p:spPr>
+          <a:xfrm>
+            <a:off x="5667925" y="608425"/>
+            <a:ext cx="3225999" cy="4485299"/>
           </a:xfrm>
           <a:prstGeom prst="rect">
             <a:avLst/>
@@ -10532,7 +10887,113 @@
   <p:cSld>
     <p:spTree>
       <p:nvGrpSpPr>
-        <p:cNvPr id="121" name="Shape 121"/>
+        <p:cNvPr id="123" name="Shape 123"/>
+        <p:cNvGrpSpPr/>
+        <p:nvPr/>
+      </p:nvGrpSpPr>
+      <p:grpSpPr>
+        <a:xfrm>
+          <a:off x="0" y="0"/>
+          <a:ext cx="0" cy="0"/>
+          <a:chOff x="0" y="0"/>
+          <a:chExt cx="0" cy="0"/>
+        </a:xfrm>
+      </p:grpSpPr>
+      <p:pic>
+        <p:nvPicPr>
+          <p:cNvPr id="124" name="Google Shape;124;p25" title="Lecture7gr.png"/>
+          <p:cNvPicPr preferRelativeResize="0"/>
+          <p:nvPr/>
+        </p:nvPicPr>
+        <p:blipFill>
+          <a:blip r:embed="rId3">
+            <a:alphaModFix/>
+          </a:blip>
+          <a:stretch>
+            <a:fillRect/>
+          </a:stretch>
+        </p:blipFill>
+        <p:spPr>
+          <a:xfrm>
+            <a:off x="1312200" y="697000"/>
+            <a:ext cx="6096000" cy="3657600"/>
+          </a:xfrm>
+          <a:prstGeom prst="rect">
+            <a:avLst/>
+          </a:prstGeom>
+          <a:noFill/>
+          <a:ln>
+            <a:noFill/>
+          </a:ln>
+        </p:spPr>
+      </p:pic>
+    </p:spTree>
+  </p:cSld>
+  <p:clrMapOvr>
+    <a:masterClrMapping/>
+  </p:clrMapOvr>
+</p:sld>
+</file>
+
+<file path=ppt/slides/slide12.xml><?xml version="1.0" encoding="utf-8"?>
+<p:sld xmlns:a="http://schemas.openxmlformats.org/drawingml/2006/main" xmlns:r="http://schemas.openxmlformats.org/officeDocument/2006/relationships" xmlns:mc="http://schemas.openxmlformats.org/markup-compatibility/2006" xmlns:mv="urn:schemas-microsoft-com:mac:vml" xmlns:p="http://schemas.openxmlformats.org/presentationml/2006/main" xmlns:c="http://schemas.openxmlformats.org/drawingml/2006/chart" xmlns:dgm="http://schemas.openxmlformats.org/drawingml/2006/diagram" xmlns:o="urn:schemas-microsoft-com:office:office" xmlns:v="urn:schemas-microsoft-com:vml" xmlns:pvml="urn:schemas-microsoft-com:office:powerpoint" xmlns:com="http://schemas.openxmlformats.org/drawingml/2006/compatibility" xmlns:p14="http://schemas.microsoft.com/office/powerpoint/2010/main" xmlns:p15="http://schemas.microsoft.com/office/powerpoint/2012/main" xmlns:ahyp="http://schemas.microsoft.com/office/drawing/2018/hyperlinkcolor">
+  <p:cSld>
+    <p:spTree>
+      <p:nvGrpSpPr>
+        <p:cNvPr id="128" name="Shape 128"/>
+        <p:cNvGrpSpPr/>
+        <p:nvPr/>
+      </p:nvGrpSpPr>
+      <p:grpSpPr>
+        <a:xfrm>
+          <a:off x="0" y="0"/>
+          <a:ext cx="0" cy="0"/>
+          <a:chOff x="0" y="0"/>
+          <a:chExt cx="0" cy="0"/>
+        </a:xfrm>
+      </p:grpSpPr>
+      <p:pic>
+        <p:nvPicPr>
+          <p:cNvPr id="129" name="Google Shape;129;p26" title="Lecture7-31.jpg"/>
+          <p:cNvPicPr preferRelativeResize="0"/>
+          <p:nvPr/>
+        </p:nvPicPr>
+        <p:blipFill>
+          <a:blip r:embed="rId3">
+            <a:alphaModFix/>
+          </a:blip>
+          <a:stretch>
+            <a:fillRect/>
+          </a:stretch>
+        </p:blipFill>
+        <p:spPr>
+          <a:xfrm>
+            <a:off x="2088800" y="152400"/>
+            <a:ext cx="4328370" cy="4838702"/>
+          </a:xfrm>
+          <a:prstGeom prst="rect">
+            <a:avLst/>
+          </a:prstGeom>
+          <a:noFill/>
+          <a:ln>
+            <a:noFill/>
+          </a:ln>
+        </p:spPr>
+      </p:pic>
+    </p:spTree>
+  </p:cSld>
+  <p:clrMapOvr>
+    <a:masterClrMapping/>
+  </p:clrMapOvr>
+</p:sld>
+</file>
+
+<file path=ppt/slides/slide13.xml><?xml version="1.0" encoding="utf-8"?>
+<p:sld xmlns:a="http://schemas.openxmlformats.org/drawingml/2006/main" xmlns:r="http://schemas.openxmlformats.org/officeDocument/2006/relationships" xmlns:mc="http://schemas.openxmlformats.org/markup-compatibility/2006" xmlns:mv="urn:schemas-microsoft-com:mac:vml" xmlns:p="http://schemas.openxmlformats.org/presentationml/2006/main" xmlns:c="http://schemas.openxmlformats.org/drawingml/2006/chart" xmlns:dgm="http://schemas.openxmlformats.org/drawingml/2006/diagram" xmlns:o="urn:schemas-microsoft-com:office:office" xmlns:v="urn:schemas-microsoft-com:vml" xmlns:pvml="urn:schemas-microsoft-com:office:powerpoint" xmlns:com="http://schemas.openxmlformats.org/drawingml/2006/compatibility" xmlns:p14="http://schemas.microsoft.com/office/powerpoint/2010/main" xmlns:p15="http://schemas.microsoft.com/office/powerpoint/2012/main" xmlns:ahyp="http://schemas.microsoft.com/office/drawing/2018/hyperlinkcolor">
+  <p:cSld>
+    <p:spTree>
+      <p:nvGrpSpPr>
+        <p:cNvPr id="133" name="Shape 133"/>
         <p:cNvGrpSpPr/>
         <p:nvPr/>
       </p:nvGrpSpPr>
@@ -10546,7 +11007,7 @@
       </p:grpSpPr>
       <p:sp>
         <p:nvSpPr>
-          <p:cNvPr id="122" name="Google Shape;122;p25"/>
+          <p:cNvPr id="134" name="Google Shape;134;p27"/>
           <p:cNvSpPr txBox="1"/>
           <p:nvPr/>
         </p:nvSpPr>
@@ -10598,7 +11059,7 @@
       </p:sp>
       <p:pic>
         <p:nvPicPr>
-          <p:cNvPr id="123" name="Google Shape;123;p25"/>
+          <p:cNvPr id="135" name="Google Shape;135;p27"/>
           <p:cNvPicPr preferRelativeResize="0"/>
           <p:nvPr/>
         </p:nvPicPr>
@@ -10626,7 +11087,7 @@
       </p:pic>
       <p:pic>
         <p:nvPicPr>
-          <p:cNvPr id="124" name="Google Shape;124;p25"/>
+          <p:cNvPr id="136" name="Google Shape;136;p27"/>
           <p:cNvPicPr preferRelativeResize="0"/>
           <p:nvPr/>
         </p:nvPicPr>
@@ -10660,7 +11121,7 @@
       </p:pic>
       <p:sp>
         <p:nvSpPr>
-          <p:cNvPr id="125" name="Google Shape;125;p25"/>
+          <p:cNvPr id="137" name="Google Shape;137;p27"/>
           <p:cNvSpPr txBox="1"/>
           <p:nvPr/>
         </p:nvSpPr>
@@ -10710,12 +11171,12 @@
 </p:sld>
 </file>
 
-<file path=ppt/slides/slide12.xml><?xml version="1.0" encoding="utf-8"?>
+<file path=ppt/slides/slide14.xml><?xml version="1.0" encoding="utf-8"?>
 <p:sld xmlns:a="http://schemas.openxmlformats.org/drawingml/2006/main" xmlns:r="http://schemas.openxmlformats.org/officeDocument/2006/relationships" xmlns:mc="http://schemas.openxmlformats.org/markup-compatibility/2006" xmlns:mv="urn:schemas-microsoft-com:mac:vml" xmlns:p="http://schemas.openxmlformats.org/presentationml/2006/main" xmlns:c="http://schemas.openxmlformats.org/drawingml/2006/chart" xmlns:dgm="http://schemas.openxmlformats.org/drawingml/2006/diagram" xmlns:o="urn:schemas-microsoft-com:office:office" xmlns:v="urn:schemas-microsoft-com:vml" xmlns:pvml="urn:schemas-microsoft-com:office:powerpoint" xmlns:com="http://schemas.openxmlformats.org/drawingml/2006/compatibility" xmlns:p14="http://schemas.microsoft.com/office/powerpoint/2010/main" xmlns:p15="http://schemas.microsoft.com/office/powerpoint/2012/main" xmlns:ahyp="http://schemas.microsoft.com/office/drawing/2018/hyperlinkcolor">
   <p:cSld>
     <p:spTree>
       <p:nvGrpSpPr>
-        <p:cNvPr id="129" name="Shape 129"/>
+        <p:cNvPr id="141" name="Shape 141"/>
         <p:cNvGrpSpPr/>
         <p:nvPr/>
       </p:nvGrpSpPr>
@@ -10729,7 +11190,7 @@
       </p:grpSpPr>
       <p:pic>
         <p:nvPicPr>
-          <p:cNvPr id="130" name="Google Shape;130;p26"/>
+          <p:cNvPr id="142" name="Google Shape;142;p28"/>
           <p:cNvPicPr preferRelativeResize="0"/>
           <p:nvPr/>
         </p:nvPicPr>
@@ -10757,7 +11218,7 @@
       </p:pic>
       <p:sp>
         <p:nvSpPr>
-          <p:cNvPr id="131" name="Google Shape;131;p26"/>
+          <p:cNvPr id="143" name="Google Shape;143;p28"/>
           <p:cNvSpPr txBox="1"/>
           <p:nvPr/>
         </p:nvSpPr>
@@ -10833,7 +11294,7 @@
       </p:sp>
       <p:pic>
         <p:nvPicPr>
-          <p:cNvPr id="132" name="Google Shape;132;p26"/>
+          <p:cNvPr id="144" name="Google Shape;144;p28"/>
           <p:cNvPicPr preferRelativeResize="0"/>
           <p:nvPr/>
         </p:nvPicPr>
@@ -10873,12 +11334,12 @@
 </p:sld>
 </file>
 
-<file path=ppt/slides/slide13.xml><?xml version="1.0" encoding="utf-8"?>
+<file path=ppt/slides/slide15.xml><?xml version="1.0" encoding="utf-8"?>
 <p:sld xmlns:a="http://schemas.openxmlformats.org/drawingml/2006/main" xmlns:r="http://schemas.openxmlformats.org/officeDocument/2006/relationships" xmlns:mc="http://schemas.openxmlformats.org/markup-compatibility/2006" xmlns:mv="urn:schemas-microsoft-com:mac:vml" xmlns:p="http://schemas.openxmlformats.org/presentationml/2006/main" xmlns:c="http://schemas.openxmlformats.org/drawingml/2006/chart" xmlns:dgm="http://schemas.openxmlformats.org/drawingml/2006/diagram" xmlns:o="urn:schemas-microsoft-com:office:office" xmlns:v="urn:schemas-microsoft-com:vml" xmlns:pvml="urn:schemas-microsoft-com:office:powerpoint" xmlns:com="http://schemas.openxmlformats.org/drawingml/2006/compatibility" xmlns:p14="http://schemas.microsoft.com/office/powerpoint/2010/main" xmlns:p15="http://schemas.microsoft.com/office/powerpoint/2012/main" xmlns:ahyp="http://schemas.microsoft.com/office/drawing/2018/hyperlinkcolor">
   <p:cSld>
     <p:spTree>
       <p:nvGrpSpPr>
-        <p:cNvPr id="136" name="Shape 136"/>
+        <p:cNvPr id="148" name="Shape 148"/>
         <p:cNvGrpSpPr/>
         <p:nvPr/>
       </p:nvGrpSpPr>
@@ -10892,7 +11353,7 @@
       </p:grpSpPr>
       <p:sp>
         <p:nvSpPr>
-          <p:cNvPr id="137" name="Google Shape;137;p27"/>
+          <p:cNvPr id="149" name="Google Shape;149;p29"/>
           <p:cNvSpPr txBox="1"/>
           <p:nvPr/>
         </p:nvSpPr>
@@ -10944,7 +11405,7 @@
       </p:sp>
       <p:pic>
         <p:nvPicPr>
-          <p:cNvPr id="138" name="Google Shape;138;p27"/>
+          <p:cNvPr id="150" name="Google Shape;150;p29"/>
           <p:cNvPicPr preferRelativeResize="0"/>
           <p:nvPr/>
         </p:nvPicPr>
@@ -10972,7 +11433,7 @@
       </p:pic>
       <p:sp>
         <p:nvSpPr>
-          <p:cNvPr id="139" name="Google Shape;139;p27"/>
+          <p:cNvPr id="151" name="Google Shape;151;p29"/>
           <p:cNvSpPr txBox="1"/>
           <p:nvPr/>
         </p:nvSpPr>
@@ -11030,12 +11491,12 @@
 </p:sld>
 </file>
 
-<file path=ppt/slides/slide14.xml><?xml version="1.0" encoding="utf-8"?>
+<file path=ppt/slides/slide16.xml><?xml version="1.0" encoding="utf-8"?>
 <p:sld xmlns:a="http://schemas.openxmlformats.org/drawingml/2006/main" xmlns:r="http://schemas.openxmlformats.org/officeDocument/2006/relationships" xmlns:mc="http://schemas.openxmlformats.org/markup-compatibility/2006" xmlns:mv="urn:schemas-microsoft-com:mac:vml" xmlns:p="http://schemas.openxmlformats.org/presentationml/2006/main" xmlns:c="http://schemas.openxmlformats.org/drawingml/2006/chart" xmlns:dgm="http://schemas.openxmlformats.org/drawingml/2006/diagram" xmlns:o="urn:schemas-microsoft-com:office:office" xmlns:v="urn:schemas-microsoft-com:vml" xmlns:pvml="urn:schemas-microsoft-com:office:powerpoint" xmlns:com="http://schemas.openxmlformats.org/drawingml/2006/compatibility" xmlns:p14="http://schemas.microsoft.com/office/powerpoint/2010/main" xmlns:p15="http://schemas.microsoft.com/office/powerpoint/2012/main" xmlns:ahyp="http://schemas.microsoft.com/office/drawing/2018/hyperlinkcolor">
   <p:cSld>
     <p:spTree>
       <p:nvGrpSpPr>
-        <p:cNvPr id="143" name="Shape 143"/>
+        <p:cNvPr id="155" name="Shape 155"/>
         <p:cNvGrpSpPr/>
         <p:nvPr/>
       </p:nvGrpSpPr>
@@ -11049,7 +11510,7 @@
       </p:grpSpPr>
       <p:sp>
         <p:nvSpPr>
-          <p:cNvPr id="144" name="Google Shape;144;p28"/>
+          <p:cNvPr id="156" name="Google Shape;156;p30"/>
           <p:cNvSpPr txBox="1"/>
           <p:nvPr/>
         </p:nvSpPr>
@@ -11103,7 +11564,7 @@
       </p:sp>
       <p:sp>
         <p:nvSpPr>
-          <p:cNvPr id="145" name="Google Shape;145;p28"/>
+          <p:cNvPr id="157" name="Google Shape;157;p30"/>
           <p:cNvSpPr txBox="1"/>
           <p:nvPr/>
         </p:nvSpPr>
@@ -11155,7 +11616,7 @@
       </p:sp>
       <p:pic>
         <p:nvPicPr>
-          <p:cNvPr id="146" name="Google Shape;146;p28"/>
+          <p:cNvPr id="158" name="Google Shape;158;p30"/>
           <p:cNvPicPr preferRelativeResize="0"/>
           <p:nvPr/>
         </p:nvPicPr>
@@ -11189,12 +11650,12 @@
 </p:sld>
 </file>
 
-<file path=ppt/slides/slide15.xml><?xml version="1.0" encoding="utf-8"?>
+<file path=ppt/slides/slide17.xml><?xml version="1.0" encoding="utf-8"?>
 <p:sld xmlns:a="http://schemas.openxmlformats.org/drawingml/2006/main" xmlns:r="http://schemas.openxmlformats.org/officeDocument/2006/relationships" xmlns:mc="http://schemas.openxmlformats.org/markup-compatibility/2006" xmlns:mv="urn:schemas-microsoft-com:mac:vml" xmlns:p="http://schemas.openxmlformats.org/presentationml/2006/main" xmlns:c="http://schemas.openxmlformats.org/drawingml/2006/chart" xmlns:dgm="http://schemas.openxmlformats.org/drawingml/2006/diagram" xmlns:o="urn:schemas-microsoft-com:office:office" xmlns:v="urn:schemas-microsoft-com:vml" xmlns:pvml="urn:schemas-microsoft-com:office:powerpoint" xmlns:com="http://schemas.openxmlformats.org/drawingml/2006/compatibility" xmlns:p14="http://schemas.microsoft.com/office/powerpoint/2010/main" xmlns:p15="http://schemas.microsoft.com/office/powerpoint/2012/main" xmlns:ahyp="http://schemas.microsoft.com/office/drawing/2018/hyperlinkcolor">
   <p:cSld>
     <p:spTree>
       <p:nvGrpSpPr>
-        <p:cNvPr id="150" name="Shape 150"/>
+        <p:cNvPr id="162" name="Shape 162"/>
         <p:cNvGrpSpPr/>
         <p:nvPr/>
       </p:nvGrpSpPr>
@@ -11208,7 +11669,7 @@
       </p:grpSpPr>
       <p:sp>
         <p:nvSpPr>
-          <p:cNvPr id="151" name="Google Shape;151;p29"/>
+          <p:cNvPr id="163" name="Google Shape;163;p31"/>
           <p:cNvSpPr txBox="1"/>
           <p:nvPr/>
         </p:nvSpPr>
@@ -11260,7 +11721,7 @@
       </p:sp>
       <p:sp>
         <p:nvSpPr>
-          <p:cNvPr id="152" name="Google Shape;152;p29"/>
+          <p:cNvPr id="164" name="Google Shape;164;p31"/>
           <p:cNvSpPr txBox="1"/>
           <p:nvPr/>
         </p:nvSpPr>
@@ -11343,9 +11804,9 @@
             </a:pPr>
             <a:r>
               <a:rPr lang="en" sz="2000"/>
-              <a:t>float x, y, z;</a:t>
-            </a:r>
-            <a:endParaRPr sz="2000"/>
+              <a:t>float x, y, z;  </a:t>
+            </a:r>
+            <a:endParaRPr i="1" sz="2000"/>
           </a:p>
           <a:p>
             <a:pPr indent="0" lvl="0" marL="0" rtl="0" algn="l">
@@ -11506,12 +11967,12 @@
 </p:sld>
 </file>
 
-<file path=ppt/slides/slide16.xml><?xml version="1.0" encoding="utf-8"?>
+<file path=ppt/slides/slide18.xml><?xml version="1.0" encoding="utf-8"?>
 <p:sld xmlns:a="http://schemas.openxmlformats.org/drawingml/2006/main" xmlns:r="http://schemas.openxmlformats.org/officeDocument/2006/relationships" xmlns:mc="http://schemas.openxmlformats.org/markup-compatibility/2006" xmlns:mv="urn:schemas-microsoft-com:mac:vml" xmlns:p="http://schemas.openxmlformats.org/presentationml/2006/main" xmlns:c="http://schemas.openxmlformats.org/drawingml/2006/chart" xmlns:dgm="http://schemas.openxmlformats.org/drawingml/2006/diagram" xmlns:o="urn:schemas-microsoft-com:office:office" xmlns:v="urn:schemas-microsoft-com:vml" xmlns:pvml="urn:schemas-microsoft-com:office:powerpoint" xmlns:com="http://schemas.openxmlformats.org/drawingml/2006/compatibility" xmlns:p14="http://schemas.microsoft.com/office/powerpoint/2010/main" xmlns:p15="http://schemas.microsoft.com/office/powerpoint/2012/main" xmlns:ahyp="http://schemas.microsoft.com/office/drawing/2018/hyperlinkcolor">
   <p:cSld>
     <p:spTree>
       <p:nvGrpSpPr>
-        <p:cNvPr id="156" name="Shape 156"/>
+        <p:cNvPr id="168" name="Shape 168"/>
         <p:cNvGrpSpPr/>
         <p:nvPr/>
       </p:nvGrpSpPr>
@@ -11525,7 +11986,7 @@
       </p:grpSpPr>
       <p:sp>
         <p:nvSpPr>
-          <p:cNvPr id="157" name="Google Shape;157;p30"/>
+          <p:cNvPr id="169" name="Google Shape;169;p32"/>
           <p:cNvSpPr txBox="1"/>
           <p:nvPr/>
         </p:nvSpPr>
@@ -11815,12 +12276,12 @@
 </p:sld>
 </file>
 
-<file path=ppt/slides/slide17.xml><?xml version="1.0" encoding="utf-8"?>
+<file path=ppt/slides/slide19.xml><?xml version="1.0" encoding="utf-8"?>
 <p:sld xmlns:a="http://schemas.openxmlformats.org/drawingml/2006/main" xmlns:r="http://schemas.openxmlformats.org/officeDocument/2006/relationships" xmlns:mc="http://schemas.openxmlformats.org/markup-compatibility/2006" xmlns:mv="urn:schemas-microsoft-com:mac:vml" xmlns:p="http://schemas.openxmlformats.org/presentationml/2006/main" xmlns:c="http://schemas.openxmlformats.org/drawingml/2006/chart" xmlns:dgm="http://schemas.openxmlformats.org/drawingml/2006/diagram" xmlns:o="urn:schemas-microsoft-com:office:office" xmlns:v="urn:schemas-microsoft-com:vml" xmlns:pvml="urn:schemas-microsoft-com:office:powerpoint" xmlns:com="http://schemas.openxmlformats.org/drawingml/2006/compatibility" xmlns:p14="http://schemas.microsoft.com/office/powerpoint/2010/main" xmlns:p15="http://schemas.microsoft.com/office/powerpoint/2012/main" xmlns:ahyp="http://schemas.microsoft.com/office/drawing/2018/hyperlinkcolor">
   <p:cSld>
     <p:spTree>
       <p:nvGrpSpPr>
-        <p:cNvPr id="161" name="Shape 161"/>
+        <p:cNvPr id="173" name="Shape 173"/>
         <p:cNvGrpSpPr/>
         <p:nvPr/>
       </p:nvGrpSpPr>
@@ -11834,7 +12295,7 @@
       </p:grpSpPr>
       <p:sp>
         <p:nvSpPr>
-          <p:cNvPr id="162" name="Google Shape;162;p31"/>
+          <p:cNvPr id="174" name="Google Shape;174;p33"/>
           <p:cNvSpPr txBox="1"/>
           <p:nvPr/>
         </p:nvSpPr>
@@ -11886,14 +12347,14 @@
       </p:sp>
       <p:sp>
         <p:nvSpPr>
-          <p:cNvPr id="163" name="Google Shape;163;p31"/>
+          <p:cNvPr id="175" name="Google Shape;175;p33"/>
           <p:cNvSpPr txBox="1"/>
           <p:nvPr/>
         </p:nvSpPr>
         <p:spPr>
           <a:xfrm>
             <a:off x="65775" y="1197775"/>
-            <a:ext cx="9012600" cy="3078300"/>
+            <a:ext cx="9012600" cy="3386400"/>
           </a:xfrm>
           <a:prstGeom prst="rect">
             <a:avLst/>
@@ -11942,6 +12403,44 @@
               <a:buNone/>
             </a:pPr>
             <a:r>
+              <a:rPr lang="en" sz="2000">
+                <a:solidFill>
+                  <a:schemeClr val="dk1"/>
+                </a:solidFill>
+              </a:rPr>
+              <a:t>//</a:t>
+            </a:r>
+            <a:r>
+              <a:rPr lang="en" sz="2000">
+                <a:solidFill>
+                  <a:schemeClr val="dk1"/>
+                </a:solidFill>
+                <a:highlight>
+                  <a:srgbClr val="EAD1DC"/>
+                </a:highlight>
+              </a:rPr>
+              <a:t>cudaArray_t cuArray = 0;</a:t>
+            </a:r>
+            <a:endParaRPr sz="2000">
+              <a:solidFill>
+                <a:schemeClr val="dk1"/>
+              </a:solidFill>
+              <a:highlight>
+                <a:srgbClr val="EAD1DC"/>
+              </a:highlight>
+            </a:endParaRPr>
+          </a:p>
+          <a:p>
+            <a:pPr indent="0" lvl="0" marL="0" rtl="0" algn="l">
+              <a:spcBef>
+                <a:spcPts val="0"/>
+              </a:spcBef>
+              <a:spcAft>
+                <a:spcPts val="0"/>
+              </a:spcAft>
+              <a:buNone/>
+            </a:pPr>
+            <a:r>
               <a:t/>
             </a:r>
             <a:endParaRPr sz="2000"/>
@@ -12078,643 +12577,6 @@
             </a:pPr>
             <a:r>
               <a:t/>
-            </a:r>
-            <a:endParaRPr/>
-          </a:p>
-        </p:txBody>
-      </p:sp>
-    </p:spTree>
-  </p:cSld>
-  <p:clrMapOvr>
-    <a:masterClrMapping/>
-  </p:clrMapOvr>
-</p:sld>
-</file>
-
-<file path=ppt/slides/slide18.xml><?xml version="1.0" encoding="utf-8"?>
-<p:sld xmlns:a="http://schemas.openxmlformats.org/drawingml/2006/main" xmlns:r="http://schemas.openxmlformats.org/officeDocument/2006/relationships" xmlns:mc="http://schemas.openxmlformats.org/markup-compatibility/2006" xmlns:mv="urn:schemas-microsoft-com:mac:vml" xmlns:p="http://schemas.openxmlformats.org/presentationml/2006/main" xmlns:c="http://schemas.openxmlformats.org/drawingml/2006/chart" xmlns:dgm="http://schemas.openxmlformats.org/drawingml/2006/diagram" xmlns:o="urn:schemas-microsoft-com:office:office" xmlns:v="urn:schemas-microsoft-com:vml" xmlns:pvml="urn:schemas-microsoft-com:office:powerpoint" xmlns:com="http://schemas.openxmlformats.org/drawingml/2006/compatibility" xmlns:p14="http://schemas.microsoft.com/office/powerpoint/2010/main" xmlns:p15="http://schemas.microsoft.com/office/powerpoint/2012/main" xmlns:ahyp="http://schemas.microsoft.com/office/drawing/2018/hyperlinkcolor">
-  <p:cSld>
-    <p:spTree>
-      <p:nvGrpSpPr>
-        <p:cNvPr id="167" name="Shape 167"/>
-        <p:cNvGrpSpPr/>
-        <p:nvPr/>
-      </p:nvGrpSpPr>
-      <p:grpSpPr>
-        <a:xfrm>
-          <a:off x="0" y="0"/>
-          <a:ext cx="0" cy="0"/>
-          <a:chOff x="0" y="0"/>
-          <a:chExt cx="0" cy="0"/>
-        </a:xfrm>
-      </p:grpSpPr>
-      <p:sp>
-        <p:nvSpPr>
-          <p:cNvPr id="168" name="Google Shape;168;p32"/>
-          <p:cNvSpPr txBox="1"/>
-          <p:nvPr/>
-        </p:nvSpPr>
-        <p:spPr>
-          <a:xfrm>
-            <a:off x="118400" y="589275"/>
-            <a:ext cx="8959800" cy="3263100"/>
-          </a:xfrm>
-          <a:prstGeom prst="rect">
-            <a:avLst/>
-          </a:prstGeom>
-          <a:solidFill>
-            <a:srgbClr val="FFE599"/>
-          </a:solidFill>
-          <a:ln>
-            <a:noFill/>
-          </a:ln>
-        </p:spPr>
-        <p:txBody>
-          <a:bodyPr anchorCtr="0" anchor="t" bIns="91425" lIns="91425" spcFirstLastPara="1" rIns="91425" wrap="square" tIns="91425">
-            <a:spAutoFit/>
-          </a:bodyPr>
-          <a:lstStyle/>
-          <a:p>
-            <a:pPr indent="0" lvl="0" marL="0" rtl="0" algn="l">
-              <a:spcBef>
-                <a:spcPts val="0"/>
-              </a:spcBef>
-              <a:spcAft>
-                <a:spcPts val="0"/>
-              </a:spcAft>
-              <a:buClr>
-                <a:schemeClr val="dk1"/>
-              </a:buClr>
-              <a:buSzPts val="1100"/>
-              <a:buFont typeface="Arial"/>
-              <a:buNone/>
-            </a:pPr>
-            <a:r>
-              <a:rPr lang="en" sz="2000">
-                <a:solidFill>
-                  <a:schemeClr val="dk1"/>
-                </a:solidFill>
-              </a:rPr>
-              <a:t>  </a:t>
-            </a:r>
-            <a:r>
-              <a:rPr lang="en" sz="2000">
-                <a:solidFill>
-                  <a:schemeClr val="dk1"/>
-                </a:solidFill>
-              </a:rPr>
-              <a:t>cpyParams.srcPtr = make_cudaPitchedPtr( (void*)df_h,</a:t>
-            </a:r>
-            <a:endParaRPr sz="2000">
-              <a:solidFill>
-                <a:schemeClr val="dk1"/>
-              </a:solidFill>
-            </a:endParaRPr>
-          </a:p>
-          <a:p>
-            <a:pPr indent="0" lvl="0" marL="0" rtl="0" algn="l">
-              <a:spcBef>
-                <a:spcPts val="0"/>
-              </a:spcBef>
-              <a:spcAft>
-                <a:spcPts val="0"/>
-              </a:spcAft>
-              <a:buNone/>
-            </a:pPr>
-            <a:r>
-              <a:rPr lang="en" sz="2000">
-                <a:solidFill>
-                  <a:schemeClr val="dk1"/>
-                </a:solidFill>
-              </a:rPr>
-              <a:t>           volumeSize.width*sizeof(float), </a:t>
-            </a:r>
-            <a:endParaRPr sz="2000">
-              <a:solidFill>
-                <a:schemeClr val="dk1"/>
-              </a:solidFill>
-            </a:endParaRPr>
-          </a:p>
-          <a:p>
-            <a:pPr indent="0" lvl="0" marL="0" rtl="0" algn="l">
-              <a:spcBef>
-                <a:spcPts val="0"/>
-              </a:spcBef>
-              <a:spcAft>
-                <a:spcPts val="0"/>
-              </a:spcAft>
-              <a:buClr>
-                <a:schemeClr val="dk1"/>
-              </a:buClr>
-              <a:buSzPts val="1100"/>
-              <a:buFont typeface="Arial"/>
-              <a:buNone/>
-            </a:pPr>
-            <a:r>
-              <a:rPr lang="en" sz="2000">
-                <a:solidFill>
-                  <a:schemeClr val="dk1"/>
-                </a:solidFill>
-              </a:rPr>
-              <a:t>            volumeSize.width, volumeSize.height);</a:t>
-            </a:r>
-            <a:endParaRPr sz="2000">
-              <a:solidFill>
-                <a:schemeClr val="dk1"/>
-              </a:solidFill>
-            </a:endParaRPr>
-          </a:p>
-          <a:p>
-            <a:pPr indent="0" lvl="0" marL="0" rtl="0" algn="l">
-              <a:spcBef>
-                <a:spcPts val="0"/>
-              </a:spcBef>
-              <a:spcAft>
-                <a:spcPts val="0"/>
-              </a:spcAft>
-              <a:buClr>
-                <a:schemeClr val="dk1"/>
-              </a:buClr>
-              <a:buSzPts val="1100"/>
-              <a:buFont typeface="Arial"/>
-              <a:buNone/>
-            </a:pPr>
-            <a:r>
-              <a:rPr lang="en" sz="2000">
-                <a:solidFill>
-                  <a:schemeClr val="dk1"/>
-                </a:solidFill>
-              </a:rPr>
-              <a:t>  cpyParams.dstArray = df_Array;</a:t>
-            </a:r>
-            <a:endParaRPr sz="2000">
-              <a:solidFill>
-                <a:schemeClr val="dk1"/>
-              </a:solidFill>
-            </a:endParaRPr>
-          </a:p>
-          <a:p>
-            <a:pPr indent="0" lvl="0" marL="0" rtl="0" algn="l">
-              <a:spcBef>
-                <a:spcPts val="0"/>
-              </a:spcBef>
-              <a:spcAft>
-                <a:spcPts val="0"/>
-              </a:spcAft>
-              <a:buNone/>
-            </a:pPr>
-            <a:r>
-              <a:rPr lang="en" sz="2000">
-                <a:solidFill>
-                  <a:schemeClr val="dk1"/>
-                </a:solidFill>
-              </a:rPr>
-              <a:t>  </a:t>
-            </a:r>
-            <a:endParaRPr sz="2000">
-              <a:solidFill>
-                <a:schemeClr val="dk1"/>
-              </a:solidFill>
-            </a:endParaRPr>
-          </a:p>
-          <a:p>
-            <a:pPr indent="0" lvl="0" marL="0" rtl="0" algn="l">
-              <a:spcBef>
-                <a:spcPts val="0"/>
-              </a:spcBef>
-              <a:spcAft>
-                <a:spcPts val="0"/>
-              </a:spcAft>
-              <a:buClr>
-                <a:schemeClr val="dk1"/>
-              </a:buClr>
-              <a:buSzPts val="1100"/>
-              <a:buFont typeface="Arial"/>
-              <a:buNone/>
-            </a:pPr>
-            <a:r>
-              <a:rPr lang="en" sz="2000">
-                <a:solidFill>
-                  <a:schemeClr val="dk1"/>
-                </a:solidFill>
-              </a:rPr>
-              <a:t>  cpyParams.extent = volumeSize;</a:t>
-            </a:r>
-            <a:endParaRPr sz="2000">
-              <a:solidFill>
-                <a:schemeClr val="dk1"/>
-              </a:solidFill>
-            </a:endParaRPr>
-          </a:p>
-          <a:p>
-            <a:pPr indent="0" lvl="0" marL="0" rtl="0" algn="l">
-              <a:spcBef>
-                <a:spcPts val="0"/>
-              </a:spcBef>
-              <a:spcAft>
-                <a:spcPts val="0"/>
-              </a:spcAft>
-              <a:buClr>
-                <a:schemeClr val="dk1"/>
-              </a:buClr>
-              <a:buSzPts val="1100"/>
-              <a:buFont typeface="Arial"/>
-              <a:buNone/>
-            </a:pPr>
-            <a:r>
-              <a:rPr lang="en" sz="2000">
-                <a:solidFill>
-                  <a:schemeClr val="dk1"/>
-                </a:solidFill>
-              </a:rPr>
-              <a:t>  cpyParams.kind = cudaMemcpyHostToDevice;</a:t>
-            </a:r>
-            <a:endParaRPr sz="2000">
-              <a:solidFill>
-                <a:schemeClr val="dk1"/>
-              </a:solidFill>
-            </a:endParaRPr>
-          </a:p>
-          <a:p>
-            <a:pPr indent="0" lvl="0" marL="0" rtl="0" algn="l">
-              <a:spcBef>
-                <a:spcPts val="0"/>
-              </a:spcBef>
-              <a:spcAft>
-                <a:spcPts val="0"/>
-              </a:spcAft>
-              <a:buNone/>
-            </a:pPr>
-            <a:r>
-              <a:rPr lang="en" sz="2000">
-                <a:solidFill>
-                  <a:schemeClr val="dk1"/>
-                </a:solidFill>
-              </a:rPr>
-              <a:t>  </a:t>
-            </a:r>
-            <a:endParaRPr sz="2000">
-              <a:solidFill>
-                <a:schemeClr val="dk1"/>
-              </a:solidFill>
-            </a:endParaRPr>
-          </a:p>
-          <a:p>
-            <a:pPr indent="0" lvl="0" marL="0" rtl="0" algn="l">
-              <a:spcBef>
-                <a:spcPts val="0"/>
-              </a:spcBef>
-              <a:spcAft>
-                <a:spcPts val="0"/>
-              </a:spcAft>
-              <a:buNone/>
-            </a:pPr>
-            <a:r>
-              <a:rPr lang="en" sz="2000">
-                <a:solidFill>
-                  <a:schemeClr val="dk1"/>
-                </a:solidFill>
-              </a:rPr>
-              <a:t>  cudaMemcpy3D(&amp;cpyParams);</a:t>
-            </a:r>
-            <a:endParaRPr sz="2000">
-              <a:solidFill>
-                <a:schemeClr val="dk1"/>
-              </a:solidFill>
-            </a:endParaRPr>
-          </a:p>
-          <a:p>
-            <a:pPr indent="0" lvl="0" marL="0" rtl="0" algn="l">
-              <a:spcBef>
-                <a:spcPts val="0"/>
-              </a:spcBef>
-              <a:spcAft>
-                <a:spcPts val="0"/>
-              </a:spcAft>
-              <a:buNone/>
-            </a:pPr>
-            <a:r>
-              <a:rPr lang="en" sz="2000">
-                <a:solidFill>
-                  <a:schemeClr val="dk1"/>
-                </a:solidFill>
-              </a:rPr>
-              <a:t>}</a:t>
-            </a:r>
-            <a:endParaRPr sz="2000">
-              <a:solidFill>
-                <a:schemeClr val="dk1"/>
-              </a:solidFill>
-            </a:endParaRPr>
-          </a:p>
-        </p:txBody>
-      </p:sp>
-    </p:spTree>
-  </p:cSld>
-  <p:clrMapOvr>
-    <a:masterClrMapping/>
-  </p:clrMapOvr>
-</p:sld>
-</file>
-
-<file path=ppt/slides/slide19.xml><?xml version="1.0" encoding="utf-8"?>
-<p:sld xmlns:a="http://schemas.openxmlformats.org/drawingml/2006/main" xmlns:r="http://schemas.openxmlformats.org/officeDocument/2006/relationships" xmlns:mc="http://schemas.openxmlformats.org/markup-compatibility/2006" xmlns:mv="urn:schemas-microsoft-com:mac:vml" xmlns:p="http://schemas.openxmlformats.org/presentationml/2006/main" xmlns:c="http://schemas.openxmlformats.org/drawingml/2006/chart" xmlns:dgm="http://schemas.openxmlformats.org/drawingml/2006/diagram" xmlns:o="urn:schemas-microsoft-com:office:office" xmlns:v="urn:schemas-microsoft-com:vml" xmlns:pvml="urn:schemas-microsoft-com:office:powerpoint" xmlns:com="http://schemas.openxmlformats.org/drawingml/2006/compatibility" xmlns:p14="http://schemas.microsoft.com/office/powerpoint/2010/main" xmlns:p15="http://schemas.microsoft.com/office/powerpoint/2012/main" xmlns:ahyp="http://schemas.microsoft.com/office/drawing/2018/hyperlinkcolor">
-  <p:cSld>
-    <p:spTree>
-      <p:nvGrpSpPr>
-        <p:cNvPr id="172" name="Shape 172"/>
-        <p:cNvGrpSpPr/>
-        <p:nvPr/>
-      </p:nvGrpSpPr>
-      <p:grpSpPr>
-        <a:xfrm>
-          <a:off x="0" y="0"/>
-          <a:ext cx="0" cy="0"/>
-          <a:chOff x="0" y="0"/>
-          <a:chExt cx="0" cy="0"/>
-        </a:xfrm>
-      </p:grpSpPr>
-      <p:sp>
-        <p:nvSpPr>
-          <p:cNvPr id="173" name="Google Shape;173;p33"/>
-          <p:cNvSpPr txBox="1"/>
-          <p:nvPr/>
-        </p:nvSpPr>
-        <p:spPr>
-          <a:xfrm>
-            <a:off x="197250" y="184700"/>
-            <a:ext cx="8749500" cy="492600"/>
-          </a:xfrm>
-          <a:prstGeom prst="rect">
-            <a:avLst/>
-          </a:prstGeom>
-          <a:solidFill>
-            <a:srgbClr val="C9DAF8"/>
-          </a:solidFill>
-          <a:ln>
-            <a:noFill/>
-          </a:ln>
-        </p:spPr>
-        <p:txBody>
-          <a:bodyPr anchorCtr="0" anchor="t" bIns="91425" lIns="91425" spcFirstLastPara="1" rIns="91425" wrap="square" tIns="91425">
-            <a:spAutoFit/>
-          </a:bodyPr>
-          <a:lstStyle/>
-          <a:p>
-            <a:pPr indent="0" lvl="0" marL="0" rtl="0" algn="l">
-              <a:spcBef>
-                <a:spcPts val="0"/>
-              </a:spcBef>
-              <a:spcAft>
-                <a:spcPts val="0"/>
-              </a:spcAft>
-              <a:buNone/>
-            </a:pPr>
-            <a:r>
-              <a:rPr b="1" lang="en" sz="2000"/>
-              <a:t>Шаг 4: </a:t>
-            </a:r>
-            <a:r>
-              <a:rPr lang="en" sz="2000"/>
-              <a:t>настроить интерфейс доступа к текстуре</a:t>
-            </a:r>
-            <a:r>
-              <a:rPr lang="en" sz="2000"/>
-              <a:t>. </a:t>
-            </a:r>
-            <a:endParaRPr sz="2000"/>
-          </a:p>
-        </p:txBody>
-      </p:sp>
-      <p:sp>
-        <p:nvSpPr>
-          <p:cNvPr id="174" name="Google Shape;174;p33"/>
-          <p:cNvSpPr txBox="1"/>
-          <p:nvPr/>
-        </p:nvSpPr>
-        <p:spPr>
-          <a:xfrm>
-            <a:off x="236825" y="947800"/>
-            <a:ext cx="8749500" cy="3570900"/>
-          </a:xfrm>
-          <a:prstGeom prst="rect">
-            <a:avLst/>
-          </a:prstGeom>
-          <a:solidFill>
-            <a:srgbClr val="FFE599"/>
-          </a:solidFill>
-          <a:ln cap="flat" cmpd="sng" w="9525">
-            <a:solidFill>
-              <a:schemeClr val="dk1"/>
-            </a:solidFill>
-            <a:prstDash val="solid"/>
-            <a:round/>
-            <a:headEnd len="sm" w="sm" type="none"/>
-            <a:tailEnd len="sm" w="sm" type="none"/>
-          </a:ln>
-        </p:spPr>
-        <p:txBody>
-          <a:bodyPr anchorCtr="0" anchor="t" bIns="91425" lIns="91425" spcFirstLastPara="1" rIns="91425" wrap="square" tIns="91425">
-            <a:spAutoFit/>
-          </a:bodyPr>
-          <a:lstStyle/>
-          <a:p>
-            <a:pPr indent="0" lvl="0" marL="0" rtl="0" algn="l">
-              <a:spcBef>
-                <a:spcPts val="0"/>
-              </a:spcBef>
-              <a:spcAft>
-                <a:spcPts val="0"/>
-              </a:spcAft>
-              <a:buClr>
-                <a:schemeClr val="dk1"/>
-              </a:buClr>
-              <a:buSzPts val="1100"/>
-              <a:buFont typeface="Arial"/>
-              <a:buNone/>
-            </a:pPr>
-            <a:r>
-              <a:rPr lang="en" sz="2000"/>
-              <a:t>texture&lt;float, 3, cudaReadModeElementType&gt;  </a:t>
-            </a:r>
-            <a:r>
-              <a:rPr b="1" lang="en" sz="2000"/>
-              <a:t>df_tex;</a:t>
-            </a:r>
-            <a:endParaRPr b="1" sz="2000"/>
-          </a:p>
-          <a:p>
-            <a:pPr indent="0" lvl="0" marL="0" rtl="0" algn="l">
-              <a:spcBef>
-                <a:spcPts val="0"/>
-              </a:spcBef>
-              <a:spcAft>
-                <a:spcPts val="0"/>
-              </a:spcAft>
-              <a:buNone/>
-            </a:pPr>
-            <a:r>
-              <a:t/>
-            </a:r>
-            <a:endParaRPr sz="2000"/>
-          </a:p>
-          <a:p>
-            <a:pPr indent="0" lvl="0" marL="0" rtl="0" algn="l">
-              <a:spcBef>
-                <a:spcPts val="0"/>
-              </a:spcBef>
-              <a:spcAft>
-                <a:spcPts val="0"/>
-              </a:spcAft>
-              <a:buNone/>
-            </a:pPr>
-            <a:r>
-              <a:rPr b="1" lang="en" sz="2000"/>
-              <a:t>void   tune_texture(cudaChannelFormatDesc </a:t>
-            </a:r>
-            <a:r>
-              <a:rPr b="1" lang="en" sz="2000">
-                <a:solidFill>
-                  <a:schemeClr val="dk1"/>
-                </a:solidFill>
-              </a:rPr>
-              <a:t>channelDesc</a:t>
-            </a:r>
-            <a:r>
-              <a:rPr b="1" lang="en" sz="2000"/>
-              <a:t>)</a:t>
-            </a:r>
-            <a:r>
-              <a:rPr lang="en" sz="2000"/>
-              <a:t>{</a:t>
-            </a:r>
-            <a:endParaRPr sz="2000"/>
-          </a:p>
-          <a:p>
-            <a:pPr indent="0" lvl="0" marL="0" rtl="0" algn="l">
-              <a:spcBef>
-                <a:spcPts val="0"/>
-              </a:spcBef>
-              <a:spcAft>
-                <a:spcPts val="0"/>
-              </a:spcAft>
-              <a:buNone/>
-            </a:pPr>
-            <a:r>
-              <a:rPr lang="en" sz="2000"/>
-              <a:t>  df_tex.normalized = false;</a:t>
-            </a:r>
-            <a:endParaRPr sz="2000"/>
-          </a:p>
-          <a:p>
-            <a:pPr indent="0" lvl="0" marL="0" rtl="0" algn="l">
-              <a:spcBef>
-                <a:spcPts val="0"/>
-              </a:spcBef>
-              <a:spcAft>
-                <a:spcPts val="0"/>
-              </a:spcAft>
-              <a:buNone/>
-            </a:pPr>
-            <a:r>
-              <a:rPr lang="en" sz="2000"/>
-              <a:t>  df_tex.filterMode = cudaFilterModeLinear;</a:t>
-            </a:r>
-            <a:endParaRPr sz="2000"/>
-          </a:p>
-          <a:p>
-            <a:pPr indent="0" lvl="0" marL="0" rtl="0" algn="l">
-              <a:spcBef>
-                <a:spcPts val="0"/>
-              </a:spcBef>
-              <a:spcAft>
-                <a:spcPts val="0"/>
-              </a:spcAft>
-              <a:buNone/>
-            </a:pPr>
-            <a:r>
-              <a:rPr lang="en" sz="2000"/>
-              <a:t>  df_tex.addressMode[0] = cudaAddressModeClamp;</a:t>
-            </a:r>
-            <a:endParaRPr sz="2000"/>
-          </a:p>
-          <a:p>
-            <a:pPr indent="0" lvl="0" marL="0" rtl="0" algn="l">
-              <a:spcBef>
-                <a:spcPts val="0"/>
-              </a:spcBef>
-              <a:spcAft>
-                <a:spcPts val="0"/>
-              </a:spcAft>
-              <a:buNone/>
-            </a:pPr>
-            <a:r>
-              <a:rPr lang="en" sz="2000"/>
-              <a:t>  df_tex.addressMode[1] = cudaAddressModeClamp;</a:t>
-            </a:r>
-            <a:endParaRPr sz="2000"/>
-          </a:p>
-          <a:p>
-            <a:pPr indent="0" lvl="0" marL="0" rtl="0" algn="l">
-              <a:spcBef>
-                <a:spcPts val="0"/>
-              </a:spcBef>
-              <a:spcAft>
-                <a:spcPts val="0"/>
-              </a:spcAft>
-              <a:buNone/>
-            </a:pPr>
-            <a:r>
-              <a:rPr lang="en" sz="2000"/>
-              <a:t>  df_tex.addressMode[2] = cudaAddressModeClamp;</a:t>
-            </a:r>
-            <a:endParaRPr sz="2000"/>
-          </a:p>
-          <a:p>
-            <a:pPr indent="0" lvl="0" marL="0" rtl="0" algn="l">
-              <a:spcBef>
-                <a:spcPts val="0"/>
-              </a:spcBef>
-              <a:spcAft>
-                <a:spcPts val="0"/>
-              </a:spcAft>
-              <a:buNone/>
-            </a:pPr>
-            <a:r>
-              <a:rPr lang="en" sz="2000"/>
-              <a:t>  </a:t>
-            </a:r>
-            <a:endParaRPr sz="2000"/>
-          </a:p>
-          <a:p>
-            <a:pPr indent="0" lvl="0" marL="0" rtl="0" algn="l">
-              <a:spcBef>
-                <a:spcPts val="0"/>
-              </a:spcBef>
-              <a:spcAft>
-                <a:spcPts val="0"/>
-              </a:spcAft>
-              <a:buNone/>
-            </a:pPr>
-            <a:r>
-              <a:rPr lang="en" sz="2000"/>
-              <a:t>  cudaBindTextureToArray(df_tex, df_Array, channelDesc);</a:t>
-            </a:r>
-            <a:endParaRPr sz="2000"/>
-          </a:p>
-          <a:p>
-            <a:pPr indent="0" lvl="0" marL="0" rtl="0" algn="l">
-              <a:spcBef>
-                <a:spcPts val="0"/>
-              </a:spcBef>
-              <a:spcAft>
-                <a:spcPts val="0"/>
-              </a:spcAft>
-              <a:buNone/>
-            </a:pPr>
-            <a:r>
-              <a:rPr lang="en" sz="2000"/>
-              <a:t>}</a:t>
             </a:r>
             <a:endParaRPr/>
           </a:p>
@@ -12761,8 +12623,8 @@
         </p:blipFill>
         <p:spPr>
           <a:xfrm>
-            <a:off x="685800" y="228600"/>
-            <a:ext cx="7217951" cy="4838700"/>
+            <a:off x="1524000" y="685800"/>
+            <a:ext cx="5889082" cy="4305995"/>
           </a:xfrm>
           <a:prstGeom prst="rect">
             <a:avLst/>
@@ -12773,6 +12635,54 @@
           </a:ln>
         </p:spPr>
       </p:pic>
+      <p:sp>
+        <p:nvSpPr>
+          <p:cNvPr id="72" name="Google Shape;72;p16"/>
+          <p:cNvSpPr txBox="1"/>
+          <p:nvPr/>
+        </p:nvSpPr>
+        <p:spPr>
+          <a:xfrm>
+            <a:off x="51375" y="143200"/>
+            <a:ext cx="9030900" cy="413400"/>
+          </a:xfrm>
+          <a:prstGeom prst="rect">
+            <a:avLst/>
+          </a:prstGeom>
+          <a:noFill/>
+          <a:ln cap="flat" cmpd="sng" w="9525">
+            <a:solidFill>
+              <a:schemeClr val="dk1"/>
+            </a:solidFill>
+            <a:prstDash val="solid"/>
+            <a:round/>
+            <a:headEnd len="sm" w="sm" type="none"/>
+            <a:tailEnd len="sm" w="sm" type="none"/>
+          </a:ln>
+        </p:spPr>
+        <p:txBody>
+          <a:bodyPr anchorCtr="0" anchor="t" bIns="91425" lIns="91425" spcFirstLastPara="1" rIns="91425" wrap="square" tIns="91425">
+            <a:noAutofit/>
+          </a:bodyPr>
+          <a:lstStyle/>
+          <a:p>
+            <a:pPr indent="0" lvl="0" marL="0" rtl="0" algn="l">
+              <a:spcBef>
+                <a:spcPts val="0"/>
+              </a:spcBef>
+              <a:spcAft>
+                <a:spcPts val="0"/>
+              </a:spcAft>
+              <a:buNone/>
+            </a:pPr>
+            <a:r>
+              <a:rPr i="1" lang="en" sz="1600"/>
+              <a:t>https://www.researchgate.net/figure/Memory-Hierarchy-in-the-NVIDIA-GPUs_fig2_228345757</a:t>
+            </a:r>
+            <a:endParaRPr i="1" sz="1600"/>
+          </a:p>
+        </p:txBody>
+      </p:sp>
     </p:spTree>
   </p:cSld>
   <p:clrMapOvr>
@@ -12786,7 +12696,7 @@
   <p:cSld>
     <p:spTree>
       <p:nvGrpSpPr>
-        <p:cNvPr id="178" name="Shape 178"/>
+        <p:cNvPr id="179" name="Shape 179"/>
         <p:cNvGrpSpPr/>
         <p:nvPr/>
       </p:nvGrpSpPr>
@@ -12800,66 +12710,14 @@
       </p:grpSpPr>
       <p:sp>
         <p:nvSpPr>
-          <p:cNvPr id="179" name="Google Shape;179;p34"/>
-          <p:cNvSpPr txBox="1"/>
-          <p:nvPr/>
-        </p:nvSpPr>
-        <p:spPr>
-          <a:xfrm>
-            <a:off x="197250" y="108500"/>
-            <a:ext cx="8749500" cy="800400"/>
-          </a:xfrm>
-          <a:prstGeom prst="rect">
-            <a:avLst/>
-          </a:prstGeom>
-          <a:solidFill>
-            <a:srgbClr val="C9DAF8"/>
-          </a:solidFill>
-          <a:ln>
-            <a:noFill/>
-          </a:ln>
-        </p:spPr>
-        <p:txBody>
-          <a:bodyPr anchorCtr="0" anchor="t" bIns="91425" lIns="91425" spcFirstLastPara="1" rIns="91425" wrap="square" tIns="91425">
-            <a:spAutoFit/>
-          </a:bodyPr>
-          <a:lstStyle/>
-          <a:p>
-            <a:pPr indent="0" lvl="0" marL="0" rtl="0" algn="l">
-              <a:spcBef>
-                <a:spcPts val="0"/>
-              </a:spcBef>
-              <a:spcAft>
-                <a:spcPts val="0"/>
-              </a:spcAft>
-              <a:buNone/>
-            </a:pPr>
-            <a:r>
-              <a:rPr b="1" lang="en" sz="2000"/>
-              <a:t>Шаг 5: </a:t>
-            </a:r>
-            <a:r>
-              <a:rPr lang="en" sz="2000"/>
-              <a:t>реализовать вычисление интеграла, используя текстурную ссылку</a:t>
-            </a:r>
-            <a:r>
-              <a:rPr lang="en" sz="2000"/>
-              <a:t>. </a:t>
-            </a:r>
-            <a:endParaRPr sz="2000"/>
-          </a:p>
-        </p:txBody>
-      </p:sp>
-      <p:sp>
-        <p:nvSpPr>
           <p:cNvPr id="180" name="Google Shape;180;p34"/>
           <p:cNvSpPr txBox="1"/>
           <p:nvPr/>
         </p:nvSpPr>
         <p:spPr>
           <a:xfrm>
-            <a:off x="184200" y="1197775"/>
-            <a:ext cx="8749500" cy="3786600"/>
+            <a:off x="118400" y="589275"/>
+            <a:ext cx="8959800" cy="3263100"/>
           </a:xfrm>
           <a:prstGeom prst="rect">
             <a:avLst/>
@@ -12892,10 +12750,50 @@
               <a:buNone/>
             </a:pPr>
             <a:r>
-              <a:rPr lang="en" sz="2000"/>
-              <a:t>__global__ void kernel(float *a){</a:t>
-            </a:r>
-            <a:endParaRPr sz="2000"/>
+              <a:rPr lang="en" sz="2000">
+                <a:solidFill>
+                  <a:schemeClr val="dk1"/>
+                </a:solidFill>
+              </a:rPr>
+              <a:t>  </a:t>
+            </a:r>
+            <a:r>
+              <a:rPr lang="en" sz="2000">
+                <a:solidFill>
+                  <a:schemeClr val="dk1"/>
+                </a:solidFill>
+              </a:rPr>
+              <a:t>cpyParams.srcPtr = make_cudaPitchedPtr( (void*)df_h,</a:t>
+            </a:r>
+            <a:endParaRPr sz="2000">
+              <a:solidFill>
+                <a:schemeClr val="dk1"/>
+              </a:solidFill>
+            </a:endParaRPr>
+          </a:p>
+          <a:p>
+            <a:pPr indent="0" lvl="0" marL="0" rtl="0" algn="l">
+              <a:spcBef>
+                <a:spcPts val="0"/>
+              </a:spcBef>
+              <a:spcAft>
+                <a:spcPts val="0"/>
+              </a:spcAft>
+              <a:buNone/>
+            </a:pPr>
+            <a:r>
+              <a:rPr lang="en" sz="2000">
+                <a:solidFill>
+                  <a:schemeClr val="dk1"/>
+                </a:solidFill>
+              </a:rPr>
+              <a:t>           volumeSize.width*sizeof(float), </a:t>
+            </a:r>
+            <a:endParaRPr sz="2000">
+              <a:solidFill>
+                <a:schemeClr val="dk1"/>
+              </a:solidFill>
+            </a:endParaRPr>
           </a:p>
           <a:p>
             <a:pPr indent="0" lvl="0" marL="0" rtl="0" algn="l">
@@ -12913,10 +12811,18 @@
               <a:buNone/>
             </a:pPr>
             <a:r>
-              <a:rPr lang="en" sz="2000"/>
-              <a:t>  __shared__ float cache[THREADSPERBLOCK];</a:t>
-            </a:r>
-            <a:endParaRPr sz="2000"/>
+              <a:rPr lang="en" sz="2000">
+                <a:solidFill>
+                  <a:schemeClr val="dk1"/>
+                </a:solidFill>
+              </a:rPr>
+              <a:t>            volumeSize.width, volumeSize.height);</a:t>
+            </a:r>
+            <a:endParaRPr sz="2000">
+              <a:solidFill>
+                <a:schemeClr val="dk1"/>
+              </a:solidFill>
+            </a:endParaRPr>
           </a:p>
           <a:p>
             <a:pPr indent="0" lvl="0" marL="0" rtl="0" algn="l">
@@ -12934,10 +12840,42 @@
               <a:buNone/>
             </a:pPr>
             <a:r>
-              <a:rPr lang="en" sz="2000"/>
-              <a:t>  int tid = threadIdx.x + blockIdx.x * blockDim.x;</a:t>
-            </a:r>
-            <a:endParaRPr sz="2000"/>
+              <a:rPr lang="en" sz="2000">
+                <a:solidFill>
+                  <a:schemeClr val="dk1"/>
+                </a:solidFill>
+              </a:rPr>
+              <a:t>  cpyParams.dstArray = df_Array;</a:t>
+            </a:r>
+            <a:endParaRPr sz="2000">
+              <a:solidFill>
+                <a:schemeClr val="dk1"/>
+              </a:solidFill>
+            </a:endParaRPr>
+          </a:p>
+          <a:p>
+            <a:pPr indent="0" lvl="0" marL="0" rtl="0" algn="l">
+              <a:spcBef>
+                <a:spcPts val="0"/>
+              </a:spcBef>
+              <a:spcAft>
+                <a:spcPts val="0"/>
+              </a:spcAft>
+              <a:buNone/>
+            </a:pPr>
+            <a:r>
+              <a:rPr lang="en" sz="2000">
+                <a:solidFill>
+                  <a:schemeClr val="dk1"/>
+                </a:solidFill>
+              </a:rPr>
+              <a:t>  </a:t>
+            </a:r>
+            <a:endParaRPr sz="2000">
+              <a:solidFill>
+                <a:schemeClr val="dk1"/>
+              </a:solidFill>
+            </a:endParaRPr>
           </a:p>
           <a:p>
             <a:pPr indent="0" lvl="0" marL="0" rtl="0" algn="l">
@@ -12955,10 +12893,18 @@
               <a:buNone/>
             </a:pPr>
             <a:r>
-              <a:rPr lang="en" sz="2000"/>
-              <a:t>  int cacheIndex = threadIdx.x;</a:t>
-            </a:r>
-            <a:endParaRPr sz="2000"/>
+              <a:rPr lang="en" sz="2000">
+                <a:solidFill>
+                  <a:schemeClr val="dk1"/>
+                </a:solidFill>
+              </a:rPr>
+              <a:t>  cpyParams.extent = volumeSize;</a:t>
+            </a:r>
+            <a:endParaRPr sz="2000">
+              <a:solidFill>
+                <a:schemeClr val="dk1"/>
+              </a:solidFill>
+            </a:endParaRPr>
           </a:p>
           <a:p>
             <a:pPr indent="0" lvl="0" marL="0" rtl="0" algn="l">
@@ -12976,148 +12922,90 @@
               <a:buNone/>
             </a:pPr>
             <a:r>
-              <a:rPr lang="en" sz="2000"/>
-              <a:t>  float x = vert[tid].x;</a:t>
-            </a:r>
-            <a:endParaRPr sz="2000"/>
-          </a:p>
-          <a:p>
-            <a:pPr indent="0" lvl="0" marL="0" rtl="0" algn="l">
-              <a:spcBef>
-                <a:spcPts val="0"/>
-              </a:spcBef>
-              <a:spcAft>
-                <a:spcPts val="0"/>
-              </a:spcAft>
-              <a:buClr>
+              <a:rPr lang="en" sz="2000">
+                <a:solidFill>
+                  <a:schemeClr val="dk1"/>
+                </a:solidFill>
+              </a:rPr>
+              <a:t>  cpyParams.kind = cudaMemcpyHostToDevice;</a:t>
+            </a:r>
+            <a:endParaRPr sz="2000">
+              <a:solidFill>
                 <a:schemeClr val="dk1"/>
-              </a:buClr>
-              <a:buSzPts val="1100"/>
-              <a:buFont typeface="Arial"/>
-              <a:buNone/>
-            </a:pPr>
-            <a:r>
-              <a:rPr lang="en" sz="2000"/>
-              <a:t>  float y = vert[tid].y;</a:t>
-            </a:r>
-            <a:endParaRPr sz="2000"/>
-          </a:p>
-          <a:p>
-            <a:pPr indent="0" lvl="0" marL="0" rtl="0" algn="l">
-              <a:spcBef>
-                <a:spcPts val="0"/>
-              </a:spcBef>
-              <a:spcAft>
-                <a:spcPts val="0"/>
-              </a:spcAft>
-              <a:buClr>
+              </a:solidFill>
+            </a:endParaRPr>
+          </a:p>
+          <a:p>
+            <a:pPr indent="0" lvl="0" marL="0" rtl="0" algn="l">
+              <a:spcBef>
+                <a:spcPts val="0"/>
+              </a:spcBef>
+              <a:spcAft>
+                <a:spcPts val="0"/>
+              </a:spcAft>
+              <a:buNone/>
+            </a:pPr>
+            <a:r>
+              <a:rPr lang="en" sz="2000">
+                <a:solidFill>
+                  <a:schemeClr val="dk1"/>
+                </a:solidFill>
+              </a:rPr>
+              <a:t>  </a:t>
+            </a:r>
+            <a:endParaRPr sz="2000">
+              <a:solidFill>
                 <a:schemeClr val="dk1"/>
-              </a:buClr>
-              <a:buSzPts val="1100"/>
-              <a:buFont typeface="Arial"/>
-              <a:buNone/>
-            </a:pPr>
-            <a:r>
-              <a:rPr lang="en" sz="2000"/>
-              <a:t>  float z = vert[tid].z;</a:t>
-            </a:r>
-            <a:endParaRPr sz="2000"/>
-          </a:p>
-          <a:p>
-            <a:pPr indent="0" lvl="0" marL="0" rtl="0" algn="l">
-              <a:spcBef>
-                <a:spcPts val="0"/>
-              </a:spcBef>
-              <a:spcAft>
-                <a:spcPts val="0"/>
-              </a:spcAft>
-              <a:buClr>
+              </a:solidFill>
+            </a:endParaRPr>
+          </a:p>
+          <a:p>
+            <a:pPr indent="0" lvl="0" marL="0" rtl="0" algn="l">
+              <a:spcBef>
+                <a:spcPts val="0"/>
+              </a:spcBef>
+              <a:spcAft>
+                <a:spcPts val="0"/>
+              </a:spcAft>
+              <a:buNone/>
+            </a:pPr>
+            <a:r>
+              <a:rPr lang="en" sz="2000">
+                <a:solidFill>
+                  <a:schemeClr val="dk1"/>
+                </a:solidFill>
+              </a:rPr>
+              <a:t>  cudaMemcpy3D(&amp;cpyParams);</a:t>
+            </a:r>
+            <a:endParaRPr sz="2000">
+              <a:solidFill>
                 <a:schemeClr val="dk1"/>
-              </a:buClr>
-              <a:buSzPts val="1100"/>
-              <a:buFont typeface="Arial"/>
-              <a:buNone/>
-            </a:pPr>
-            <a:r>
-              <a:rPr lang="en" sz="2000"/>
-              <a:t>  cache[cacheIndex] = </a:t>
-            </a:r>
-            <a:r>
-              <a:rPr b="1" lang="en" sz="2000"/>
-              <a:t>tex3D(df_tex, z, y, x);</a:t>
-            </a:r>
-            <a:endParaRPr b="1" sz="2000"/>
-          </a:p>
-          <a:p>
-            <a:pPr indent="0" lvl="0" marL="0" rtl="0" algn="l">
-              <a:spcBef>
-                <a:spcPts val="0"/>
-              </a:spcBef>
-              <a:spcAft>
-                <a:spcPts val="0"/>
-              </a:spcAft>
-              <a:buNone/>
-            </a:pPr>
-            <a:r>
-              <a:t/>
-            </a:r>
-            <a:endParaRPr sz="2000"/>
-          </a:p>
-          <a:p>
-            <a:pPr indent="0" lvl="0" marL="0" rtl="0" algn="l">
-              <a:spcBef>
-                <a:spcPts val="0"/>
-              </a:spcBef>
-              <a:spcAft>
-                <a:spcPts val="0"/>
-              </a:spcAft>
-              <a:buClr>
+              </a:solidFill>
+            </a:endParaRPr>
+          </a:p>
+          <a:p>
+            <a:pPr indent="0" lvl="0" marL="0" rtl="0" algn="l">
+              <a:spcBef>
+                <a:spcPts val="0"/>
+              </a:spcBef>
+              <a:spcAft>
+                <a:spcPts val="0"/>
+              </a:spcAft>
+              <a:buNone/>
+            </a:pPr>
+            <a:r>
+              <a:rPr lang="en" sz="2000">
+                <a:solidFill>
+                  <a:schemeClr val="dk1"/>
+                </a:solidFill>
+              </a:rPr>
+              <a:t>}</a:t>
+            </a:r>
+            <a:endParaRPr sz="2000">
+              <a:solidFill>
                 <a:schemeClr val="dk1"/>
-              </a:buClr>
-              <a:buSzPts val="1100"/>
-              <a:buFont typeface="Arial"/>
-              <a:buNone/>
-            </a:pPr>
-            <a:r>
-              <a:rPr lang="en" sz="2000"/>
-              <a:t>__syncthreads();</a:t>
-            </a:r>
-            <a:endParaRPr sz="2000"/>
-          </a:p>
-          <a:p>
-            <a:pPr indent="0" lvl="0" marL="0" rtl="0" algn="l">
-              <a:spcBef>
-                <a:spcPts val="0"/>
-              </a:spcBef>
-              <a:spcAft>
-                <a:spcPts val="0"/>
-              </a:spcAft>
-              <a:buClr>
-                <a:schemeClr val="dk1"/>
-              </a:buClr>
-              <a:buSzPts val="1100"/>
-              <a:buFont typeface="Arial"/>
-              <a:buNone/>
-            </a:pPr>
-            <a:r>
-              <a:t/>
-            </a:r>
-            <a:endParaRPr sz="2000"/>
-          </a:p>
-          <a:p>
-            <a:pPr indent="0" lvl="0" marL="0" rtl="0" algn="l">
-              <a:spcBef>
-                <a:spcPts val="0"/>
-              </a:spcBef>
-              <a:spcAft>
-                <a:spcPts val="0"/>
-              </a:spcAft>
-              <a:buNone/>
-            </a:pPr>
-            <a:r>
-              <a:t/>
-            </a:r>
-            <a:endParaRPr/>
+              </a:solidFill>
+            </a:endParaRPr>
           </a:p>
         </p:txBody>
       </p:sp>
@@ -13154,243 +13042,15 @@
         </p:nvSpPr>
         <p:spPr>
           <a:xfrm>
-            <a:off x="105250" y="831025"/>
-            <a:ext cx="8841300" cy="3170700"/>
+            <a:off x="236825" y="844700"/>
+            <a:ext cx="8749500" cy="2955300"/>
           </a:xfrm>
           <a:prstGeom prst="rect">
             <a:avLst/>
           </a:prstGeom>
           <a:solidFill>
-            <a:srgbClr val="FFE599"/>
+            <a:srgbClr val="EAD1DC"/>
           </a:solidFill>
-          <a:ln>
-            <a:noFill/>
-          </a:ln>
-        </p:spPr>
-        <p:txBody>
-          <a:bodyPr anchorCtr="0" anchor="t" bIns="91425" lIns="91425" spcFirstLastPara="1" rIns="91425" wrap="square" tIns="91425">
-            <a:spAutoFit/>
-          </a:bodyPr>
-          <a:lstStyle/>
-          <a:p>
-            <a:pPr indent="0" lvl="0" marL="0" rtl="0" algn="l">
-              <a:spcBef>
-                <a:spcPts val="0"/>
-              </a:spcBef>
-              <a:spcAft>
-                <a:spcPts val="0"/>
-              </a:spcAft>
-              <a:buClr>
-                <a:schemeClr val="dk1"/>
-              </a:buClr>
-              <a:buSzPts val="1100"/>
-              <a:buFont typeface="Arial"/>
-              <a:buNone/>
-            </a:pPr>
-            <a:r>
-              <a:rPr lang="en" sz="2000"/>
-              <a:t>  </a:t>
-            </a:r>
-            <a:r>
-              <a:rPr lang="en" sz="2000"/>
-              <a:t>for (int s = blockDim.x / 2; s &gt; 0; s &gt;&gt;= 1){</a:t>
-            </a:r>
-            <a:endParaRPr sz="2000"/>
-          </a:p>
-          <a:p>
-            <a:pPr indent="0" lvl="0" marL="0" rtl="0" algn="l">
-              <a:spcBef>
-                <a:spcPts val="0"/>
-              </a:spcBef>
-              <a:spcAft>
-                <a:spcPts val="0"/>
-              </a:spcAft>
-              <a:buClr>
-                <a:schemeClr val="dk1"/>
-              </a:buClr>
-              <a:buSzPts val="1100"/>
-              <a:buFont typeface="Arial"/>
-              <a:buNone/>
-            </a:pPr>
-            <a:r>
-              <a:rPr lang="en" sz="2000"/>
-              <a:t>    if (cacheIndex &lt; s)</a:t>
-            </a:r>
-            <a:endParaRPr sz="2000"/>
-          </a:p>
-          <a:p>
-            <a:pPr indent="0" lvl="0" marL="0" rtl="0" algn="l">
-              <a:spcBef>
-                <a:spcPts val="0"/>
-              </a:spcBef>
-              <a:spcAft>
-                <a:spcPts val="0"/>
-              </a:spcAft>
-              <a:buClr>
-                <a:schemeClr val="dk1"/>
-              </a:buClr>
-              <a:buSzPts val="1100"/>
-              <a:buFont typeface="Arial"/>
-              <a:buNone/>
-            </a:pPr>
-            <a:r>
-              <a:rPr lang="en" sz="2000"/>
-              <a:t>      cache[cacheIndex] += cache[cacheIndex + s];</a:t>
-            </a:r>
-            <a:endParaRPr sz="2000"/>
-          </a:p>
-          <a:p>
-            <a:pPr indent="0" lvl="0" marL="0" rtl="0" algn="l">
-              <a:spcBef>
-                <a:spcPts val="0"/>
-              </a:spcBef>
-              <a:spcAft>
-                <a:spcPts val="0"/>
-              </a:spcAft>
-              <a:buClr>
-                <a:schemeClr val="dk1"/>
-              </a:buClr>
-              <a:buSzPts val="1100"/>
-              <a:buFont typeface="Arial"/>
-              <a:buNone/>
-            </a:pPr>
-            <a:r>
-              <a:rPr lang="en" sz="2000"/>
-              <a:t>      __syncthreads();</a:t>
-            </a:r>
-            <a:endParaRPr sz="2000"/>
-          </a:p>
-          <a:p>
-            <a:pPr indent="0" lvl="0" marL="0" rtl="0" algn="l">
-              <a:spcBef>
-                <a:spcPts val="0"/>
-              </a:spcBef>
-              <a:spcAft>
-                <a:spcPts val="0"/>
-              </a:spcAft>
-              <a:buClr>
-                <a:schemeClr val="dk1"/>
-              </a:buClr>
-              <a:buSzPts val="1100"/>
-              <a:buFont typeface="Arial"/>
-              <a:buNone/>
-            </a:pPr>
-            <a:r>
-              <a:rPr lang="en" sz="2000"/>
-              <a:t>  }</a:t>
-            </a:r>
-            <a:endParaRPr sz="2000"/>
-          </a:p>
-          <a:p>
-            <a:pPr indent="0" lvl="0" marL="0" rtl="0" algn="l">
-              <a:spcBef>
-                <a:spcPts val="0"/>
-              </a:spcBef>
-              <a:spcAft>
-                <a:spcPts val="0"/>
-              </a:spcAft>
-              <a:buNone/>
-            </a:pPr>
-            <a:r>
-              <a:t/>
-            </a:r>
-            <a:endParaRPr sz="2000"/>
-          </a:p>
-          <a:p>
-            <a:pPr indent="0" lvl="0" marL="0" rtl="0" algn="l">
-              <a:spcBef>
-                <a:spcPts val="0"/>
-              </a:spcBef>
-              <a:spcAft>
-                <a:spcPts val="0"/>
-              </a:spcAft>
-              <a:buClr>
-                <a:schemeClr val="dk1"/>
-              </a:buClr>
-              <a:buSzPts val="1100"/>
-              <a:buFont typeface="Arial"/>
-              <a:buNone/>
-            </a:pPr>
-            <a:r>
-              <a:rPr lang="en" sz="2000"/>
-              <a:t>  if (cacheIndex == 0)</a:t>
-            </a:r>
-            <a:endParaRPr sz="2000"/>
-          </a:p>
-          <a:p>
-            <a:pPr indent="0" lvl="0" marL="0" rtl="0" algn="l">
-              <a:spcBef>
-                <a:spcPts val="0"/>
-              </a:spcBef>
-              <a:spcAft>
-                <a:spcPts val="0"/>
-              </a:spcAft>
-              <a:buClr>
-                <a:schemeClr val="dk1"/>
-              </a:buClr>
-              <a:buSzPts val="1100"/>
-              <a:buFont typeface="Arial"/>
-              <a:buNone/>
-            </a:pPr>
-            <a:r>
-              <a:rPr lang="en" sz="2000"/>
-              <a:t>  a[blockIdx.x] = cache[0];</a:t>
-            </a:r>
-            <a:endParaRPr sz="2000"/>
-          </a:p>
-          <a:p>
-            <a:pPr indent="0" lvl="0" marL="0" rtl="0" algn="l">
-              <a:spcBef>
-                <a:spcPts val="0"/>
-              </a:spcBef>
-              <a:spcAft>
-                <a:spcPts val="0"/>
-              </a:spcAft>
-              <a:buClr>
-                <a:schemeClr val="dk1"/>
-              </a:buClr>
-              <a:buSzPts val="1100"/>
-              <a:buFont typeface="Arial"/>
-              <a:buNone/>
-            </a:pPr>
-            <a:r>
-              <a:rPr lang="en" sz="2000"/>
-              <a:t>}</a:t>
-            </a:r>
-            <a:endParaRPr sz="2000"/>
-          </a:p>
-          <a:p>
-            <a:pPr indent="0" lvl="0" marL="0" rtl="0" algn="l">
-              <a:spcBef>
-                <a:spcPts val="0"/>
-              </a:spcBef>
-              <a:spcAft>
-                <a:spcPts val="0"/>
-              </a:spcAft>
-              <a:buNone/>
-            </a:pPr>
-            <a:r>
-              <a:t/>
-            </a:r>
-            <a:endParaRPr/>
-          </a:p>
-        </p:txBody>
-      </p:sp>
-      <p:sp>
-        <p:nvSpPr>
-          <p:cNvPr id="186" name="Google Shape;186;p35"/>
-          <p:cNvSpPr txBox="1"/>
-          <p:nvPr/>
-        </p:nvSpPr>
-        <p:spPr>
-          <a:xfrm>
-            <a:off x="5683750" y="1921400"/>
-            <a:ext cx="3078600" cy="800400"/>
-          </a:xfrm>
-          <a:prstGeom prst="rect">
-            <a:avLst/>
-          </a:prstGeom>
-          <a:noFill/>
           <a:ln cap="flat" cmpd="sng" w="9525">
             <a:solidFill>
               <a:schemeClr val="dk1"/>
@@ -13414,13 +13074,185 @@
               <a:spcAft>
                 <a:spcPts val="0"/>
               </a:spcAft>
-              <a:buNone/>
-            </a:pPr>
-            <a:r>
-              <a:rPr i="1" lang="en" sz="2000"/>
-              <a:t>суммирование посредством редукции</a:t>
-            </a:r>
-            <a:endParaRPr i="1" sz="2000"/>
+              <a:buClr>
+                <a:schemeClr val="dk1"/>
+              </a:buClr>
+              <a:buSzPts val="1100"/>
+              <a:buFont typeface="Arial"/>
+              <a:buNone/>
+            </a:pPr>
+            <a:r>
+              <a:rPr lang="en" sz="2000"/>
+              <a:t>    struct cudaTextureDesc texDesc;</a:t>
+            </a:r>
+            <a:endParaRPr sz="2000"/>
+          </a:p>
+          <a:p>
+            <a:pPr indent="0" lvl="0" marL="0" rtl="0" algn="l">
+              <a:spcBef>
+                <a:spcPts val="0"/>
+              </a:spcBef>
+              <a:spcAft>
+                <a:spcPts val="0"/>
+              </a:spcAft>
+              <a:buClr>
+                <a:schemeClr val="dk1"/>
+              </a:buClr>
+              <a:buSzPts val="1100"/>
+              <a:buFont typeface="Arial"/>
+              <a:buNone/>
+            </a:pPr>
+            <a:r>
+              <a:rPr lang="en" sz="2000"/>
+              <a:t>    memset(&amp;texDesc, 0, sizeof(texDesc));</a:t>
+            </a:r>
+            <a:endParaRPr sz="2000"/>
+          </a:p>
+          <a:p>
+            <a:pPr indent="0" lvl="0" marL="0" rtl="0" algn="l">
+              <a:spcBef>
+                <a:spcPts val="0"/>
+              </a:spcBef>
+              <a:spcAft>
+                <a:spcPts val="0"/>
+              </a:spcAft>
+              <a:buClr>
+                <a:schemeClr val="dk1"/>
+              </a:buClr>
+              <a:buSzPts val="1100"/>
+              <a:buFont typeface="Arial"/>
+              <a:buNone/>
+            </a:pPr>
+            <a:r>
+              <a:rPr lang="en" sz="2000"/>
+              <a:t>    texDesc.addressMode[0] = cudaAddressModeClamp;</a:t>
+            </a:r>
+            <a:endParaRPr sz="2000"/>
+          </a:p>
+          <a:p>
+            <a:pPr indent="0" lvl="0" marL="0" rtl="0" algn="l">
+              <a:spcBef>
+                <a:spcPts val="0"/>
+              </a:spcBef>
+              <a:spcAft>
+                <a:spcPts val="0"/>
+              </a:spcAft>
+              <a:buClr>
+                <a:schemeClr val="dk1"/>
+              </a:buClr>
+              <a:buSzPts val="1100"/>
+              <a:buFont typeface="Arial"/>
+              <a:buNone/>
+            </a:pPr>
+            <a:r>
+              <a:rPr lang="en" sz="2000"/>
+              <a:t>    texDesc.addressMode[1] = cudaAddressModeClamp;</a:t>
+            </a:r>
+            <a:endParaRPr sz="2000"/>
+          </a:p>
+          <a:p>
+            <a:pPr indent="0" lvl="0" marL="0" rtl="0" algn="l">
+              <a:spcBef>
+                <a:spcPts val="0"/>
+              </a:spcBef>
+              <a:spcAft>
+                <a:spcPts val="0"/>
+              </a:spcAft>
+              <a:buClr>
+                <a:schemeClr val="dk1"/>
+              </a:buClr>
+              <a:buSzPts val="1100"/>
+              <a:buFont typeface="Arial"/>
+              <a:buNone/>
+            </a:pPr>
+            <a:r>
+              <a:rPr lang="en" sz="2000"/>
+              <a:t>    texDesc.addressMode[2] = cudaAddressModeClamp;</a:t>
+            </a:r>
+            <a:endParaRPr sz="2000"/>
+          </a:p>
+          <a:p>
+            <a:pPr indent="0" lvl="0" marL="0" rtl="0" algn="l">
+              <a:spcBef>
+                <a:spcPts val="0"/>
+              </a:spcBef>
+              <a:spcAft>
+                <a:spcPts val="0"/>
+              </a:spcAft>
+              <a:buClr>
+                <a:schemeClr val="dk1"/>
+              </a:buClr>
+              <a:buSzPts val="1100"/>
+              <a:buFont typeface="Arial"/>
+              <a:buNone/>
+            </a:pPr>
+            <a:r>
+              <a:rPr lang="en" sz="2000"/>
+              <a:t>    texDesc.filterMode = cudaFilterModeLinear;</a:t>
+            </a:r>
+            <a:endParaRPr sz="2000"/>
+          </a:p>
+          <a:p>
+            <a:pPr indent="0" lvl="0" marL="0" rtl="0" algn="l">
+              <a:spcBef>
+                <a:spcPts val="0"/>
+              </a:spcBef>
+              <a:spcAft>
+                <a:spcPts val="0"/>
+              </a:spcAft>
+              <a:buClr>
+                <a:schemeClr val="dk1"/>
+              </a:buClr>
+              <a:buSzPts val="1100"/>
+              <a:buFont typeface="Arial"/>
+              <a:buNone/>
+            </a:pPr>
+            <a:r>
+              <a:rPr lang="en" sz="2000"/>
+              <a:t>    texDesc.readMode = cudaReadModeElementType;</a:t>
+            </a:r>
+            <a:endParaRPr sz="2000"/>
+          </a:p>
+          <a:p>
+            <a:pPr indent="0" lvl="0" marL="0" rtl="0" algn="l">
+              <a:spcBef>
+                <a:spcPts val="0"/>
+              </a:spcBef>
+              <a:spcAft>
+                <a:spcPts val="0"/>
+              </a:spcAft>
+              <a:buClr>
+                <a:schemeClr val="dk1"/>
+              </a:buClr>
+              <a:buSzPts val="1100"/>
+              <a:buFont typeface="Arial"/>
+              <a:buNone/>
+            </a:pPr>
+            <a:r>
+              <a:rPr lang="en" sz="2000"/>
+              <a:t>    texDesc.normalizedCoords = 0;</a:t>
+            </a:r>
+            <a:endParaRPr sz="2000"/>
+          </a:p>
+          <a:p>
+            <a:pPr indent="0" lvl="0" marL="0" rtl="0" algn="l">
+              <a:spcBef>
+                <a:spcPts val="0"/>
+              </a:spcBef>
+              <a:spcAft>
+                <a:spcPts val="0"/>
+              </a:spcAft>
+              <a:buNone/>
+            </a:pPr>
+            <a:r>
+              <a:rPr lang="en" sz="2000"/>
+              <a:t> </a:t>
+            </a:r>
+            <a:r>
+              <a:rPr lang="en" sz="2000"/>
+              <a:t>}</a:t>
+            </a:r>
+            <a:endParaRPr sz="2000"/>
           </a:p>
         </p:txBody>
       </p:sp>
@@ -13437,7 +13269,7 @@
   <p:cSld>
     <p:spTree>
       <p:nvGrpSpPr>
-        <p:cNvPr id="190" name="Shape 190"/>
+        <p:cNvPr id="189" name="Shape 189"/>
         <p:cNvGrpSpPr/>
         <p:nvPr/>
       </p:nvGrpSpPr>
@@ -13451,14 +13283,14 @@
       </p:grpSpPr>
       <p:sp>
         <p:nvSpPr>
-          <p:cNvPr id="191" name="Google Shape;191;p36"/>
+          <p:cNvPr id="190" name="Google Shape;190;p36"/>
           <p:cNvSpPr txBox="1"/>
           <p:nvPr/>
         </p:nvSpPr>
         <p:spPr>
           <a:xfrm>
-            <a:off x="197250" y="337100"/>
-            <a:ext cx="8749500" cy="1108200"/>
+            <a:off x="197250" y="32300"/>
+            <a:ext cx="8749500" cy="492600"/>
           </a:xfrm>
           <a:prstGeom prst="rect">
             <a:avLst/>
@@ -13487,15 +13319,267 @@
             </a:pPr>
             <a:r>
               <a:rPr b="1" lang="en" sz="2000"/>
-              <a:t>Шаг 6: </a:t>
+              <a:t>Шаг 4: </a:t>
             </a:r>
             <a:r>
               <a:rPr lang="en" sz="2000"/>
-              <a:t>реализовать функцию, выполняющую три-линейную интерполяцию и реализовать ядро, заменив текстурную ссылку вызовом этой функции</a:t>
+              <a:t>настроить интерфейс доступа к текстуре</a:t>
             </a:r>
             <a:r>
               <a:rPr lang="en" sz="2000"/>
               <a:t>. </a:t>
+            </a:r>
+            <a:endParaRPr sz="2000"/>
+          </a:p>
+        </p:txBody>
+      </p:sp>
+      <p:sp>
+        <p:nvSpPr>
+          <p:cNvPr id="191" name="Google Shape;191;p36"/>
+          <p:cNvSpPr txBox="1"/>
+          <p:nvPr/>
+        </p:nvSpPr>
+        <p:spPr>
+          <a:xfrm>
+            <a:off x="236825" y="844700"/>
+            <a:ext cx="8749500" cy="3570900"/>
+          </a:xfrm>
+          <a:prstGeom prst="rect">
+            <a:avLst/>
+          </a:prstGeom>
+          <a:solidFill>
+            <a:srgbClr val="FFE599"/>
+          </a:solidFill>
+          <a:ln cap="flat" cmpd="sng" w="9525">
+            <a:solidFill>
+              <a:schemeClr val="dk1"/>
+            </a:solidFill>
+            <a:prstDash val="solid"/>
+            <a:round/>
+            <a:headEnd len="sm" w="sm" type="none"/>
+            <a:tailEnd len="sm" w="sm" type="none"/>
+          </a:ln>
+        </p:spPr>
+        <p:txBody>
+          <a:bodyPr anchorCtr="0" anchor="t" bIns="91425" lIns="91425" spcFirstLastPara="1" rIns="91425" wrap="square" tIns="91425">
+            <a:spAutoFit/>
+          </a:bodyPr>
+          <a:lstStyle/>
+          <a:p>
+            <a:pPr indent="0" lvl="0" marL="0" rtl="0" algn="l">
+              <a:spcBef>
+                <a:spcPts val="0"/>
+              </a:spcBef>
+              <a:spcAft>
+                <a:spcPts val="0"/>
+              </a:spcAft>
+              <a:buClr>
+                <a:schemeClr val="dk1"/>
+              </a:buClr>
+              <a:buSzPts val="1100"/>
+              <a:buFont typeface="Arial"/>
+              <a:buNone/>
+            </a:pPr>
+            <a:r>
+              <a:rPr lang="en" sz="2000"/>
+              <a:t>texture&lt;float, 3, cudaReadModeElementType&gt;  </a:t>
+            </a:r>
+            <a:r>
+              <a:rPr b="1" lang="en" sz="2000"/>
+              <a:t>df_tex;</a:t>
+            </a:r>
+            <a:endParaRPr b="1" sz="2000"/>
+          </a:p>
+          <a:p>
+            <a:pPr indent="0" lvl="0" marL="0" rtl="0" algn="l">
+              <a:spcBef>
+                <a:spcPts val="0"/>
+              </a:spcBef>
+              <a:spcAft>
+                <a:spcPts val="0"/>
+              </a:spcAft>
+              <a:buClr>
+                <a:schemeClr val="dk1"/>
+              </a:buClr>
+              <a:buSzPts val="1100"/>
+              <a:buFont typeface="Arial"/>
+              <a:buNone/>
+            </a:pPr>
+            <a:r>
+              <a:rPr lang="en" sz="2000"/>
+              <a:t>/</a:t>
+            </a:r>
+            <a:r>
+              <a:rPr lang="en" sz="2000">
+                <a:highlight>
+                  <a:srgbClr val="EAD1DC"/>
+                </a:highlight>
+              </a:rPr>
+              <a:t>/cudaTextureObject_t    df_tex = 0;</a:t>
+            </a:r>
+            <a:endParaRPr sz="2000">
+              <a:highlight>
+                <a:srgbClr val="EAD1DC"/>
+              </a:highlight>
+            </a:endParaRPr>
+          </a:p>
+          <a:p>
+            <a:pPr indent="0" lvl="0" marL="0" rtl="0" algn="l">
+              <a:spcBef>
+                <a:spcPts val="0"/>
+              </a:spcBef>
+              <a:spcAft>
+                <a:spcPts val="0"/>
+              </a:spcAft>
+              <a:buNone/>
+            </a:pPr>
+            <a:r>
+              <a:rPr b="1" lang="en" sz="2000"/>
+              <a:t>void   tune_texture(cudaChannelFormatDesc </a:t>
+            </a:r>
+            <a:r>
+              <a:rPr b="1" lang="en" sz="2000">
+                <a:solidFill>
+                  <a:schemeClr val="dk1"/>
+                </a:solidFill>
+              </a:rPr>
+              <a:t>channelDesc</a:t>
+            </a:r>
+            <a:r>
+              <a:rPr b="1" lang="en" sz="2000"/>
+              <a:t>)</a:t>
+            </a:r>
+            <a:r>
+              <a:rPr lang="en" sz="2000"/>
+              <a:t>{</a:t>
+            </a:r>
+            <a:endParaRPr sz="2000"/>
+          </a:p>
+          <a:p>
+            <a:pPr indent="0" lvl="0" marL="0" rtl="0" algn="l">
+              <a:spcBef>
+                <a:spcPts val="0"/>
+              </a:spcBef>
+              <a:spcAft>
+                <a:spcPts val="0"/>
+              </a:spcAft>
+              <a:buNone/>
+            </a:pPr>
+            <a:r>
+              <a:rPr lang="en" sz="2000"/>
+              <a:t>  df_tex.normalized = false;</a:t>
+            </a:r>
+            <a:endParaRPr sz="2000"/>
+          </a:p>
+          <a:p>
+            <a:pPr indent="0" lvl="0" marL="0" rtl="0" algn="l">
+              <a:spcBef>
+                <a:spcPts val="0"/>
+              </a:spcBef>
+              <a:spcAft>
+                <a:spcPts val="0"/>
+              </a:spcAft>
+              <a:buNone/>
+            </a:pPr>
+            <a:r>
+              <a:rPr lang="en" sz="2000"/>
+              <a:t>  df_tex.filterMode = cudaFilterModeLinear;</a:t>
+            </a:r>
+            <a:endParaRPr sz="2000"/>
+          </a:p>
+          <a:p>
+            <a:pPr indent="0" lvl="0" marL="0" rtl="0" algn="l">
+              <a:spcBef>
+                <a:spcPts val="0"/>
+              </a:spcBef>
+              <a:spcAft>
+                <a:spcPts val="0"/>
+              </a:spcAft>
+              <a:buNone/>
+            </a:pPr>
+            <a:r>
+              <a:rPr lang="en" sz="2000"/>
+              <a:t>   df_tex.addressMode[0] = cudaAddressModeClamp;</a:t>
+            </a:r>
+            <a:endParaRPr sz="2000"/>
+          </a:p>
+          <a:p>
+            <a:pPr indent="0" lvl="0" marL="0" rtl="0" algn="l">
+              <a:spcBef>
+                <a:spcPts val="0"/>
+              </a:spcBef>
+              <a:spcAft>
+                <a:spcPts val="0"/>
+              </a:spcAft>
+              <a:buNone/>
+            </a:pPr>
+            <a:r>
+              <a:rPr lang="en" sz="2000"/>
+              <a:t>  df_tex.addressMode[1] = cudaAddressModeClamp;</a:t>
+            </a:r>
+            <a:endParaRPr sz="2000"/>
+          </a:p>
+          <a:p>
+            <a:pPr indent="0" lvl="0" marL="0" rtl="0" algn="l">
+              <a:spcBef>
+                <a:spcPts val="0"/>
+              </a:spcBef>
+              <a:spcAft>
+                <a:spcPts val="0"/>
+              </a:spcAft>
+              <a:buNone/>
+            </a:pPr>
+            <a:r>
+              <a:rPr lang="en" sz="2000"/>
+              <a:t>  df_tex.addressMode[2] = cudaAddressModeClamp;</a:t>
+            </a:r>
+            <a:endParaRPr sz="2000"/>
+          </a:p>
+          <a:p>
+            <a:pPr indent="0" lvl="0" marL="0" rtl="0" algn="l">
+              <a:spcBef>
+                <a:spcPts val="0"/>
+              </a:spcBef>
+              <a:spcAft>
+                <a:spcPts val="0"/>
+              </a:spcAft>
+              <a:buNone/>
+            </a:pPr>
+            <a:r>
+              <a:rPr lang="en" sz="2000"/>
+              <a:t>  </a:t>
+            </a:r>
+            <a:endParaRPr sz="2000"/>
+          </a:p>
+          <a:p>
+            <a:pPr indent="0" lvl="0" marL="0" rtl="0" algn="l">
+              <a:spcBef>
+                <a:spcPts val="0"/>
+              </a:spcBef>
+              <a:spcAft>
+                <a:spcPts val="0"/>
+              </a:spcAft>
+              <a:buNone/>
+            </a:pPr>
+            <a:r>
+              <a:rPr lang="en" sz="2000"/>
+              <a:t>  cudaBindTextureToArray(df_tex, df_Array, channelDesc);</a:t>
+            </a:r>
+            <a:endParaRPr sz="2000"/>
+          </a:p>
+          <a:p>
+            <a:pPr indent="0" lvl="0" marL="0" rtl="0" algn="l">
+              <a:spcBef>
+                <a:spcPts val="0"/>
+              </a:spcBef>
+              <a:spcAft>
+                <a:spcPts val="0"/>
+              </a:spcAft>
+              <a:buNone/>
+            </a:pPr>
+            <a:r>
+              <a:rPr lang="en" sz="2000"/>
+              <a:t>}</a:t>
             </a:r>
             <a:endParaRPr sz="2000"/>
           </a:p>
@@ -13534,6 +13618,1050 @@
         </p:nvSpPr>
         <p:spPr>
           <a:xfrm>
+            <a:off x="236825" y="442400"/>
+            <a:ext cx="8749500" cy="4186800"/>
+          </a:xfrm>
+          <a:prstGeom prst="rect">
+            <a:avLst/>
+          </a:prstGeom>
+          <a:solidFill>
+            <a:srgbClr val="EAD1DC"/>
+          </a:solidFill>
+          <a:ln cap="flat" cmpd="sng" w="9525">
+            <a:solidFill>
+              <a:schemeClr val="dk1"/>
+            </a:solidFill>
+            <a:prstDash val="solid"/>
+            <a:round/>
+            <a:headEnd len="sm" w="sm" type="none"/>
+            <a:tailEnd len="sm" w="sm" type="none"/>
+          </a:ln>
+        </p:spPr>
+        <p:txBody>
+          <a:bodyPr anchorCtr="0" anchor="t" bIns="91425" lIns="91425" spcFirstLastPara="1" rIns="91425" wrap="square" tIns="91425">
+            <a:spAutoFit/>
+          </a:bodyPr>
+          <a:lstStyle/>
+          <a:p>
+            <a:pPr indent="0" lvl="0" marL="0" rtl="0" algn="l">
+              <a:spcBef>
+                <a:spcPts val="0"/>
+              </a:spcBef>
+              <a:spcAft>
+                <a:spcPts val="0"/>
+              </a:spcAft>
+              <a:buNone/>
+            </a:pPr>
+            <a:r>
+              <a:rPr lang="en" sz="2000"/>
+              <a:t>const cudaExtent volumeSize = make_cudaExtent(FGSIZE*sizeof(float),</a:t>
+            </a:r>
+            <a:endParaRPr sz="2000"/>
+          </a:p>
+          <a:p>
+            <a:pPr indent="0" lvl="0" marL="0" rtl="0" algn="l">
+              <a:spcBef>
+                <a:spcPts val="0"/>
+              </a:spcBef>
+              <a:spcAft>
+                <a:spcPts val="0"/>
+              </a:spcAft>
+              <a:buClr>
+                <a:schemeClr val="dk1"/>
+              </a:buClr>
+              <a:buSzPts val="1100"/>
+              <a:buFont typeface="Arial"/>
+              <a:buNone/>
+            </a:pPr>
+            <a:r>
+              <a:rPr lang="en" sz="2000"/>
+              <a:t>                                                                                           FGSIZE, FGSIZE);</a:t>
+            </a:r>
+            <a:endParaRPr sz="2000"/>
+          </a:p>
+          <a:p>
+            <a:pPr indent="0" lvl="0" marL="0" rtl="0" algn="l">
+              <a:spcBef>
+                <a:spcPts val="0"/>
+              </a:spcBef>
+              <a:spcAft>
+                <a:spcPts val="0"/>
+              </a:spcAft>
+              <a:buClr>
+                <a:schemeClr val="dk1"/>
+              </a:buClr>
+              <a:buSzPts val="1100"/>
+              <a:buFont typeface="Arial"/>
+              <a:buNone/>
+            </a:pPr>
+            <a:r>
+              <a:rPr lang="en" sz="2000"/>
+              <a:t>cudaChannelFormatDesc channelDesc = cudaCreateChannelDesc&lt;float&gt;();</a:t>
+            </a:r>
+            <a:endParaRPr sz="2000"/>
+          </a:p>
+          <a:p>
+            <a:pPr indent="0" lvl="0" marL="0" rtl="0" algn="l">
+              <a:spcBef>
+                <a:spcPts val="0"/>
+              </a:spcBef>
+              <a:spcAft>
+                <a:spcPts val="0"/>
+              </a:spcAft>
+              <a:buClr>
+                <a:schemeClr val="dk1"/>
+              </a:buClr>
+              <a:buSzPts val="1100"/>
+              <a:buFont typeface="Arial"/>
+              <a:buNone/>
+            </a:pPr>
+            <a:r>
+              <a:rPr lang="en" sz="2000"/>
+              <a:t>cudaMalloc3DArray(&amp;cuArray, &amp;channelDesc, volumeSize);</a:t>
+            </a:r>
+            <a:endParaRPr sz="2000"/>
+          </a:p>
+          <a:p>
+            <a:pPr indent="0" lvl="0" marL="0" rtl="0" algn="l">
+              <a:spcBef>
+                <a:spcPts val="0"/>
+              </a:spcBef>
+              <a:spcAft>
+                <a:spcPts val="0"/>
+              </a:spcAft>
+              <a:buClr>
+                <a:schemeClr val="dk1"/>
+              </a:buClr>
+              <a:buSzPts val="1100"/>
+              <a:buFont typeface="Arial"/>
+              <a:buNone/>
+            </a:pPr>
+            <a:r>
+              <a:rPr lang="en" sz="2000"/>
+              <a:t>cudaMemcpy3DParms  cpyParams={0};</a:t>
+            </a:r>
+            <a:endParaRPr sz="2000"/>
+          </a:p>
+          <a:p>
+            <a:pPr indent="0" lvl="0" marL="0" rtl="0" algn="l">
+              <a:spcBef>
+                <a:spcPts val="0"/>
+              </a:spcBef>
+              <a:spcAft>
+                <a:spcPts val="0"/>
+              </a:spcAft>
+              <a:buNone/>
+            </a:pPr>
+            <a:r>
+              <a:rPr lang="en" sz="2000"/>
+              <a:t>cpyParams.srcPtr = make_cudaPitchedPtr( (void*)df_h, </a:t>
+            </a:r>
+            <a:endParaRPr sz="2000"/>
+          </a:p>
+          <a:p>
+            <a:pPr indent="0" lvl="0" marL="0" rtl="0" algn="l">
+              <a:spcBef>
+                <a:spcPts val="0"/>
+              </a:spcBef>
+              <a:spcAft>
+                <a:spcPts val="0"/>
+              </a:spcAft>
+              <a:buClr>
+                <a:schemeClr val="dk1"/>
+              </a:buClr>
+              <a:buSzPts val="1100"/>
+              <a:buFont typeface="Arial"/>
+              <a:buNone/>
+            </a:pPr>
+            <a:r>
+              <a:rPr lang="en" sz="2000"/>
+              <a:t>      volumeSize.width*sizeof(float),  volumeSize.width,  volumeSize.height);</a:t>
+            </a:r>
+            <a:endParaRPr sz="2000"/>
+          </a:p>
+          <a:p>
+            <a:pPr indent="0" lvl="0" marL="0" rtl="0" algn="l">
+              <a:spcBef>
+                <a:spcPts val="0"/>
+              </a:spcBef>
+              <a:spcAft>
+                <a:spcPts val="0"/>
+              </a:spcAft>
+              <a:buClr>
+                <a:schemeClr val="dk1"/>
+              </a:buClr>
+              <a:buSzPts val="1100"/>
+              <a:buFont typeface="Arial"/>
+              <a:buNone/>
+            </a:pPr>
+            <a:r>
+              <a:rPr lang="en" sz="2000"/>
+              <a:t> cpyParams.dstArray = cuArray;</a:t>
+            </a:r>
+            <a:endParaRPr sz="2000"/>
+          </a:p>
+          <a:p>
+            <a:pPr indent="0" lvl="0" marL="0" rtl="0" algn="l">
+              <a:spcBef>
+                <a:spcPts val="0"/>
+              </a:spcBef>
+              <a:spcAft>
+                <a:spcPts val="0"/>
+              </a:spcAft>
+              <a:buClr>
+                <a:schemeClr val="dk1"/>
+              </a:buClr>
+              <a:buSzPts val="1100"/>
+              <a:buFont typeface="Arial"/>
+              <a:buNone/>
+            </a:pPr>
+            <a:r>
+              <a:rPr lang="en" sz="2000"/>
+              <a:t> cpyParams.extent = volumeSize;</a:t>
+            </a:r>
+            <a:endParaRPr sz="2000"/>
+          </a:p>
+          <a:p>
+            <a:pPr indent="0" lvl="0" marL="0" rtl="0" algn="l">
+              <a:spcBef>
+                <a:spcPts val="0"/>
+              </a:spcBef>
+              <a:spcAft>
+                <a:spcPts val="0"/>
+              </a:spcAft>
+              <a:buClr>
+                <a:schemeClr val="dk1"/>
+              </a:buClr>
+              <a:buSzPts val="1100"/>
+              <a:buFont typeface="Arial"/>
+              <a:buNone/>
+            </a:pPr>
+            <a:r>
+              <a:rPr lang="en" sz="2000"/>
+              <a:t> cpyParams.kind = cudaMemcpyHostToDevice; </a:t>
+            </a:r>
+            <a:endParaRPr sz="2000"/>
+          </a:p>
+          <a:p>
+            <a:pPr indent="0" lvl="0" marL="0" rtl="0" algn="l">
+              <a:spcBef>
+                <a:spcPts val="0"/>
+              </a:spcBef>
+              <a:spcAft>
+                <a:spcPts val="0"/>
+              </a:spcAft>
+              <a:buClr>
+                <a:schemeClr val="dk1"/>
+              </a:buClr>
+              <a:buSzPts val="1100"/>
+              <a:buFont typeface="Arial"/>
+              <a:buNone/>
+            </a:pPr>
+            <a:r>
+              <a:rPr lang="en" sz="2000"/>
+              <a:t> cudaMemcpy3D(&amp;cpyParams));</a:t>
+            </a:r>
+            <a:endParaRPr sz="2000"/>
+          </a:p>
+          <a:p>
+            <a:pPr indent="0" lvl="0" marL="0" rtl="0" algn="l">
+              <a:spcBef>
+                <a:spcPts val="0"/>
+              </a:spcBef>
+              <a:spcAft>
+                <a:spcPts val="0"/>
+              </a:spcAft>
+              <a:buClr>
+                <a:schemeClr val="dk1"/>
+              </a:buClr>
+              <a:buSzPts val="1100"/>
+              <a:buFont typeface="Arial"/>
+              <a:buNone/>
+            </a:pPr>
+            <a:r>
+              <a:rPr b="1" lang="en" sz="2000"/>
+              <a:t>cudaCreateTextureObject(&amp;df_tex, &amp;resDesc, &amp;texDesc, NULL);</a:t>
+            </a:r>
+            <a:endParaRPr b="1" sz="2000"/>
+          </a:p>
+          <a:p>
+            <a:pPr indent="0" lvl="0" marL="0" rtl="0" algn="l">
+              <a:spcBef>
+                <a:spcPts val="0"/>
+              </a:spcBef>
+              <a:spcAft>
+                <a:spcPts val="0"/>
+              </a:spcAft>
+              <a:buNone/>
+            </a:pPr>
+            <a:r>
+              <a:t/>
+            </a:r>
+            <a:endParaRPr sz="2000"/>
+          </a:p>
+        </p:txBody>
+      </p:sp>
+    </p:spTree>
+  </p:cSld>
+  <p:clrMapOvr>
+    <a:masterClrMapping/>
+  </p:clrMapOvr>
+</p:sld>
+</file>
+
+<file path=ppt/slides/slide24.xml><?xml version="1.0" encoding="utf-8"?>
+<p:sld xmlns:a="http://schemas.openxmlformats.org/drawingml/2006/main" xmlns:r="http://schemas.openxmlformats.org/officeDocument/2006/relationships" xmlns:mc="http://schemas.openxmlformats.org/markup-compatibility/2006" xmlns:mv="urn:schemas-microsoft-com:mac:vml" xmlns:p="http://schemas.openxmlformats.org/presentationml/2006/main" xmlns:c="http://schemas.openxmlformats.org/drawingml/2006/chart" xmlns:dgm="http://schemas.openxmlformats.org/drawingml/2006/diagram" xmlns:o="urn:schemas-microsoft-com:office:office" xmlns:v="urn:schemas-microsoft-com:vml" xmlns:pvml="urn:schemas-microsoft-com:office:powerpoint" xmlns:com="http://schemas.openxmlformats.org/drawingml/2006/compatibility" xmlns:p14="http://schemas.microsoft.com/office/powerpoint/2010/main" xmlns:p15="http://schemas.microsoft.com/office/powerpoint/2012/main" xmlns:ahyp="http://schemas.microsoft.com/office/drawing/2018/hyperlinkcolor">
+  <p:cSld>
+    <p:spTree>
+      <p:nvGrpSpPr>
+        <p:cNvPr id="200" name="Shape 200"/>
+        <p:cNvGrpSpPr/>
+        <p:nvPr/>
+      </p:nvGrpSpPr>
+      <p:grpSpPr>
+        <a:xfrm>
+          <a:off x="0" y="0"/>
+          <a:ext cx="0" cy="0"/>
+          <a:chOff x="0" y="0"/>
+          <a:chExt cx="0" cy="0"/>
+        </a:xfrm>
+      </p:grpSpPr>
+      <p:sp>
+        <p:nvSpPr>
+          <p:cNvPr id="201" name="Google Shape;201;p38"/>
+          <p:cNvSpPr txBox="1"/>
+          <p:nvPr/>
+        </p:nvSpPr>
+        <p:spPr>
+          <a:xfrm>
+            <a:off x="197250" y="108500"/>
+            <a:ext cx="8749500" cy="800400"/>
+          </a:xfrm>
+          <a:prstGeom prst="rect">
+            <a:avLst/>
+          </a:prstGeom>
+          <a:solidFill>
+            <a:srgbClr val="C9DAF8"/>
+          </a:solidFill>
+          <a:ln>
+            <a:noFill/>
+          </a:ln>
+        </p:spPr>
+        <p:txBody>
+          <a:bodyPr anchorCtr="0" anchor="t" bIns="91425" lIns="91425" spcFirstLastPara="1" rIns="91425" wrap="square" tIns="91425">
+            <a:spAutoFit/>
+          </a:bodyPr>
+          <a:lstStyle/>
+          <a:p>
+            <a:pPr indent="0" lvl="0" marL="0" rtl="0" algn="l">
+              <a:spcBef>
+                <a:spcPts val="0"/>
+              </a:spcBef>
+              <a:spcAft>
+                <a:spcPts val="0"/>
+              </a:spcAft>
+              <a:buNone/>
+            </a:pPr>
+            <a:r>
+              <a:rPr b="1" lang="en" sz="2000"/>
+              <a:t>Шаг 5: </a:t>
+            </a:r>
+            <a:r>
+              <a:rPr lang="en" sz="2000"/>
+              <a:t>реализовать вычисление интеграла, используя текстурную ссылку</a:t>
+            </a:r>
+            <a:r>
+              <a:rPr lang="en" sz="2000"/>
+              <a:t>. </a:t>
+            </a:r>
+            <a:endParaRPr sz="2000"/>
+          </a:p>
+        </p:txBody>
+      </p:sp>
+      <p:sp>
+        <p:nvSpPr>
+          <p:cNvPr id="202" name="Google Shape;202;p38"/>
+          <p:cNvSpPr txBox="1"/>
+          <p:nvPr/>
+        </p:nvSpPr>
+        <p:spPr>
+          <a:xfrm>
+            <a:off x="184200" y="1197775"/>
+            <a:ext cx="8749500" cy="3786600"/>
+          </a:xfrm>
+          <a:prstGeom prst="rect">
+            <a:avLst/>
+          </a:prstGeom>
+          <a:solidFill>
+            <a:srgbClr val="FFE599"/>
+          </a:solidFill>
+          <a:ln>
+            <a:noFill/>
+          </a:ln>
+        </p:spPr>
+        <p:txBody>
+          <a:bodyPr anchorCtr="0" anchor="t" bIns="91425" lIns="91425" spcFirstLastPara="1" rIns="91425" wrap="square" tIns="91425">
+            <a:spAutoFit/>
+          </a:bodyPr>
+          <a:lstStyle/>
+          <a:p>
+            <a:pPr indent="0" lvl="0" marL="0" rtl="0" algn="l">
+              <a:spcBef>
+                <a:spcPts val="0"/>
+              </a:spcBef>
+              <a:spcAft>
+                <a:spcPts val="0"/>
+              </a:spcAft>
+              <a:buClr>
+                <a:schemeClr val="dk1"/>
+              </a:buClr>
+              <a:buSzPts val="1100"/>
+              <a:buFont typeface="Arial"/>
+              <a:buNone/>
+            </a:pPr>
+            <a:r>
+              <a:rPr lang="en" sz="2000"/>
+              <a:t>__global__ void kernel(float *a){</a:t>
+            </a:r>
+            <a:endParaRPr sz="2000"/>
+          </a:p>
+          <a:p>
+            <a:pPr indent="0" lvl="0" marL="0" rtl="0" algn="l">
+              <a:spcBef>
+                <a:spcPts val="0"/>
+              </a:spcBef>
+              <a:spcAft>
+                <a:spcPts val="0"/>
+              </a:spcAft>
+              <a:buClr>
+                <a:schemeClr val="dk1"/>
+              </a:buClr>
+              <a:buSzPts val="1100"/>
+              <a:buFont typeface="Arial"/>
+              <a:buNone/>
+            </a:pPr>
+            <a:r>
+              <a:rPr lang="en" sz="2000"/>
+              <a:t>  __shared__ float cache[THREADSPERBLOCK];</a:t>
+            </a:r>
+            <a:endParaRPr sz="2000"/>
+          </a:p>
+          <a:p>
+            <a:pPr indent="0" lvl="0" marL="0" rtl="0" algn="l">
+              <a:spcBef>
+                <a:spcPts val="0"/>
+              </a:spcBef>
+              <a:spcAft>
+                <a:spcPts val="0"/>
+              </a:spcAft>
+              <a:buClr>
+                <a:schemeClr val="dk1"/>
+              </a:buClr>
+              <a:buSzPts val="1100"/>
+              <a:buFont typeface="Arial"/>
+              <a:buNone/>
+            </a:pPr>
+            <a:r>
+              <a:rPr lang="en" sz="2000"/>
+              <a:t>  int tid = threadIdx.x + blockIdx.x * blockDim.x;</a:t>
+            </a:r>
+            <a:endParaRPr sz="2000"/>
+          </a:p>
+          <a:p>
+            <a:pPr indent="0" lvl="0" marL="0" rtl="0" algn="l">
+              <a:spcBef>
+                <a:spcPts val="0"/>
+              </a:spcBef>
+              <a:spcAft>
+                <a:spcPts val="0"/>
+              </a:spcAft>
+              <a:buClr>
+                <a:schemeClr val="dk1"/>
+              </a:buClr>
+              <a:buSzPts val="1100"/>
+              <a:buFont typeface="Arial"/>
+              <a:buNone/>
+            </a:pPr>
+            <a:r>
+              <a:rPr lang="en" sz="2000"/>
+              <a:t>  int cacheIndex = threadIdx.x;</a:t>
+            </a:r>
+            <a:endParaRPr sz="2000"/>
+          </a:p>
+          <a:p>
+            <a:pPr indent="0" lvl="0" marL="0" rtl="0" algn="l">
+              <a:spcBef>
+                <a:spcPts val="0"/>
+              </a:spcBef>
+              <a:spcAft>
+                <a:spcPts val="0"/>
+              </a:spcAft>
+              <a:buClr>
+                <a:schemeClr val="dk1"/>
+              </a:buClr>
+              <a:buSzPts val="1100"/>
+              <a:buFont typeface="Arial"/>
+              <a:buNone/>
+            </a:pPr>
+            <a:r>
+              <a:rPr lang="en" sz="2000"/>
+              <a:t>  float x = vert[tid].x;</a:t>
+            </a:r>
+            <a:endParaRPr sz="2000"/>
+          </a:p>
+          <a:p>
+            <a:pPr indent="0" lvl="0" marL="0" rtl="0" algn="l">
+              <a:spcBef>
+                <a:spcPts val="0"/>
+              </a:spcBef>
+              <a:spcAft>
+                <a:spcPts val="0"/>
+              </a:spcAft>
+              <a:buClr>
+                <a:schemeClr val="dk1"/>
+              </a:buClr>
+              <a:buSzPts val="1100"/>
+              <a:buFont typeface="Arial"/>
+              <a:buNone/>
+            </a:pPr>
+            <a:r>
+              <a:rPr lang="en" sz="2000"/>
+              <a:t>  float y = vert[tid].y;</a:t>
+            </a:r>
+            <a:endParaRPr sz="2000"/>
+          </a:p>
+          <a:p>
+            <a:pPr indent="0" lvl="0" marL="0" rtl="0" algn="l">
+              <a:spcBef>
+                <a:spcPts val="0"/>
+              </a:spcBef>
+              <a:spcAft>
+                <a:spcPts val="0"/>
+              </a:spcAft>
+              <a:buClr>
+                <a:schemeClr val="dk1"/>
+              </a:buClr>
+              <a:buSzPts val="1100"/>
+              <a:buFont typeface="Arial"/>
+              <a:buNone/>
+            </a:pPr>
+            <a:r>
+              <a:rPr lang="en" sz="2000"/>
+              <a:t>  float z = vert[tid].z;</a:t>
+            </a:r>
+            <a:endParaRPr sz="2000"/>
+          </a:p>
+          <a:p>
+            <a:pPr indent="0" lvl="0" marL="0" rtl="0" algn="l">
+              <a:spcBef>
+                <a:spcPts val="0"/>
+              </a:spcBef>
+              <a:spcAft>
+                <a:spcPts val="0"/>
+              </a:spcAft>
+              <a:buClr>
+                <a:schemeClr val="dk1"/>
+              </a:buClr>
+              <a:buSzPts val="1100"/>
+              <a:buFont typeface="Arial"/>
+              <a:buNone/>
+            </a:pPr>
+            <a:r>
+              <a:rPr lang="en" sz="2000"/>
+              <a:t>  cache[cacheIndex] = </a:t>
+            </a:r>
+            <a:r>
+              <a:rPr b="1" lang="en" sz="2000"/>
+              <a:t>tex3D(df_tex, z, y, x);</a:t>
+            </a:r>
+            <a:endParaRPr b="1" sz="2000"/>
+          </a:p>
+          <a:p>
+            <a:pPr indent="0" lvl="0" marL="0" rtl="0" algn="l">
+              <a:spcBef>
+                <a:spcPts val="0"/>
+              </a:spcBef>
+              <a:spcAft>
+                <a:spcPts val="0"/>
+              </a:spcAft>
+              <a:buNone/>
+            </a:pPr>
+            <a:r>
+              <a:t/>
+            </a:r>
+            <a:endParaRPr sz="2000"/>
+          </a:p>
+          <a:p>
+            <a:pPr indent="0" lvl="0" marL="0" rtl="0" algn="l">
+              <a:spcBef>
+                <a:spcPts val="0"/>
+              </a:spcBef>
+              <a:spcAft>
+                <a:spcPts val="0"/>
+              </a:spcAft>
+              <a:buClr>
+                <a:schemeClr val="dk1"/>
+              </a:buClr>
+              <a:buSzPts val="1100"/>
+              <a:buFont typeface="Arial"/>
+              <a:buNone/>
+            </a:pPr>
+            <a:r>
+              <a:rPr lang="en" sz="2000"/>
+              <a:t>__syncthreads();</a:t>
+            </a:r>
+            <a:endParaRPr sz="2000"/>
+          </a:p>
+          <a:p>
+            <a:pPr indent="0" lvl="0" marL="0" rtl="0" algn="l">
+              <a:spcBef>
+                <a:spcPts val="0"/>
+              </a:spcBef>
+              <a:spcAft>
+                <a:spcPts val="0"/>
+              </a:spcAft>
+              <a:buClr>
+                <a:schemeClr val="dk1"/>
+              </a:buClr>
+              <a:buSzPts val="1100"/>
+              <a:buFont typeface="Arial"/>
+              <a:buNone/>
+            </a:pPr>
+            <a:r>
+              <a:t/>
+            </a:r>
+            <a:endParaRPr sz="2000"/>
+          </a:p>
+          <a:p>
+            <a:pPr indent="0" lvl="0" marL="0" rtl="0" algn="l">
+              <a:spcBef>
+                <a:spcPts val="0"/>
+              </a:spcBef>
+              <a:spcAft>
+                <a:spcPts val="0"/>
+              </a:spcAft>
+              <a:buNone/>
+            </a:pPr>
+            <a:r>
+              <a:t/>
+            </a:r>
+            <a:endParaRPr/>
+          </a:p>
+        </p:txBody>
+      </p:sp>
+    </p:spTree>
+  </p:cSld>
+  <p:clrMapOvr>
+    <a:masterClrMapping/>
+  </p:clrMapOvr>
+</p:sld>
+</file>
+
+<file path=ppt/slides/slide25.xml><?xml version="1.0" encoding="utf-8"?>
+<p:sld xmlns:a="http://schemas.openxmlformats.org/drawingml/2006/main" xmlns:r="http://schemas.openxmlformats.org/officeDocument/2006/relationships" xmlns:mc="http://schemas.openxmlformats.org/markup-compatibility/2006" xmlns:mv="urn:schemas-microsoft-com:mac:vml" xmlns:p="http://schemas.openxmlformats.org/presentationml/2006/main" xmlns:c="http://schemas.openxmlformats.org/drawingml/2006/chart" xmlns:dgm="http://schemas.openxmlformats.org/drawingml/2006/diagram" xmlns:o="urn:schemas-microsoft-com:office:office" xmlns:v="urn:schemas-microsoft-com:vml" xmlns:pvml="urn:schemas-microsoft-com:office:powerpoint" xmlns:com="http://schemas.openxmlformats.org/drawingml/2006/compatibility" xmlns:p14="http://schemas.microsoft.com/office/powerpoint/2010/main" xmlns:p15="http://schemas.microsoft.com/office/powerpoint/2012/main" xmlns:ahyp="http://schemas.microsoft.com/office/drawing/2018/hyperlinkcolor">
+  <p:cSld>
+    <p:spTree>
+      <p:nvGrpSpPr>
+        <p:cNvPr id="206" name="Shape 206"/>
+        <p:cNvGrpSpPr/>
+        <p:nvPr/>
+      </p:nvGrpSpPr>
+      <p:grpSpPr>
+        <a:xfrm>
+          <a:off x="0" y="0"/>
+          <a:ext cx="0" cy="0"/>
+          <a:chOff x="0" y="0"/>
+          <a:chExt cx="0" cy="0"/>
+        </a:xfrm>
+      </p:grpSpPr>
+      <p:sp>
+        <p:nvSpPr>
+          <p:cNvPr id="207" name="Google Shape;207;p39"/>
+          <p:cNvSpPr txBox="1"/>
+          <p:nvPr/>
+        </p:nvSpPr>
+        <p:spPr>
+          <a:xfrm>
+            <a:off x="105250" y="831025"/>
+            <a:ext cx="8841300" cy="3170700"/>
+          </a:xfrm>
+          <a:prstGeom prst="rect">
+            <a:avLst/>
+          </a:prstGeom>
+          <a:solidFill>
+            <a:srgbClr val="FFE599"/>
+          </a:solidFill>
+          <a:ln>
+            <a:noFill/>
+          </a:ln>
+        </p:spPr>
+        <p:txBody>
+          <a:bodyPr anchorCtr="0" anchor="t" bIns="91425" lIns="91425" spcFirstLastPara="1" rIns="91425" wrap="square" tIns="91425">
+            <a:spAutoFit/>
+          </a:bodyPr>
+          <a:lstStyle/>
+          <a:p>
+            <a:pPr indent="0" lvl="0" marL="0" rtl="0" algn="l">
+              <a:spcBef>
+                <a:spcPts val="0"/>
+              </a:spcBef>
+              <a:spcAft>
+                <a:spcPts val="0"/>
+              </a:spcAft>
+              <a:buClr>
+                <a:schemeClr val="dk1"/>
+              </a:buClr>
+              <a:buSzPts val="1100"/>
+              <a:buFont typeface="Arial"/>
+              <a:buNone/>
+            </a:pPr>
+            <a:r>
+              <a:rPr lang="en" sz="2000"/>
+              <a:t>  </a:t>
+            </a:r>
+            <a:r>
+              <a:rPr lang="en" sz="2000"/>
+              <a:t>for (int s = blockDim.x / 2; s &gt; 0; s &gt;&gt;= 1){</a:t>
+            </a:r>
+            <a:endParaRPr sz="2000"/>
+          </a:p>
+          <a:p>
+            <a:pPr indent="0" lvl="0" marL="0" rtl="0" algn="l">
+              <a:spcBef>
+                <a:spcPts val="0"/>
+              </a:spcBef>
+              <a:spcAft>
+                <a:spcPts val="0"/>
+              </a:spcAft>
+              <a:buClr>
+                <a:schemeClr val="dk1"/>
+              </a:buClr>
+              <a:buSzPts val="1100"/>
+              <a:buFont typeface="Arial"/>
+              <a:buNone/>
+            </a:pPr>
+            <a:r>
+              <a:rPr lang="en" sz="2000"/>
+              <a:t>    if (cacheIndex &lt; s)</a:t>
+            </a:r>
+            <a:endParaRPr sz="2000"/>
+          </a:p>
+          <a:p>
+            <a:pPr indent="0" lvl="0" marL="0" rtl="0" algn="l">
+              <a:spcBef>
+                <a:spcPts val="0"/>
+              </a:spcBef>
+              <a:spcAft>
+                <a:spcPts val="0"/>
+              </a:spcAft>
+              <a:buClr>
+                <a:schemeClr val="dk1"/>
+              </a:buClr>
+              <a:buSzPts val="1100"/>
+              <a:buFont typeface="Arial"/>
+              <a:buNone/>
+            </a:pPr>
+            <a:r>
+              <a:rPr lang="en" sz="2000"/>
+              <a:t>      cache[cacheIndex] += cache[cacheIndex + s];</a:t>
+            </a:r>
+            <a:endParaRPr sz="2000"/>
+          </a:p>
+          <a:p>
+            <a:pPr indent="0" lvl="0" marL="0" rtl="0" algn="l">
+              <a:spcBef>
+                <a:spcPts val="0"/>
+              </a:spcBef>
+              <a:spcAft>
+                <a:spcPts val="0"/>
+              </a:spcAft>
+              <a:buClr>
+                <a:schemeClr val="dk1"/>
+              </a:buClr>
+              <a:buSzPts val="1100"/>
+              <a:buFont typeface="Arial"/>
+              <a:buNone/>
+            </a:pPr>
+            <a:r>
+              <a:rPr lang="en" sz="2000"/>
+              <a:t>      __syncthreads();</a:t>
+            </a:r>
+            <a:endParaRPr sz="2000"/>
+          </a:p>
+          <a:p>
+            <a:pPr indent="0" lvl="0" marL="0" rtl="0" algn="l">
+              <a:spcBef>
+                <a:spcPts val="0"/>
+              </a:spcBef>
+              <a:spcAft>
+                <a:spcPts val="0"/>
+              </a:spcAft>
+              <a:buClr>
+                <a:schemeClr val="dk1"/>
+              </a:buClr>
+              <a:buSzPts val="1100"/>
+              <a:buFont typeface="Arial"/>
+              <a:buNone/>
+            </a:pPr>
+            <a:r>
+              <a:rPr lang="en" sz="2000"/>
+              <a:t>  }</a:t>
+            </a:r>
+            <a:endParaRPr sz="2000"/>
+          </a:p>
+          <a:p>
+            <a:pPr indent="0" lvl="0" marL="0" rtl="0" algn="l">
+              <a:spcBef>
+                <a:spcPts val="0"/>
+              </a:spcBef>
+              <a:spcAft>
+                <a:spcPts val="0"/>
+              </a:spcAft>
+              <a:buNone/>
+            </a:pPr>
+            <a:r>
+              <a:t/>
+            </a:r>
+            <a:endParaRPr sz="2000"/>
+          </a:p>
+          <a:p>
+            <a:pPr indent="0" lvl="0" marL="0" rtl="0" algn="l">
+              <a:spcBef>
+                <a:spcPts val="0"/>
+              </a:spcBef>
+              <a:spcAft>
+                <a:spcPts val="0"/>
+              </a:spcAft>
+              <a:buClr>
+                <a:schemeClr val="dk1"/>
+              </a:buClr>
+              <a:buSzPts val="1100"/>
+              <a:buFont typeface="Arial"/>
+              <a:buNone/>
+            </a:pPr>
+            <a:r>
+              <a:rPr lang="en" sz="2000"/>
+              <a:t>  if (cacheIndex == 0)</a:t>
+            </a:r>
+            <a:endParaRPr sz="2000"/>
+          </a:p>
+          <a:p>
+            <a:pPr indent="0" lvl="0" marL="0" rtl="0" algn="l">
+              <a:spcBef>
+                <a:spcPts val="0"/>
+              </a:spcBef>
+              <a:spcAft>
+                <a:spcPts val="0"/>
+              </a:spcAft>
+              <a:buClr>
+                <a:schemeClr val="dk1"/>
+              </a:buClr>
+              <a:buSzPts val="1100"/>
+              <a:buFont typeface="Arial"/>
+              <a:buNone/>
+            </a:pPr>
+            <a:r>
+              <a:rPr lang="en" sz="2000"/>
+              <a:t>  a[blockIdx.x] = cache[0];</a:t>
+            </a:r>
+            <a:endParaRPr sz="2000"/>
+          </a:p>
+          <a:p>
+            <a:pPr indent="0" lvl="0" marL="0" rtl="0" algn="l">
+              <a:spcBef>
+                <a:spcPts val="0"/>
+              </a:spcBef>
+              <a:spcAft>
+                <a:spcPts val="0"/>
+              </a:spcAft>
+              <a:buClr>
+                <a:schemeClr val="dk1"/>
+              </a:buClr>
+              <a:buSzPts val="1100"/>
+              <a:buFont typeface="Arial"/>
+              <a:buNone/>
+            </a:pPr>
+            <a:r>
+              <a:rPr lang="en" sz="2000"/>
+              <a:t>}</a:t>
+            </a:r>
+            <a:endParaRPr sz="2000"/>
+          </a:p>
+          <a:p>
+            <a:pPr indent="0" lvl="0" marL="0" rtl="0" algn="l">
+              <a:spcBef>
+                <a:spcPts val="0"/>
+              </a:spcBef>
+              <a:spcAft>
+                <a:spcPts val="0"/>
+              </a:spcAft>
+              <a:buNone/>
+            </a:pPr>
+            <a:r>
+              <a:t/>
+            </a:r>
+            <a:endParaRPr/>
+          </a:p>
+        </p:txBody>
+      </p:sp>
+      <p:sp>
+        <p:nvSpPr>
+          <p:cNvPr id="208" name="Google Shape;208;p39"/>
+          <p:cNvSpPr txBox="1"/>
+          <p:nvPr/>
+        </p:nvSpPr>
+        <p:spPr>
+          <a:xfrm>
+            <a:off x="5683750" y="1921400"/>
+            <a:ext cx="3078600" cy="800400"/>
+          </a:xfrm>
+          <a:prstGeom prst="rect">
+            <a:avLst/>
+          </a:prstGeom>
+          <a:noFill/>
+          <a:ln cap="flat" cmpd="sng" w="9525">
+            <a:solidFill>
+              <a:schemeClr val="dk1"/>
+            </a:solidFill>
+            <a:prstDash val="solid"/>
+            <a:round/>
+            <a:headEnd len="sm" w="sm" type="none"/>
+            <a:tailEnd len="sm" w="sm" type="none"/>
+          </a:ln>
+        </p:spPr>
+        <p:txBody>
+          <a:bodyPr anchorCtr="0" anchor="t" bIns="91425" lIns="91425" spcFirstLastPara="1" rIns="91425" wrap="square" tIns="91425">
+            <a:spAutoFit/>
+          </a:bodyPr>
+          <a:lstStyle/>
+          <a:p>
+            <a:pPr indent="0" lvl="0" marL="0" rtl="0" algn="l">
+              <a:spcBef>
+                <a:spcPts val="0"/>
+              </a:spcBef>
+              <a:spcAft>
+                <a:spcPts val="0"/>
+              </a:spcAft>
+              <a:buNone/>
+            </a:pPr>
+            <a:r>
+              <a:rPr i="1" lang="en" sz="2000"/>
+              <a:t>суммирование посредством редукции</a:t>
+            </a:r>
+            <a:endParaRPr i="1" sz="2000"/>
+          </a:p>
+        </p:txBody>
+      </p:sp>
+    </p:spTree>
+  </p:cSld>
+  <p:clrMapOvr>
+    <a:masterClrMapping/>
+  </p:clrMapOvr>
+</p:sld>
+</file>
+
+<file path=ppt/slides/slide26.xml><?xml version="1.0" encoding="utf-8"?>
+<p:sld xmlns:a="http://schemas.openxmlformats.org/drawingml/2006/main" xmlns:r="http://schemas.openxmlformats.org/officeDocument/2006/relationships" xmlns:mc="http://schemas.openxmlformats.org/markup-compatibility/2006" xmlns:mv="urn:schemas-microsoft-com:mac:vml" xmlns:p="http://schemas.openxmlformats.org/presentationml/2006/main" xmlns:c="http://schemas.openxmlformats.org/drawingml/2006/chart" xmlns:dgm="http://schemas.openxmlformats.org/drawingml/2006/diagram" xmlns:o="urn:schemas-microsoft-com:office:office" xmlns:v="urn:schemas-microsoft-com:vml" xmlns:pvml="urn:schemas-microsoft-com:office:powerpoint" xmlns:com="http://schemas.openxmlformats.org/drawingml/2006/compatibility" xmlns:p14="http://schemas.microsoft.com/office/powerpoint/2010/main" xmlns:p15="http://schemas.microsoft.com/office/powerpoint/2012/main" xmlns:ahyp="http://schemas.microsoft.com/office/drawing/2018/hyperlinkcolor">
+  <p:cSld>
+    <p:spTree>
+      <p:nvGrpSpPr>
+        <p:cNvPr id="212" name="Shape 212"/>
+        <p:cNvGrpSpPr/>
+        <p:nvPr/>
+      </p:nvGrpSpPr>
+      <p:grpSpPr>
+        <a:xfrm>
+          <a:off x="0" y="0"/>
+          <a:ext cx="0" cy="0"/>
+          <a:chOff x="0" y="0"/>
+          <a:chExt cx="0" cy="0"/>
+        </a:xfrm>
+      </p:grpSpPr>
+      <p:sp>
+        <p:nvSpPr>
+          <p:cNvPr id="213" name="Google Shape;213;p40"/>
+          <p:cNvSpPr txBox="1"/>
+          <p:nvPr/>
+        </p:nvSpPr>
+        <p:spPr>
+          <a:xfrm>
+            <a:off x="197250" y="337100"/>
+            <a:ext cx="8749500" cy="1108200"/>
+          </a:xfrm>
+          <a:prstGeom prst="rect">
+            <a:avLst/>
+          </a:prstGeom>
+          <a:solidFill>
+            <a:srgbClr val="C9DAF8"/>
+          </a:solidFill>
+          <a:ln>
+            <a:noFill/>
+          </a:ln>
+        </p:spPr>
+        <p:txBody>
+          <a:bodyPr anchorCtr="0" anchor="t" bIns="91425" lIns="91425" spcFirstLastPara="1" rIns="91425" wrap="square" tIns="91425">
+            <a:spAutoFit/>
+          </a:bodyPr>
+          <a:lstStyle/>
+          <a:p>
+            <a:pPr indent="0" lvl="0" marL="0" rtl="0" algn="l">
+              <a:spcBef>
+                <a:spcPts val="0"/>
+              </a:spcBef>
+              <a:spcAft>
+                <a:spcPts val="0"/>
+              </a:spcAft>
+              <a:buNone/>
+            </a:pPr>
+            <a:r>
+              <a:rPr b="1" lang="en" sz="2000"/>
+              <a:t>Шаг 6: </a:t>
+            </a:r>
+            <a:r>
+              <a:rPr lang="en" sz="2000"/>
+              <a:t>реализовать функцию, выполняющую три-линейную интерполяцию и реализовать ядро, заменив текстурную ссылку вызовом этой функции</a:t>
+            </a:r>
+            <a:r>
+              <a:rPr lang="en" sz="2000"/>
+              <a:t>. </a:t>
+            </a:r>
+            <a:endParaRPr sz="2000"/>
+          </a:p>
+        </p:txBody>
+      </p:sp>
+    </p:spTree>
+  </p:cSld>
+  <p:clrMapOvr>
+    <a:masterClrMapping/>
+  </p:clrMapOvr>
+</p:sld>
+</file>
+
+<file path=ppt/slides/slide27.xml><?xml version="1.0" encoding="utf-8"?>
+<p:sld xmlns:a="http://schemas.openxmlformats.org/drawingml/2006/main" xmlns:r="http://schemas.openxmlformats.org/officeDocument/2006/relationships" xmlns:mc="http://schemas.openxmlformats.org/markup-compatibility/2006" xmlns:mv="urn:schemas-microsoft-com:mac:vml" xmlns:p="http://schemas.openxmlformats.org/presentationml/2006/main" xmlns:c="http://schemas.openxmlformats.org/drawingml/2006/chart" xmlns:dgm="http://schemas.openxmlformats.org/drawingml/2006/diagram" xmlns:o="urn:schemas-microsoft-com:office:office" xmlns:v="urn:schemas-microsoft-com:vml" xmlns:pvml="urn:schemas-microsoft-com:office:powerpoint" xmlns:com="http://schemas.openxmlformats.org/drawingml/2006/compatibility" xmlns:p14="http://schemas.microsoft.com/office/powerpoint/2010/main" xmlns:p15="http://schemas.microsoft.com/office/powerpoint/2012/main" xmlns:ahyp="http://schemas.microsoft.com/office/drawing/2018/hyperlinkcolor">
+  <p:cSld>
+    <p:spTree>
+      <p:nvGrpSpPr>
+        <p:cNvPr id="217" name="Shape 217"/>
+        <p:cNvGrpSpPr/>
+        <p:nvPr/>
+      </p:nvGrpSpPr>
+      <p:grpSpPr>
+        <a:xfrm>
+          <a:off x="0" y="0"/>
+          <a:ext cx="0" cy="0"/>
+          <a:chOff x="0" y="0"/>
+          <a:chExt cx="0" cy="0"/>
+        </a:xfrm>
+      </p:grpSpPr>
+      <p:sp>
+        <p:nvSpPr>
+          <p:cNvPr id="218" name="Google Shape;218;p41"/>
+          <p:cNvSpPr txBox="1"/>
+          <p:nvPr/>
+        </p:nvSpPr>
+        <p:spPr>
+          <a:xfrm>
             <a:off x="223675" y="1289875"/>
             <a:ext cx="8617800" cy="1416000"/>
           </a:xfrm>
@@ -13635,7 +14763,7 @@
       </p:sp>
       <p:sp>
         <p:nvSpPr>
-          <p:cNvPr id="197" name="Google Shape;197;p37"/>
+          <p:cNvPr id="219" name="Google Shape;219;p41"/>
           <p:cNvSpPr txBox="1"/>
           <p:nvPr/>
         </p:nvSpPr>
@@ -13693,12 +14821,12 @@
 </p:sld>
 </file>
 
-<file path=ppt/slides/slide24.xml><?xml version="1.0" encoding="utf-8"?>
+<file path=ppt/slides/slide28.xml><?xml version="1.0" encoding="utf-8"?>
 <p:sld xmlns:a="http://schemas.openxmlformats.org/drawingml/2006/main" xmlns:r="http://schemas.openxmlformats.org/officeDocument/2006/relationships" xmlns:mc="http://schemas.openxmlformats.org/markup-compatibility/2006" xmlns:mv="urn:schemas-microsoft-com:mac:vml" xmlns:p="http://schemas.openxmlformats.org/presentationml/2006/main" xmlns:c="http://schemas.openxmlformats.org/drawingml/2006/chart" xmlns:dgm="http://schemas.openxmlformats.org/drawingml/2006/diagram" xmlns:o="urn:schemas-microsoft-com:office:office" xmlns:v="urn:schemas-microsoft-com:vml" xmlns:pvml="urn:schemas-microsoft-com:office:powerpoint" xmlns:com="http://schemas.openxmlformats.org/drawingml/2006/compatibility" xmlns:p14="http://schemas.microsoft.com/office/powerpoint/2010/main" xmlns:p15="http://schemas.microsoft.com/office/powerpoint/2012/main" xmlns:ahyp="http://schemas.microsoft.com/office/drawing/2018/hyperlinkcolor">
   <p:cSld>
     <p:spTree>
       <p:nvGrpSpPr>
-        <p:cNvPr id="201" name="Shape 201"/>
+        <p:cNvPr id="223" name="Shape 223"/>
         <p:cNvGrpSpPr/>
         <p:nvPr/>
       </p:nvGrpSpPr>
@@ -13712,7 +14840,7 @@
       </p:grpSpPr>
       <p:sp>
         <p:nvSpPr>
-          <p:cNvPr id="202" name="Google Shape;202;p38"/>
+          <p:cNvPr id="224" name="Google Shape;224;p42"/>
           <p:cNvSpPr txBox="1"/>
           <p:nvPr/>
         </p:nvSpPr>
@@ -13775,108 +14903,7 @@
   <p:cSld>
     <p:spTree>
       <p:nvGrpSpPr>
-        <p:cNvPr id="75" name="Shape 75"/>
-        <p:cNvGrpSpPr/>
-        <p:nvPr/>
-      </p:nvGrpSpPr>
-      <p:grpSpPr>
-        <a:xfrm>
-          <a:off x="0" y="0"/>
-          <a:ext cx="0" cy="0"/>
-          <a:chOff x="0" y="0"/>
-          <a:chExt cx="0" cy="0"/>
-        </a:xfrm>
-      </p:grpSpPr>
-      <p:pic>
-        <p:nvPicPr>
-          <p:cNvPr id="76" name="Google Shape;76;p17"/>
-          <p:cNvPicPr preferRelativeResize="0"/>
-          <p:nvPr/>
-        </p:nvPicPr>
-        <p:blipFill>
-          <a:blip r:embed="rId3">
-            <a:alphaModFix/>
-          </a:blip>
-          <a:stretch>
-            <a:fillRect/>
-          </a:stretch>
-        </p:blipFill>
-        <p:spPr>
-          <a:xfrm>
-            <a:off x="1524000" y="685800"/>
-            <a:ext cx="5889082" cy="4305995"/>
-          </a:xfrm>
-          <a:prstGeom prst="rect">
-            <a:avLst/>
-          </a:prstGeom>
-          <a:noFill/>
-          <a:ln>
-            <a:noFill/>
-          </a:ln>
-        </p:spPr>
-      </p:pic>
-      <p:sp>
-        <p:nvSpPr>
-          <p:cNvPr id="77" name="Google Shape;77;p17"/>
-          <p:cNvSpPr txBox="1"/>
-          <p:nvPr/>
-        </p:nvSpPr>
-        <p:spPr>
-          <a:xfrm>
-            <a:off x="51375" y="143200"/>
-            <a:ext cx="9030900" cy="413400"/>
-          </a:xfrm>
-          <a:prstGeom prst="rect">
-            <a:avLst/>
-          </a:prstGeom>
-          <a:noFill/>
-          <a:ln cap="flat" cmpd="sng" w="9525">
-            <a:solidFill>
-              <a:schemeClr val="dk1"/>
-            </a:solidFill>
-            <a:prstDash val="solid"/>
-            <a:round/>
-            <a:headEnd len="sm" w="sm" type="none"/>
-            <a:tailEnd len="sm" w="sm" type="none"/>
-          </a:ln>
-        </p:spPr>
-        <p:txBody>
-          <a:bodyPr anchorCtr="0" anchor="t" bIns="91425" lIns="91425" spcFirstLastPara="1" rIns="91425" wrap="square" tIns="91425">
-            <a:noAutofit/>
-          </a:bodyPr>
-          <a:lstStyle/>
-          <a:p>
-            <a:pPr indent="0" lvl="0" marL="0" rtl="0" algn="l">
-              <a:spcBef>
-                <a:spcPts val="0"/>
-              </a:spcBef>
-              <a:spcAft>
-                <a:spcPts val="0"/>
-              </a:spcAft>
-              <a:buNone/>
-            </a:pPr>
-            <a:r>
-              <a:rPr i="1" lang="en" sz="1600"/>
-              <a:t>https://www.researchgate.net/figure/Memory-Hierarchy-in-the-NVIDIA-GPUs_fig2_228345757</a:t>
-            </a:r>
-            <a:endParaRPr i="1" sz="1600"/>
-          </a:p>
-        </p:txBody>
-      </p:sp>
-    </p:spTree>
-  </p:cSld>
-  <p:clrMapOvr>
-    <a:masterClrMapping/>
-  </p:clrMapOvr>
-</p:sld>
-</file>
-
-<file path=ppt/slides/slide4.xml><?xml version="1.0" encoding="utf-8"?>
-<p:sld xmlns:a="http://schemas.openxmlformats.org/drawingml/2006/main" xmlns:r="http://schemas.openxmlformats.org/officeDocument/2006/relationships" xmlns:mc="http://schemas.openxmlformats.org/markup-compatibility/2006" xmlns:mv="urn:schemas-microsoft-com:mac:vml" xmlns:p="http://schemas.openxmlformats.org/presentationml/2006/main" xmlns:c="http://schemas.openxmlformats.org/drawingml/2006/chart" xmlns:dgm="http://schemas.openxmlformats.org/drawingml/2006/diagram" xmlns:o="urn:schemas-microsoft-com:office:office" xmlns:v="urn:schemas-microsoft-com:vml" xmlns:pvml="urn:schemas-microsoft-com:office:powerpoint" xmlns:com="http://schemas.openxmlformats.org/drawingml/2006/compatibility" xmlns:p14="http://schemas.microsoft.com/office/powerpoint/2010/main" xmlns:p15="http://schemas.microsoft.com/office/powerpoint/2012/main" xmlns:ahyp="http://schemas.microsoft.com/office/drawing/2018/hyperlinkcolor">
-  <p:cSld>
-    <p:spTree>
-      <p:nvGrpSpPr>
-        <p:cNvPr id="81" name="Shape 81"/>
+        <p:cNvPr id="76" name="Shape 76"/>
         <p:cNvGrpSpPr/>
         <p:nvPr/>
       </p:nvGrpSpPr>
@@ -13890,7 +14917,7 @@
       </p:grpSpPr>
       <p:sp>
         <p:nvSpPr>
-          <p:cNvPr id="82" name="Google Shape;82;p18"/>
+          <p:cNvPr id="77" name="Google Shape;77;p17"/>
           <p:cNvSpPr txBox="1"/>
           <p:nvPr/>
         </p:nvSpPr>
@@ -14245,7 +15272,7 @@
       </p:sp>
       <p:sp>
         <p:nvSpPr>
-          <p:cNvPr id="83" name="Google Shape;83;p18"/>
+          <p:cNvPr id="78" name="Google Shape;78;p17"/>
           <p:cNvSpPr txBox="1"/>
           <p:nvPr/>
         </p:nvSpPr>
@@ -14290,6 +15317,307 @@
               <a:t>test_mem.cu</a:t>
             </a:r>
             <a:endParaRPr b="1" i="1" sz="2000"/>
+          </a:p>
+        </p:txBody>
+      </p:sp>
+    </p:spTree>
+  </p:cSld>
+  <p:clrMapOvr>
+    <a:masterClrMapping/>
+  </p:clrMapOvr>
+</p:sld>
+</file>
+
+<file path=ppt/slides/slide4.xml><?xml version="1.0" encoding="utf-8"?>
+<p:sld xmlns:a="http://schemas.openxmlformats.org/drawingml/2006/main" xmlns:r="http://schemas.openxmlformats.org/officeDocument/2006/relationships" xmlns:mc="http://schemas.openxmlformats.org/markup-compatibility/2006" xmlns:mv="urn:schemas-microsoft-com:mac:vml" xmlns:p="http://schemas.openxmlformats.org/presentationml/2006/main" xmlns:c="http://schemas.openxmlformats.org/drawingml/2006/chart" xmlns:dgm="http://schemas.openxmlformats.org/drawingml/2006/diagram" xmlns:o="urn:schemas-microsoft-com:office:office" xmlns:v="urn:schemas-microsoft-com:vml" xmlns:pvml="urn:schemas-microsoft-com:office:powerpoint" xmlns:com="http://schemas.openxmlformats.org/drawingml/2006/compatibility" xmlns:p14="http://schemas.microsoft.com/office/powerpoint/2010/main" xmlns:p15="http://schemas.microsoft.com/office/powerpoint/2012/main" xmlns:ahyp="http://schemas.microsoft.com/office/drawing/2018/hyperlinkcolor">
+  <p:cSld>
+    <p:spTree>
+      <p:nvGrpSpPr>
+        <p:cNvPr id="82" name="Shape 82"/>
+        <p:cNvGrpSpPr/>
+        <p:nvPr/>
+      </p:nvGrpSpPr>
+      <p:grpSpPr>
+        <a:xfrm>
+          <a:off x="0" y="0"/>
+          <a:ext cx="0" cy="0"/>
+          <a:chOff x="0" y="0"/>
+          <a:chExt cx="0" cy="0"/>
+        </a:xfrm>
+      </p:grpSpPr>
+      <p:sp>
+        <p:nvSpPr>
+          <p:cNvPr id="83" name="Google Shape;83;p18"/>
+          <p:cNvSpPr txBox="1"/>
+          <p:nvPr/>
+        </p:nvSpPr>
+        <p:spPr>
+          <a:xfrm>
+            <a:off x="100850" y="788675"/>
+            <a:ext cx="8895300" cy="3792000"/>
+          </a:xfrm>
+          <a:prstGeom prst="rect">
+            <a:avLst/>
+          </a:prstGeom>
+          <a:solidFill>
+            <a:srgbClr val="D0E0E3"/>
+          </a:solidFill>
+          <a:ln cap="flat" cmpd="sng" w="9525">
+            <a:solidFill>
+              <a:schemeClr val="dk1"/>
+            </a:solidFill>
+            <a:prstDash val="solid"/>
+            <a:round/>
+            <a:headEnd len="sm" w="sm" type="none"/>
+            <a:tailEnd len="sm" w="sm" type="none"/>
+          </a:ln>
+        </p:spPr>
+        <p:txBody>
+          <a:bodyPr anchorCtr="0" anchor="t" bIns="91425" lIns="91425" spcFirstLastPara="1" rIns="91425" wrap="square" tIns="91425">
+            <a:noAutofit/>
+          </a:bodyPr>
+          <a:lstStyle/>
+          <a:p>
+            <a:pPr indent="0" lvl="0" marL="0" rtl="0" algn="l">
+              <a:spcBef>
+                <a:spcPts val="0"/>
+              </a:spcBef>
+              <a:spcAft>
+                <a:spcPts val="0"/>
+              </a:spcAft>
+              <a:buClr>
+                <a:schemeClr val="dk1"/>
+              </a:buClr>
+              <a:buSzPts val="1100"/>
+              <a:buFont typeface="Arial"/>
+              <a:buNone/>
+            </a:pPr>
+            <a:r>
+              <a:rPr lang="en" sz="2000"/>
+              <a:t>void hInitC(){</a:t>
+            </a:r>
+            <a:endParaRPr sz="2000"/>
+          </a:p>
+          <a:p>
+            <a:pPr indent="0" lvl="0" marL="0" rtl="0" algn="l">
+              <a:spcBef>
+                <a:spcPts val="0"/>
+              </a:spcBef>
+              <a:spcAft>
+                <a:spcPts val="0"/>
+              </a:spcAft>
+              <a:buClr>
+                <a:schemeClr val="dk1"/>
+              </a:buClr>
+              <a:buSzPts val="1100"/>
+              <a:buFont typeface="Arial"/>
+              <a:buNone/>
+            </a:pPr>
+            <a:r>
+              <a:rPr lang="en" sz="2000"/>
+              <a:t>    int N=ARRAY_SIZE/THREADS_PER_BLOCK;</a:t>
+            </a:r>
+            <a:endParaRPr sz="2000"/>
+          </a:p>
+          <a:p>
+            <a:pPr indent="0" lvl="0" marL="0" rtl="0" algn="l">
+              <a:spcBef>
+                <a:spcPts val="0"/>
+              </a:spcBef>
+              <a:spcAft>
+                <a:spcPts val="0"/>
+              </a:spcAft>
+              <a:buClr>
+                <a:schemeClr val="dk1"/>
+              </a:buClr>
+              <a:buSzPts val="1100"/>
+              <a:buFont typeface="Arial"/>
+              <a:buNone/>
+            </a:pPr>
+            <a:r>
+              <a:rPr lang="en" sz="2000"/>
+              <a:t>    float* hC=(float*)calloc(N, sizeof(float));</a:t>
+            </a:r>
+            <a:endParaRPr sz="2000"/>
+          </a:p>
+          <a:p>
+            <a:pPr indent="0" lvl="0" marL="0" rtl="0" algn="l">
+              <a:spcBef>
+                <a:spcPts val="0"/>
+              </a:spcBef>
+              <a:spcAft>
+                <a:spcPts val="0"/>
+              </a:spcAft>
+              <a:buClr>
+                <a:schemeClr val="dk1"/>
+              </a:buClr>
+              <a:buSzPts val="1100"/>
+              <a:buFont typeface="Arial"/>
+              <a:buNone/>
+            </a:pPr>
+            <a:r>
+              <a:rPr lang="en" sz="2000"/>
+              <a:t>    for(int n=0;n&lt;N;n++)</a:t>
+            </a:r>
+            <a:endParaRPr sz="2000"/>
+          </a:p>
+          <a:p>
+            <a:pPr indent="0" lvl="0" marL="0" rtl="0" algn="l">
+              <a:spcBef>
+                <a:spcPts val="0"/>
+              </a:spcBef>
+              <a:spcAft>
+                <a:spcPts val="0"/>
+              </a:spcAft>
+              <a:buClr>
+                <a:schemeClr val="dk1"/>
+              </a:buClr>
+              <a:buSzPts val="1100"/>
+              <a:buFont typeface="Arial"/>
+              <a:buNone/>
+            </a:pPr>
+            <a:r>
+              <a:rPr lang="en" sz="2000"/>
+              <a:t>        hC[n]=(float)n;</a:t>
+            </a:r>
+            <a:endParaRPr sz="2000"/>
+          </a:p>
+          <a:p>
+            <a:pPr indent="0" lvl="0" marL="0" rtl="0" algn="l">
+              <a:spcBef>
+                <a:spcPts val="0"/>
+              </a:spcBef>
+              <a:spcAft>
+                <a:spcPts val="0"/>
+              </a:spcAft>
+              <a:buNone/>
+            </a:pPr>
+            <a:r>
+              <a:t/>
+            </a:r>
+            <a:endParaRPr sz="2000"/>
+          </a:p>
+          <a:p>
+            <a:pPr indent="0" lvl="0" marL="0" rtl="0" algn="l">
+              <a:spcBef>
+                <a:spcPts val="0"/>
+              </a:spcBef>
+              <a:spcAft>
+                <a:spcPts val="0"/>
+              </a:spcAft>
+              <a:buNone/>
+            </a:pPr>
+            <a:r>
+              <a:rPr lang="en" sz="2000"/>
+              <a:t>    </a:t>
+            </a:r>
+            <a:r>
+              <a:rPr b="1" lang="en" sz="2000"/>
+              <a:t>cudaMemcpyToSymbol</a:t>
+            </a:r>
+            <a:r>
+              <a:rPr lang="en" sz="2000"/>
+              <a:t>(C, hC, N*sizeof(float), 0,</a:t>
+            </a:r>
+            <a:endParaRPr sz="2000"/>
+          </a:p>
+          <a:p>
+            <a:pPr indent="457200" lvl="0" marL="4572000" rtl="0" algn="l">
+              <a:spcBef>
+                <a:spcPts val="0"/>
+              </a:spcBef>
+              <a:spcAft>
+                <a:spcPts val="0"/>
+              </a:spcAft>
+              <a:buClr>
+                <a:schemeClr val="dk1"/>
+              </a:buClr>
+              <a:buSzPts val="1100"/>
+              <a:buFont typeface="Arial"/>
+              <a:buNone/>
+            </a:pPr>
+            <a:r>
+              <a:rPr lang="en" sz="2000"/>
+              <a:t>    cudaMemcpyHostToDevice);</a:t>
+            </a:r>
+            <a:endParaRPr sz="2000"/>
+          </a:p>
+          <a:p>
+            <a:pPr indent="0" lvl="0" marL="0" rtl="0" algn="l">
+              <a:spcBef>
+                <a:spcPts val="0"/>
+              </a:spcBef>
+              <a:spcAft>
+                <a:spcPts val="0"/>
+              </a:spcAft>
+              <a:buClr>
+                <a:schemeClr val="dk1"/>
+              </a:buClr>
+              <a:buSzPts val="1100"/>
+              <a:buFont typeface="Arial"/>
+              <a:buNone/>
+            </a:pPr>
+            <a:r>
+              <a:t/>
+            </a:r>
+            <a:endParaRPr sz="2000"/>
+          </a:p>
+          <a:p>
+            <a:pPr indent="0" lvl="0" marL="0" rtl="0" algn="l">
+              <a:spcBef>
+                <a:spcPts val="0"/>
+              </a:spcBef>
+              <a:spcAft>
+                <a:spcPts val="0"/>
+              </a:spcAft>
+              <a:buClr>
+                <a:schemeClr val="dk1"/>
+              </a:buClr>
+              <a:buSzPts val="1100"/>
+              <a:buFont typeface="Arial"/>
+              <a:buNone/>
+            </a:pPr>
+            <a:r>
+              <a:rPr lang="en" sz="2000"/>
+              <a:t>    free(hC);</a:t>
+            </a:r>
+            <a:endParaRPr sz="2000"/>
+          </a:p>
+          <a:p>
+            <a:pPr indent="0" lvl="0" marL="0" rtl="0" algn="l">
+              <a:spcBef>
+                <a:spcPts val="0"/>
+              </a:spcBef>
+              <a:spcAft>
+                <a:spcPts val="0"/>
+              </a:spcAft>
+              <a:buClr>
+                <a:schemeClr val="dk1"/>
+              </a:buClr>
+              <a:buSzPts val="1100"/>
+              <a:buFont typeface="Arial"/>
+              <a:buNone/>
+            </a:pPr>
+            <a:r>
+              <a:rPr lang="en" sz="2000"/>
+              <a:t>}</a:t>
+            </a:r>
+            <a:endParaRPr sz="2000"/>
+          </a:p>
+          <a:p>
+            <a:pPr indent="0" lvl="0" marL="0" rtl="0" algn="l">
+              <a:spcBef>
+                <a:spcPts val="0"/>
+              </a:spcBef>
+              <a:spcAft>
+                <a:spcPts val="0"/>
+              </a:spcAft>
+              <a:buNone/>
+            </a:pPr>
+            <a:r>
+              <a:t/>
+            </a:r>
+            <a:endParaRPr sz="1800"/>
           </a:p>
         </p:txBody>
       </p:sp>
@@ -14326,8 +15654,8 @@
         </p:nvSpPr>
         <p:spPr>
           <a:xfrm>
-            <a:off x="100850" y="788675"/>
-            <a:ext cx="8895300" cy="3792000"/>
+            <a:off x="121025" y="808850"/>
+            <a:ext cx="8915400" cy="2884500"/>
           </a:xfrm>
           <a:prstGeom prst="rect">
             <a:avLst/>
@@ -14366,10 +15694,10 @@
               <a:buNone/>
             </a:pPr>
             <a:r>
-              <a:rPr lang="en" sz="2000"/>
-              <a:t>void hInitC(){</a:t>
-            </a:r>
-            <a:endParaRPr sz="2000"/>
+              <a:rPr lang="en" sz="1800"/>
+              <a:t>__global__ void gTestB(){</a:t>
+            </a:r>
+            <a:endParaRPr sz="1800"/>
           </a:p>
           <a:p>
             <a:pPr indent="0" lvl="0" marL="0" rtl="0" algn="l">
@@ -14387,10 +15715,10 @@
               <a:buNone/>
             </a:pPr>
             <a:r>
-              <a:rPr lang="en" sz="2000"/>
-              <a:t>    int N=ARRAY_SIZE/THREADS_PER_BLOCK;</a:t>
-            </a:r>
-            <a:endParaRPr sz="2000"/>
+              <a:rPr lang="en" sz="1800"/>
+              <a:t>    int i= threadIdx.x+blockIdx.x*blockDim.x;</a:t>
+            </a:r>
+            <a:endParaRPr sz="1800"/>
           </a:p>
           <a:p>
             <a:pPr indent="0" lvl="0" marL="0" rtl="0" algn="l">
@@ -14408,10 +15736,18 @@
               <a:buNone/>
             </a:pPr>
             <a:r>
-              <a:rPr lang="en" sz="2000"/>
-              <a:t>    float* hC=(float*)calloc(N, sizeof(float));</a:t>
-            </a:r>
-            <a:endParaRPr sz="2000"/>
+              <a:rPr lang="en" sz="1800"/>
+              <a:t>    A[i]=A[i]*(</a:t>
+            </a:r>
+            <a:r>
+              <a:rPr b="1" lang="en" sz="1800"/>
+              <a:t>B</a:t>
+            </a:r>
+            <a:r>
+              <a:rPr lang="en" sz="1800"/>
+              <a:t>[blockIdx.x]+1);</a:t>
+            </a:r>
+            <a:endParaRPr sz="1800"/>
           </a:p>
           <a:p>
             <a:pPr indent="0" lvl="0" marL="0" rtl="0" algn="l">
@@ -14429,10 +15765,10 @@
               <a:buNone/>
             </a:pPr>
             <a:r>
-              <a:rPr lang="en" sz="2000"/>
-              <a:t>    for(int n=0;n&lt;N;n++)</a:t>
-            </a:r>
-            <a:endParaRPr sz="2000"/>
+              <a:rPr lang="en" sz="1800"/>
+              <a:t>}</a:t>
+            </a:r>
+            <a:endParaRPr sz="1800"/>
           </a:p>
           <a:p>
             <a:pPr indent="0" lvl="0" marL="0" rtl="0" algn="l">
@@ -14450,52 +15786,12 @@
               <a:buNone/>
             </a:pPr>
             <a:r>
-              <a:rPr lang="en" sz="2000"/>
-              <a:t>        hC[n]=(float)n;</a:t>
-            </a:r>
-            <a:endParaRPr sz="2000"/>
-          </a:p>
-          <a:p>
-            <a:pPr indent="0" lvl="0" marL="0" rtl="0" algn="l">
-              <a:spcBef>
-                <a:spcPts val="0"/>
-              </a:spcBef>
-              <a:spcAft>
-                <a:spcPts val="0"/>
-              </a:spcAft>
-              <a:buNone/>
-            </a:pPr>
-            <a:r>
               <a:t/>
             </a:r>
-            <a:endParaRPr sz="2000"/>
-          </a:p>
-          <a:p>
-            <a:pPr indent="0" lvl="0" marL="0" rtl="0" algn="l">
-              <a:spcBef>
-                <a:spcPts val="0"/>
-              </a:spcBef>
-              <a:spcAft>
-                <a:spcPts val="0"/>
-              </a:spcAft>
-              <a:buNone/>
-            </a:pPr>
-            <a:r>
-              <a:rPr lang="en" sz="2000"/>
-              <a:t>    </a:t>
-            </a:r>
-            <a:r>
-              <a:rPr b="1" lang="en" sz="2000"/>
-              <a:t>cudaMemcpyToSymbol</a:t>
-            </a:r>
-            <a:r>
-              <a:rPr lang="en" sz="2000"/>
-              <a:t>(C, hC, N*sizeof(float), 0,</a:t>
-            </a:r>
-            <a:endParaRPr sz="2000"/>
-          </a:p>
-          <a:p>
-            <a:pPr indent="457200" lvl="0" marL="4572000" rtl="0" algn="l">
+            <a:endParaRPr sz="1800"/>
+          </a:p>
+          <a:p>
+            <a:pPr indent="0" lvl="0" marL="0" rtl="0" algn="l">
               <a:spcBef>
                 <a:spcPts val="0"/>
               </a:spcBef>
@@ -14510,10 +15806,10 @@
               <a:buNone/>
             </a:pPr>
             <a:r>
-              <a:rPr lang="en" sz="2000"/>
-              <a:t>    cudaMemcpyHostToDevice);</a:t>
-            </a:r>
-            <a:endParaRPr sz="2000"/>
+              <a:rPr lang="en" sz="1800"/>
+              <a:t>__global__ void gTestC(){</a:t>
+            </a:r>
+            <a:endParaRPr sz="1800"/>
           </a:p>
           <a:p>
             <a:pPr indent="0" lvl="0" marL="0" rtl="0" algn="l">
@@ -14531,9 +15827,10 @@
               <a:buNone/>
             </a:pPr>
             <a:r>
-              <a:t/>
-            </a:r>
-            <a:endParaRPr sz="2000"/>
+              <a:rPr lang="en" sz="1800"/>
+              <a:t>    int i= threadIdx.x+blockIdx.x*blockDim.x;</a:t>
+            </a:r>
+            <a:endParaRPr sz="1800"/>
           </a:p>
           <a:p>
             <a:pPr indent="0" lvl="0" marL="0" rtl="0" algn="l">
@@ -14551,10 +15848,18 @@
               <a:buNone/>
             </a:pPr>
             <a:r>
-              <a:rPr lang="en" sz="2000"/>
-              <a:t>    free(hC);</a:t>
-            </a:r>
-            <a:endParaRPr sz="2000"/>
+              <a:rPr lang="en" sz="1800"/>
+              <a:t>    A[i]=A[i]*(</a:t>
+            </a:r>
+            <a:r>
+              <a:rPr b="1" lang="en" sz="1800"/>
+              <a:t>C</a:t>
+            </a:r>
+            <a:r>
+              <a:rPr lang="en" sz="1800"/>
+              <a:t>[blockIdx.x]+1);</a:t>
+            </a:r>
+            <a:endParaRPr sz="1800"/>
           </a:p>
           <a:p>
             <a:pPr indent="0" lvl="0" marL="0" rtl="0" algn="l">
@@ -14572,10 +15877,30 @@
               <a:buNone/>
             </a:pPr>
             <a:r>
-              <a:rPr lang="en" sz="2000"/>
+              <a:rPr lang="en" sz="1800"/>
               <a:t>}</a:t>
             </a:r>
-            <a:endParaRPr sz="2000"/>
+            <a:endParaRPr sz="1800"/>
+          </a:p>
+          <a:p>
+            <a:pPr indent="0" lvl="0" marL="0" rtl="0" algn="l">
+              <a:spcBef>
+                <a:spcPts val="0"/>
+              </a:spcBef>
+              <a:spcAft>
+                <a:spcPts val="0"/>
+              </a:spcAft>
+              <a:buClr>
+                <a:schemeClr val="dk1"/>
+              </a:buClr>
+              <a:buSzPts val="1100"/>
+              <a:buFont typeface="Arial"/>
+              <a:buNone/>
+            </a:pPr>
+            <a:r>
+              <a:t/>
+            </a:r>
+            <a:endParaRPr sz="1800"/>
           </a:p>
           <a:p>
             <a:pPr indent="0" lvl="0" marL="0" rtl="0" algn="l">
@@ -14627,8 +15952,8 @@
         </p:nvSpPr>
         <p:spPr>
           <a:xfrm>
-            <a:off x="121025" y="808850"/>
-            <a:ext cx="8915400" cy="2884500"/>
+            <a:off x="60500" y="62525"/>
+            <a:ext cx="8996100" cy="4871100"/>
           </a:xfrm>
           <a:prstGeom prst="rect">
             <a:avLst/>
@@ -14668,7 +15993,7 @@
             </a:pPr>
             <a:r>
               <a:rPr lang="en" sz="1800"/>
-              <a:t>__global__ void gTestB(){</a:t>
+              <a:t>int main(){</a:t>
             </a:r>
             <a:endParaRPr sz="1800"/>
           </a:p>
@@ -14689,7 +16014,7 @@
             </a:pPr>
             <a:r>
               <a:rPr lang="en" sz="1800"/>
-              <a:t>    int i= threadIdx.x+blockIdx.x*blockDim.x;</a:t>
+              <a:t>  gInit&lt;&lt;&lt;ARRAY_SIZE/THREADS_PER_BLOCK, THREADS_PER_BLOCK&gt;&gt;&gt;();</a:t>
             </a:r>
             <a:endParaRPr sz="1800"/>
           </a:p>
@@ -14710,15 +16035,7 @@
             </a:pPr>
             <a:r>
               <a:rPr lang="en" sz="1800"/>
-              <a:t>    A[i]=A[i]*(</a:t>
-            </a:r>
-            <a:r>
-              <a:rPr b="1" lang="en" sz="1800"/>
-              <a:t>B</a:t>
-            </a:r>
-            <a:r>
-              <a:rPr lang="en" sz="1800"/>
-              <a:t>[blockIdx.x]+1);</a:t>
+              <a:t>  cudaDeviceSynchronize();</a:t>
             </a:r>
             <a:endParaRPr sz="1800"/>
           </a:p>
@@ -14738,8 +16055,7 @@
               <a:buNone/>
             </a:pPr>
             <a:r>
-              <a:rPr lang="en" sz="1800"/>
-              <a:t>}</a:t>
+              <a:t/>
             </a:r>
             <a:endParaRPr sz="1800"/>
           </a:p>
@@ -14759,7 +16075,8 @@
               <a:buNone/>
             </a:pPr>
             <a:r>
-              <a:t/>
+              <a:rPr lang="en" sz="1800"/>
+              <a:t>  hInitC();</a:t>
             </a:r>
             <a:endParaRPr sz="1800"/>
           </a:p>
@@ -14779,8 +16096,7 @@
               <a:buNone/>
             </a:pPr>
             <a:r>
-              <a:rPr lang="en" sz="1800"/>
-              <a:t>__global__ void gTestC(){</a:t>
+              <a:t/>
             </a:r>
             <a:endParaRPr sz="1800"/>
           </a:p>
@@ -14801,7 +16117,7 @@
             </a:pPr>
             <a:r>
               <a:rPr lang="en" sz="1800"/>
-              <a:t>    int i= threadIdx.x+blockIdx.x*blockDim.x;</a:t>
+              <a:t>  gTestB&lt;&lt;&lt;ARRAY_SIZE/THREADS_PER_BLOCK, THREADS_PER_BLOCK&gt;&gt;&gt;();</a:t>
             </a:r>
             <a:endParaRPr sz="1800"/>
           </a:p>
@@ -14822,15 +16138,7 @@
             </a:pPr>
             <a:r>
               <a:rPr lang="en" sz="1800"/>
-              <a:t>    A[i]=A[i]*(</a:t>
-            </a:r>
-            <a:r>
-              <a:rPr b="1" lang="en" sz="1800"/>
-              <a:t>C</a:t>
-            </a:r>
-            <a:r>
-              <a:rPr lang="en" sz="1800"/>
-              <a:t>[blockIdx.x]+1);</a:t>
+              <a:t>  cudaDeviceSynchronize();</a:t>
             </a:r>
             <a:endParaRPr sz="1800"/>
           </a:p>
@@ -14850,8 +16158,7 @@
               <a:buNone/>
             </a:pPr>
             <a:r>
-              <a:rPr lang="en" sz="1800"/>
-              <a:t>}</a:t>
+              <a:t/>
             </a:r>
             <a:endParaRPr sz="1800"/>
           </a:p>
@@ -14871,7 +16178,153 @@
               <a:buNone/>
             </a:pPr>
             <a:r>
+              <a:rPr lang="en" sz="1800"/>
+              <a:t>  gTestC&lt;&lt;&lt;ARRAY_SIZE/THREADS_PER_BLOCK, THREADS_PER_BLOCK&gt;&gt;&gt;();</a:t>
+            </a:r>
+            <a:endParaRPr sz="1800"/>
+          </a:p>
+          <a:p>
+            <a:pPr indent="0" lvl="0" marL="0" rtl="0" algn="l">
+              <a:spcBef>
+                <a:spcPts val="0"/>
+              </a:spcBef>
+              <a:spcAft>
+                <a:spcPts val="0"/>
+              </a:spcAft>
+              <a:buClr>
+                <a:schemeClr val="dk1"/>
+              </a:buClr>
+              <a:buSzPts val="1100"/>
+              <a:buFont typeface="Arial"/>
+              <a:buNone/>
+            </a:pPr>
+            <a:r>
+              <a:rPr lang="en" sz="1800"/>
+              <a:t>  cudaDeviceSynchronize();</a:t>
+            </a:r>
+            <a:endParaRPr sz="1800"/>
+          </a:p>
+          <a:p>
+            <a:pPr indent="0" lvl="0" marL="0" rtl="0" algn="l">
+              <a:spcBef>
+                <a:spcPts val="0"/>
+              </a:spcBef>
+              <a:spcAft>
+                <a:spcPts val="0"/>
+              </a:spcAft>
+              <a:buClr>
+                <a:schemeClr val="dk1"/>
+              </a:buClr>
+              <a:buSzPts val="1100"/>
+              <a:buFont typeface="Arial"/>
+              <a:buNone/>
+            </a:pPr>
+            <a:r>
               <a:t/>
+            </a:r>
+            <a:endParaRPr sz="1800"/>
+          </a:p>
+          <a:p>
+            <a:pPr indent="0" lvl="0" marL="0" rtl="0" algn="l">
+              <a:spcBef>
+                <a:spcPts val="0"/>
+              </a:spcBef>
+              <a:spcAft>
+                <a:spcPts val="0"/>
+              </a:spcAft>
+              <a:buClr>
+                <a:schemeClr val="dk1"/>
+              </a:buClr>
+              <a:buSzPts val="1100"/>
+              <a:buFont typeface="Arial"/>
+              <a:buNone/>
+            </a:pPr>
+            <a:r>
+              <a:rPr lang="en" sz="1800"/>
+              <a:t>  gOut&lt;&lt;&lt;ARRAY_SIZE/THREADS_PER_BLOCK, THREADS_PER_BLOCK&gt;&gt;&gt;();</a:t>
+            </a:r>
+            <a:endParaRPr sz="1800"/>
+          </a:p>
+          <a:p>
+            <a:pPr indent="0" lvl="0" marL="0" rtl="0" algn="l">
+              <a:spcBef>
+                <a:spcPts val="0"/>
+              </a:spcBef>
+              <a:spcAft>
+                <a:spcPts val="0"/>
+              </a:spcAft>
+              <a:buClr>
+                <a:schemeClr val="dk1"/>
+              </a:buClr>
+              <a:buSzPts val="1100"/>
+              <a:buFont typeface="Arial"/>
+              <a:buNone/>
+            </a:pPr>
+            <a:r>
+              <a:rPr lang="en" sz="1800"/>
+              <a:t>  cudaDeviceSynchronize();</a:t>
+            </a:r>
+            <a:endParaRPr sz="1800"/>
+          </a:p>
+          <a:p>
+            <a:pPr indent="0" lvl="0" marL="0" rtl="0" algn="l">
+              <a:spcBef>
+                <a:spcPts val="0"/>
+              </a:spcBef>
+              <a:spcAft>
+                <a:spcPts val="0"/>
+              </a:spcAft>
+              <a:buClr>
+                <a:schemeClr val="dk1"/>
+              </a:buClr>
+              <a:buSzPts val="1100"/>
+              <a:buFont typeface="Arial"/>
+              <a:buNone/>
+            </a:pPr>
+            <a:r>
+              <a:t/>
+            </a:r>
+            <a:endParaRPr sz="1800"/>
+          </a:p>
+          <a:p>
+            <a:pPr indent="0" lvl="0" marL="0" rtl="0" algn="l">
+              <a:spcBef>
+                <a:spcPts val="0"/>
+              </a:spcBef>
+              <a:spcAft>
+                <a:spcPts val="0"/>
+              </a:spcAft>
+              <a:buClr>
+                <a:schemeClr val="dk1"/>
+              </a:buClr>
+              <a:buSzPts val="1100"/>
+              <a:buFont typeface="Arial"/>
+              <a:buNone/>
+            </a:pPr>
+            <a:r>
+              <a:rPr lang="en" sz="1800"/>
+              <a:t>  return 0;</a:t>
+            </a:r>
+            <a:endParaRPr sz="1800"/>
+          </a:p>
+          <a:p>
+            <a:pPr indent="0" lvl="0" marL="0" rtl="0" algn="l">
+              <a:spcBef>
+                <a:spcPts val="0"/>
+              </a:spcBef>
+              <a:spcAft>
+                <a:spcPts val="0"/>
+              </a:spcAft>
+              <a:buClr>
+                <a:schemeClr val="dk1"/>
+              </a:buClr>
+              <a:buSzPts val="1100"/>
+              <a:buFont typeface="Arial"/>
+              <a:buNone/>
+            </a:pPr>
+            <a:r>
+              <a:rPr lang="en" sz="1800"/>
+              <a:t>}</a:t>
             </a:r>
             <a:endParaRPr sz="1800"/>
           </a:p>
@@ -14925,432 +16378,6 @@
         </p:nvSpPr>
         <p:spPr>
           <a:xfrm>
-            <a:off x="60500" y="62525"/>
-            <a:ext cx="8996100" cy="4871100"/>
-          </a:xfrm>
-          <a:prstGeom prst="rect">
-            <a:avLst/>
-          </a:prstGeom>
-          <a:solidFill>
-            <a:srgbClr val="D0E0E3"/>
-          </a:solidFill>
-          <a:ln cap="flat" cmpd="sng" w="9525">
-            <a:solidFill>
-              <a:schemeClr val="dk1"/>
-            </a:solidFill>
-            <a:prstDash val="solid"/>
-            <a:round/>
-            <a:headEnd len="sm" w="sm" type="none"/>
-            <a:tailEnd len="sm" w="sm" type="none"/>
-          </a:ln>
-        </p:spPr>
-        <p:txBody>
-          <a:bodyPr anchorCtr="0" anchor="t" bIns="91425" lIns="91425" spcFirstLastPara="1" rIns="91425" wrap="square" tIns="91425">
-            <a:noAutofit/>
-          </a:bodyPr>
-          <a:lstStyle/>
-          <a:p>
-            <a:pPr indent="0" lvl="0" marL="0" rtl="0" algn="l">
-              <a:spcBef>
-                <a:spcPts val="0"/>
-              </a:spcBef>
-              <a:spcAft>
-                <a:spcPts val="0"/>
-              </a:spcAft>
-              <a:buClr>
-                <a:schemeClr val="dk1"/>
-              </a:buClr>
-              <a:buSzPts val="1100"/>
-              <a:buFont typeface="Arial"/>
-              <a:buNone/>
-            </a:pPr>
-            <a:r>
-              <a:rPr lang="en" sz="1800"/>
-              <a:t>int main(){</a:t>
-            </a:r>
-            <a:endParaRPr sz="1800"/>
-          </a:p>
-          <a:p>
-            <a:pPr indent="0" lvl="0" marL="0" rtl="0" algn="l">
-              <a:spcBef>
-                <a:spcPts val="0"/>
-              </a:spcBef>
-              <a:spcAft>
-                <a:spcPts val="0"/>
-              </a:spcAft>
-              <a:buClr>
-                <a:schemeClr val="dk1"/>
-              </a:buClr>
-              <a:buSzPts val="1100"/>
-              <a:buFont typeface="Arial"/>
-              <a:buNone/>
-            </a:pPr>
-            <a:r>
-              <a:rPr lang="en" sz="1800"/>
-              <a:t>  gInit&lt;&lt;&lt;ARRAY_SIZE/THREADS_PER_BLOCK, THREADS_PER_BLOCK&gt;&gt;&gt;();</a:t>
-            </a:r>
-            <a:endParaRPr sz="1800"/>
-          </a:p>
-          <a:p>
-            <a:pPr indent="0" lvl="0" marL="0" rtl="0" algn="l">
-              <a:spcBef>
-                <a:spcPts val="0"/>
-              </a:spcBef>
-              <a:spcAft>
-                <a:spcPts val="0"/>
-              </a:spcAft>
-              <a:buClr>
-                <a:schemeClr val="dk1"/>
-              </a:buClr>
-              <a:buSzPts val="1100"/>
-              <a:buFont typeface="Arial"/>
-              <a:buNone/>
-            </a:pPr>
-            <a:r>
-              <a:rPr lang="en" sz="1800"/>
-              <a:t>  cudaDeviceSynchronize();</a:t>
-            </a:r>
-            <a:endParaRPr sz="1800"/>
-          </a:p>
-          <a:p>
-            <a:pPr indent="0" lvl="0" marL="0" rtl="0" algn="l">
-              <a:spcBef>
-                <a:spcPts val="0"/>
-              </a:spcBef>
-              <a:spcAft>
-                <a:spcPts val="0"/>
-              </a:spcAft>
-              <a:buClr>
-                <a:schemeClr val="dk1"/>
-              </a:buClr>
-              <a:buSzPts val="1100"/>
-              <a:buFont typeface="Arial"/>
-              <a:buNone/>
-            </a:pPr>
-            <a:r>
-              <a:t/>
-            </a:r>
-            <a:endParaRPr sz="1800"/>
-          </a:p>
-          <a:p>
-            <a:pPr indent="0" lvl="0" marL="0" rtl="0" algn="l">
-              <a:spcBef>
-                <a:spcPts val="0"/>
-              </a:spcBef>
-              <a:spcAft>
-                <a:spcPts val="0"/>
-              </a:spcAft>
-              <a:buClr>
-                <a:schemeClr val="dk1"/>
-              </a:buClr>
-              <a:buSzPts val="1100"/>
-              <a:buFont typeface="Arial"/>
-              <a:buNone/>
-            </a:pPr>
-            <a:r>
-              <a:rPr lang="en" sz="1800"/>
-              <a:t>  hInitC();</a:t>
-            </a:r>
-            <a:endParaRPr sz="1800"/>
-          </a:p>
-          <a:p>
-            <a:pPr indent="0" lvl="0" marL="0" rtl="0" algn="l">
-              <a:spcBef>
-                <a:spcPts val="0"/>
-              </a:spcBef>
-              <a:spcAft>
-                <a:spcPts val="0"/>
-              </a:spcAft>
-              <a:buClr>
-                <a:schemeClr val="dk1"/>
-              </a:buClr>
-              <a:buSzPts val="1100"/>
-              <a:buFont typeface="Arial"/>
-              <a:buNone/>
-            </a:pPr>
-            <a:r>
-              <a:t/>
-            </a:r>
-            <a:endParaRPr sz="1800"/>
-          </a:p>
-          <a:p>
-            <a:pPr indent="0" lvl="0" marL="0" rtl="0" algn="l">
-              <a:spcBef>
-                <a:spcPts val="0"/>
-              </a:spcBef>
-              <a:spcAft>
-                <a:spcPts val="0"/>
-              </a:spcAft>
-              <a:buClr>
-                <a:schemeClr val="dk1"/>
-              </a:buClr>
-              <a:buSzPts val="1100"/>
-              <a:buFont typeface="Arial"/>
-              <a:buNone/>
-            </a:pPr>
-            <a:r>
-              <a:rPr lang="en" sz="1800"/>
-              <a:t>  gTestB&lt;&lt;&lt;ARRAY_SIZE/THREADS_PER_BLOCK, THREADS_PER_BLOCK&gt;&gt;&gt;();</a:t>
-            </a:r>
-            <a:endParaRPr sz="1800"/>
-          </a:p>
-          <a:p>
-            <a:pPr indent="0" lvl="0" marL="0" rtl="0" algn="l">
-              <a:spcBef>
-                <a:spcPts val="0"/>
-              </a:spcBef>
-              <a:spcAft>
-                <a:spcPts val="0"/>
-              </a:spcAft>
-              <a:buClr>
-                <a:schemeClr val="dk1"/>
-              </a:buClr>
-              <a:buSzPts val="1100"/>
-              <a:buFont typeface="Arial"/>
-              <a:buNone/>
-            </a:pPr>
-            <a:r>
-              <a:rPr lang="en" sz="1800"/>
-              <a:t>  cudaDeviceSynchronize();</a:t>
-            </a:r>
-            <a:endParaRPr sz="1800"/>
-          </a:p>
-          <a:p>
-            <a:pPr indent="0" lvl="0" marL="0" rtl="0" algn="l">
-              <a:spcBef>
-                <a:spcPts val="0"/>
-              </a:spcBef>
-              <a:spcAft>
-                <a:spcPts val="0"/>
-              </a:spcAft>
-              <a:buClr>
-                <a:schemeClr val="dk1"/>
-              </a:buClr>
-              <a:buSzPts val="1100"/>
-              <a:buFont typeface="Arial"/>
-              <a:buNone/>
-            </a:pPr>
-            <a:r>
-              <a:t/>
-            </a:r>
-            <a:endParaRPr sz="1800"/>
-          </a:p>
-          <a:p>
-            <a:pPr indent="0" lvl="0" marL="0" rtl="0" algn="l">
-              <a:spcBef>
-                <a:spcPts val="0"/>
-              </a:spcBef>
-              <a:spcAft>
-                <a:spcPts val="0"/>
-              </a:spcAft>
-              <a:buClr>
-                <a:schemeClr val="dk1"/>
-              </a:buClr>
-              <a:buSzPts val="1100"/>
-              <a:buFont typeface="Arial"/>
-              <a:buNone/>
-            </a:pPr>
-            <a:r>
-              <a:rPr lang="en" sz="1800"/>
-              <a:t>  gTestC&lt;&lt;&lt;ARRAY_SIZE/THREADS_PER_BLOCK, THREADS_PER_BLOCK&gt;&gt;&gt;();</a:t>
-            </a:r>
-            <a:endParaRPr sz="1800"/>
-          </a:p>
-          <a:p>
-            <a:pPr indent="0" lvl="0" marL="0" rtl="0" algn="l">
-              <a:spcBef>
-                <a:spcPts val="0"/>
-              </a:spcBef>
-              <a:spcAft>
-                <a:spcPts val="0"/>
-              </a:spcAft>
-              <a:buClr>
-                <a:schemeClr val="dk1"/>
-              </a:buClr>
-              <a:buSzPts val="1100"/>
-              <a:buFont typeface="Arial"/>
-              <a:buNone/>
-            </a:pPr>
-            <a:r>
-              <a:rPr lang="en" sz="1800"/>
-              <a:t>  cudaDeviceSynchronize();</a:t>
-            </a:r>
-            <a:endParaRPr sz="1800"/>
-          </a:p>
-          <a:p>
-            <a:pPr indent="0" lvl="0" marL="0" rtl="0" algn="l">
-              <a:spcBef>
-                <a:spcPts val="0"/>
-              </a:spcBef>
-              <a:spcAft>
-                <a:spcPts val="0"/>
-              </a:spcAft>
-              <a:buClr>
-                <a:schemeClr val="dk1"/>
-              </a:buClr>
-              <a:buSzPts val="1100"/>
-              <a:buFont typeface="Arial"/>
-              <a:buNone/>
-            </a:pPr>
-            <a:r>
-              <a:t/>
-            </a:r>
-            <a:endParaRPr sz="1800"/>
-          </a:p>
-          <a:p>
-            <a:pPr indent="0" lvl="0" marL="0" rtl="0" algn="l">
-              <a:spcBef>
-                <a:spcPts val="0"/>
-              </a:spcBef>
-              <a:spcAft>
-                <a:spcPts val="0"/>
-              </a:spcAft>
-              <a:buClr>
-                <a:schemeClr val="dk1"/>
-              </a:buClr>
-              <a:buSzPts val="1100"/>
-              <a:buFont typeface="Arial"/>
-              <a:buNone/>
-            </a:pPr>
-            <a:r>
-              <a:rPr lang="en" sz="1800"/>
-              <a:t>  gOut&lt;&lt;&lt;ARRAY_SIZE/THREADS_PER_BLOCK, THREADS_PER_BLOCK&gt;&gt;&gt;();</a:t>
-            </a:r>
-            <a:endParaRPr sz="1800"/>
-          </a:p>
-          <a:p>
-            <a:pPr indent="0" lvl="0" marL="0" rtl="0" algn="l">
-              <a:spcBef>
-                <a:spcPts val="0"/>
-              </a:spcBef>
-              <a:spcAft>
-                <a:spcPts val="0"/>
-              </a:spcAft>
-              <a:buClr>
-                <a:schemeClr val="dk1"/>
-              </a:buClr>
-              <a:buSzPts val="1100"/>
-              <a:buFont typeface="Arial"/>
-              <a:buNone/>
-            </a:pPr>
-            <a:r>
-              <a:rPr lang="en" sz="1800"/>
-              <a:t>  cudaDeviceSynchronize();</a:t>
-            </a:r>
-            <a:endParaRPr sz="1800"/>
-          </a:p>
-          <a:p>
-            <a:pPr indent="0" lvl="0" marL="0" rtl="0" algn="l">
-              <a:spcBef>
-                <a:spcPts val="0"/>
-              </a:spcBef>
-              <a:spcAft>
-                <a:spcPts val="0"/>
-              </a:spcAft>
-              <a:buClr>
-                <a:schemeClr val="dk1"/>
-              </a:buClr>
-              <a:buSzPts val="1100"/>
-              <a:buFont typeface="Arial"/>
-              <a:buNone/>
-            </a:pPr>
-            <a:r>
-              <a:t/>
-            </a:r>
-            <a:endParaRPr sz="1800"/>
-          </a:p>
-          <a:p>
-            <a:pPr indent="0" lvl="0" marL="0" rtl="0" algn="l">
-              <a:spcBef>
-                <a:spcPts val="0"/>
-              </a:spcBef>
-              <a:spcAft>
-                <a:spcPts val="0"/>
-              </a:spcAft>
-              <a:buClr>
-                <a:schemeClr val="dk1"/>
-              </a:buClr>
-              <a:buSzPts val="1100"/>
-              <a:buFont typeface="Arial"/>
-              <a:buNone/>
-            </a:pPr>
-            <a:r>
-              <a:rPr lang="en" sz="1800"/>
-              <a:t>  return 0;</a:t>
-            </a:r>
-            <a:endParaRPr sz="1800"/>
-          </a:p>
-          <a:p>
-            <a:pPr indent="0" lvl="0" marL="0" rtl="0" algn="l">
-              <a:spcBef>
-                <a:spcPts val="0"/>
-              </a:spcBef>
-              <a:spcAft>
-                <a:spcPts val="0"/>
-              </a:spcAft>
-              <a:buClr>
-                <a:schemeClr val="dk1"/>
-              </a:buClr>
-              <a:buSzPts val="1100"/>
-              <a:buFont typeface="Arial"/>
-              <a:buNone/>
-            </a:pPr>
-            <a:r>
-              <a:rPr lang="en" sz="1800"/>
-              <a:t>}</a:t>
-            </a:r>
-            <a:endParaRPr sz="1800"/>
-          </a:p>
-          <a:p>
-            <a:pPr indent="0" lvl="0" marL="0" rtl="0" algn="l">
-              <a:spcBef>
-                <a:spcPts val="0"/>
-              </a:spcBef>
-              <a:spcAft>
-                <a:spcPts val="0"/>
-              </a:spcAft>
-              <a:buNone/>
-            </a:pPr>
-            <a:r>
-              <a:t/>
-            </a:r>
-            <a:endParaRPr sz="1800"/>
-          </a:p>
-        </p:txBody>
-      </p:sp>
-    </p:spTree>
-  </p:cSld>
-  <p:clrMapOvr>
-    <a:masterClrMapping/>
-  </p:clrMapOvr>
-</p:sld>
-</file>
-
-<file path=ppt/slides/slide8.xml><?xml version="1.0" encoding="utf-8"?>
-<p:sld xmlns:a="http://schemas.openxmlformats.org/drawingml/2006/main" xmlns:r="http://schemas.openxmlformats.org/officeDocument/2006/relationships" xmlns:mc="http://schemas.openxmlformats.org/markup-compatibility/2006" xmlns:mv="urn:schemas-microsoft-com:mac:vml" xmlns:p="http://schemas.openxmlformats.org/presentationml/2006/main" xmlns:c="http://schemas.openxmlformats.org/drawingml/2006/chart" xmlns:dgm="http://schemas.openxmlformats.org/drawingml/2006/diagram" xmlns:o="urn:schemas-microsoft-com:office:office" xmlns:v="urn:schemas-microsoft-com:vml" xmlns:pvml="urn:schemas-microsoft-com:office:powerpoint" xmlns:com="http://schemas.openxmlformats.org/drawingml/2006/compatibility" xmlns:p14="http://schemas.microsoft.com/office/powerpoint/2010/main" xmlns:p15="http://schemas.microsoft.com/office/powerpoint/2012/main" xmlns:ahyp="http://schemas.microsoft.com/office/drawing/2018/hyperlinkcolor">
-  <p:cSld>
-    <p:spTree>
-      <p:nvGrpSpPr>
-        <p:cNvPr id="102" name="Shape 102"/>
-        <p:cNvGrpSpPr/>
-        <p:nvPr/>
-      </p:nvGrpSpPr>
-      <p:grpSpPr>
-        <a:xfrm>
-          <a:off x="0" y="0"/>
-          <a:ext cx="0" cy="0"/>
-          <a:chOff x="0" y="0"/>
-          <a:chExt cx="0" cy="0"/>
-        </a:xfrm>
-      </p:grpSpPr>
-      <p:sp>
-        <p:nvSpPr>
-          <p:cNvPr id="103" name="Google Shape;103;p22"/>
-          <p:cNvSpPr txBox="1"/>
-          <p:nvPr/>
-        </p:nvSpPr>
-        <p:spPr>
-          <a:xfrm>
             <a:off x="100850" y="123050"/>
             <a:ext cx="8925600" cy="3418800"/>
           </a:xfrm>
@@ -15597,7 +16624,7 @@
       </p:sp>
       <p:sp>
         <p:nvSpPr>
-          <p:cNvPr id="104" name="Google Shape;104;p22"/>
+          <p:cNvPr id="99" name="Google Shape;99;p21"/>
           <p:cNvSpPr txBox="1"/>
           <p:nvPr/>
         </p:nvSpPr>
@@ -15656,7 +16683,7 @@
       </p:sp>
       <p:sp>
         <p:nvSpPr>
-          <p:cNvPr id="105" name="Google Shape;105;p22"/>
+          <p:cNvPr id="100" name="Google Shape;100;p21"/>
           <p:cNvSpPr txBox="1"/>
           <p:nvPr/>
         </p:nvSpPr>
@@ -15754,6 +16781,382 @@
               <a:ea typeface="Courier New"/>
               <a:cs typeface="Courier New"/>
               <a:sym typeface="Courier New"/>
+            </a:endParaRPr>
+          </a:p>
+          <a:p>
+            <a:pPr indent="0" lvl="0" marL="0" rtl="0" algn="l">
+              <a:spcBef>
+                <a:spcPts val="0"/>
+              </a:spcBef>
+              <a:spcAft>
+                <a:spcPts val="0"/>
+              </a:spcAft>
+              <a:buNone/>
+            </a:pPr>
+            <a:r>
+              <a:t/>
+            </a:r>
+            <a:endParaRPr sz="1800"/>
+          </a:p>
+        </p:txBody>
+      </p:sp>
+    </p:spTree>
+  </p:cSld>
+  <p:clrMapOvr>
+    <a:masterClrMapping/>
+  </p:clrMapOvr>
+</p:sld>
+</file>
+
+<file path=ppt/slides/slide8.xml><?xml version="1.0" encoding="utf-8"?>
+<p:sld xmlns:a="http://schemas.openxmlformats.org/drawingml/2006/main" xmlns:r="http://schemas.openxmlformats.org/officeDocument/2006/relationships" xmlns:mc="http://schemas.openxmlformats.org/markup-compatibility/2006" xmlns:mv="urn:schemas-microsoft-com:mac:vml" xmlns:p="http://schemas.openxmlformats.org/presentationml/2006/main" xmlns:c="http://schemas.openxmlformats.org/drawingml/2006/chart" xmlns:dgm="http://schemas.openxmlformats.org/drawingml/2006/diagram" xmlns:o="urn:schemas-microsoft-com:office:office" xmlns:v="urn:schemas-microsoft-com:vml" xmlns:pvml="urn:schemas-microsoft-com:office:powerpoint" xmlns:com="http://schemas.openxmlformats.org/drawingml/2006/compatibility" xmlns:p14="http://schemas.microsoft.com/office/powerpoint/2010/main" xmlns:p15="http://schemas.microsoft.com/office/powerpoint/2012/main" xmlns:ahyp="http://schemas.microsoft.com/office/drawing/2018/hyperlinkcolor">
+  <p:cSld>
+    <p:spTree>
+      <p:nvGrpSpPr>
+        <p:cNvPr id="104" name="Shape 104"/>
+        <p:cNvGrpSpPr/>
+        <p:nvPr/>
+      </p:nvGrpSpPr>
+      <p:grpSpPr>
+        <a:xfrm>
+          <a:off x="0" y="0"/>
+          <a:ext cx="0" cy="0"/>
+          <a:chOff x="0" y="0"/>
+          <a:chExt cx="0" cy="0"/>
+        </a:xfrm>
+      </p:grpSpPr>
+      <p:sp>
+        <p:nvSpPr>
+          <p:cNvPr id="105" name="Google Shape;105;p22"/>
+          <p:cNvSpPr txBox="1"/>
+          <p:nvPr/>
+        </p:nvSpPr>
+        <p:spPr>
+          <a:xfrm>
+            <a:off x="100850" y="626175"/>
+            <a:ext cx="8976000" cy="3580200"/>
+          </a:xfrm>
+          <a:prstGeom prst="rect">
+            <a:avLst/>
+          </a:prstGeom>
+          <a:solidFill>
+            <a:srgbClr val="EFEFEF"/>
+          </a:solidFill>
+          <a:ln cap="flat" cmpd="sng" w="9525">
+            <a:solidFill>
+              <a:schemeClr val="dk1"/>
+            </a:solidFill>
+            <a:prstDash val="solid"/>
+            <a:round/>
+            <a:headEnd len="sm" w="sm" type="none"/>
+            <a:tailEnd len="sm" w="sm" type="none"/>
+          </a:ln>
+        </p:spPr>
+        <p:txBody>
+          <a:bodyPr anchorCtr="0" anchor="t" bIns="91425" lIns="91425" spcFirstLastPara="1" rIns="91425" wrap="square" tIns="91425">
+            <a:noAutofit/>
+          </a:bodyPr>
+          <a:lstStyle/>
+          <a:p>
+            <a:pPr indent="0" lvl="0" marL="0" rtl="0" algn="l">
+              <a:spcBef>
+                <a:spcPts val="0"/>
+              </a:spcBef>
+              <a:spcAft>
+                <a:spcPts val="0"/>
+              </a:spcAft>
+              <a:buClr>
+                <a:schemeClr val="dk1"/>
+              </a:buClr>
+              <a:buSzPts val="1100"/>
+              <a:buFont typeface="Arial"/>
+              <a:buNone/>
+            </a:pPr>
+            <a:r>
+              <a:rPr lang="en" sz="1900">
+                <a:solidFill>
+                  <a:schemeClr val="dk1"/>
+                </a:solidFill>
+                <a:highlight>
+                  <a:srgbClr val="EFEFEF"/>
+                </a:highlight>
+              </a:rPr>
+              <a:t>7&gt; </a:t>
+            </a:r>
+            <a:r>
+              <a:rPr b="1" lang="en" sz="1900">
+                <a:solidFill>
+                  <a:schemeClr val="dk1"/>
+                </a:solidFill>
+                <a:highlight>
+                  <a:srgbClr val="EFEFEF"/>
+                </a:highlight>
+              </a:rPr>
+              <a:t>nvprof ./test_mem &gt; test.txt</a:t>
+            </a:r>
+            <a:endParaRPr b="1" sz="1900">
+              <a:solidFill>
+                <a:schemeClr val="dk1"/>
+              </a:solidFill>
+              <a:highlight>
+                <a:srgbClr val="EFEFEF"/>
+              </a:highlight>
+            </a:endParaRPr>
+          </a:p>
+          <a:p>
+            <a:pPr indent="0" lvl="0" marL="0" rtl="0" algn="l">
+              <a:spcBef>
+                <a:spcPts val="0"/>
+              </a:spcBef>
+              <a:spcAft>
+                <a:spcPts val="0"/>
+              </a:spcAft>
+              <a:buClr>
+                <a:schemeClr val="dk1"/>
+              </a:buClr>
+              <a:buSzPts val="1100"/>
+              <a:buFont typeface="Arial"/>
+              <a:buNone/>
+            </a:pPr>
+            <a:r>
+              <a:rPr lang="en" sz="1900">
+                <a:solidFill>
+                  <a:schemeClr val="dk1"/>
+                </a:solidFill>
+              </a:rPr>
+              <a:t>==9251== NVPROF is profiling process 9251, command: ./test_mem</a:t>
+            </a:r>
+            <a:endParaRPr sz="1900">
+              <a:solidFill>
+                <a:schemeClr val="dk1"/>
+              </a:solidFill>
+            </a:endParaRPr>
+          </a:p>
+          <a:p>
+            <a:pPr indent="0" lvl="0" marL="0" rtl="0" algn="l">
+              <a:spcBef>
+                <a:spcPts val="0"/>
+              </a:spcBef>
+              <a:spcAft>
+                <a:spcPts val="0"/>
+              </a:spcAft>
+              <a:buClr>
+                <a:schemeClr val="dk1"/>
+              </a:buClr>
+              <a:buSzPts val="1100"/>
+              <a:buFont typeface="Arial"/>
+              <a:buNone/>
+            </a:pPr>
+            <a:r>
+              <a:rPr lang="en" sz="1900">
+                <a:solidFill>
+                  <a:schemeClr val="dk1"/>
+                </a:solidFill>
+              </a:rPr>
+              <a:t>==9251== Profiling application: ./test_mem</a:t>
+            </a:r>
+            <a:endParaRPr sz="1900">
+              <a:solidFill>
+                <a:schemeClr val="dk1"/>
+              </a:solidFill>
+            </a:endParaRPr>
+          </a:p>
+          <a:p>
+            <a:pPr indent="0" lvl="0" marL="0" rtl="0" algn="l">
+              <a:spcBef>
+                <a:spcPts val="0"/>
+              </a:spcBef>
+              <a:spcAft>
+                <a:spcPts val="0"/>
+              </a:spcAft>
+              <a:buClr>
+                <a:schemeClr val="dk1"/>
+              </a:buClr>
+              <a:buSzPts val="1100"/>
+              <a:buFont typeface="Arial"/>
+              <a:buNone/>
+            </a:pPr>
+            <a:r>
+              <a:rPr lang="en" sz="1900">
+                <a:solidFill>
+                  <a:schemeClr val="dk1"/>
+                </a:solidFill>
+              </a:rPr>
+              <a:t>==9251== Profiling result:</a:t>
+            </a:r>
+            <a:endParaRPr sz="1900">
+              <a:solidFill>
+                <a:schemeClr val="dk1"/>
+              </a:solidFill>
+            </a:endParaRPr>
+          </a:p>
+          <a:p>
+            <a:pPr indent="0" lvl="0" marL="0" rtl="0" algn="l">
+              <a:spcBef>
+                <a:spcPts val="0"/>
+              </a:spcBef>
+              <a:spcAft>
+                <a:spcPts val="0"/>
+              </a:spcAft>
+              <a:buClr>
+                <a:schemeClr val="dk1"/>
+              </a:buClr>
+              <a:buSzPts val="1100"/>
+              <a:buFont typeface="Arial"/>
+              <a:buNone/>
+            </a:pPr>
+            <a:r>
+              <a:rPr lang="en" sz="1900">
+                <a:solidFill>
+                  <a:schemeClr val="dk1"/>
+                </a:solidFill>
+              </a:rPr>
+              <a:t>           Type  Time(%)      Time     Calls       Avg       Min       Max  Name</a:t>
+            </a:r>
+            <a:endParaRPr sz="1900">
+              <a:solidFill>
+                <a:schemeClr val="dk1"/>
+              </a:solidFill>
+            </a:endParaRPr>
+          </a:p>
+          <a:p>
+            <a:pPr indent="0" lvl="0" marL="0" rtl="0" algn="l">
+              <a:spcBef>
+                <a:spcPts val="0"/>
+              </a:spcBef>
+              <a:spcAft>
+                <a:spcPts val="0"/>
+              </a:spcAft>
+              <a:buClr>
+                <a:schemeClr val="dk1"/>
+              </a:buClr>
+              <a:buSzPts val="1100"/>
+              <a:buFont typeface="Arial"/>
+              <a:buNone/>
+            </a:pPr>
+            <a:r>
+              <a:rPr lang="en" sz="1900">
+                <a:solidFill>
+                  <a:schemeClr val="dk1"/>
+                </a:solidFill>
+              </a:rPr>
+              <a:t>GPU activities:   99.84%  2.8895ms         1  2.8895ms  2.8895ms  2.8895ms  gOut(void)</a:t>
+            </a:r>
+            <a:endParaRPr sz="1900">
+              <a:solidFill>
+                <a:schemeClr val="dk1"/>
+              </a:solidFill>
+            </a:endParaRPr>
+          </a:p>
+          <a:p>
+            <a:pPr indent="0" lvl="0" marL="0" rtl="0" algn="l">
+              <a:spcBef>
+                <a:spcPts val="0"/>
+              </a:spcBef>
+              <a:spcAft>
+                <a:spcPts val="0"/>
+              </a:spcAft>
+              <a:buClr>
+                <a:schemeClr val="dk1"/>
+              </a:buClr>
+              <a:buSzPts val="1100"/>
+              <a:buFont typeface="Arial"/>
+              <a:buNone/>
+            </a:pPr>
+            <a:r>
+              <a:rPr lang="en" sz="1900">
+                <a:solidFill>
+                  <a:schemeClr val="dk1"/>
+                </a:solidFill>
+              </a:rPr>
+              <a:t>                   0.05%  1.5360us         1  1.5360us  1.5360us  1.5360us  gInit(void)</a:t>
+            </a:r>
+            <a:endParaRPr sz="1900">
+              <a:solidFill>
+                <a:schemeClr val="dk1"/>
+              </a:solidFill>
+            </a:endParaRPr>
+          </a:p>
+          <a:p>
+            <a:pPr indent="0" lvl="0" marL="0" rtl="0" algn="l">
+              <a:spcBef>
+                <a:spcPts val="0"/>
+              </a:spcBef>
+              <a:spcAft>
+                <a:spcPts val="0"/>
+              </a:spcAft>
+              <a:buClr>
+                <a:schemeClr val="dk1"/>
+              </a:buClr>
+              <a:buSzPts val="1100"/>
+              <a:buFont typeface="Arial"/>
+              <a:buNone/>
+            </a:pPr>
+            <a:r>
+              <a:rPr lang="en" sz="1900">
+                <a:solidFill>
+                  <a:schemeClr val="dk1"/>
+                </a:solidFill>
+              </a:rPr>
+              <a:t>                   0.05%  1.4080us         1  1.4080us  1.4080us  1.4080us  gTestB(void)</a:t>
+            </a:r>
+            <a:endParaRPr sz="1900">
+              <a:solidFill>
+                <a:schemeClr val="dk1"/>
+              </a:solidFill>
+            </a:endParaRPr>
+          </a:p>
+          <a:p>
+            <a:pPr indent="0" lvl="0" marL="0" rtl="0" algn="l">
+              <a:spcBef>
+                <a:spcPts val="0"/>
+              </a:spcBef>
+              <a:spcAft>
+                <a:spcPts val="0"/>
+              </a:spcAft>
+              <a:buClr>
+                <a:schemeClr val="dk1"/>
+              </a:buClr>
+              <a:buSzPts val="1100"/>
+              <a:buFont typeface="Arial"/>
+              <a:buNone/>
+            </a:pPr>
+            <a:r>
+              <a:rPr lang="en" sz="1900">
+                <a:solidFill>
+                  <a:schemeClr val="dk1"/>
+                </a:solidFill>
+              </a:rPr>
+              <a:t>                   0.04%  1.2160us         1  1.2160us  1.2160us  1.2160us  gTestC(void)</a:t>
+            </a:r>
+            <a:endParaRPr sz="1900">
+              <a:solidFill>
+                <a:schemeClr val="dk1"/>
+              </a:solidFill>
+            </a:endParaRPr>
+          </a:p>
+          <a:p>
+            <a:pPr indent="0" lvl="0" marL="0" rtl="0" algn="l">
+              <a:spcBef>
+                <a:spcPts val="0"/>
+              </a:spcBef>
+              <a:spcAft>
+                <a:spcPts val="0"/>
+              </a:spcAft>
+              <a:buClr>
+                <a:schemeClr val="dk1"/>
+              </a:buClr>
+              <a:buSzPts val="1100"/>
+              <a:buFont typeface="Arial"/>
+              <a:buNone/>
+            </a:pPr>
+            <a:r>
+              <a:t/>
+            </a:r>
+            <a:endParaRPr sz="1900">
+              <a:solidFill>
+                <a:schemeClr val="dk1"/>
+              </a:solidFill>
             </a:endParaRPr>
           </a:p>
           <a:p>
@@ -15806,15 +17209,65 @@
         </p:nvSpPr>
         <p:spPr>
           <a:xfrm>
-            <a:off x="100850" y="626175"/>
-            <a:ext cx="8976000" cy="3580200"/>
+            <a:off x="990600" y="26428"/>
+            <a:ext cx="7086600" cy="464100"/>
           </a:xfrm>
           <a:prstGeom prst="rect">
             <a:avLst/>
           </a:prstGeom>
           <a:solidFill>
-            <a:srgbClr val="EFEFEF"/>
+            <a:srgbClr val="FFCC00"/>
           </a:solidFill>
+          <a:ln>
+            <a:noFill/>
+          </a:ln>
+        </p:spPr>
+        <p:txBody>
+          <a:bodyPr anchorCtr="0" anchor="t" bIns="46800" lIns="90000" spcFirstLastPara="1" rIns="90000" wrap="square" tIns="46800">
+            <a:spAutoFit/>
+          </a:bodyPr>
+          <a:lstStyle/>
+          <a:p>
+            <a:pPr indent="0" lvl="0" marL="0" marR="0" rtl="0" algn="ctr">
+              <a:lnSpc>
+                <a:spcPct val="100000"/>
+              </a:lnSpc>
+              <a:spcBef>
+                <a:spcPts val="0"/>
+              </a:spcBef>
+              <a:spcAft>
+                <a:spcPts val="0"/>
+              </a:spcAft>
+              <a:buClr>
+                <a:srgbClr val="000000"/>
+              </a:buClr>
+              <a:buSzPts val="2400"/>
+              <a:buFont typeface="Arial"/>
+              <a:buNone/>
+            </a:pPr>
+            <a:r>
+              <a:rPr b="1" lang="en" sz="2400"/>
+              <a:t>Текстурная память</a:t>
+            </a:r>
+            <a:endParaRPr b="1" i="1" sz="2100"/>
+          </a:p>
+        </p:txBody>
+      </p:sp>
+      <p:sp>
+        <p:nvSpPr>
+          <p:cNvPr id="111" name="Google Shape;111;p23"/>
+          <p:cNvSpPr txBox="1"/>
+          <p:nvPr/>
+        </p:nvSpPr>
+        <p:spPr>
+          <a:xfrm>
+            <a:off x="421025" y="829375"/>
+            <a:ext cx="8328300" cy="1108200"/>
+          </a:xfrm>
+          <a:prstGeom prst="rect">
+            <a:avLst/>
+          </a:prstGeom>
+          <a:noFill/>
           <a:ln cap="flat" cmpd="sng" w="9525">
             <a:solidFill>
               <a:schemeClr val="dk1"/>
@@ -15827,7 +17280,7 @@
         </p:spPr>
         <p:txBody>
           <a:bodyPr anchorCtr="0" anchor="t" bIns="91425" lIns="91425" spcFirstLastPara="1" rIns="91425" wrap="square" tIns="91425">
-            <a:noAutofit/>
+            <a:spAutoFit/>
           </a:bodyPr>
           <a:lstStyle/>
           <a:p>
@@ -15846,309 +17299,61 @@
               <a:buNone/>
             </a:pPr>
             <a:r>
-              <a:rPr lang="en" sz="1900">
-                <a:solidFill>
-                  <a:schemeClr val="dk1"/>
-                </a:solidFill>
-                <a:highlight>
-                  <a:srgbClr val="EFEFEF"/>
-                </a:highlight>
-              </a:rPr>
-              <a:t>7&gt; </a:t>
-            </a:r>
-            <a:r>
-              <a:rPr b="1" lang="en" sz="1900">
-                <a:solidFill>
-                  <a:schemeClr val="dk1"/>
-                </a:solidFill>
-                <a:highlight>
-                  <a:srgbClr val="EFEFEF"/>
-                </a:highlight>
-              </a:rPr>
-              <a:t>nvprof ./test_mem &gt; test.txt</a:t>
-            </a:r>
-            <a:endParaRPr b="1" sz="1900">
-              <a:solidFill>
-                <a:schemeClr val="dk1"/>
-              </a:solidFill>
-              <a:highlight>
-                <a:srgbClr val="EFEFEF"/>
-              </a:highlight>
-            </a:endParaRPr>
-          </a:p>
-          <a:p>
-            <a:pPr indent="0" lvl="0" marL="0" rtl="0" algn="l">
-              <a:spcBef>
-                <a:spcPts val="0"/>
-              </a:spcBef>
-              <a:spcAft>
-                <a:spcPts val="0"/>
-              </a:spcAft>
-              <a:buClr>
-                <a:schemeClr val="dk1"/>
-              </a:buClr>
-              <a:buSzPts val="1100"/>
-              <a:buFont typeface="Arial"/>
-              <a:buNone/>
-            </a:pPr>
-            <a:r>
-              <a:rPr lang="en" sz="1900">
-                <a:solidFill>
-                  <a:schemeClr val="dk1"/>
-                </a:solidFill>
-              </a:rPr>
-              <a:t>==9251== NVPROF is profiling process 9251, command: ./test_mem</a:t>
-            </a:r>
-            <a:endParaRPr sz="1900">
-              <a:solidFill>
-                <a:schemeClr val="dk1"/>
-              </a:solidFill>
-            </a:endParaRPr>
-          </a:p>
-          <a:p>
-            <a:pPr indent="0" lvl="0" marL="0" rtl="0" algn="l">
-              <a:spcBef>
-                <a:spcPts val="0"/>
-              </a:spcBef>
-              <a:spcAft>
-                <a:spcPts val="0"/>
-              </a:spcAft>
-              <a:buClr>
-                <a:schemeClr val="dk1"/>
-              </a:buClr>
-              <a:buSzPts val="1100"/>
-              <a:buFont typeface="Arial"/>
-              <a:buNone/>
-            </a:pPr>
-            <a:r>
-              <a:rPr lang="en" sz="1900">
-                <a:solidFill>
-                  <a:schemeClr val="dk1"/>
-                </a:solidFill>
-              </a:rPr>
-              <a:t>==9251== Profiling application: ./test_mem</a:t>
-            </a:r>
-            <a:endParaRPr sz="1900">
-              <a:solidFill>
-                <a:schemeClr val="dk1"/>
-              </a:solidFill>
-            </a:endParaRPr>
-          </a:p>
-          <a:p>
-            <a:pPr indent="0" lvl="0" marL="0" rtl="0" algn="l">
-              <a:spcBef>
-                <a:spcPts val="0"/>
-              </a:spcBef>
-              <a:spcAft>
-                <a:spcPts val="0"/>
-              </a:spcAft>
-              <a:buClr>
-                <a:schemeClr val="dk1"/>
-              </a:buClr>
-              <a:buSzPts val="1100"/>
-              <a:buFont typeface="Arial"/>
-              <a:buNone/>
-            </a:pPr>
-            <a:r>
-              <a:rPr lang="en" sz="1900">
-                <a:solidFill>
-                  <a:schemeClr val="dk1"/>
-                </a:solidFill>
-              </a:rPr>
-              <a:t>==9251== Profiling result:</a:t>
-            </a:r>
-            <a:endParaRPr sz="1900">
-              <a:solidFill>
-                <a:schemeClr val="dk1"/>
-              </a:solidFill>
-            </a:endParaRPr>
-          </a:p>
-          <a:p>
-            <a:pPr indent="0" lvl="0" marL="0" rtl="0" algn="l">
-              <a:spcBef>
-                <a:spcPts val="0"/>
-              </a:spcBef>
-              <a:spcAft>
-                <a:spcPts val="0"/>
-              </a:spcAft>
-              <a:buClr>
-                <a:schemeClr val="dk1"/>
-              </a:buClr>
-              <a:buSzPts val="1100"/>
-              <a:buFont typeface="Arial"/>
-              <a:buNone/>
-            </a:pPr>
-            <a:r>
-              <a:rPr lang="en" sz="1900">
-                <a:solidFill>
-                  <a:schemeClr val="dk1"/>
-                </a:solidFill>
-              </a:rPr>
-              <a:t>           Type  Time(%)      Time     Calls       Avg       Min       Max  Name</a:t>
-            </a:r>
-            <a:endParaRPr sz="1900">
-              <a:solidFill>
-                <a:schemeClr val="dk1"/>
-              </a:solidFill>
-            </a:endParaRPr>
-          </a:p>
-          <a:p>
-            <a:pPr indent="0" lvl="0" marL="0" rtl="0" algn="l">
-              <a:spcBef>
-                <a:spcPts val="0"/>
-              </a:spcBef>
-              <a:spcAft>
-                <a:spcPts val="0"/>
-              </a:spcAft>
-              <a:buClr>
-                <a:schemeClr val="dk1"/>
-              </a:buClr>
-              <a:buSzPts val="1100"/>
-              <a:buFont typeface="Arial"/>
-              <a:buNone/>
-            </a:pPr>
-            <a:r>
-              <a:rPr lang="en" sz="1900">
-                <a:solidFill>
-                  <a:schemeClr val="dk1"/>
-                </a:solidFill>
-              </a:rPr>
-              <a:t>GPU activities:   99.84%  2.8895ms         1  2.8895ms  2.8895ms  2.8895ms  gOut(void)</a:t>
-            </a:r>
-            <a:endParaRPr sz="1900">
-              <a:solidFill>
-                <a:schemeClr val="dk1"/>
-              </a:solidFill>
-            </a:endParaRPr>
-          </a:p>
-          <a:p>
-            <a:pPr indent="0" lvl="0" marL="0" rtl="0" algn="l">
-              <a:spcBef>
-                <a:spcPts val="0"/>
-              </a:spcBef>
-              <a:spcAft>
-                <a:spcPts val="0"/>
-              </a:spcAft>
-              <a:buClr>
-                <a:schemeClr val="dk1"/>
-              </a:buClr>
-              <a:buSzPts val="1100"/>
-              <a:buFont typeface="Arial"/>
-              <a:buNone/>
-            </a:pPr>
-            <a:r>
-              <a:rPr lang="en" sz="1900">
-                <a:solidFill>
-                  <a:schemeClr val="dk1"/>
-                </a:solidFill>
-              </a:rPr>
-              <a:t>                   0.05%  1.5360us         1  1.5360us  1.5360us  1.5360us  gInit(void)</a:t>
-            </a:r>
-            <a:endParaRPr sz="1900">
-              <a:solidFill>
-                <a:schemeClr val="dk1"/>
-              </a:solidFill>
-            </a:endParaRPr>
-          </a:p>
-          <a:p>
-            <a:pPr indent="0" lvl="0" marL="0" rtl="0" algn="l">
-              <a:spcBef>
-                <a:spcPts val="0"/>
-              </a:spcBef>
-              <a:spcAft>
-                <a:spcPts val="0"/>
-              </a:spcAft>
-              <a:buClr>
-                <a:schemeClr val="dk1"/>
-              </a:buClr>
-              <a:buSzPts val="1100"/>
-              <a:buFont typeface="Arial"/>
-              <a:buNone/>
-            </a:pPr>
-            <a:r>
-              <a:rPr lang="en" sz="1900">
-                <a:solidFill>
-                  <a:schemeClr val="dk1"/>
-                </a:solidFill>
-              </a:rPr>
-              <a:t>                   0.05%  1.4080us         1  1.4080us  1.4080us  1.4080us  gTestB(void)</a:t>
-            </a:r>
-            <a:endParaRPr sz="1900">
-              <a:solidFill>
-                <a:schemeClr val="dk1"/>
-              </a:solidFill>
-            </a:endParaRPr>
-          </a:p>
-          <a:p>
-            <a:pPr indent="0" lvl="0" marL="0" rtl="0" algn="l">
-              <a:spcBef>
-                <a:spcPts val="0"/>
-              </a:spcBef>
-              <a:spcAft>
-                <a:spcPts val="0"/>
-              </a:spcAft>
-              <a:buClr>
-                <a:schemeClr val="dk1"/>
-              </a:buClr>
-              <a:buSzPts val="1100"/>
-              <a:buFont typeface="Arial"/>
-              <a:buNone/>
-            </a:pPr>
-            <a:r>
-              <a:rPr lang="en" sz="1900">
-                <a:solidFill>
-                  <a:schemeClr val="dk1"/>
-                </a:solidFill>
-              </a:rPr>
-              <a:t>                   0.04%  1.2160us         1  1.2160us  1.2160us  1.2160us  gTestC(void)</a:t>
-            </a:r>
-            <a:endParaRPr sz="1900">
-              <a:solidFill>
-                <a:schemeClr val="dk1"/>
-              </a:solidFill>
-            </a:endParaRPr>
-          </a:p>
-          <a:p>
-            <a:pPr indent="0" lvl="0" marL="0" rtl="0" algn="l">
-              <a:spcBef>
-                <a:spcPts val="0"/>
-              </a:spcBef>
-              <a:spcAft>
-                <a:spcPts val="0"/>
-              </a:spcAft>
-              <a:buClr>
-                <a:schemeClr val="dk1"/>
-              </a:buClr>
-              <a:buSzPts val="1100"/>
-              <a:buFont typeface="Arial"/>
-              <a:buNone/>
-            </a:pPr>
-            <a:r>
-              <a:t/>
-            </a:r>
-            <a:endParaRPr sz="1900">
-              <a:solidFill>
-                <a:schemeClr val="dk1"/>
-              </a:solidFill>
-            </a:endParaRPr>
-          </a:p>
-          <a:p>
-            <a:pPr indent="0" lvl="0" marL="0" rtl="0" algn="l">
-              <a:spcBef>
-                <a:spcPts val="0"/>
-              </a:spcBef>
-              <a:spcAft>
-                <a:spcPts val="0"/>
-              </a:spcAft>
-              <a:buNone/>
-            </a:pPr>
-            <a:r>
-              <a:t/>
-            </a:r>
-            <a:endParaRPr sz="1800"/>
+              <a:rPr lang="en" sz="2000"/>
+              <a:t>● Текстура – специальный интерфейс доступа к глобальной памяти, обеспечивающий 1D, 2D и 3D целочисленную и </a:t>
+            </a:r>
+            <a:r>
+              <a:rPr b="1" lang="en" sz="2000"/>
+              <a:t>вещественную</a:t>
+            </a:r>
+            <a:endParaRPr b="1" sz="2000"/>
+          </a:p>
+          <a:p>
+            <a:pPr indent="0" lvl="0" marL="0" rtl="0" algn="l">
+              <a:spcBef>
+                <a:spcPts val="0"/>
+              </a:spcBef>
+              <a:spcAft>
+                <a:spcPts val="0"/>
+              </a:spcAft>
+              <a:buNone/>
+            </a:pPr>
+            <a:r>
+              <a:rPr lang="en" sz="2000"/>
+              <a:t>индексацию.</a:t>
+            </a:r>
+            <a:endParaRPr sz="2000"/>
           </a:p>
         </p:txBody>
       </p:sp>
+      <p:pic>
+        <p:nvPicPr>
+          <p:cNvPr id="112" name="Google Shape;112;p23"/>
+          <p:cNvPicPr preferRelativeResize="0"/>
+          <p:nvPr/>
+        </p:nvPicPr>
+        <p:blipFill>
+          <a:blip r:embed="rId3">
+            <a:alphaModFix/>
+          </a:blip>
+          <a:stretch>
+            <a:fillRect/>
+          </a:stretch>
+        </p:blipFill>
+        <p:spPr>
+          <a:xfrm>
+            <a:off x="152400" y="2089975"/>
+            <a:ext cx="8839199" cy="2757967"/>
+          </a:xfrm>
+          <a:prstGeom prst="rect">
+            <a:avLst/>
+          </a:prstGeom>
+          <a:noFill/>
+          <a:ln>
+            <a:noFill/>
+          </a:ln>
+        </p:spPr>
+      </p:pic>
     </p:spTree>
   </p:cSld>
   <p:clrMapOvr>
@@ -16158,285 +17363,6 @@
 </file>
 
 <file path=ppt/theme/theme1.xml><?xml version="1.0" encoding="utf-8"?>
-<a:theme xmlns:a="http://schemas.openxmlformats.org/drawingml/2006/main" xmlns:r="http://schemas.openxmlformats.org/officeDocument/2006/relationships" name="Simple Light">
-  <a:themeElements>
-    <a:clrScheme name="Simple Light">
-      <a:dk1>
-        <a:srgbClr val="000000"/>
-      </a:dk1>
-      <a:lt1>
-        <a:srgbClr val="FFFFFF"/>
-      </a:lt1>
-      <a:dk2>
-        <a:srgbClr val="595959"/>
-      </a:dk2>
-      <a:lt2>
-        <a:srgbClr val="EEEEEE"/>
-      </a:lt2>
-      <a:accent1>
-        <a:srgbClr val="4285F4"/>
-      </a:accent1>
-      <a:accent2>
-        <a:srgbClr val="212121"/>
-      </a:accent2>
-      <a:accent3>
-        <a:srgbClr val="78909C"/>
-      </a:accent3>
-      <a:accent4>
-        <a:srgbClr val="FFAB40"/>
-      </a:accent4>
-      <a:accent5>
-        <a:srgbClr val="0097A7"/>
-      </a:accent5>
-      <a:accent6>
-        <a:srgbClr val="EEFF41"/>
-      </a:accent6>
-      <a:hlink>
-        <a:srgbClr val="0097A7"/>
-      </a:hlink>
-      <a:folHlink>
-        <a:srgbClr val="0097A7"/>
-      </a:folHlink>
-    </a:clrScheme>
-    <a:fontScheme name="Office">
-      <a:majorFont>
-        <a:latin typeface="Arial"/>
-        <a:ea typeface=""/>
-        <a:cs typeface=""/>
-        <a:font script="Jpan" typeface="ＭＳ Ｐゴシック"/>
-        <a:font script="Hang" typeface="맑은 고딕"/>
-        <a:font script="Hans" typeface="宋体"/>
-        <a:font script="Hant" typeface="新細明體"/>
-        <a:font script="Arab" typeface="Times New Roman"/>
-        <a:font script="Hebr" typeface="Times New Roman"/>
-        <a:font script="Thai" typeface="Angsana New"/>
-        <a:font script="Ethi" typeface="Nyala"/>
-        <a:font script="Beng" typeface="Vrinda"/>
-        <a:font script="Gujr" typeface="Shruti"/>
-        <a:font script="Khmr" typeface="MoolBoran"/>
-        <a:font script="Knda" typeface="Tunga"/>
-        <a:font script="Guru" typeface="Raavi"/>
-        <a:font script="Cans" typeface="Euphemia"/>
-        <a:font script="Cher" typeface="Plantagenet Cherokee"/>
-        <a:font script="Yiii" typeface="Microsoft Yi Baiti"/>
-        <a:font script="Tibt" typeface="Microsoft Himalaya"/>
-        <a:font script="Thaa" typeface="MV Boli"/>
-        <a:font script="Deva" typeface="Mangal"/>
-        <a:font script="Telu" typeface="Gautami"/>
-        <a:font script="Taml" typeface="Latha"/>
-        <a:font script="Syrc" typeface="Estrangelo Edessa"/>
-        <a:font script="Orya" typeface="Kalinga"/>
-        <a:font script="Mlym" typeface="Kartika"/>
-        <a:font script="Laoo" typeface="DokChampa"/>
-        <a:font script="Sinh" typeface="Iskoola Pota"/>
-        <a:font script="Mong" typeface="Mongolian Baiti"/>
-        <a:font script="Viet" typeface="Times New Roman"/>
-        <a:font script="Uigh" typeface="Microsoft Uighur"/>
-        <a:font script="Geor" typeface="Sylfaen"/>
-      </a:majorFont>
-      <a:minorFont>
-        <a:latin typeface="Arial"/>
-        <a:ea typeface=""/>
-        <a:cs typeface=""/>
-        <a:font script="Jpan" typeface="ＭＳ Ｐゴシック"/>
-        <a:font script="Hang" typeface="맑은 고딕"/>
-        <a:font script="Hans" typeface="宋体"/>
-        <a:font script="Hant" typeface="新細明體"/>
-        <a:font script="Arab" typeface="Arial"/>
-        <a:font script="Hebr" typeface="Arial"/>
-        <a:font script="Thai" typeface="Cordia New"/>
-        <a:font script="Ethi" typeface="Nyala"/>
-        <a:font script="Beng" typeface="Vrinda"/>
-        <a:font script="Gujr" typeface="Shruti"/>
-        <a:font script="Khmr" typeface="DaunPenh"/>
-        <a:font script="Knda" typeface="Tunga"/>
-        <a:font script="Guru" typeface="Raavi"/>
-        <a:font script="Cans" typeface="Euphemia"/>
-        <a:font script="Cher" typeface="Plantagenet Cherokee"/>
-        <a:font script="Yiii" typeface="Microsoft Yi Baiti"/>
-        <a:font script="Tibt" typeface="Microsoft Himalaya"/>
-        <a:font script="Thaa" typeface="MV Boli"/>
-        <a:font script="Deva" typeface="Mangal"/>
-        <a:font script="Telu" typeface="Gautami"/>
-        <a:font script="Taml" typeface="Latha"/>
-        <a:font script="Syrc" typeface="Estrangelo Edessa"/>
-        <a:font script="Orya" typeface="Kalinga"/>
-        <a:font script="Mlym" typeface="Kartika"/>
-        <a:font script="Laoo" typeface="DokChampa"/>
-        <a:font script="Sinh" typeface="Iskoola Pota"/>
-        <a:font script="Mong" typeface="Mongolian Baiti"/>
-        <a:font script="Viet" typeface="Arial"/>
-        <a:font script="Uigh" typeface="Microsoft Uighur"/>
-        <a:font script="Geor" typeface="Sylfaen"/>
-      </a:minorFont>
-    </a:fontScheme>
-    <a:fmtScheme name="Office">
-      <a:fillStyleLst>
-        <a:solidFill>
-          <a:schemeClr val="phClr"/>
-        </a:solidFill>
-        <a:gradFill rotWithShape="1">
-          <a:gsLst>
-            <a:gs pos="0">
-              <a:schemeClr val="phClr">
-                <a:tint val="50000"/>
-                <a:satMod val="300000"/>
-              </a:schemeClr>
-            </a:gs>
-            <a:gs pos="35000">
-              <a:schemeClr val="phClr">
-                <a:tint val="37000"/>
-                <a:satMod val="300000"/>
-              </a:schemeClr>
-            </a:gs>
-            <a:gs pos="100000">
-              <a:schemeClr val="phClr">
-                <a:tint val="15000"/>
-                <a:satMod val="350000"/>
-              </a:schemeClr>
-            </a:gs>
-          </a:gsLst>
-          <a:lin ang="16200000" scaled="1"/>
-        </a:gradFill>
-        <a:gradFill rotWithShape="1">
-          <a:gsLst>
-            <a:gs pos="0">
-              <a:schemeClr val="phClr">
-                <a:tint val="100000"/>
-                <a:shade val="100000"/>
-                <a:satMod val="130000"/>
-              </a:schemeClr>
-            </a:gs>
-            <a:gs pos="100000">
-              <a:schemeClr val="phClr">
-                <a:tint val="50000"/>
-                <a:shade val="100000"/>
-                <a:satMod val="350000"/>
-              </a:schemeClr>
-            </a:gs>
-          </a:gsLst>
-          <a:lin ang="16200000" scaled="0"/>
-        </a:gradFill>
-      </a:fillStyleLst>
-      <a:lnStyleLst>
-        <a:ln w="9525" cap="flat" cmpd="sng" algn="ctr">
-          <a:solidFill>
-            <a:schemeClr val="phClr">
-              <a:shade val="95000"/>
-              <a:satMod val="105000"/>
-            </a:schemeClr>
-          </a:solidFill>
-          <a:prstDash val="solid"/>
-        </a:ln>
-        <a:ln w="25400" cap="flat" cmpd="sng" algn="ctr">
-          <a:solidFill>
-            <a:schemeClr val="phClr"/>
-          </a:solidFill>
-          <a:prstDash val="solid"/>
-        </a:ln>
-        <a:ln w="38100" cap="flat" cmpd="sng" algn="ctr">
-          <a:solidFill>
-            <a:schemeClr val="phClr"/>
-          </a:solidFill>
-          <a:prstDash val="solid"/>
-        </a:ln>
-      </a:lnStyleLst>
-      <a:effectStyleLst>
-        <a:effectStyle>
-          <a:effectLst>
-            <a:outerShdw blurRad="40000" dist="20000" dir="5400000" rotWithShape="0">
-              <a:srgbClr val="000000">
-                <a:alpha val="38000"/>
-              </a:srgbClr>
-            </a:outerShdw>
-          </a:effectLst>
-        </a:effectStyle>
-        <a:effectStyle>
-          <a:effectLst>
-            <a:outerShdw blurRad="40000" dist="23000" dir="5400000" rotWithShape="0">
-              <a:srgbClr val="000000">
-                <a:alpha val="35000"/>
-              </a:srgbClr>
-            </a:outerShdw>
-          </a:effectLst>
-        </a:effectStyle>
-        <a:effectStyle>
-          <a:effectLst>
-            <a:outerShdw blurRad="40000" dist="23000" dir="5400000" rotWithShape="0">
-              <a:srgbClr val="000000">
-                <a:alpha val="35000"/>
-              </a:srgbClr>
-            </a:outerShdw>
-          </a:effectLst>
-          <a:scene3d>
-            <a:camera prst="orthographicFront">
-              <a:rot lat="0" lon="0" rev="0"/>
-            </a:camera>
-            <a:lightRig rig="threePt" dir="t">
-              <a:rot lat="0" lon="0" rev="1200000"/>
-            </a:lightRig>
-          </a:scene3d>
-          <a:sp3d>
-            <a:bevelT w="63500" h="25400"/>
-          </a:sp3d>
-        </a:effectStyle>
-      </a:effectStyleLst>
-      <a:bgFillStyleLst>
-        <a:solidFill>
-          <a:schemeClr val="phClr"/>
-        </a:solidFill>
-        <a:gradFill rotWithShape="1">
-          <a:gsLst>
-            <a:gs pos="0">
-              <a:schemeClr val="phClr">
-                <a:tint val="40000"/>
-                <a:satMod val="350000"/>
-              </a:schemeClr>
-            </a:gs>
-            <a:gs pos="40000">
-              <a:schemeClr val="phClr">
-                <a:tint val="45000"/>
-                <a:shade val="99000"/>
-                <a:satMod val="350000"/>
-              </a:schemeClr>
-            </a:gs>
-            <a:gs pos="100000">
-              <a:schemeClr val="phClr">
-                <a:shade val="20000"/>
-                <a:satMod val="255000"/>
-              </a:schemeClr>
-            </a:gs>
-          </a:gsLst>
-          <a:path path="circle">
-            <a:fillToRect l="50000" t="-80000" r="50000" b="180000"/>
-          </a:path>
-        </a:gradFill>
-        <a:gradFill rotWithShape="1">
-          <a:gsLst>
-            <a:gs pos="0">
-              <a:schemeClr val="phClr">
-                <a:tint val="80000"/>
-                <a:satMod val="300000"/>
-              </a:schemeClr>
-            </a:gs>
-            <a:gs pos="100000">
-              <a:schemeClr val="phClr">
-                <a:shade val="30000"/>
-                <a:satMod val="200000"/>
-              </a:schemeClr>
-            </a:gs>
-          </a:gsLst>
-          <a:path path="circle">
-            <a:fillToRect l="50000" t="50000" r="50000" b="50000"/>
-          </a:path>
-        </a:gradFill>
-      </a:bgFillStyleLst>
-    </a:fmtScheme>
-  </a:themeElements>
-</a:theme>
-</file>
-
-<file path=ppt/theme/theme2.xml><?xml version="1.0" encoding="utf-8"?>
 <a:theme xmlns:a="http://schemas.openxmlformats.org/drawingml/2006/main" xmlns:r="http://schemas.openxmlformats.org/officeDocument/2006/relationships">
   <a:themeElements>
     <a:clrScheme name="Default">
@@ -16715,7 +17641,7 @@
 </a:theme>
 </file>
 
-<file path=ppt/theme/theme3.xml><?xml version="1.0" encoding="utf-8"?>
+<file path=ppt/theme/theme2.xml><?xml version="1.0" encoding="utf-8"?>
 <a:theme xmlns:a="http://schemas.openxmlformats.org/drawingml/2006/main" xmlns:r="http://schemas.openxmlformats.org/officeDocument/2006/relationships" name="POI_THEME_TEMPLATE_DESIGN">
   <a:themeElements>
     <a:clrScheme name="POI_THEME_TEMPLATE_DESIGN">
@@ -16992,4 +17918,283 @@
     </a:fmtScheme>
   </a:themeElements>
 </a:theme>
+</file>
+
+<file path=ppt/theme/theme3.xml><?xml version="1.0" encoding="utf-8"?>
+<a:theme xmlns:a="http://schemas.openxmlformats.org/drawingml/2006/main" xmlns:r="http://schemas.openxmlformats.org/officeDocument/2006/relationships" name="Simple Light">
+  <a:themeElements>
+    <a:clrScheme name="Simple Light">
+      <a:dk1>
+        <a:srgbClr val="000000"/>
+      </a:dk1>
+      <a:lt1>
+        <a:srgbClr val="FFFFFF"/>
+      </a:lt1>
+      <a:dk2>
+        <a:srgbClr val="595959"/>
+      </a:dk2>
+      <a:lt2>
+        <a:srgbClr val="EEEEEE"/>
+      </a:lt2>
+      <a:accent1>
+        <a:srgbClr val="4285F4"/>
+      </a:accent1>
+      <a:accent2>
+        <a:srgbClr val="212121"/>
+      </a:accent2>
+      <a:accent3>
+        <a:srgbClr val="78909C"/>
+      </a:accent3>
+      <a:accent4>
+        <a:srgbClr val="FFAB40"/>
+      </a:accent4>
+      <a:accent5>
+        <a:srgbClr val="0097A7"/>
+      </a:accent5>
+      <a:accent6>
+        <a:srgbClr val="EEFF41"/>
+      </a:accent6>
+      <a:hlink>
+        <a:srgbClr val="0097A7"/>
+      </a:hlink>
+      <a:folHlink>
+        <a:srgbClr val="0097A7"/>
+      </a:folHlink>
+    </a:clrScheme>
+    <a:fontScheme name="Office">
+      <a:majorFont>
+        <a:latin typeface="Arial"/>
+        <a:ea typeface=""/>
+        <a:cs typeface=""/>
+        <a:font script="Jpan" typeface="ＭＳ Ｐゴシック"/>
+        <a:font script="Hang" typeface="맑은 고딕"/>
+        <a:font script="Hans" typeface="宋体"/>
+        <a:font script="Hant" typeface="新細明體"/>
+        <a:font script="Arab" typeface="Times New Roman"/>
+        <a:font script="Hebr" typeface="Times New Roman"/>
+        <a:font script="Thai" typeface="Angsana New"/>
+        <a:font script="Ethi" typeface="Nyala"/>
+        <a:font script="Beng" typeface="Vrinda"/>
+        <a:font script="Gujr" typeface="Shruti"/>
+        <a:font script="Khmr" typeface="MoolBoran"/>
+        <a:font script="Knda" typeface="Tunga"/>
+        <a:font script="Guru" typeface="Raavi"/>
+        <a:font script="Cans" typeface="Euphemia"/>
+        <a:font script="Cher" typeface="Plantagenet Cherokee"/>
+        <a:font script="Yiii" typeface="Microsoft Yi Baiti"/>
+        <a:font script="Tibt" typeface="Microsoft Himalaya"/>
+        <a:font script="Thaa" typeface="MV Boli"/>
+        <a:font script="Deva" typeface="Mangal"/>
+        <a:font script="Telu" typeface="Gautami"/>
+        <a:font script="Taml" typeface="Latha"/>
+        <a:font script="Syrc" typeface="Estrangelo Edessa"/>
+        <a:font script="Orya" typeface="Kalinga"/>
+        <a:font script="Mlym" typeface="Kartika"/>
+        <a:font script="Laoo" typeface="DokChampa"/>
+        <a:font script="Sinh" typeface="Iskoola Pota"/>
+        <a:font script="Mong" typeface="Mongolian Baiti"/>
+        <a:font script="Viet" typeface="Times New Roman"/>
+        <a:font script="Uigh" typeface="Microsoft Uighur"/>
+        <a:font script="Geor" typeface="Sylfaen"/>
+      </a:majorFont>
+      <a:minorFont>
+        <a:latin typeface="Arial"/>
+        <a:ea typeface=""/>
+        <a:cs typeface=""/>
+        <a:font script="Jpan" typeface="ＭＳ Ｐゴシック"/>
+        <a:font script="Hang" typeface="맑은 고딕"/>
+        <a:font script="Hans" typeface="宋体"/>
+        <a:font script="Hant" typeface="新細明體"/>
+        <a:font script="Arab" typeface="Arial"/>
+        <a:font script="Hebr" typeface="Arial"/>
+        <a:font script="Thai" typeface="Cordia New"/>
+        <a:font script="Ethi" typeface="Nyala"/>
+        <a:font script="Beng" typeface="Vrinda"/>
+        <a:font script="Gujr" typeface="Shruti"/>
+        <a:font script="Khmr" typeface="DaunPenh"/>
+        <a:font script="Knda" typeface="Tunga"/>
+        <a:font script="Guru" typeface="Raavi"/>
+        <a:font script="Cans" typeface="Euphemia"/>
+        <a:font script="Cher" typeface="Plantagenet Cherokee"/>
+        <a:font script="Yiii" typeface="Microsoft Yi Baiti"/>
+        <a:font script="Tibt" typeface="Microsoft Himalaya"/>
+        <a:font script="Thaa" typeface="MV Boli"/>
+        <a:font script="Deva" typeface="Mangal"/>
+        <a:font script="Telu" typeface="Gautami"/>
+        <a:font script="Taml" typeface="Latha"/>
+        <a:font script="Syrc" typeface="Estrangelo Edessa"/>
+        <a:font script="Orya" typeface="Kalinga"/>
+        <a:font script="Mlym" typeface="Kartika"/>
+        <a:font script="Laoo" typeface="DokChampa"/>
+        <a:font script="Sinh" typeface="Iskoola Pota"/>
+        <a:font script="Mong" typeface="Mongolian Baiti"/>
+        <a:font script="Viet" typeface="Arial"/>
+        <a:font script="Uigh" typeface="Microsoft Uighur"/>
+        <a:font script="Geor" typeface="Sylfaen"/>
+      </a:minorFont>
+    </a:fontScheme>
+    <a:fmtScheme name="Office">
+      <a:fillStyleLst>
+        <a:solidFill>
+          <a:schemeClr val="phClr"/>
+        </a:solidFill>
+        <a:gradFill rotWithShape="1">
+          <a:gsLst>
+            <a:gs pos="0">
+              <a:schemeClr val="phClr">
+                <a:tint val="50000"/>
+                <a:satMod val="300000"/>
+              </a:schemeClr>
+            </a:gs>
+            <a:gs pos="35000">
+              <a:schemeClr val="phClr">
+                <a:tint val="37000"/>
+                <a:satMod val="300000"/>
+              </a:schemeClr>
+            </a:gs>
+            <a:gs pos="100000">
+              <a:schemeClr val="phClr">
+                <a:tint val="15000"/>
+                <a:satMod val="350000"/>
+              </a:schemeClr>
+            </a:gs>
+          </a:gsLst>
+          <a:lin ang="16200000" scaled="1"/>
+        </a:gradFill>
+        <a:gradFill rotWithShape="1">
+          <a:gsLst>
+            <a:gs pos="0">
+              <a:schemeClr val="phClr">
+                <a:tint val="100000"/>
+                <a:shade val="100000"/>
+                <a:satMod val="130000"/>
+              </a:schemeClr>
+            </a:gs>
+            <a:gs pos="100000">
+              <a:schemeClr val="phClr">
+                <a:tint val="50000"/>
+                <a:shade val="100000"/>
+                <a:satMod val="350000"/>
+              </a:schemeClr>
+            </a:gs>
+          </a:gsLst>
+          <a:lin ang="16200000" scaled="0"/>
+        </a:gradFill>
+      </a:fillStyleLst>
+      <a:lnStyleLst>
+        <a:ln w="9525" cap="flat" cmpd="sng" algn="ctr">
+          <a:solidFill>
+            <a:schemeClr val="phClr">
+              <a:shade val="95000"/>
+              <a:satMod val="105000"/>
+            </a:schemeClr>
+          </a:solidFill>
+          <a:prstDash val="solid"/>
+        </a:ln>
+        <a:ln w="25400" cap="flat" cmpd="sng" algn="ctr">
+          <a:solidFill>
+            <a:schemeClr val="phClr"/>
+          </a:solidFill>
+          <a:prstDash val="solid"/>
+        </a:ln>
+        <a:ln w="38100" cap="flat" cmpd="sng" algn="ctr">
+          <a:solidFill>
+            <a:schemeClr val="phClr"/>
+          </a:solidFill>
+          <a:prstDash val="solid"/>
+        </a:ln>
+      </a:lnStyleLst>
+      <a:effectStyleLst>
+        <a:effectStyle>
+          <a:effectLst>
+            <a:outerShdw blurRad="40000" dist="20000" dir="5400000" rotWithShape="0">
+              <a:srgbClr val="000000">
+                <a:alpha val="38000"/>
+              </a:srgbClr>
+            </a:outerShdw>
+          </a:effectLst>
+        </a:effectStyle>
+        <a:effectStyle>
+          <a:effectLst>
+            <a:outerShdw blurRad="40000" dist="23000" dir="5400000" rotWithShape="0">
+              <a:srgbClr val="000000">
+                <a:alpha val="35000"/>
+              </a:srgbClr>
+            </a:outerShdw>
+          </a:effectLst>
+        </a:effectStyle>
+        <a:effectStyle>
+          <a:effectLst>
+            <a:outerShdw blurRad="40000" dist="23000" dir="5400000" rotWithShape="0">
+              <a:srgbClr val="000000">
+                <a:alpha val="35000"/>
+              </a:srgbClr>
+            </a:outerShdw>
+          </a:effectLst>
+          <a:scene3d>
+            <a:camera prst="orthographicFront">
+              <a:rot lat="0" lon="0" rev="0"/>
+            </a:camera>
+            <a:lightRig rig="threePt" dir="t">
+              <a:rot lat="0" lon="0" rev="1200000"/>
+            </a:lightRig>
+          </a:scene3d>
+          <a:sp3d>
+            <a:bevelT w="63500" h="25400"/>
+          </a:sp3d>
+        </a:effectStyle>
+      </a:effectStyleLst>
+      <a:bgFillStyleLst>
+        <a:solidFill>
+          <a:schemeClr val="phClr"/>
+        </a:solidFill>
+        <a:gradFill rotWithShape="1">
+          <a:gsLst>
+            <a:gs pos="0">
+              <a:schemeClr val="phClr">
+                <a:tint val="40000"/>
+                <a:satMod val="350000"/>
+              </a:schemeClr>
+            </a:gs>
+            <a:gs pos="40000">
+              <a:schemeClr val="phClr">
+                <a:tint val="45000"/>
+                <a:shade val="99000"/>
+                <a:satMod val="350000"/>
+              </a:schemeClr>
+            </a:gs>
+            <a:gs pos="100000">
+              <a:schemeClr val="phClr">
+                <a:shade val="20000"/>
+                <a:satMod val="255000"/>
+              </a:schemeClr>
+            </a:gs>
+          </a:gsLst>
+          <a:path path="circle">
+            <a:fillToRect l="50000" t="-80000" r="50000" b="180000"/>
+          </a:path>
+        </a:gradFill>
+        <a:gradFill rotWithShape="1">
+          <a:gsLst>
+            <a:gs pos="0">
+              <a:schemeClr val="phClr">
+                <a:tint val="80000"/>
+                <a:satMod val="300000"/>
+              </a:schemeClr>
+            </a:gs>
+            <a:gs pos="100000">
+              <a:schemeClr val="phClr">
+                <a:shade val="30000"/>
+                <a:satMod val="200000"/>
+              </a:schemeClr>
+            </a:gs>
+          </a:gsLst>
+          <a:path path="circle">
+            <a:fillToRect l="50000" t="50000" r="50000" b="50000"/>
+          </a:path>
+        </a:gradFill>
+      </a:bgFillStyleLst>
+    </a:fmtScheme>
+  </a:themeElements>
+</a:theme>
 </file>